--- a/memo-machine-learning.pptx
+++ b/memo-machine-learning.pptx
@@ -18,6 +18,12 @@
     <p:sldId id="266" r:id="rId12"/>
     <p:sldId id="267" r:id="rId13"/>
     <p:sldId id="268" r:id="rId14"/>
+    <p:sldId id="271" r:id="rId22"/>
+    <p:sldId id="272" r:id="rId23"/>
+    <p:sldId id="273" r:id="rId24"/>
+    <p:sldId id="274" r:id="rId25"/>
+    <p:sldId id="275" r:id="rId26"/>
+    <p:sldId id="276" r:id="rId27"/>
     <p:sldId id="269" r:id="rId15"/>
     <p:sldId id="270" r:id="rId16"/>
   </p:sldIdLst>
@@ -5879,7 +5885,2225 @@
                 <a:ea typeface="Calibri" pitchFamily="34" charset="-122"/>
                 <a:cs typeface="Calibri" pitchFamily="34" charset="-120"/>
               </a:rPr>
-              <a:t>Prochaine étape : régression multiple — plusieurs variables, et la normalisation devient obligatoire.</a:t>
+              <a:t>Prochaine étape : classification — une cible binaire, une autre fonction de coût, d'autres métriques que le R².</a:t>
+            </a:r>
+            <a:endParaRPr lang="en-US" sz="1250" dirty="0"/>
+          </a:p>
+        </p:txBody>
+      </p:sp>
+    </p:spTree>
+  </p:cSld>
+  <p:clrMapOvr>
+    <a:masterClrMapping/>
+  </p:clrMapOvr>
+</p:sld>
+</file>
+
+<file path=ppt/slides/slide16.xml><?xml version="1.0" encoding="utf-8"?>
+<p:sld xmlns:a="http://schemas.openxmlformats.org/drawingml/2006/main" xmlns:r="http://schemas.openxmlformats.org/officeDocument/2006/relationships" xmlns:p="http://schemas.openxmlformats.org/presentationml/2006/main">
+  <p:cSld name="Slide 8">
+    <p:spTree>
+      <p:nvGrpSpPr>
+        <p:cNvPr id="1" name=""/>
+        <p:cNvGrpSpPr/>
+        <p:nvPr/>
+      </p:nvGrpSpPr>
+      <p:grpSpPr>
+        <a:xfrm>
+          <a:off x="0" y="0"/>
+          <a:ext cx="0" cy="0"/>
+          <a:chOff x="0" y="0"/>
+          <a:chExt cx="0" cy="0"/>
+        </a:xfrm>
+      </p:grpSpPr>
+      <p:sp>
+        <p:nvSpPr>
+          <p:cNvPr id="2" name="Text 0"/>
+          <p:cNvSpPr/>
+          <p:nvPr/>
+        </p:nvSpPr>
+        <p:spPr>
+          <a:xfrm>
+            <a:off x="640080" y="384048"/>
+            <a:ext cx="10881360" cy="685800"/>
+          </a:xfrm>
+          <a:prstGeom prst="rect">
+            <a:avLst/>
+          </a:prstGeom>
+          <a:noFill/>
+          <a:ln/>
+        </p:spPr>
+        <p:txBody>
+          <a:bodyPr wrap="square" lIns="0" tIns="0" rIns="0" bIns="0" rtlCol="0" anchor="ctr"/>
+          <a:lstStyle/>
+          <a:p>
+            <a:pPr indent="0" marL="0">
+              <a:buNone/>
+            </a:pPr>
+            <a:r>
+              <a:rPr lang="en-US" sz="3400" b="1" dirty="0">
+                <a:solidFill>
+                  <a:srgbClr val="1F2A1F"/>
+                </a:solidFill>
+                <a:latin typeface="Cambria" pitchFamily="34" charset="0"/>
+                <a:ea typeface="Cambria" pitchFamily="34" charset="-122"/>
+                <a:cs typeface="Cambria" pitchFamily="34" charset="-120"/>
+              </a:rPr>
+              <a:t>Une variable trop bonne pour être vraie</a:t>
+            </a:r>
+            <a:endParaRPr lang="en-US" sz="3400" dirty="0"/>
+          </a:p>
+        </p:txBody>
+      </p:sp>
+      <p:sp>
+        <p:nvSpPr>
+          <p:cNvPr id="3" name="Text 1"/>
+          <p:cNvSpPr/>
+          <p:nvPr/>
+        </p:nvSpPr>
+        <p:spPr>
+          <a:xfrm>
+            <a:off x="640080" y="1078992"/>
+            <a:ext cx="10881360" cy="384048"/>
+          </a:xfrm>
+          <a:prstGeom prst="rect">
+            <a:avLst/>
+          </a:prstGeom>
+          <a:noFill/>
+          <a:ln/>
+        </p:spPr>
+        <p:txBody>
+          <a:bodyPr wrap="square" lIns="0" tIns="0" rIns="0" bIns="0" rtlCol="0" anchor="ctr"/>
+          <a:lstStyle/>
+          <a:p>
+            <a:pPr indent="0" marL="0">
+              <a:buNone/>
+            </a:pPr>
+            <a:r>
+              <a:rPr lang="en-US" sz="1400" i="1" dirty="0">
+                <a:solidFill>
+                  <a:srgbClr val="5E6E5E"/>
+                </a:solidFill>
+                <a:latin typeface="Calibri" pitchFamily="34" charset="0"/>
+                <a:ea typeface="Calibri" pitchFamily="34" charset="-122"/>
+                <a:cs typeface="Calibri" pitchFamily="34" charset="-120"/>
+              </a:rPr>
+              <a:t>Un R² de 0,999 n'est pas une bonne nouvelle</a:t>
+            </a:r>
+            <a:endParaRPr lang="en-US" sz="1400" dirty="0"/>
+          </a:p>
+        </p:txBody>
+      </p:sp>
+      <p:sp>
+        <p:nvSpPr>
+          <p:cNvPr id="4" name="Shape 2"/>
+          <p:cNvSpPr/>
+          <p:nvPr/>
+        </p:nvSpPr>
+        <p:spPr>
+          <a:xfrm>
+            <a:off x="640080" y="1737360"/>
+            <a:ext cx="5166360" cy="2834640"/>
+          </a:xfrm>
+          <a:prstGeom prst="roundRect">
+            <a:avLst>
+              <a:gd name="adj" fmla="val 2581"/>
+            </a:avLst>
+          </a:prstGeom>
+          <a:solidFill>
+            <a:srgbClr val="EDF2E6"/>
+          </a:solidFill>
+          <a:ln w="12700">
+            <a:solidFill>
+              <a:srgbClr val="EDF2E6"/>
+            </a:solidFill>
+            <a:prstDash val="solid"/>
+          </a:ln>
+        </p:spPr>
+      </p:sp>
+      <p:sp>
+        <p:nvSpPr>
+          <p:cNvPr id="5" name="Text 3"/>
+          <p:cNvSpPr/>
+          <p:nvPr/>
+        </p:nvSpPr>
+        <p:spPr>
+          <a:xfrm>
+            <a:off x="960120" y="1920240"/>
+            <a:ext cx="4389120" cy="310896"/>
+          </a:xfrm>
+          <a:prstGeom prst="rect">
+            <a:avLst/>
+          </a:prstGeom>
+          <a:noFill/>
+          <a:ln/>
+        </p:spPr>
+        <p:txBody>
+          <a:bodyPr wrap="square" lIns="0" tIns="0" rIns="0" bIns="0" rtlCol="0" anchor="ctr"/>
+          <a:lstStyle/>
+          <a:p>
+            <a:pPr indent="0" marL="0">
+              <a:buNone/>
+            </a:pPr>
+            <a:r>
+              <a:rPr lang="en-US" sz="1700" b="1" dirty="0">
+                <a:solidFill>
+                  <a:srgbClr val="2C5F2D"/>
+                </a:solidFill>
+                <a:latin typeface="Cambria" pitchFamily="34" charset="0"/>
+                <a:ea typeface="Cambria" pitchFamily="34" charset="-122"/>
+                <a:cs typeface="Cambria" pitchFamily="34" charset="-120"/>
+              </a:rPr>
+              <a:t>Fuite directe</a:t>
+            </a:r>
+            <a:endParaRPr lang="en-US" sz="1700" dirty="0"/>
+          </a:p>
+        </p:txBody>
+      </p:sp>
+      <p:sp>
+        <p:nvSpPr>
+          <p:cNvPr id="6" name="Text 4"/>
+          <p:cNvSpPr/>
+          <p:nvPr/>
+        </p:nvSpPr>
+        <p:spPr>
+          <a:xfrm>
+            <a:off x="960120" y="2377440"/>
+            <a:ext cx="4572000" cy="2011680"/>
+          </a:xfrm>
+          <a:prstGeom prst="rect">
+            <a:avLst/>
+          </a:prstGeom>
+          <a:noFill/>
+          <a:ln/>
+        </p:spPr>
+        <p:txBody>
+          <a:bodyPr wrap="square" lIns="0" tIns="0" rIns="0" bIns="0" rtlCol="0" anchor="t"/>
+          <a:lstStyle/>
+          <a:p>
+            <a:pPr indent="0" marL="0">
+              <a:lnSpc>
+                <a:spcPct val="115000"/>
+              </a:lnSpc>
+              <a:buNone/>
+            </a:pPr>
+            <a:r>
+              <a:rPr lang="en-US" sz="1200" dirty="0">
+                <a:solidFill>
+                  <a:srgbClr val="1F2A1F"/>
+                </a:solidFill>
+                <a:latin typeface="Calibri" pitchFamily="34" charset="0"/>
+                <a:ea typeface="Calibri" pitchFamily="34" charset="-122"/>
+                <a:cs typeface="Calibri" pitchFamily="34" charset="-120"/>
+              </a:rPr>
+              <a:t>Le CO₂ homologué est calculé à partir de la consommation : leur rapport est une constante.</a:t>
+            </a:r>
+            <a:endParaRPr lang="en-US" sz="1200" dirty="0"/>
+          </a:p>
+          <a:p>
+            <a:pPr indent="0" marL="0">
+              <a:lnSpc>
+                <a:spcPct val="115000"/>
+              </a:lnSpc>
+              <a:buNone/>
+            </a:pPr>
+            <a:endParaRPr lang="en-US" sz="1200" dirty="0"/>
+          </a:p>
+          <a:p>
+            <a:pPr indent="0" marL="0">
+              <a:lnSpc>
+                <a:spcPct val="115000"/>
+              </a:lnSpc>
+              <a:buNone/>
+            </a:pPr>
+            <a:r>
+              <a:rPr lang="en-US" sz="1200" dirty="0">
+                <a:solidFill>
+                  <a:srgbClr val="1F2A1F"/>
+                </a:solidFill>
+                <a:latin typeface="Calibri" pitchFamily="34" charset="0"/>
+                <a:ea typeface="Calibri" pitchFamily="34" charset="-122"/>
+                <a:cs typeface="Calibri" pitchFamily="34" charset="-120"/>
+              </a:rPr>
+              <a:t>• R² = 0,999 et MAE = 0,9 g/km</a:t>
+            </a:r>
+            <a:endParaRPr lang="en-US" sz="1200" dirty="0"/>
+          </a:p>
+          <a:p>
+            <a:pPr indent="0" marL="0">
+              <a:lnSpc>
+                <a:spcPct val="115000"/>
+              </a:lnSpc>
+              <a:buNone/>
+            </a:pPr>
+            <a:r>
+              <a:rPr lang="en-US" sz="1200" dirty="0">
+                <a:solidFill>
+                  <a:srgbClr val="1F2A1F"/>
+                </a:solidFill>
+                <a:latin typeface="Calibri" pitchFamily="34" charset="0"/>
+                <a:ea typeface="Calibri" pitchFamily="34" charset="-122"/>
+                <a:cs typeface="Calibri" pitchFamily="34" charset="-120"/>
+              </a:rPr>
+              <a:t>• Coefficient appris : 2,64 kg de CO₂ par litre</a:t>
+            </a:r>
+            <a:endParaRPr lang="en-US" sz="1200" dirty="0"/>
+          </a:p>
+          <a:p>
+            <a:pPr indent="0" marL="0">
+              <a:lnSpc>
+                <a:spcPct val="115000"/>
+              </a:lnSpc>
+              <a:buNone/>
+            </a:pPr>
+            <a:endParaRPr lang="en-US" sz="1200" dirty="0"/>
+          </a:p>
+          <a:p>
+            <a:pPr indent="0" marL="0">
+              <a:lnSpc>
+                <a:spcPct val="115000"/>
+              </a:lnSpc>
+              <a:buNone/>
+            </a:pPr>
+            <a:r>
+              <a:rPr lang="en-US" sz="1200" dirty="0">
+                <a:solidFill>
+                  <a:srgbClr val="1F2A1F"/>
+                </a:solidFill>
+                <a:latin typeface="Calibri" pitchFamily="34" charset="0"/>
+                <a:ea typeface="Calibri" pitchFamily="34" charset="-122"/>
+                <a:cs typeface="Calibri" pitchFamily="34" charset="-120"/>
+              </a:rPr>
+              <a:t>Le facteur d'émission du gazole — une constante physique, pas un paramètre.</a:t>
+            </a:r>
+            <a:endParaRPr lang="en-US" sz="1200" dirty="0"/>
+          </a:p>
+        </p:txBody>
+      </p:sp>
+      <p:sp>
+        <p:nvSpPr>
+          <p:cNvPr id="7" name="Shape 5"/>
+          <p:cNvSpPr/>
+          <p:nvPr/>
+        </p:nvSpPr>
+        <p:spPr>
+          <a:xfrm>
+            <a:off x="6355080" y="1737360"/>
+            <a:ext cx="5166360" cy="2834640"/>
+          </a:xfrm>
+          <a:prstGeom prst="roundRect">
+            <a:avLst>
+              <a:gd name="adj" fmla="val 2581"/>
+            </a:avLst>
+          </a:prstGeom>
+          <a:solidFill>
+            <a:srgbClr val="EDF2E6"/>
+          </a:solidFill>
+          <a:ln w="12700">
+            <a:solidFill>
+              <a:srgbClr val="EDF2E6"/>
+            </a:solidFill>
+            <a:prstDash val="solid"/>
+          </a:ln>
+        </p:spPr>
+      </p:sp>
+      <p:sp>
+        <p:nvSpPr>
+          <p:cNvPr id="8" name="Text 6"/>
+          <p:cNvSpPr/>
+          <p:nvPr/>
+        </p:nvSpPr>
+        <p:spPr>
+          <a:xfrm>
+            <a:off x="6675120" y="1920240"/>
+            <a:ext cx="4389120" cy="310896"/>
+          </a:xfrm>
+          <a:prstGeom prst="rect">
+            <a:avLst/>
+          </a:prstGeom>
+          <a:noFill/>
+          <a:ln/>
+        </p:spPr>
+        <p:txBody>
+          <a:bodyPr wrap="square" lIns="0" tIns="0" rIns="0" bIns="0" rtlCol="0" anchor="ctr"/>
+          <a:lstStyle/>
+          <a:p>
+            <a:pPr indent="0" marL="0">
+              <a:buNone/>
+            </a:pPr>
+            <a:r>
+              <a:rPr lang="en-US" sz="1700" b="1" dirty="0">
+                <a:solidFill>
+                  <a:srgbClr val="5E6E5E"/>
+                </a:solidFill>
+                <a:latin typeface="Cambria" pitchFamily="34" charset="0"/>
+                <a:ea typeface="Cambria" pitchFamily="34" charset="-122"/>
+                <a:cs typeface="Cambria" pitchFamily="34" charset="-120"/>
+              </a:rPr>
+              <a:t>Fuite par formule</a:t>
+            </a:r>
+            <a:endParaRPr lang="en-US" sz="1700" dirty="0"/>
+          </a:p>
+        </p:txBody>
+      </p:sp>
+      <p:sp>
+        <p:nvSpPr>
+          <p:cNvPr id="9" name="Text 7"/>
+          <p:cNvSpPr/>
+          <p:nvPr/>
+        </p:nvSpPr>
+        <p:spPr>
+          <a:xfrm>
+            <a:off x="6675120" y="2377440"/>
+            <a:ext cx="4572000" cy="2011680"/>
+          </a:xfrm>
+          <a:prstGeom prst="rect">
+            <a:avLst/>
+          </a:prstGeom>
+          <a:noFill/>
+          <a:ln/>
+        </p:spPr>
+        <p:txBody>
+          <a:bodyPr wrap="square" lIns="0" tIns="0" rIns="0" bIns="0" rtlCol="0" anchor="t"/>
+          <a:lstStyle/>
+          <a:p>
+            <a:pPr indent="0" marL="0">
+              <a:lnSpc>
+                <a:spcPct val="115000"/>
+              </a:lnSpc>
+              <a:buNone/>
+            </a:pPr>
+            <a:r>
+              <a:rPr lang="en-US" sz="1200" dirty="0">
+                <a:solidFill>
+                  <a:srgbClr val="1F2A1F"/>
+                </a:solidFill>
+                <a:latin typeface="Calibri" pitchFamily="34" charset="0"/>
+                <a:ea typeface="Calibri" pitchFamily="34" charset="-122"/>
+                <a:cs typeface="Calibri" pitchFamily="34" charset="-120"/>
+              </a:rPr>
+              <a:t>La puissance administrative se calcule depuis 1998 par une formule qui contient le CO₂.</a:t>
+            </a:r>
+            <a:endParaRPr lang="en-US" sz="1200" dirty="0"/>
+          </a:p>
+          <a:p>
+            <a:pPr indent="0" marL="0">
+              <a:lnSpc>
+                <a:spcPct val="115000"/>
+              </a:lnSpc>
+              <a:buNone/>
+            </a:pPr>
+            <a:endParaRPr lang="en-US" sz="1200" dirty="0"/>
+          </a:p>
+          <a:p>
+            <a:pPr indent="0" marL="0">
+              <a:lnSpc>
+                <a:spcPct val="115000"/>
+              </a:lnSpc>
+              <a:buNone/>
+            </a:pPr>
+            <a:r>
+              <a:rPr lang="en-US" sz="1200" dirty="0">
+                <a:solidFill>
+                  <a:srgbClr val="1F2A1F"/>
+                </a:solidFill>
+                <a:latin typeface="Calibri" pitchFamily="34" charset="0"/>
+                <a:ea typeface="Calibri" pitchFamily="34" charset="-122"/>
+                <a:cs typeface="Calibri" pitchFamily="34" charset="-120"/>
+              </a:rPr>
+              <a:t>• Corrélation avec la cible : 0,708 seulement</a:t>
+            </a:r>
+            <a:endParaRPr lang="en-US" sz="1200" dirty="0"/>
+          </a:p>
+          <a:p>
+            <a:pPr indent="0" marL="0">
+              <a:lnSpc>
+                <a:spcPct val="115000"/>
+              </a:lnSpc>
+              <a:buNone/>
+            </a:pPr>
+            <a:r>
+              <a:rPr lang="en-US" sz="1200" dirty="0">
+                <a:solidFill>
+                  <a:srgbClr val="1F2A1F"/>
+                </a:solidFill>
+                <a:latin typeface="Calibri" pitchFamily="34" charset="0"/>
+                <a:ea typeface="Calibri" pitchFamily="34" charset="-122"/>
+                <a:cs typeface="Calibri" pitchFamily="34" charset="-120"/>
+              </a:rPr>
+              <a:t>• La formule reproduit 99,5 % des lignes</a:t>
+            </a:r>
+            <a:endParaRPr lang="en-US" sz="1200" dirty="0"/>
+          </a:p>
+          <a:p>
+            <a:pPr indent="0" marL="0">
+              <a:lnSpc>
+                <a:spcPct val="115000"/>
+              </a:lnSpc>
+              <a:buNone/>
+            </a:pPr>
+            <a:endParaRPr lang="en-US" sz="1200" dirty="0"/>
+          </a:p>
+          <a:p>
+            <a:pPr indent="0" marL="0">
+              <a:lnSpc>
+                <a:spcPct val="115000"/>
+              </a:lnSpc>
+              <a:buNone/>
+            </a:pPr>
+            <a:r>
+              <a:rPr lang="en-US" sz="1200" dirty="0">
+                <a:solidFill>
+                  <a:srgbClr val="1F2A1F"/>
+                </a:solidFill>
+                <a:latin typeface="Calibri" pitchFamily="34" charset="0"/>
+                <a:ea typeface="Calibri" pitchFamily="34" charset="-122"/>
+                <a:cs typeface="Calibri" pitchFamily="34" charset="-120"/>
+              </a:rPr>
+              <a:t>Une fuite non linéaire est invisible dans une matrice de corrélation.</a:t>
+            </a:r>
+            <a:endParaRPr lang="en-US" sz="1200" dirty="0"/>
+          </a:p>
+        </p:txBody>
+      </p:sp>
+      <p:sp>
+        <p:nvSpPr>
+          <p:cNvPr id="10" name="Shape 8"/>
+          <p:cNvSpPr/>
+          <p:nvPr/>
+        </p:nvSpPr>
+        <p:spPr>
+          <a:xfrm>
+            <a:off x="640080" y="4846320"/>
+            <a:ext cx="10881360" cy="914400"/>
+          </a:xfrm>
+          <a:prstGeom prst="roundRect">
+            <a:avLst>
+              <a:gd name="adj" fmla="val 8000"/>
+            </a:avLst>
+          </a:prstGeom>
+          <a:solidFill>
+            <a:srgbClr val="1A3A1C"/>
+          </a:solidFill>
+          <a:ln w="12700">
+            <a:solidFill>
+              <a:srgbClr val="1A3A1C"/>
+            </a:solidFill>
+            <a:prstDash val="solid"/>
+          </a:ln>
+        </p:spPr>
+      </p:sp>
+      <p:sp>
+        <p:nvSpPr>
+          <p:cNvPr id="11" name="Text 9"/>
+          <p:cNvSpPr/>
+          <p:nvPr/>
+        </p:nvSpPr>
+        <p:spPr>
+          <a:xfrm>
+            <a:off x="960120" y="5029200"/>
+            <a:ext cx="10241280" cy="548640"/>
+          </a:xfrm>
+          <a:prstGeom prst="rect">
+            <a:avLst/>
+          </a:prstGeom>
+          <a:noFill/>
+          <a:ln/>
+        </p:spPr>
+        <p:txBody>
+          <a:bodyPr wrap="square" lIns="0" tIns="0" rIns="0" bIns="0" rtlCol="0" anchor="ctr"/>
+          <a:lstStyle/>
+          <a:p>
+            <a:pPr indent="0" marL="0">
+              <a:buNone/>
+            </a:pPr>
+            <a:r>
+              <a:rPr lang="en-US" sz="1350" dirty="0">
+                <a:solidFill>
+                  <a:srgbClr val="FFFFFF"/>
+                </a:solidFill>
+                <a:latin typeface="Calibri" pitchFamily="34" charset="0"/>
+                <a:ea typeface="Calibri" pitchFamily="34" charset="-122"/>
+                <a:cs typeface="Calibri" pitchFamily="34" charset="-120"/>
+              </a:rPr>
+              <a:t>Le test : cette variable serait-elle connue avant la cible, en situation réelle ? Sinon, elle sort du modèle.</a:t>
+            </a:r>
+            <a:endParaRPr lang="en-US" sz="1350" dirty="0"/>
+          </a:p>
+        </p:txBody>
+      </p:sp>
+    </p:spTree>
+  </p:cSld>
+  <p:clrMapOvr>
+    <a:masterClrMapping/>
+  </p:clrMapOvr>
+</p:sld>
+</file>
+
+<file path=ppt/slides/slide17.xml><?xml version="1.0" encoding="utf-8"?>
+<p:sld xmlns:a="http://schemas.openxmlformats.org/drawingml/2006/main" xmlns:r="http://schemas.openxmlformats.org/officeDocument/2006/relationships" xmlns:p="http://schemas.openxmlformats.org/presentationml/2006/main">
+  <p:cSld name="Slide 11">
+    <p:spTree>
+      <p:nvGrpSpPr>
+        <p:cNvPr id="1" name=""/>
+        <p:cNvGrpSpPr/>
+        <p:nvPr/>
+      </p:nvGrpSpPr>
+      <p:grpSpPr>
+        <a:xfrm>
+          <a:off x="0" y="0"/>
+          <a:ext cx="0" cy="0"/>
+          <a:chOff x="0" y="0"/>
+          <a:chExt cx="0" cy="0"/>
+        </a:xfrm>
+      </p:grpSpPr>
+      <p:sp>
+        <p:nvSpPr>
+          <p:cNvPr id="2" name="Text 0"/>
+          <p:cNvSpPr/>
+          <p:nvPr/>
+        </p:nvSpPr>
+        <p:spPr>
+          <a:xfrm>
+            <a:off x="640080" y="384048"/>
+            <a:ext cx="10881360" cy="685800"/>
+          </a:xfrm>
+          <a:prstGeom prst="rect">
+            <a:avLst/>
+          </a:prstGeom>
+          <a:noFill/>
+          <a:ln/>
+        </p:spPr>
+        <p:txBody>
+          <a:bodyPr wrap="square" lIns="0" tIns="0" rIns="0" bIns="0" rtlCol="0" anchor="ctr"/>
+          <a:lstStyle/>
+          <a:p>
+            <a:pPr indent="0" marL="0">
+              <a:buNone/>
+            </a:pPr>
+            <a:r>
+              <a:rPr lang="en-US" sz="3400" b="1" dirty="0">
+                <a:solidFill>
+                  <a:srgbClr val="1F2A1F"/>
+                </a:solidFill>
+                <a:latin typeface="Cambria" pitchFamily="34" charset="0"/>
+                <a:ea typeface="Cambria" pitchFamily="34" charset="-122"/>
+                <a:cs typeface="Cambria" pitchFamily="34" charset="-120"/>
+              </a:rPr>
+              <a:t>Une ligne n'est pas une observation</a:t>
+            </a:r>
+            <a:endParaRPr lang="en-US" sz="3400" dirty="0"/>
+          </a:p>
+        </p:txBody>
+      </p:sp>
+      <p:sp>
+        <p:nvSpPr>
+          <p:cNvPr id="3" name="Text 1"/>
+          <p:cNvSpPr/>
+          <p:nvPr/>
+        </p:nvSpPr>
+        <p:spPr>
+          <a:xfrm>
+            <a:off x="640080" y="1078992"/>
+            <a:ext cx="10881360" cy="384048"/>
+          </a:xfrm>
+          <a:prstGeom prst="rect">
+            <a:avLst/>
+          </a:prstGeom>
+          <a:noFill/>
+          <a:ln/>
+        </p:spPr>
+        <p:txBody>
+          <a:bodyPr wrap="square" lIns="0" tIns="0" rIns="0" bIns="0" rtlCol="0" anchor="ctr"/>
+          <a:lstStyle/>
+          <a:p>
+            <a:pPr indent="0" marL="0">
+              <a:buNone/>
+            </a:pPr>
+            <a:r>
+              <a:rPr lang="en-US" sz="1400" i="1" dirty="0">
+                <a:solidFill>
+                  <a:srgbClr val="5E6E5E"/>
+                </a:solidFill>
+                <a:latin typeface="Calibri" pitchFamily="34" charset="0"/>
+                <a:ea typeface="Calibri" pitchFamily="34" charset="-122"/>
+                <a:cs typeface="Calibri" pitchFamily="34" charset="-120"/>
+              </a:rPr>
+              <a:t>Vérifier l'unité du fichier avant tout calcul</a:t>
+            </a:r>
+            <a:endParaRPr lang="en-US" sz="1400" dirty="0"/>
+          </a:p>
+        </p:txBody>
+      </p:sp>
+      <p:sp>
+        <p:nvSpPr>
+          <p:cNvPr id="4" name="Shape 2"/>
+          <p:cNvSpPr/>
+          <p:nvPr/>
+        </p:nvSpPr>
+        <p:spPr>
+          <a:xfrm>
+            <a:off x="640080" y="1737360"/>
+            <a:ext cx="5166360" cy="1828800"/>
+          </a:xfrm>
+          <a:prstGeom prst="roundRect">
+            <a:avLst>
+              <a:gd name="adj" fmla="val 4000"/>
+            </a:avLst>
+          </a:prstGeom>
+          <a:solidFill>
+            <a:srgbClr val="EDF2E6"/>
+          </a:solidFill>
+          <a:ln w="12700">
+            <a:solidFill>
+              <a:srgbClr val="EDF2E6"/>
+            </a:solidFill>
+            <a:prstDash val="solid"/>
+          </a:ln>
+        </p:spPr>
+      </p:sp>
+      <p:sp>
+        <p:nvSpPr>
+          <p:cNvPr id="5" name="Text 3"/>
+          <p:cNvSpPr/>
+          <p:nvPr/>
+        </p:nvSpPr>
+        <p:spPr>
+          <a:xfrm>
+            <a:off x="960120" y="1920240"/>
+            <a:ext cx="4389120" cy="310896"/>
+          </a:xfrm>
+          <a:prstGeom prst="rect">
+            <a:avLst/>
+          </a:prstGeom>
+          <a:noFill/>
+          <a:ln/>
+        </p:spPr>
+        <p:txBody>
+          <a:bodyPr wrap="square" lIns="0" tIns="0" rIns="0" bIns="0" rtlCol="0" anchor="ctr"/>
+          <a:lstStyle/>
+          <a:p>
+            <a:pPr indent="0" marL="0">
+              <a:buNone/>
+            </a:pPr>
+            <a:r>
+              <a:rPr lang="en-US" sz="1700" b="1" dirty="0">
+                <a:solidFill>
+                  <a:srgbClr val="5E6E5E"/>
+                </a:solidFill>
+                <a:latin typeface="Cambria" pitchFamily="34" charset="0"/>
+                <a:ea typeface="Cambria" pitchFamily="34" charset="-122"/>
+                <a:cs typeface="Cambria" pitchFamily="34" charset="-120"/>
+              </a:rPr>
+              <a:t>Ce que contient le fichier</a:t>
+            </a:r>
+            <a:endParaRPr lang="en-US" sz="1700" dirty="0"/>
+          </a:p>
+        </p:txBody>
+      </p:sp>
+      <p:sp>
+        <p:nvSpPr>
+          <p:cNvPr id="6" name="Text 4"/>
+          <p:cNvSpPr/>
+          <p:nvPr/>
+        </p:nvSpPr>
+        <p:spPr>
+          <a:xfrm>
+            <a:off x="960120" y="2377440"/>
+            <a:ext cx="4572000" cy="1005840"/>
+          </a:xfrm>
+          <a:prstGeom prst="rect">
+            <a:avLst/>
+          </a:prstGeom>
+          <a:noFill/>
+          <a:ln/>
+        </p:spPr>
+        <p:txBody>
+          <a:bodyPr wrap="square" lIns="0" tIns="0" rIns="0" bIns="0" rtlCol="0" anchor="t"/>
+          <a:lstStyle/>
+          <a:p>
+            <a:pPr indent="0" marL="0">
+              <a:lnSpc>
+                <a:spcPct val="115000"/>
+              </a:lnSpc>
+              <a:buNone/>
+            </a:pPr>
+            <a:r>
+              <a:rPr lang="en-US" sz="1200" dirty="0">
+                <a:solidFill>
+                  <a:srgbClr val="1F2A1F"/>
+                </a:solidFill>
+                <a:latin typeface="Calibri" pitchFamily="34" charset="0"/>
+                <a:ea typeface="Calibri" pitchFamily="34" charset="-122"/>
+                <a:cs typeface="Calibri" pitchFamily="34" charset="-120"/>
+              </a:rPr>
+              <a:t>Chaque véhicule est déclaré une fois par variante d'homologation : mêmes masse, puissance et CO₂, numéros de dossier différents. Rien ne signale la répétition.</a:t>
+            </a:r>
+            <a:endParaRPr lang="en-US" sz="1200" dirty="0"/>
+          </a:p>
+        </p:txBody>
+      </p:sp>
+      <p:sp>
+        <p:nvSpPr>
+          <p:cNvPr id="7" name="Shape 5"/>
+          <p:cNvSpPr/>
+          <p:nvPr/>
+        </p:nvSpPr>
+        <p:spPr>
+          <a:xfrm>
+            <a:off x="6355080" y="1737360"/>
+            <a:ext cx="5166360" cy="1828800"/>
+          </a:xfrm>
+          <a:prstGeom prst="roundRect">
+            <a:avLst>
+              <a:gd name="adj" fmla="val 4000"/>
+            </a:avLst>
+          </a:prstGeom>
+          <a:solidFill>
+            <a:srgbClr val="1A3A1C"/>
+          </a:solidFill>
+          <a:ln w="12700">
+            <a:solidFill>
+              <a:srgbClr val="1A3A1C"/>
+            </a:solidFill>
+            <a:prstDash val="solid"/>
+          </a:ln>
+        </p:spPr>
+      </p:sp>
+      <p:sp>
+        <p:nvSpPr>
+          <p:cNvPr id="8" name="Text 6"/>
+          <p:cNvSpPr/>
+          <p:nvPr/>
+        </p:nvSpPr>
+        <p:spPr>
+          <a:xfrm>
+            <a:off x="6675120" y="1920240"/>
+            <a:ext cx="4389120" cy="310896"/>
+          </a:xfrm>
+          <a:prstGeom prst="rect">
+            <a:avLst/>
+          </a:prstGeom>
+          <a:noFill/>
+          <a:ln/>
+        </p:spPr>
+        <p:txBody>
+          <a:bodyPr wrap="square" lIns="0" tIns="0" rIns="0" bIns="0" rtlCol="0" anchor="ctr"/>
+          <a:lstStyle/>
+          <a:p>
+            <a:pPr indent="0" marL="0">
+              <a:buNone/>
+            </a:pPr>
+            <a:r>
+              <a:rPr lang="en-US" sz="1700" b="1" dirty="0">
+                <a:solidFill>
+                  <a:srgbClr val="97BC62"/>
+                </a:solidFill>
+                <a:latin typeface="Cambria" pitchFamily="34" charset="0"/>
+                <a:ea typeface="Cambria" pitchFamily="34" charset="-122"/>
+                <a:cs typeface="Cambria" pitchFamily="34" charset="-120"/>
+              </a:rPr>
+              <a:t>Ce que ça fait au modèle</a:t>
+            </a:r>
+            <a:endParaRPr lang="en-US" sz="1700" dirty="0"/>
+          </a:p>
+        </p:txBody>
+      </p:sp>
+      <p:sp>
+        <p:nvSpPr>
+          <p:cNvPr id="9" name="Text 7"/>
+          <p:cNvSpPr/>
+          <p:nvPr/>
+        </p:nvSpPr>
+        <p:spPr>
+          <a:xfrm>
+            <a:off x="6675120" y="2377440"/>
+            <a:ext cx="4572000" cy="1005840"/>
+          </a:xfrm>
+          <a:prstGeom prst="rect">
+            <a:avLst/>
+          </a:prstGeom>
+          <a:noFill/>
+          <a:ln/>
+        </p:spPr>
+        <p:txBody>
+          <a:bodyPr wrap="square" lIns="0" tIns="0" rIns="0" bIns="0" rtlCol="0" anchor="ctr"/>
+          <a:lstStyle/>
+          <a:p>
+            <a:pPr indent="0" marL="0">
+              <a:lnSpc>
+                <a:spcPct val="115000"/>
+              </a:lnSpc>
+              <a:buNone/>
+            </a:pPr>
+            <a:r>
+              <a:rPr lang="en-US" sz="1200" dirty="0">
+                <a:solidFill>
+                  <a:srgbClr val="FFFFFF"/>
+                </a:solidFill>
+                <a:latin typeface="Calibri" pitchFamily="34" charset="0"/>
+                <a:ea typeface="Calibri" pitchFamily="34" charset="-122"/>
+                <a:cs typeface="Calibri" pitchFamily="34" charset="-120"/>
+              </a:rPr>
+              <a:t>Un modèle déclaré en 18 versions pèse 18 fois plus lourd dans la somme des carrés. L'ajustement suit le catalogue commercial, pas la physique.</a:t>
+            </a:r>
+            <a:endParaRPr lang="en-US" sz="1200" dirty="0"/>
+          </a:p>
+        </p:txBody>
+      </p:sp>
+      <p:sp>
+        <p:nvSpPr>
+          <p:cNvPr id="10" name="Shape 8"/>
+          <p:cNvSpPr/>
+          <p:nvPr/>
+        </p:nvSpPr>
+        <p:spPr>
+          <a:xfrm>
+            <a:off x="640080" y="3794760"/>
+            <a:ext cx="10881360" cy="1051560"/>
+          </a:xfrm>
+          <a:prstGeom prst="roundRect">
+            <a:avLst>
+              <a:gd name="adj" fmla="val 6957"/>
+            </a:avLst>
+          </a:prstGeom>
+          <a:solidFill>
+            <a:srgbClr val="EDF2E6"/>
+          </a:solidFill>
+          <a:ln w="12700">
+            <a:solidFill>
+              <a:srgbClr val="EDF2E6"/>
+            </a:solidFill>
+            <a:prstDash val="solid"/>
+          </a:ln>
+        </p:spPr>
+      </p:sp>
+      <p:sp>
+        <p:nvSpPr>
+          <p:cNvPr id="11" name="Text 9"/>
+          <p:cNvSpPr/>
+          <p:nvPr/>
+        </p:nvSpPr>
+        <p:spPr>
+          <a:xfrm>
+            <a:off x="1005840" y="3931920"/>
+            <a:ext cx="2743200" cy="685800"/>
+          </a:xfrm>
+          <a:prstGeom prst="rect">
+            <a:avLst/>
+          </a:prstGeom>
+          <a:noFill/>
+          <a:ln/>
+        </p:spPr>
+        <p:txBody>
+          <a:bodyPr wrap="square" lIns="0" tIns="0" rIns="0" bIns="0" rtlCol="0" anchor="ctr"/>
+          <a:lstStyle/>
+          <a:p>
+            <a:pPr indent="0" marL="0">
+              <a:buNone/>
+            </a:pPr>
+            <a:r>
+              <a:rPr lang="en-US" sz="3200" b="1" dirty="0">
+                <a:solidFill>
+                  <a:srgbClr val="5E6E5E"/>
+                </a:solidFill>
+                <a:latin typeface="Cambria" pitchFamily="34" charset="0"/>
+                <a:ea typeface="Cambria" pitchFamily="34" charset="-122"/>
+                <a:cs typeface="Cambria" pitchFamily="34" charset="-120"/>
+              </a:rPr>
+              <a:t>6 934</a:t>
+            </a:r>
+            <a:endParaRPr lang="en-US" sz="3200" dirty="0"/>
+          </a:p>
+        </p:txBody>
+      </p:sp>
+      <p:sp>
+        <p:nvSpPr>
+          <p:cNvPr id="12" name="Text 10"/>
+          <p:cNvSpPr/>
+          <p:nvPr/>
+        </p:nvSpPr>
+        <p:spPr>
+          <a:xfrm>
+            <a:off x="1005840" y="4526280"/>
+            <a:ext cx="3108960" cy="274320"/>
+          </a:xfrm>
+          <a:prstGeom prst="rect">
+            <a:avLst/>
+          </a:prstGeom>
+          <a:noFill/>
+          <a:ln/>
+        </p:spPr>
+        <p:txBody>
+          <a:bodyPr wrap="square" lIns="0" tIns="0" rIns="0" bIns="0" rtlCol="0" anchor="ctr"/>
+          <a:lstStyle/>
+          <a:p>
+            <a:pPr indent="0" marL="0">
+              <a:buNone/>
+            </a:pPr>
+            <a:r>
+              <a:rPr lang="en-US" sz="1150" dirty="0">
+                <a:solidFill>
+                  <a:srgbClr val="5E6E5E"/>
+                </a:solidFill>
+                <a:latin typeface="Calibri" pitchFamily="34" charset="0"/>
+                <a:ea typeface="Calibri" pitchFamily="34" charset="-122"/>
+                <a:cs typeface="Calibri" pitchFamily="34" charset="-120"/>
+              </a:rPr>
+              <a:t>lignes essence dans le fichier</a:t>
+            </a:r>
+            <a:endParaRPr lang="en-US" sz="1150" dirty="0"/>
+          </a:p>
+        </p:txBody>
+      </p:sp>
+      <p:sp>
+        <p:nvSpPr>
+          <p:cNvPr id="13" name="Text 11"/>
+          <p:cNvSpPr/>
+          <p:nvPr/>
+        </p:nvSpPr>
+        <p:spPr>
+          <a:xfrm>
+            <a:off x="4480560" y="4023360"/>
+            <a:ext cx="731520" cy="457200"/>
+          </a:xfrm>
+          <a:prstGeom prst="rect">
+            <a:avLst/>
+          </a:prstGeom>
+          <a:noFill/>
+          <a:ln/>
+        </p:spPr>
+        <p:txBody>
+          <a:bodyPr wrap="square" lIns="0" tIns="0" rIns="0" bIns="0" rtlCol="0" anchor="ctr"/>
+          <a:lstStyle/>
+          <a:p>
+            <a:pPr algn="ctr" indent="0" marL="0">
+              <a:buNone/>
+            </a:pPr>
+            <a:r>
+              <a:rPr lang="en-US" sz="2600" b="1" dirty="0">
+                <a:solidFill>
+                  <a:srgbClr val="97BC62"/>
+                </a:solidFill>
+                <a:latin typeface="Calibri" pitchFamily="34" charset="0"/>
+                <a:ea typeface="Calibri" pitchFamily="34" charset="-122"/>
+                <a:cs typeface="Calibri" pitchFamily="34" charset="-120"/>
+              </a:rPr>
+              <a:t>→</a:t>
+            </a:r>
+            <a:endParaRPr lang="en-US" sz="2600" dirty="0"/>
+          </a:p>
+        </p:txBody>
+      </p:sp>
+      <p:sp>
+        <p:nvSpPr>
+          <p:cNvPr id="14" name="Text 12"/>
+          <p:cNvSpPr/>
+          <p:nvPr/>
+        </p:nvSpPr>
+        <p:spPr>
+          <a:xfrm>
+            <a:off x="5669280" y="3931920"/>
+            <a:ext cx="2743200" cy="685800"/>
+          </a:xfrm>
+          <a:prstGeom prst="rect">
+            <a:avLst/>
+          </a:prstGeom>
+          <a:noFill/>
+          <a:ln/>
+        </p:spPr>
+        <p:txBody>
+          <a:bodyPr wrap="square" lIns="0" tIns="0" rIns="0" bIns="0" rtlCol="0" anchor="ctr"/>
+          <a:lstStyle/>
+          <a:p>
+            <a:pPr indent="0" marL="0">
+              <a:buNone/>
+            </a:pPr>
+            <a:r>
+              <a:rPr lang="en-US" sz="3200" b="1" dirty="0">
+                <a:solidFill>
+                  <a:srgbClr val="2C5F2D"/>
+                </a:solidFill>
+                <a:latin typeface="Cambria" pitchFamily="34" charset="0"/>
+                <a:ea typeface="Cambria" pitchFamily="34" charset="-122"/>
+                <a:cs typeface="Cambria" pitchFamily="34" charset="-120"/>
+              </a:rPr>
+              <a:t>2 406</a:t>
+            </a:r>
+            <a:endParaRPr lang="en-US" sz="3200" dirty="0"/>
+          </a:p>
+        </p:txBody>
+      </p:sp>
+      <p:sp>
+        <p:nvSpPr>
+          <p:cNvPr id="15" name="Text 13"/>
+          <p:cNvSpPr/>
+          <p:nvPr/>
+        </p:nvSpPr>
+        <p:spPr>
+          <a:xfrm>
+            <a:off x="5669280" y="4526280"/>
+            <a:ext cx="5029200" cy="274320"/>
+          </a:xfrm>
+          <a:prstGeom prst="rect">
+            <a:avLst/>
+          </a:prstGeom>
+          <a:noFill/>
+          <a:ln/>
+        </p:spPr>
+        <p:txBody>
+          <a:bodyPr wrap="square" lIns="0" tIns="0" rIns="0" bIns="0" rtlCol="0" anchor="ctr"/>
+          <a:lstStyle/>
+          <a:p>
+            <a:pPr indent="0" marL="0">
+              <a:buNone/>
+            </a:pPr>
+            <a:r>
+              <a:rPr lang="en-US" sz="1150" dirty="0">
+                <a:solidFill>
+                  <a:srgbClr val="1F2A1F"/>
+                </a:solidFill>
+                <a:latin typeface="Calibri" pitchFamily="34" charset="0"/>
+                <a:ea typeface="Calibri" pitchFamily="34" charset="-122"/>
+                <a:cs typeface="Calibri" pitchFamily="34" charset="-120"/>
+              </a:rPr>
+              <a:t>véhicules après dédoublonnage</a:t>
+            </a:r>
+            <a:endParaRPr lang="en-US" sz="1150" dirty="0"/>
+          </a:p>
+        </p:txBody>
+      </p:sp>
+      <p:sp>
+        <p:nvSpPr>
+          <p:cNvPr id="16" name="Shape 14"/>
+          <p:cNvSpPr/>
+          <p:nvPr/>
+        </p:nvSpPr>
+        <p:spPr>
+          <a:xfrm>
+            <a:off x="640080" y="5074920"/>
+            <a:ext cx="10881360" cy="777240"/>
+          </a:xfrm>
+          <a:prstGeom prst="roundRect">
+            <a:avLst>
+              <a:gd name="adj" fmla="val 9412"/>
+            </a:avLst>
+          </a:prstGeom>
+          <a:solidFill>
+            <a:srgbClr val="EDF2E6"/>
+          </a:solidFill>
+          <a:ln w="12700">
+            <a:solidFill>
+              <a:srgbClr val="EDF2E6"/>
+            </a:solidFill>
+            <a:prstDash val="solid"/>
+          </a:ln>
+        </p:spPr>
+      </p:sp>
+      <p:sp>
+        <p:nvSpPr>
+          <p:cNvPr id="17" name="Text 15"/>
+          <p:cNvSpPr/>
+          <p:nvPr/>
+        </p:nvSpPr>
+        <p:spPr>
+          <a:xfrm>
+            <a:off x="960120" y="5193792"/>
+            <a:ext cx="10241280" cy="548640"/>
+          </a:xfrm>
+          <a:prstGeom prst="rect">
+            <a:avLst/>
+          </a:prstGeom>
+          <a:noFill/>
+          <a:ln/>
+        </p:spPr>
+        <p:txBody>
+          <a:bodyPr wrap="square" lIns="0" tIns="0" rIns="0" bIns="0" rtlCol="0" anchor="ctr"/>
+          <a:lstStyle/>
+          <a:p>
+            <a:pPr indent="0" marL="0">
+              <a:buNone/>
+            </a:pPr>
+            <a:r>
+              <a:rPr lang="en-US" sz="1300" dirty="0">
+                <a:solidFill>
+                  <a:srgbClr val="1F2A1F"/>
+                </a:solidFill>
+                <a:latin typeface="Calibri" pitchFamily="34" charset="0"/>
+                <a:ea typeface="Calibri" pitchFamily="34" charset="-122"/>
+                <a:cs typeface="Calibri" pitchFamily="34" charset="-120"/>
+              </a:rPr>
+              <a:t>Dédoublonner sur des clés métier explicites — et dire lesquelles. Ici : marque, modèle, masse, puissance, CO₂.</a:t>
+            </a:r>
+            <a:endParaRPr lang="en-US" sz="1300" dirty="0"/>
+          </a:p>
+        </p:txBody>
+      </p:sp>
+    </p:spTree>
+  </p:cSld>
+  <p:clrMapOvr>
+    <a:masterClrMapping/>
+  </p:clrMapOvr>
+</p:sld>
+</file>
+
+<file path=ppt/slides/slide18.xml><?xml version="1.0" encoding="utf-8"?>
+<p:sld xmlns:a="http://schemas.openxmlformats.org/drawingml/2006/main" xmlns:r="http://schemas.openxmlformats.org/officeDocument/2006/relationships" xmlns:p="http://schemas.openxmlformats.org/presentationml/2006/main">
+  <p:cSld name="Slide 12">
+    <p:spTree>
+      <p:nvGrpSpPr>
+        <p:cNvPr id="1" name=""/>
+        <p:cNvGrpSpPr/>
+        <p:nvPr/>
+      </p:nvGrpSpPr>
+      <p:grpSpPr>
+        <a:xfrm>
+          <a:off x="0" y="0"/>
+          <a:ext cx="0" cy="0"/>
+          <a:chOff x="0" y="0"/>
+          <a:chExt cx="0" cy="0"/>
+        </a:xfrm>
+      </p:grpSpPr>
+      <p:sp>
+        <p:nvSpPr>
+          <p:cNvPr id="2" name="Text 0"/>
+          <p:cNvSpPr/>
+          <p:nvPr/>
+        </p:nvSpPr>
+        <p:spPr>
+          <a:xfrm>
+            <a:off x="640080" y="384048"/>
+            <a:ext cx="10881360" cy="685800"/>
+          </a:xfrm>
+          <a:prstGeom prst="rect">
+            <a:avLst/>
+          </a:prstGeom>
+          <a:noFill/>
+          <a:ln/>
+        </p:spPr>
+        <p:txBody>
+          <a:bodyPr wrap="square" lIns="0" tIns="0" rIns="0" bIns="0" rtlCol="0" anchor="ctr"/>
+          <a:lstStyle/>
+          <a:p>
+            <a:pPr indent="0" marL="0">
+              <a:buNone/>
+            </a:pPr>
+            <a:r>
+              <a:rPr lang="en-US" sz="3400" b="1" dirty="0">
+                <a:solidFill>
+                  <a:srgbClr val="1F2A1F"/>
+                </a:solidFill>
+                <a:latin typeface="Cambria" pitchFamily="34" charset="0"/>
+                <a:ea typeface="Cambria" pitchFamily="34" charset="-122"/>
+                <a:cs typeface="Cambria" pitchFamily="34" charset="-120"/>
+              </a:rPr>
+              <a:t>Quand deux variables se recouvrent</a:t>
+            </a:r>
+            <a:endParaRPr lang="en-US" sz="3400" dirty="0"/>
+          </a:p>
+        </p:txBody>
+      </p:sp>
+      <p:sp>
+        <p:nvSpPr>
+          <p:cNvPr id="3" name="Text 1"/>
+          <p:cNvSpPr/>
+          <p:nvPr/>
+        </p:nvSpPr>
+        <p:spPr>
+          <a:xfrm>
+            <a:off x="640080" y="1078992"/>
+            <a:ext cx="10881360" cy="384048"/>
+          </a:xfrm>
+          <a:prstGeom prst="rect">
+            <a:avLst/>
+          </a:prstGeom>
+          <a:noFill/>
+          <a:ln/>
+        </p:spPr>
+        <p:txBody>
+          <a:bodyPr wrap="square" lIns="0" tIns="0" rIns="0" bIns="0" rtlCol="0" anchor="ctr"/>
+          <a:lstStyle/>
+          <a:p>
+            <a:pPr indent="0" marL="0">
+              <a:buNone/>
+            </a:pPr>
+            <a:r>
+              <a:rPr lang="en-US" sz="1400" i="1" dirty="0">
+                <a:solidFill>
+                  <a:srgbClr val="5E6E5E"/>
+                </a:solidFill>
+                <a:latin typeface="Calibri" pitchFamily="34" charset="0"/>
+                <a:ea typeface="Calibri" pitchFamily="34" charset="-122"/>
+                <a:cs typeface="Calibri" pitchFamily="34" charset="-120"/>
+              </a:rPr>
+              <a:t>La colinéarité ne fausse pas les prédictions — elle interdit de lire les coefficients</a:t>
+            </a:r>
+            <a:endParaRPr lang="en-US" sz="1400" dirty="0"/>
+          </a:p>
+        </p:txBody>
+      </p:sp>
+      <p:sp>
+        <p:nvSpPr>
+          <p:cNvPr id="4" name="Shape 2"/>
+          <p:cNvSpPr/>
+          <p:nvPr/>
+        </p:nvSpPr>
+        <p:spPr>
+          <a:xfrm>
+            <a:off x="640080" y="1737360"/>
+            <a:ext cx="3538728" cy="2377440"/>
+          </a:xfrm>
+          <a:prstGeom prst="roundRect">
+            <a:avLst>
+              <a:gd name="adj" fmla="val 3077"/>
+            </a:avLst>
+          </a:prstGeom>
+          <a:solidFill>
+            <a:srgbClr val="EDF2E6"/>
+          </a:solidFill>
+          <a:ln w="12700">
+            <a:solidFill>
+              <a:srgbClr val="EDF2E6"/>
+            </a:solidFill>
+            <a:prstDash val="solid"/>
+          </a:ln>
+        </p:spPr>
+      </p:sp>
+      <p:sp>
+        <p:nvSpPr>
+          <p:cNvPr id="5" name="Text 3"/>
+          <p:cNvSpPr/>
+          <p:nvPr/>
+        </p:nvSpPr>
+        <p:spPr>
+          <a:xfrm>
+            <a:off x="914400" y="1920240"/>
+            <a:ext cx="3017520" cy="502920"/>
+          </a:xfrm>
+          <a:prstGeom prst="rect">
+            <a:avLst/>
+          </a:prstGeom>
+          <a:noFill/>
+          <a:ln/>
+        </p:spPr>
+        <p:txBody>
+          <a:bodyPr wrap="square" lIns="0" tIns="0" rIns="0" bIns="0" rtlCol="0" anchor="ctr"/>
+          <a:lstStyle/>
+          <a:p>
+            <a:pPr indent="0" marL="0">
+              <a:buNone/>
+            </a:pPr>
+            <a:r>
+              <a:rPr lang="en-US" sz="2400" b="1" dirty="0">
+                <a:solidFill>
+                  <a:srgbClr val="2C5F2D"/>
+                </a:solidFill>
+                <a:latin typeface="Cambria" pitchFamily="34" charset="0"/>
+                <a:ea typeface="Cambria" pitchFamily="34" charset="-122"/>
+                <a:cs typeface="Cambria" pitchFamily="34" charset="-120"/>
+              </a:rPr>
+              <a:t>Le symptôme</a:t>
+            </a:r>
+            <a:endParaRPr lang="en-US" sz="2400" dirty="0"/>
+          </a:p>
+        </p:txBody>
+      </p:sp>
+      <p:sp>
+        <p:nvSpPr>
+          <p:cNvPr id="6" name="Text 4"/>
+          <p:cNvSpPr/>
+          <p:nvPr/>
+        </p:nvSpPr>
+        <p:spPr>
+          <a:xfrm>
+            <a:off x="914400" y="2542032"/>
+            <a:ext cx="3017520" cy="1371600"/>
+          </a:xfrm>
+          <a:prstGeom prst="rect">
+            <a:avLst/>
+          </a:prstGeom>
+          <a:noFill/>
+          <a:ln/>
+        </p:spPr>
+        <p:txBody>
+          <a:bodyPr wrap="square" lIns="0" tIns="0" rIns="0" bIns="0" rtlCol="0" anchor="t"/>
+          <a:lstStyle/>
+          <a:p>
+            <a:pPr indent="0" marL="0">
+              <a:lnSpc>
+                <a:spcPct val="115000"/>
+              </a:lnSpc>
+              <a:buNone/>
+            </a:pPr>
+            <a:r>
+              <a:rPr lang="en-US" sz="1200" dirty="0">
+                <a:solidFill>
+                  <a:srgbClr val="1F2A1F"/>
+                </a:solidFill>
+                <a:latin typeface="Calibri" pitchFamily="34" charset="0"/>
+                <a:ea typeface="Calibri" pitchFamily="34" charset="-122"/>
+                <a:cs typeface="Calibri" pitchFamily="34" charset="-120"/>
+              </a:rPr>
+              <a:t>Un coefficient au signe physiquement absurde : à masse égale, plus le véhicule serait puissant, moins il émettrait.</a:t>
+            </a:r>
+            <a:endParaRPr lang="en-US" sz="1200" dirty="0"/>
+          </a:p>
+        </p:txBody>
+      </p:sp>
+      <p:sp>
+        <p:nvSpPr>
+          <p:cNvPr id="7" name="Shape 5"/>
+          <p:cNvSpPr/>
+          <p:nvPr/>
+        </p:nvSpPr>
+        <p:spPr>
+          <a:xfrm>
+            <a:off x="4361688" y="1737360"/>
+            <a:ext cx="3538728" cy="2377440"/>
+          </a:xfrm>
+          <a:prstGeom prst="roundRect">
+            <a:avLst>
+              <a:gd name="adj" fmla="val 3077"/>
+            </a:avLst>
+          </a:prstGeom>
+          <a:solidFill>
+            <a:srgbClr val="EDF2E6"/>
+          </a:solidFill>
+          <a:ln w="12700">
+            <a:solidFill>
+              <a:srgbClr val="EDF2E6"/>
+            </a:solidFill>
+            <a:prstDash val="solid"/>
+          </a:ln>
+        </p:spPr>
+      </p:sp>
+      <p:sp>
+        <p:nvSpPr>
+          <p:cNvPr id="8" name="Text 6"/>
+          <p:cNvSpPr/>
+          <p:nvPr/>
+        </p:nvSpPr>
+        <p:spPr>
+          <a:xfrm>
+            <a:off x="4636008" y="1920240"/>
+            <a:ext cx="3017520" cy="502920"/>
+          </a:xfrm>
+          <a:prstGeom prst="rect">
+            <a:avLst/>
+          </a:prstGeom>
+          <a:noFill/>
+          <a:ln/>
+        </p:spPr>
+        <p:txBody>
+          <a:bodyPr wrap="square" lIns="0" tIns="0" rIns="0" bIns="0" rtlCol="0" anchor="ctr"/>
+          <a:lstStyle/>
+          <a:p>
+            <a:pPr indent="0" marL="0">
+              <a:buNone/>
+            </a:pPr>
+            <a:r>
+              <a:rPr lang="en-US" sz="2400" b="1" dirty="0">
+                <a:solidFill>
+                  <a:srgbClr val="2C5F2D"/>
+                </a:solidFill>
+                <a:latin typeface="Cambria" pitchFamily="34" charset="0"/>
+                <a:ea typeface="Cambria" pitchFamily="34" charset="-122"/>
+                <a:cs typeface="Cambria" pitchFamily="34" charset="-120"/>
+              </a:rPr>
+              <a:t>Le diagnostic</a:t>
+            </a:r>
+            <a:endParaRPr lang="en-US" sz="2400" dirty="0"/>
+          </a:p>
+        </p:txBody>
+      </p:sp>
+      <p:sp>
+        <p:nvSpPr>
+          <p:cNvPr id="9" name="Text 7"/>
+          <p:cNvSpPr/>
+          <p:nvPr/>
+        </p:nvSpPr>
+        <p:spPr>
+          <a:xfrm>
+            <a:off x="4636008" y="2542032"/>
+            <a:ext cx="3017520" cy="1371600"/>
+          </a:xfrm>
+          <a:prstGeom prst="rect">
+            <a:avLst/>
+          </a:prstGeom>
+          <a:noFill/>
+          <a:ln/>
+        </p:spPr>
+        <p:txBody>
+          <a:bodyPr wrap="square" lIns="0" tIns="0" rIns="0" bIns="0" rtlCol="0" anchor="t"/>
+          <a:lstStyle/>
+          <a:p>
+            <a:pPr indent="0" marL="0">
+              <a:lnSpc>
+                <a:spcPct val="115000"/>
+              </a:lnSpc>
+              <a:buNone/>
+            </a:pPr>
+            <a:r>
+              <a:rPr lang="en-US" sz="1200" dirty="0">
+                <a:solidFill>
+                  <a:srgbClr val="1F2A1F"/>
+                </a:solidFill>
+                <a:latin typeface="Calibri" pitchFamily="34" charset="0"/>
+                <a:ea typeface="Calibri" pitchFamily="34" charset="-122"/>
+                <a:cs typeface="Calibri" pitchFamily="34" charset="-120"/>
+              </a:rPr>
+              <a:t>Dans l'ordre : corrélation entre variables, R² de chacune seule, puis gain incrémental. Un gain nul = le coefficient ajuste du bruit.</a:t>
+            </a:r>
+            <a:endParaRPr lang="en-US" sz="1200" dirty="0"/>
+          </a:p>
+        </p:txBody>
+      </p:sp>
+      <p:sp>
+        <p:nvSpPr>
+          <p:cNvPr id="10" name="Shape 8"/>
+          <p:cNvSpPr/>
+          <p:nvPr/>
+        </p:nvSpPr>
+        <p:spPr>
+          <a:xfrm>
+            <a:off x="8083296" y="1737360"/>
+            <a:ext cx="3538728" cy="2377440"/>
+          </a:xfrm>
+          <a:prstGeom prst="roundRect">
+            <a:avLst>
+              <a:gd name="adj" fmla="val 3077"/>
+            </a:avLst>
+          </a:prstGeom>
+          <a:solidFill>
+            <a:srgbClr val="EDF2E6"/>
+          </a:solidFill>
+          <a:ln w="12700">
+            <a:solidFill>
+              <a:srgbClr val="EDF2E6"/>
+            </a:solidFill>
+            <a:prstDash val="solid"/>
+          </a:ln>
+        </p:spPr>
+      </p:sp>
+      <p:sp>
+        <p:nvSpPr>
+          <p:cNvPr id="11" name="Text 9"/>
+          <p:cNvSpPr/>
+          <p:nvPr/>
+        </p:nvSpPr>
+        <p:spPr>
+          <a:xfrm>
+            <a:off x="8357616" y="1920240"/>
+            <a:ext cx="3017520" cy="502920"/>
+          </a:xfrm>
+          <a:prstGeom prst="rect">
+            <a:avLst/>
+          </a:prstGeom>
+          <a:noFill/>
+          <a:ln/>
+        </p:spPr>
+        <p:txBody>
+          <a:bodyPr wrap="square" lIns="0" tIns="0" rIns="0" bIns="0" rtlCol="0" anchor="ctr"/>
+          <a:lstStyle/>
+          <a:p>
+            <a:pPr indent="0" marL="0">
+              <a:buNone/>
+            </a:pPr>
+            <a:r>
+              <a:rPr lang="en-US" sz="2400" b="1" dirty="0">
+                <a:solidFill>
+                  <a:srgbClr val="C0562F"/>
+                </a:solidFill>
+                <a:latin typeface="Cambria" pitchFamily="34" charset="0"/>
+                <a:ea typeface="Cambria" pitchFamily="34" charset="-122"/>
+                <a:cs typeface="Cambria" pitchFamily="34" charset="-120"/>
+              </a:rPr>
+              <a:t>La conséquence</a:t>
+            </a:r>
+            <a:endParaRPr lang="en-US" sz="2400" dirty="0"/>
+          </a:p>
+        </p:txBody>
+      </p:sp>
+      <p:sp>
+        <p:nvSpPr>
+          <p:cNvPr id="12" name="Text 10"/>
+          <p:cNvSpPr/>
+          <p:nvPr/>
+        </p:nvSpPr>
+        <p:spPr>
+          <a:xfrm>
+            <a:off x="8357616" y="2542032"/>
+            <a:ext cx="3017520" cy="1371600"/>
+          </a:xfrm>
+          <a:prstGeom prst="rect">
+            <a:avLst/>
+          </a:prstGeom>
+          <a:noFill/>
+          <a:ln/>
+        </p:spPr>
+        <p:txBody>
+          <a:bodyPr wrap="square" lIns="0" tIns="0" rIns="0" bIns="0" rtlCol="0" anchor="t"/>
+          <a:lstStyle/>
+          <a:p>
+            <a:pPr indent="0" marL="0">
+              <a:lnSpc>
+                <a:spcPct val="115000"/>
+              </a:lnSpc>
+              <a:buNone/>
+            </a:pPr>
+            <a:r>
+              <a:rPr lang="en-US" sz="1200" dirty="0">
+                <a:solidFill>
+                  <a:srgbClr val="1F2A1F"/>
+                </a:solidFill>
+                <a:latin typeface="Calibri" pitchFamily="34" charset="0"/>
+                <a:ea typeface="Calibri" pitchFamily="34" charset="-122"/>
+                <a:cs typeface="Calibri" pitchFamily="34" charset="-120"/>
+              </a:rPr>
+              <a:t>Les coefficients ne s'interprètent plus un par un. Seule leur combinaison prédit — et le modèle reste utilisable.</a:t>
+            </a:r>
+            <a:endParaRPr lang="en-US" sz="1200" dirty="0"/>
+          </a:p>
+        </p:txBody>
+      </p:sp>
+      <p:sp>
+        <p:nvSpPr>
+          <p:cNvPr id="13" name="Shape 11"/>
+          <p:cNvSpPr/>
+          <p:nvPr/>
+        </p:nvSpPr>
+        <p:spPr>
+          <a:xfrm>
+            <a:off x="640080" y="4389120"/>
+            <a:ext cx="10881360" cy="1371600"/>
+          </a:xfrm>
+          <a:prstGeom prst="roundRect">
+            <a:avLst>
+              <a:gd name="adj" fmla="val 5333"/>
+            </a:avLst>
+          </a:prstGeom>
+          <a:solidFill>
+            <a:srgbClr val="1A3A1C"/>
+          </a:solidFill>
+          <a:ln w="12700">
+            <a:solidFill>
+              <a:srgbClr val="1A3A1C"/>
+            </a:solidFill>
+            <a:prstDash val="solid"/>
+          </a:ln>
+        </p:spPr>
+      </p:sp>
+      <p:sp>
+        <p:nvSpPr>
+          <p:cNvPr id="14" name="Text 12"/>
+          <p:cNvSpPr/>
+          <p:nvPr/>
+        </p:nvSpPr>
+        <p:spPr>
+          <a:xfrm>
+            <a:off x="960120" y="4553712"/>
+            <a:ext cx="10241280" cy="320040"/>
+          </a:xfrm>
+          <a:prstGeom prst="rect">
+            <a:avLst/>
+          </a:prstGeom>
+          <a:noFill/>
+          <a:ln/>
+        </p:spPr>
+        <p:txBody>
+          <a:bodyPr wrap="square" lIns="0" tIns="0" rIns="0" bIns="0" rtlCol="0" anchor="ctr"/>
+          <a:lstStyle/>
+          <a:p>
+            <a:pPr indent="0" marL="0">
+              <a:buNone/>
+            </a:pPr>
+            <a:r>
+              <a:rPr lang="en-US" sz="1500" b="1" dirty="0">
+                <a:solidFill>
+                  <a:srgbClr val="97BC62"/>
+                </a:solidFill>
+                <a:latin typeface="Cambria" pitchFamily="34" charset="0"/>
+                <a:ea typeface="Cambria" pitchFamily="34" charset="-122"/>
+                <a:cs typeface="Cambria" pitchFamily="34" charset="-120"/>
+              </a:rPr>
+              <a:t>Les R² ne s'additionnent pas</a:t>
+            </a:r>
+            <a:endParaRPr lang="en-US" sz="1500" dirty="0"/>
+          </a:p>
+        </p:txBody>
+      </p:sp>
+      <p:sp>
+        <p:nvSpPr>
+          <p:cNvPr id="15" name="Text 13"/>
+          <p:cNvSpPr/>
+          <p:nvPr/>
+        </p:nvSpPr>
+        <p:spPr>
+          <a:xfrm>
+            <a:off x="960120" y="4937760"/>
+            <a:ext cx="10241280" cy="685800"/>
+          </a:xfrm>
+          <a:prstGeom prst="rect">
+            <a:avLst/>
+          </a:prstGeom>
+          <a:noFill/>
+          <a:ln/>
+        </p:spPr>
+        <p:txBody>
+          <a:bodyPr wrap="square" lIns="0" tIns="0" rIns="0" bIns="0" rtlCol="0" anchor="ctr"/>
+          <a:lstStyle/>
+          <a:p>
+            <a:pPr indent="0" marL="0">
+              <a:lnSpc>
+                <a:spcPct val="115000"/>
+              </a:lnSpc>
+              <a:buNone/>
+            </a:pPr>
+            <a:r>
+              <a:rPr lang="en-US" sz="1250" dirty="0">
+                <a:solidFill>
+                  <a:srgbClr val="FFFFFF"/>
+                </a:solidFill>
+                <a:latin typeface="Calibri" pitchFamily="34" charset="0"/>
+                <a:ea typeface="Calibri" pitchFamily="34" charset="-122"/>
+                <a:cs typeface="Calibri" pitchFamily="34" charset="-120"/>
+              </a:rPr>
+              <a:t>0,6158 pour la masse seule, 0,7618 pour la puissance seule, 0,7886 pour les deux ensemble. L'information commune est partagée, pas additive : c'est le gain incrémental qui compte, jamais le R² d'une variable prise seule.</a:t>
+            </a:r>
+            <a:endParaRPr lang="en-US" sz="1250" dirty="0"/>
+          </a:p>
+        </p:txBody>
+      </p:sp>
+    </p:spTree>
+  </p:cSld>
+  <p:clrMapOvr>
+    <a:masterClrMapping/>
+  </p:clrMapOvr>
+</p:sld>
+</file>
+
+<file path=ppt/slides/slide19.xml><?xml version="1.0" encoding="utf-8"?>
+<p:sld xmlns:a="http://schemas.openxmlformats.org/drawingml/2006/main" xmlns:r="http://schemas.openxmlformats.org/officeDocument/2006/relationships" xmlns:p="http://schemas.openxmlformats.org/presentationml/2006/main">
+  <p:cSld name="Slide 12">
+    <p:spTree>
+      <p:nvGrpSpPr>
+        <p:cNvPr id="1" name=""/>
+        <p:cNvGrpSpPr/>
+        <p:nvPr/>
+      </p:nvGrpSpPr>
+      <p:grpSpPr>
+        <a:xfrm>
+          <a:off x="0" y="0"/>
+          <a:ext cx="0" cy="0"/>
+          <a:chOff x="0" y="0"/>
+          <a:chExt cx="0" cy="0"/>
+        </a:xfrm>
+      </p:grpSpPr>
+      <p:sp>
+        <p:nvSpPr>
+          <p:cNvPr id="2" name="Text 0"/>
+          <p:cNvSpPr/>
+          <p:nvPr/>
+        </p:nvSpPr>
+        <p:spPr>
+          <a:xfrm>
+            <a:off x="640080" y="384048"/>
+            <a:ext cx="10881360" cy="685800"/>
+          </a:xfrm>
+          <a:prstGeom prst="rect">
+            <a:avLst/>
+          </a:prstGeom>
+          <a:noFill/>
+          <a:ln/>
+        </p:spPr>
+        <p:txBody>
+          <a:bodyPr wrap="square" lIns="0" tIns="0" rIns="0" bIns="0" rtlCol="0" anchor="ctr"/>
+          <a:lstStyle/>
+          <a:p>
+            <a:pPr indent="0" marL="0">
+              <a:buNone/>
+            </a:pPr>
+            <a:r>
+              <a:rPr lang="en-US" sz="3400" b="1" dirty="0">
+                <a:solidFill>
+                  <a:srgbClr val="1F2A1F"/>
+                </a:solidFill>
+                <a:latin typeface="Cambria" pitchFamily="34" charset="0"/>
+                <a:ea typeface="Cambria" pitchFamily="34" charset="-122"/>
+                <a:cs typeface="Cambria" pitchFamily="34" charset="-120"/>
+              </a:rPr>
+              <a:t>Le R² d'entraînement ne peut que monter</a:t>
+            </a:r>
+            <a:endParaRPr lang="en-US" sz="3400" dirty="0"/>
+          </a:p>
+        </p:txBody>
+      </p:sp>
+      <p:sp>
+        <p:nvSpPr>
+          <p:cNvPr id="3" name="Text 1"/>
+          <p:cNvSpPr/>
+          <p:nvPr/>
+        </p:nvSpPr>
+        <p:spPr>
+          <a:xfrm>
+            <a:off x="640080" y="1078992"/>
+            <a:ext cx="10881360" cy="384048"/>
+          </a:xfrm>
+          <a:prstGeom prst="rect">
+            <a:avLst/>
+          </a:prstGeom>
+          <a:noFill/>
+          <a:ln/>
+        </p:spPr>
+        <p:txBody>
+          <a:bodyPr wrap="square" lIns="0" tIns="0" rIns="0" bIns="0" rtlCol="0" anchor="ctr"/>
+          <a:lstStyle/>
+          <a:p>
+            <a:pPr indent="0" marL="0">
+              <a:buNone/>
+            </a:pPr>
+            <a:r>
+              <a:rPr lang="en-US" sz="1400" i="1" dirty="0">
+                <a:solidFill>
+                  <a:srgbClr val="5E6E5E"/>
+                </a:solidFill>
+                <a:latin typeface="Calibri" pitchFamily="34" charset="0"/>
+                <a:ea typeface="Calibri" pitchFamily="34" charset="-122"/>
+                <a:cs typeface="Calibri" pitchFamily="34" charset="-120"/>
+              </a:rPr>
+              <a:t>Dès que le nombre de paramètres varie, il cesse d'être un critère de comparaison</a:t>
+            </a:r>
+            <a:endParaRPr lang="en-US" sz="1400" dirty="0"/>
+          </a:p>
+        </p:txBody>
+      </p:sp>
+      <p:sp>
+        <p:nvSpPr>
+          <p:cNvPr id="4" name="Shape 2"/>
+          <p:cNvSpPr/>
+          <p:nvPr/>
+        </p:nvSpPr>
+        <p:spPr>
+          <a:xfrm>
+            <a:off x="640080" y="1737360"/>
+            <a:ext cx="3538728" cy="2377440"/>
+          </a:xfrm>
+          <a:prstGeom prst="roundRect">
+            <a:avLst>
+              <a:gd name="adj" fmla="val 3077"/>
+            </a:avLst>
+          </a:prstGeom>
+          <a:solidFill>
+            <a:srgbClr val="EDF2E6"/>
+          </a:solidFill>
+          <a:ln w="12700">
+            <a:solidFill>
+              <a:srgbClr val="EDF2E6"/>
+            </a:solidFill>
+            <a:prstDash val="solid"/>
+          </a:ln>
+        </p:spPr>
+      </p:sp>
+      <p:sp>
+        <p:nvSpPr>
+          <p:cNvPr id="5" name="Text 3"/>
+          <p:cNvSpPr/>
+          <p:nvPr/>
+        </p:nvSpPr>
+        <p:spPr>
+          <a:xfrm>
+            <a:off x="914400" y="1920240"/>
+            <a:ext cx="3017520" cy="502920"/>
+          </a:xfrm>
+          <a:prstGeom prst="rect">
+            <a:avLst/>
+          </a:prstGeom>
+          <a:noFill/>
+          <a:ln/>
+        </p:spPr>
+        <p:txBody>
+          <a:bodyPr wrap="square" lIns="0" tIns="0" rIns="0" bIns="0" rtlCol="0" anchor="ctr"/>
+          <a:lstStyle/>
+          <a:p>
+            <a:pPr indent="0" marL="0">
+              <a:buNone/>
+            </a:pPr>
+            <a:r>
+              <a:rPr lang="en-US" sz="2400" b="1" dirty="0">
+                <a:solidFill>
+                  <a:srgbClr val="2C5F2D"/>
+                </a:solidFill>
+                <a:latin typeface="Cambria" pitchFamily="34" charset="0"/>
+                <a:ea typeface="Cambria" pitchFamily="34" charset="-122"/>
+                <a:cs typeface="Cambria" pitchFamily="34" charset="-120"/>
+              </a:rPr>
+              <a:t>Le mécanisme</a:t>
+            </a:r>
+            <a:endParaRPr lang="en-US" sz="2400" dirty="0"/>
+          </a:p>
+        </p:txBody>
+      </p:sp>
+      <p:sp>
+        <p:nvSpPr>
+          <p:cNvPr id="6" name="Text 4"/>
+          <p:cNvSpPr/>
+          <p:nvPr/>
+        </p:nvSpPr>
+        <p:spPr>
+          <a:xfrm>
+            <a:off x="914400" y="2542032"/>
+            <a:ext cx="3017520" cy="1371600"/>
+          </a:xfrm>
+          <a:prstGeom prst="rect">
+            <a:avLst/>
+          </a:prstGeom>
+          <a:noFill/>
+          <a:ln/>
+        </p:spPr>
+        <p:txBody>
+          <a:bodyPr wrap="square" lIns="0" tIns="0" rIns="0" bIns="0" rtlCol="0" anchor="t"/>
+          <a:lstStyle/>
+          <a:p>
+            <a:pPr indent="0" marL="0">
+              <a:lnSpc>
+                <a:spcPct val="115000"/>
+              </a:lnSpc>
+              <a:buNone/>
+            </a:pPr>
+            <a:r>
+              <a:rPr lang="en-US" sz="1200" dirty="0">
+                <a:solidFill>
+                  <a:srgbClr val="1F2A1F"/>
+                </a:solidFill>
+                <a:latin typeface="Calibri" pitchFamily="34" charset="0"/>
+                <a:ea typeface="Calibri" pitchFamily="34" charset="-122"/>
+                <a:cs typeface="Calibri" pitchFamily="34" charset="-120"/>
+              </a:rPr>
+              <a:t>Une variable de plus donne un degré de liberté de plus. Même du bruit pur fait monter le R² d'entraînement.</a:t>
+            </a:r>
+            <a:endParaRPr lang="en-US" sz="1200" dirty="0"/>
+          </a:p>
+        </p:txBody>
+      </p:sp>
+      <p:sp>
+        <p:nvSpPr>
+          <p:cNvPr id="7" name="Shape 5"/>
+          <p:cNvSpPr/>
+          <p:nvPr/>
+        </p:nvSpPr>
+        <p:spPr>
+          <a:xfrm>
+            <a:off x="4361688" y="1737360"/>
+            <a:ext cx="3538728" cy="2377440"/>
+          </a:xfrm>
+          <a:prstGeom prst="roundRect">
+            <a:avLst>
+              <a:gd name="adj" fmla="val 3077"/>
+            </a:avLst>
+          </a:prstGeom>
+          <a:solidFill>
+            <a:srgbClr val="EDF2E6"/>
+          </a:solidFill>
+          <a:ln w="12700">
+            <a:solidFill>
+              <a:srgbClr val="EDF2E6"/>
+            </a:solidFill>
+            <a:prstDash val="solid"/>
+          </a:ln>
+        </p:spPr>
+      </p:sp>
+      <p:sp>
+        <p:nvSpPr>
+          <p:cNvPr id="8" name="Text 6"/>
+          <p:cNvSpPr/>
+          <p:nvPr/>
+        </p:nvSpPr>
+        <p:spPr>
+          <a:xfrm>
+            <a:off x="4636008" y="1920240"/>
+            <a:ext cx="3017520" cy="502920"/>
+          </a:xfrm>
+          <a:prstGeom prst="rect">
+            <a:avLst/>
+          </a:prstGeom>
+          <a:noFill/>
+          <a:ln/>
+        </p:spPr>
+        <p:txBody>
+          <a:bodyPr wrap="square" lIns="0" tIns="0" rIns="0" bIns="0" rtlCol="0" anchor="ctr"/>
+          <a:lstStyle/>
+          <a:p>
+            <a:pPr indent="0" marL="0">
+              <a:buNone/>
+            </a:pPr>
+            <a:r>
+              <a:rPr lang="en-US" sz="2400" b="1" dirty="0">
+                <a:solidFill>
+                  <a:srgbClr val="2C5F2D"/>
+                </a:solidFill>
+                <a:latin typeface="Cambria" pitchFamily="34" charset="0"/>
+                <a:ea typeface="Cambria" pitchFamily="34" charset="-122"/>
+                <a:cs typeface="Cambria" pitchFamily="34" charset="-120"/>
+              </a:rPr>
+              <a:t>Ce que ça masque</a:t>
+            </a:r>
+            <a:endParaRPr lang="en-US" sz="2400" dirty="0"/>
+          </a:p>
+        </p:txBody>
+      </p:sp>
+      <p:sp>
+        <p:nvSpPr>
+          <p:cNvPr id="9" name="Text 7"/>
+          <p:cNvSpPr/>
+          <p:nvPr/>
+        </p:nvSpPr>
+        <p:spPr>
+          <a:xfrm>
+            <a:off x="4636008" y="2542032"/>
+            <a:ext cx="3017520" cy="1371600"/>
+          </a:xfrm>
+          <a:prstGeom prst="rect">
+            <a:avLst/>
+          </a:prstGeom>
+          <a:noFill/>
+          <a:ln/>
+        </p:spPr>
+        <p:txBody>
+          <a:bodyPr wrap="square" lIns="0" tIns="0" rIns="0" bIns="0" rtlCol="0" anchor="t"/>
+          <a:lstStyle/>
+          <a:p>
+            <a:pPr indent="0" marL="0">
+              <a:lnSpc>
+                <a:spcPct val="115000"/>
+              </a:lnSpc>
+              <a:buNone/>
+            </a:pPr>
+            <a:r>
+              <a:rPr lang="en-US" sz="1200" dirty="0">
+                <a:solidFill>
+                  <a:srgbClr val="1F2A1F"/>
+                </a:solidFill>
+                <a:latin typeface="Calibri" pitchFamily="34" charset="0"/>
+                <a:ea typeface="Calibri" pitchFamily="34" charset="-122"/>
+                <a:cs typeface="Calibri" pitchFamily="34" charset="-120"/>
+              </a:rPr>
+              <a:t>Rien ne distingue alors l'information réelle de l'ajustement au bruit. Le ratio inutile et la variable décisive montent tous les deux.</a:t>
+            </a:r>
+            <a:endParaRPr lang="en-US" sz="1200" dirty="0"/>
+          </a:p>
+        </p:txBody>
+      </p:sp>
+      <p:sp>
+        <p:nvSpPr>
+          <p:cNvPr id="10" name="Shape 8"/>
+          <p:cNvSpPr/>
+          <p:nvPr/>
+        </p:nvSpPr>
+        <p:spPr>
+          <a:xfrm>
+            <a:off x="8083296" y="1737360"/>
+            <a:ext cx="3538728" cy="2377440"/>
+          </a:xfrm>
+          <a:prstGeom prst="roundRect">
+            <a:avLst>
+              <a:gd name="adj" fmla="val 3077"/>
+            </a:avLst>
+          </a:prstGeom>
+          <a:solidFill>
+            <a:srgbClr val="EDF2E6"/>
+          </a:solidFill>
+          <a:ln w="12700">
+            <a:solidFill>
+              <a:srgbClr val="EDF2E6"/>
+            </a:solidFill>
+            <a:prstDash val="solid"/>
+          </a:ln>
+        </p:spPr>
+      </p:sp>
+      <p:sp>
+        <p:nvSpPr>
+          <p:cNvPr id="11" name="Text 9"/>
+          <p:cNvSpPr/>
+          <p:nvPr/>
+        </p:nvSpPr>
+        <p:spPr>
+          <a:xfrm>
+            <a:off x="8357616" y="1920240"/>
+            <a:ext cx="3017520" cy="502920"/>
+          </a:xfrm>
+          <a:prstGeom prst="rect">
+            <a:avLst/>
+          </a:prstGeom>
+          <a:noFill/>
+          <a:ln/>
+        </p:spPr>
+        <p:txBody>
+          <a:bodyPr wrap="square" lIns="0" tIns="0" rIns="0" bIns="0" rtlCol="0" anchor="ctr"/>
+          <a:lstStyle/>
+          <a:p>
+            <a:pPr indent="0" marL="0">
+              <a:buNone/>
+            </a:pPr>
+            <a:r>
+              <a:rPr lang="en-US" sz="2400" b="1" dirty="0">
+                <a:solidFill>
+                  <a:srgbClr val="C0562F"/>
+                </a:solidFill>
+                <a:latin typeface="Cambria" pitchFamily="34" charset="0"/>
+                <a:ea typeface="Cambria" pitchFamily="34" charset="-122"/>
+                <a:cs typeface="Cambria" pitchFamily="34" charset="-120"/>
+              </a:rPr>
+              <a:t>Ce qui le remplace</a:t>
+            </a:r>
+            <a:endParaRPr lang="en-US" sz="2400" dirty="0"/>
+          </a:p>
+        </p:txBody>
+      </p:sp>
+      <p:sp>
+        <p:nvSpPr>
+          <p:cNvPr id="12" name="Text 10"/>
+          <p:cNvSpPr/>
+          <p:nvPr/>
+        </p:nvSpPr>
+        <p:spPr>
+          <a:xfrm>
+            <a:off x="8357616" y="2542032"/>
+            <a:ext cx="3017520" cy="1371600"/>
+          </a:xfrm>
+          <a:prstGeom prst="rect">
+            <a:avLst/>
+          </a:prstGeom>
+          <a:noFill/>
+          <a:ln/>
+        </p:spPr>
+        <p:txBody>
+          <a:bodyPr wrap="square" lIns="0" tIns="0" rIns="0" bIns="0" rtlCol="0" anchor="t"/>
+          <a:lstStyle/>
+          <a:p>
+            <a:pPr indent="0" marL="0">
+              <a:lnSpc>
+                <a:spcPct val="115000"/>
+              </a:lnSpc>
+              <a:buNone/>
+            </a:pPr>
+            <a:r>
+              <a:rPr lang="en-US" sz="1200" dirty="0">
+                <a:solidFill>
+                  <a:srgbClr val="1F2A1F"/>
+                </a:solidFill>
+                <a:latin typeface="Calibri" pitchFamily="34" charset="0"/>
+                <a:ea typeface="Calibri" pitchFamily="34" charset="-122"/>
+                <a:cs typeface="Calibri" pitchFamily="34" charset="-120"/>
+              </a:rPr>
+              <a:t>Évaluer sur des données non vues : train_test_split puis R² de test. Ou un R² ajusté, qui pénalise le nombre de paramètres.</a:t>
+            </a:r>
+            <a:endParaRPr lang="en-US" sz="1200" dirty="0"/>
+          </a:p>
+        </p:txBody>
+      </p:sp>
+      <p:sp>
+        <p:nvSpPr>
+          <p:cNvPr id="13" name="Shape 11"/>
+          <p:cNvSpPr/>
+          <p:nvPr/>
+        </p:nvSpPr>
+        <p:spPr>
+          <a:xfrm>
+            <a:off x="640080" y="4389120"/>
+            <a:ext cx="10881360" cy="1371600"/>
+          </a:xfrm>
+          <a:prstGeom prst="roundRect">
+            <a:avLst>
+              <a:gd name="adj" fmla="val 5333"/>
+            </a:avLst>
+          </a:prstGeom>
+          <a:solidFill>
+            <a:srgbClr val="1A3A1C"/>
+          </a:solidFill>
+          <a:ln w="12700">
+            <a:solidFill>
+              <a:srgbClr val="1A3A1C"/>
+            </a:solidFill>
+            <a:prstDash val="solid"/>
+          </a:ln>
+        </p:spPr>
+      </p:sp>
+      <p:sp>
+        <p:nvSpPr>
+          <p:cNvPr id="14" name="Text 12"/>
+          <p:cNvSpPr/>
+          <p:nvPr/>
+        </p:nvSpPr>
+        <p:spPr>
+          <a:xfrm>
+            <a:off x="960120" y="4553712"/>
+            <a:ext cx="10241280" cy="320040"/>
+          </a:xfrm>
+          <a:prstGeom prst="rect">
+            <a:avLst/>
+          </a:prstGeom>
+          <a:noFill/>
+          <a:ln/>
+        </p:spPr>
+        <p:txBody>
+          <a:bodyPr wrap="square" lIns="0" tIns="0" rIns="0" bIns="0" rtlCol="0" anchor="ctr"/>
+          <a:lstStyle/>
+          <a:p>
+            <a:pPr indent="0" marL="0">
+              <a:buNone/>
+            </a:pPr>
+            <a:r>
+              <a:rPr lang="en-US" sz="1500" b="1" dirty="0">
+                <a:solidFill>
+                  <a:srgbClr val="97BC62"/>
+                </a:solidFill>
+                <a:latin typeface="Cambria" pitchFamily="34" charset="0"/>
+                <a:ea typeface="Cambria" pitchFamily="34" charset="-122"/>
+                <a:cs typeface="Cambria" pitchFamily="34" charset="-120"/>
+              </a:rPr>
+              <a:t>Un R² de test supérieur au R² d'entraînement n'est pas une bonne nouvelle</a:t>
+            </a:r>
+            <a:endParaRPr lang="en-US" sz="1500" dirty="0"/>
+          </a:p>
+        </p:txBody>
+      </p:sp>
+      <p:sp>
+        <p:nvSpPr>
+          <p:cNvPr id="15" name="Text 13"/>
+          <p:cNvSpPr/>
+          <p:nvPr/>
+        </p:nvSpPr>
+        <p:spPr>
+          <a:xfrm>
+            <a:off x="960120" y="4937760"/>
+            <a:ext cx="10241280" cy="685800"/>
+          </a:xfrm>
+          <a:prstGeom prst="rect">
+            <a:avLst/>
+          </a:prstGeom>
+          <a:noFill/>
+          <a:ln/>
+        </p:spPr>
+        <p:txBody>
+          <a:bodyPr wrap="square" lIns="0" tIns="0" rIns="0" bIns="0" rtlCol="0" anchor="ctr"/>
+          <a:lstStyle/>
+          <a:p>
+            <a:pPr indent="0" marL="0">
+              <a:lnSpc>
+                <a:spcPct val="115000"/>
+              </a:lnSpc>
+              <a:buNone/>
+            </a:pPr>
+            <a:r>
+              <a:rPr lang="en-US" sz="1250" dirty="0">
+                <a:solidFill>
+                  <a:srgbClr val="FFFFFF"/>
+                </a:solidFill>
+                <a:latin typeface="Calibri" pitchFamily="34" charset="0"/>
+                <a:ea typeface="Calibri" pitchFamily="34" charset="-122"/>
+                <a:cs typeface="Calibri" pitchFamily="34" charset="-120"/>
+              </a:rPr>
+              <a:t>Il signale un tirage favorable, pas un bon modèle. Le classement de plusieurs modèles reste valide s'ils partagent le même découpage ; les valeurs absolues, non. La validation croisée tranche.</a:t>
             </a:r>
             <a:endParaRPr lang="en-US" sz="1250" dirty="0"/>
           </a:p>
@@ -6671,6 +8895,1404 @@
                 <a:cs typeface="Calibri" pitchFamily="34" charset="-120"/>
               </a:rPr>
               <a:t>Le choix de la métrique décide de la conclusion. Toujours savoir ce qu'on mesure.</a:t>
+            </a:r>
+            <a:endParaRPr lang="en-US" sz="1300" dirty="0"/>
+          </a:p>
+        </p:txBody>
+      </p:sp>
+    </p:spTree>
+  </p:cSld>
+  <p:clrMapOvr>
+    <a:masterClrMapping/>
+  </p:clrMapOvr>
+</p:sld>
+</file>
+
+<file path=ppt/slides/slide20.xml><?xml version="1.0" encoding="utf-8"?>
+<p:sld xmlns:a="http://schemas.openxmlformats.org/drawingml/2006/main" xmlns:r="http://schemas.openxmlformats.org/officeDocument/2006/relationships" xmlns:p="http://schemas.openxmlformats.org/presentationml/2006/main">
+  <p:cSld name="Slide 11">
+    <p:spTree>
+      <p:nvGrpSpPr>
+        <p:cNvPr id="1" name=""/>
+        <p:cNvGrpSpPr/>
+        <p:nvPr/>
+      </p:nvGrpSpPr>
+      <p:grpSpPr>
+        <a:xfrm>
+          <a:off x="0" y="0"/>
+          <a:ext cx="0" cy="0"/>
+          <a:chOff x="0" y="0"/>
+          <a:chExt cx="0" cy="0"/>
+        </a:xfrm>
+      </p:grpSpPr>
+      <p:sp>
+        <p:nvSpPr>
+          <p:cNvPr id="2" name="Text 0"/>
+          <p:cNvSpPr/>
+          <p:nvPr/>
+        </p:nvSpPr>
+        <p:spPr>
+          <a:xfrm>
+            <a:off x="640080" y="384048"/>
+            <a:ext cx="10881360" cy="685800"/>
+          </a:xfrm>
+          <a:prstGeom prst="rect">
+            <a:avLst/>
+          </a:prstGeom>
+          <a:noFill/>
+          <a:ln/>
+        </p:spPr>
+        <p:txBody>
+          <a:bodyPr wrap="square" lIns="0" tIns="0" rIns="0" bIns="0" rtlCol="0" anchor="ctr"/>
+          <a:lstStyle/>
+          <a:p>
+            <a:pPr indent="0" marL="0">
+              <a:buNone/>
+            </a:pPr>
+            <a:r>
+              <a:rPr lang="en-US" sz="3400" b="1" dirty="0">
+                <a:solidFill>
+                  <a:srgbClr val="1F2A1F"/>
+                </a:solidFill>
+                <a:latin typeface="Cambria" pitchFamily="34" charset="0"/>
+                <a:ea typeface="Cambria" pitchFamily="34" charset="-122"/>
+                <a:cs typeface="Cambria" pitchFamily="34" charset="-120"/>
+              </a:rPr>
+              <a:t>Comparer à quoi ?</a:t>
+            </a:r>
+            <a:endParaRPr lang="en-US" sz="3400" dirty="0"/>
+          </a:p>
+        </p:txBody>
+      </p:sp>
+      <p:sp>
+        <p:nvSpPr>
+          <p:cNvPr id="3" name="Text 1"/>
+          <p:cNvSpPr/>
+          <p:nvPr/>
+        </p:nvSpPr>
+        <p:spPr>
+          <a:xfrm>
+            <a:off x="640080" y="1078992"/>
+            <a:ext cx="10881360" cy="384048"/>
+          </a:xfrm>
+          <a:prstGeom prst="rect">
+            <a:avLst/>
+          </a:prstGeom>
+          <a:noFill/>
+          <a:ln/>
+        </p:spPr>
+        <p:txBody>
+          <a:bodyPr wrap="square" lIns="0" tIns="0" rIns="0" bIns="0" rtlCol="0" anchor="ctr"/>
+          <a:lstStyle/>
+          <a:p>
+            <a:pPr indent="0" marL="0">
+              <a:buNone/>
+            </a:pPr>
+            <a:r>
+              <a:rPr lang="en-US" sz="1400" i="1" dirty="0">
+                <a:solidFill>
+                  <a:srgbClr val="5E6E5E"/>
+                </a:solidFill>
+                <a:latin typeface="Calibri" pitchFamily="34" charset="0"/>
+                <a:ea typeface="Calibri" pitchFamily="34" charset="-122"/>
+                <a:cs typeface="Calibri" pitchFamily="34" charset="-120"/>
+              </a:rPr>
+              <a:t>Une erreur ne se juge que relativement</a:t>
+            </a:r>
+            <a:endParaRPr lang="en-US" sz="1400" dirty="0"/>
+          </a:p>
+        </p:txBody>
+      </p:sp>
+      <p:sp>
+        <p:nvSpPr>
+          <p:cNvPr id="4" name="Shape 2"/>
+          <p:cNvSpPr/>
+          <p:nvPr/>
+        </p:nvSpPr>
+        <p:spPr>
+          <a:xfrm>
+            <a:off x="640080" y="1737360"/>
+            <a:ext cx="5166360" cy="1828800"/>
+          </a:xfrm>
+          <a:prstGeom prst="roundRect">
+            <a:avLst>
+              <a:gd name="adj" fmla="val 4000"/>
+            </a:avLst>
+          </a:prstGeom>
+          <a:solidFill>
+            <a:srgbClr val="EDF2E6"/>
+          </a:solidFill>
+          <a:ln w="12700">
+            <a:solidFill>
+              <a:srgbClr val="EDF2E6"/>
+            </a:solidFill>
+            <a:prstDash val="solid"/>
+          </a:ln>
+        </p:spPr>
+      </p:sp>
+      <p:sp>
+        <p:nvSpPr>
+          <p:cNvPr id="5" name="Text 3"/>
+          <p:cNvSpPr/>
+          <p:nvPr/>
+        </p:nvSpPr>
+        <p:spPr>
+          <a:xfrm>
+            <a:off x="960120" y="1920240"/>
+            <a:ext cx="4389120" cy="310896"/>
+          </a:xfrm>
+          <a:prstGeom prst="rect">
+            <a:avLst/>
+          </a:prstGeom>
+          <a:noFill/>
+          <a:ln/>
+        </p:spPr>
+        <p:txBody>
+          <a:bodyPr wrap="square" lIns="0" tIns="0" rIns="0" bIns="0" rtlCol="0" anchor="ctr"/>
+          <a:lstStyle/>
+          <a:p>
+            <a:pPr indent="0" marL="0">
+              <a:buNone/>
+            </a:pPr>
+            <a:r>
+              <a:rPr lang="en-US" sz="1700" b="1" dirty="0">
+                <a:solidFill>
+                  <a:srgbClr val="5E6E5E"/>
+                </a:solidFill>
+                <a:latin typeface="Cambria" pitchFamily="34" charset="0"/>
+                <a:ea typeface="Cambria" pitchFamily="34" charset="-122"/>
+                <a:cs typeface="Cambria" pitchFamily="34" charset="-120"/>
+              </a:rPr>
+              <a:t>La référence naïve</a:t>
+            </a:r>
+            <a:endParaRPr lang="en-US" sz="1700" dirty="0"/>
+          </a:p>
+        </p:txBody>
+      </p:sp>
+      <p:sp>
+        <p:nvSpPr>
+          <p:cNvPr id="6" name="Text 4"/>
+          <p:cNvSpPr/>
+          <p:nvPr/>
+        </p:nvSpPr>
+        <p:spPr>
+          <a:xfrm>
+            <a:off x="960120" y="2377440"/>
+            <a:ext cx="4572000" cy="1005840"/>
+          </a:xfrm>
+          <a:prstGeom prst="rect">
+            <a:avLst/>
+          </a:prstGeom>
+          <a:noFill/>
+          <a:ln/>
+        </p:spPr>
+        <p:txBody>
+          <a:bodyPr wrap="square" lIns="0" tIns="0" rIns="0" bIns="0" rtlCol="0" anchor="t"/>
+          <a:lstStyle/>
+          <a:p>
+            <a:pPr indent="0" marL="0">
+              <a:lnSpc>
+                <a:spcPct val="115000"/>
+              </a:lnSpc>
+              <a:buNone/>
+            </a:pPr>
+            <a:r>
+              <a:rPr lang="en-US" sz="1200" dirty="0">
+                <a:solidFill>
+                  <a:srgbClr val="1F2A1F"/>
+                </a:solidFill>
+                <a:latin typeface="Calibri" pitchFamily="34" charset="0"/>
+                <a:ea typeface="Calibri" pitchFamily="34" charset="-122"/>
+                <a:cs typeface="Calibri" pitchFamily="34" charset="-120"/>
+              </a:rPr>
+              <a:t>Prédire la moyenne du parc pour tous les véhicules, sans regarder aucune variable. C'est le modèle le plus bête possible — et le point de départ obligé.</a:t>
+            </a:r>
+            <a:endParaRPr lang="en-US" sz="1200" dirty="0"/>
+          </a:p>
+        </p:txBody>
+      </p:sp>
+      <p:sp>
+        <p:nvSpPr>
+          <p:cNvPr id="7" name="Shape 5"/>
+          <p:cNvSpPr/>
+          <p:nvPr/>
+        </p:nvSpPr>
+        <p:spPr>
+          <a:xfrm>
+            <a:off x="6355080" y="1737360"/>
+            <a:ext cx="5166360" cy="1828800"/>
+          </a:xfrm>
+          <a:prstGeom prst="roundRect">
+            <a:avLst>
+              <a:gd name="adj" fmla="val 4000"/>
+            </a:avLst>
+          </a:prstGeom>
+          <a:solidFill>
+            <a:srgbClr val="1A3A1C"/>
+          </a:solidFill>
+          <a:ln w="12700">
+            <a:solidFill>
+              <a:srgbClr val="1A3A1C"/>
+            </a:solidFill>
+            <a:prstDash val="solid"/>
+          </a:ln>
+        </p:spPr>
+      </p:sp>
+      <p:sp>
+        <p:nvSpPr>
+          <p:cNvPr id="8" name="Text 6"/>
+          <p:cNvSpPr/>
+          <p:nvPr/>
+        </p:nvSpPr>
+        <p:spPr>
+          <a:xfrm>
+            <a:off x="6675120" y="1920240"/>
+            <a:ext cx="4389120" cy="310896"/>
+          </a:xfrm>
+          <a:prstGeom prst="rect">
+            <a:avLst/>
+          </a:prstGeom>
+          <a:noFill/>
+          <a:ln/>
+        </p:spPr>
+        <p:txBody>
+          <a:bodyPr wrap="square" lIns="0" tIns="0" rIns="0" bIns="0" rtlCol="0" anchor="ctr"/>
+          <a:lstStyle/>
+          <a:p>
+            <a:pPr indent="0" marL="0">
+              <a:buNone/>
+            </a:pPr>
+            <a:r>
+              <a:rPr lang="en-US" sz="1700" b="1" dirty="0">
+                <a:solidFill>
+                  <a:srgbClr val="97BC62"/>
+                </a:solidFill>
+                <a:latin typeface="Cambria" pitchFamily="34" charset="0"/>
+                <a:ea typeface="Cambria" pitchFamily="34" charset="-122"/>
+                <a:cs typeface="Cambria" pitchFamily="34" charset="-120"/>
+              </a:rPr>
+              <a:t>Ce qu'elle révèle</a:t>
+            </a:r>
+            <a:endParaRPr lang="en-US" sz="1700" dirty="0"/>
+          </a:p>
+        </p:txBody>
+      </p:sp>
+      <p:sp>
+        <p:nvSpPr>
+          <p:cNvPr id="9" name="Text 7"/>
+          <p:cNvSpPr/>
+          <p:nvPr/>
+        </p:nvSpPr>
+        <p:spPr>
+          <a:xfrm>
+            <a:off x="6675120" y="2377440"/>
+            <a:ext cx="4572000" cy="1005840"/>
+          </a:xfrm>
+          <a:prstGeom prst="rect">
+            <a:avLst/>
+          </a:prstGeom>
+          <a:noFill/>
+          <a:ln/>
+        </p:spPr>
+        <p:txBody>
+          <a:bodyPr wrap="square" lIns="0" tIns="0" rIns="0" bIns="0" rtlCol="0" anchor="ctr"/>
+          <a:lstStyle/>
+          <a:p>
+            <a:pPr indent="0" marL="0">
+              <a:lnSpc>
+                <a:spcPct val="115000"/>
+              </a:lnSpc>
+              <a:buNone/>
+            </a:pPr>
+            <a:r>
+              <a:rPr lang="en-US" sz="1200" dirty="0">
+                <a:solidFill>
+                  <a:srgbClr val="FFFFFF"/>
+                </a:solidFill>
+                <a:latin typeface="Calibri" pitchFamily="34" charset="0"/>
+                <a:ea typeface="Calibri" pitchFamily="34" charset="-122"/>
+                <a:cs typeface="Calibri" pitchFamily="34" charset="-120"/>
+              </a:rPr>
+              <a:t>15,5 g/km d'erreur ne veut rien dire seul. Rapporté à la référence, ça devient un résultat : masse, puissance et boîte divisent l'erreur par 2,8.</a:t>
+            </a:r>
+            <a:endParaRPr lang="en-US" sz="1200" dirty="0"/>
+          </a:p>
+        </p:txBody>
+      </p:sp>
+      <p:sp>
+        <p:nvSpPr>
+          <p:cNvPr id="10" name="Shape 8"/>
+          <p:cNvSpPr/>
+          <p:nvPr/>
+        </p:nvSpPr>
+        <p:spPr>
+          <a:xfrm>
+            <a:off x="640080" y="3794760"/>
+            <a:ext cx="10881360" cy="1051560"/>
+          </a:xfrm>
+          <a:prstGeom prst="roundRect">
+            <a:avLst>
+              <a:gd name="adj" fmla="val 6957"/>
+            </a:avLst>
+          </a:prstGeom>
+          <a:solidFill>
+            <a:srgbClr val="EDF2E6"/>
+          </a:solidFill>
+          <a:ln w="12700">
+            <a:solidFill>
+              <a:srgbClr val="EDF2E6"/>
+            </a:solidFill>
+            <a:prstDash val="solid"/>
+          </a:ln>
+        </p:spPr>
+      </p:sp>
+      <p:sp>
+        <p:nvSpPr>
+          <p:cNvPr id="11" name="Text 9"/>
+          <p:cNvSpPr/>
+          <p:nvPr/>
+        </p:nvSpPr>
+        <p:spPr>
+          <a:xfrm>
+            <a:off x="1005840" y="3931920"/>
+            <a:ext cx="2743200" cy="685800"/>
+          </a:xfrm>
+          <a:prstGeom prst="rect">
+            <a:avLst/>
+          </a:prstGeom>
+          <a:noFill/>
+          <a:ln/>
+        </p:spPr>
+        <p:txBody>
+          <a:bodyPr wrap="square" lIns="0" tIns="0" rIns="0" bIns="0" rtlCol="0" anchor="ctr"/>
+          <a:lstStyle/>
+          <a:p>
+            <a:pPr indent="0" marL="0">
+              <a:buNone/>
+            </a:pPr>
+            <a:r>
+              <a:rPr lang="en-US" sz="3200" b="1" dirty="0">
+                <a:solidFill>
+                  <a:srgbClr val="5E6E5E"/>
+                </a:solidFill>
+                <a:latin typeface="Cambria" pitchFamily="34" charset="0"/>
+                <a:ea typeface="Cambria" pitchFamily="34" charset="-122"/>
+                <a:cs typeface="Cambria" pitchFamily="34" charset="-120"/>
+              </a:rPr>
+              <a:t>42,9 g/km</a:t>
+            </a:r>
+            <a:endParaRPr lang="en-US" sz="3200" dirty="0"/>
+          </a:p>
+        </p:txBody>
+      </p:sp>
+      <p:sp>
+        <p:nvSpPr>
+          <p:cNvPr id="12" name="Text 10"/>
+          <p:cNvSpPr/>
+          <p:nvPr/>
+        </p:nvSpPr>
+        <p:spPr>
+          <a:xfrm>
+            <a:off x="1005840" y="4526280"/>
+            <a:ext cx="3108960" cy="274320"/>
+          </a:xfrm>
+          <a:prstGeom prst="rect">
+            <a:avLst/>
+          </a:prstGeom>
+          <a:noFill/>
+          <a:ln/>
+        </p:spPr>
+        <p:txBody>
+          <a:bodyPr wrap="square" lIns="0" tIns="0" rIns="0" bIns="0" rtlCol="0" anchor="ctr"/>
+          <a:lstStyle/>
+          <a:p>
+            <a:pPr indent="0" marL="0">
+              <a:buNone/>
+            </a:pPr>
+            <a:r>
+              <a:rPr lang="en-US" sz="1150" dirty="0">
+                <a:solidFill>
+                  <a:srgbClr val="5E6E5E"/>
+                </a:solidFill>
+                <a:latin typeface="Calibri" pitchFamily="34" charset="0"/>
+                <a:ea typeface="Calibri" pitchFamily="34" charset="-122"/>
+                <a:cs typeface="Calibri" pitchFamily="34" charset="-120"/>
+              </a:rPr>
+              <a:t>erreur de la référence naïve</a:t>
+            </a:r>
+            <a:endParaRPr lang="en-US" sz="1150" dirty="0"/>
+          </a:p>
+        </p:txBody>
+      </p:sp>
+      <p:sp>
+        <p:nvSpPr>
+          <p:cNvPr id="13" name="Text 11"/>
+          <p:cNvSpPr/>
+          <p:nvPr/>
+        </p:nvSpPr>
+        <p:spPr>
+          <a:xfrm>
+            <a:off x="4480560" y="4023360"/>
+            <a:ext cx="731520" cy="457200"/>
+          </a:xfrm>
+          <a:prstGeom prst="rect">
+            <a:avLst/>
+          </a:prstGeom>
+          <a:noFill/>
+          <a:ln/>
+        </p:spPr>
+        <p:txBody>
+          <a:bodyPr wrap="square" lIns="0" tIns="0" rIns="0" bIns="0" rtlCol="0" anchor="ctr"/>
+          <a:lstStyle/>
+          <a:p>
+            <a:pPr algn="ctr" indent="0" marL="0">
+              <a:buNone/>
+            </a:pPr>
+            <a:r>
+              <a:rPr lang="en-US" sz="2600" b="1" dirty="0">
+                <a:solidFill>
+                  <a:srgbClr val="97BC62"/>
+                </a:solidFill>
+                <a:latin typeface="Calibri" pitchFamily="34" charset="0"/>
+                <a:ea typeface="Calibri" pitchFamily="34" charset="-122"/>
+                <a:cs typeface="Calibri" pitchFamily="34" charset="-120"/>
+              </a:rPr>
+              <a:t>→</a:t>
+            </a:r>
+            <a:endParaRPr lang="en-US" sz="2600" dirty="0"/>
+          </a:p>
+        </p:txBody>
+      </p:sp>
+      <p:sp>
+        <p:nvSpPr>
+          <p:cNvPr id="14" name="Text 12"/>
+          <p:cNvSpPr/>
+          <p:nvPr/>
+        </p:nvSpPr>
+        <p:spPr>
+          <a:xfrm>
+            <a:off x="5669280" y="3931920"/>
+            <a:ext cx="2743200" cy="685800"/>
+          </a:xfrm>
+          <a:prstGeom prst="rect">
+            <a:avLst/>
+          </a:prstGeom>
+          <a:noFill/>
+          <a:ln/>
+        </p:spPr>
+        <p:txBody>
+          <a:bodyPr wrap="square" lIns="0" tIns="0" rIns="0" bIns="0" rtlCol="0" anchor="ctr"/>
+          <a:lstStyle/>
+          <a:p>
+            <a:pPr indent="0" marL="0">
+              <a:buNone/>
+            </a:pPr>
+            <a:r>
+              <a:rPr lang="en-US" sz="3200" b="1" dirty="0">
+                <a:solidFill>
+                  <a:srgbClr val="2C5F2D"/>
+                </a:solidFill>
+                <a:latin typeface="Cambria" pitchFamily="34" charset="0"/>
+                <a:ea typeface="Cambria" pitchFamily="34" charset="-122"/>
+                <a:cs typeface="Cambria" pitchFamily="34" charset="-120"/>
+              </a:rPr>
+              <a:t>15,5 g/km</a:t>
+            </a:r>
+            <a:endParaRPr lang="en-US" sz="3200" dirty="0"/>
+          </a:p>
+        </p:txBody>
+      </p:sp>
+      <p:sp>
+        <p:nvSpPr>
+          <p:cNvPr id="15" name="Text 13"/>
+          <p:cNvSpPr/>
+          <p:nvPr/>
+        </p:nvSpPr>
+        <p:spPr>
+          <a:xfrm>
+            <a:off x="5669280" y="4526280"/>
+            <a:ext cx="5029200" cy="274320"/>
+          </a:xfrm>
+          <a:prstGeom prst="rect">
+            <a:avLst/>
+          </a:prstGeom>
+          <a:noFill/>
+          <a:ln/>
+        </p:spPr>
+        <p:txBody>
+          <a:bodyPr wrap="square" lIns="0" tIns="0" rIns="0" bIns="0" rtlCol="0" anchor="ctr"/>
+          <a:lstStyle/>
+          <a:p>
+            <a:pPr indent="0" marL="0">
+              <a:buNone/>
+            </a:pPr>
+            <a:r>
+              <a:rPr lang="en-US" sz="1150" dirty="0">
+                <a:solidFill>
+                  <a:srgbClr val="1F2A1F"/>
+                </a:solidFill>
+                <a:latin typeface="Calibri" pitchFamily="34" charset="0"/>
+                <a:ea typeface="Calibri" pitchFamily="34" charset="-122"/>
+                <a:cs typeface="Calibri" pitchFamily="34" charset="-120"/>
+              </a:rPr>
+              <a:t>erreur du modèle, sur le jeu de test</a:t>
+            </a:r>
+            <a:endParaRPr lang="en-US" sz="1150" dirty="0"/>
+          </a:p>
+        </p:txBody>
+      </p:sp>
+      <p:sp>
+        <p:nvSpPr>
+          <p:cNvPr id="16" name="Shape 14"/>
+          <p:cNvSpPr/>
+          <p:nvPr/>
+        </p:nvSpPr>
+        <p:spPr>
+          <a:xfrm>
+            <a:off x="640080" y="5074920"/>
+            <a:ext cx="10881360" cy="777240"/>
+          </a:xfrm>
+          <a:prstGeom prst="roundRect">
+            <a:avLst>
+              <a:gd name="adj" fmla="val 9412"/>
+            </a:avLst>
+          </a:prstGeom>
+          <a:solidFill>
+            <a:srgbClr val="EDF2E6"/>
+          </a:solidFill>
+          <a:ln w="12700">
+            <a:solidFill>
+              <a:srgbClr val="EDF2E6"/>
+            </a:solidFill>
+            <a:prstDash val="solid"/>
+          </a:ln>
+        </p:spPr>
+      </p:sp>
+      <p:sp>
+        <p:nvSpPr>
+          <p:cNvPr id="17" name="Text 15"/>
+          <p:cNvSpPr/>
+          <p:nvPr/>
+        </p:nvSpPr>
+        <p:spPr>
+          <a:xfrm>
+            <a:off x="960120" y="5193792"/>
+            <a:ext cx="10241280" cy="548640"/>
+          </a:xfrm>
+          <a:prstGeom prst="rect">
+            <a:avLst/>
+          </a:prstGeom>
+          <a:noFill/>
+          <a:ln/>
+        </p:spPr>
+        <p:txBody>
+          <a:bodyPr wrap="square" lIns="0" tIns="0" rIns="0" bIns="0" rtlCol="0" anchor="ctr"/>
+          <a:lstStyle/>
+          <a:p>
+            <a:pPr indent="0" marL="0">
+              <a:buNone/>
+            </a:pPr>
+            <a:r>
+              <a:rPr lang="en-US" sz="1300" dirty="0">
+                <a:solidFill>
+                  <a:srgbClr val="1F2A1F"/>
+                </a:solidFill>
+                <a:latin typeface="Calibri" pitchFamily="34" charset="0"/>
+                <a:ea typeface="Calibri" pitchFamily="34" charset="-122"/>
+                <a:cs typeface="Calibri" pitchFamily="34" charset="-120"/>
+              </a:rPr>
+              <a:t>Même réflexe en classification : la classe majoritaire. Un modèle qui ne bat pas la référence naïve n'a rien appris.</a:t>
+            </a:r>
+            <a:endParaRPr lang="en-US" sz="1300" dirty="0"/>
+          </a:p>
+        </p:txBody>
+      </p:sp>
+    </p:spTree>
+  </p:cSld>
+  <p:clrMapOvr>
+    <a:masterClrMapping/>
+  </p:clrMapOvr>
+</p:sld>
+</file>
+
+<file path=ppt/slides/slide21.xml><?xml version="1.0" encoding="utf-8"?>
+<p:sld xmlns:a="http://schemas.openxmlformats.org/drawingml/2006/main" xmlns:r="http://schemas.openxmlformats.org/officeDocument/2006/relationships" xmlns:p="http://schemas.openxmlformats.org/presentationml/2006/main">
+  <p:cSld name="Slide 2">
+    <p:spTree>
+      <p:nvGrpSpPr>
+        <p:cNvPr id="1" name=""/>
+        <p:cNvGrpSpPr/>
+        <p:nvPr/>
+      </p:nvGrpSpPr>
+      <p:grpSpPr>
+        <a:xfrm>
+          <a:off x="0" y="0"/>
+          <a:ext cx="0" cy="0"/>
+          <a:chOff x="0" y="0"/>
+          <a:chExt cx="0" cy="0"/>
+        </a:xfrm>
+      </p:grpSpPr>
+      <p:sp>
+        <p:nvSpPr>
+          <p:cNvPr id="2" name="Text 0"/>
+          <p:cNvSpPr/>
+          <p:nvPr/>
+        </p:nvSpPr>
+        <p:spPr>
+          <a:xfrm>
+            <a:off x="640080" y="384048"/>
+            <a:ext cx="10881360" cy="685800"/>
+          </a:xfrm>
+          <a:prstGeom prst="rect">
+            <a:avLst/>
+          </a:prstGeom>
+          <a:noFill/>
+          <a:ln/>
+        </p:spPr>
+        <p:txBody>
+          <a:bodyPr wrap="square" lIns="0" tIns="0" rIns="0" bIns="0" rtlCol="0" anchor="ctr"/>
+          <a:lstStyle/>
+          <a:p>
+            <a:pPr indent="0" marL="0">
+              <a:buNone/>
+            </a:pPr>
+            <a:r>
+              <a:rPr lang="en-US" sz="3400" b="1" dirty="0">
+                <a:solidFill>
+                  <a:srgbClr val="1F2A1F"/>
+                </a:solidFill>
+                <a:latin typeface="Cambria" pitchFamily="34" charset="0"/>
+                <a:ea typeface="Cambria" pitchFamily="34" charset="-122"/>
+                <a:cs typeface="Cambria" pitchFamily="34" charset="-120"/>
+              </a:rPr>
+              <a:t>Les résidus, deuxième lecture</a:t>
+            </a:r>
+            <a:endParaRPr lang="en-US" sz="3400" dirty="0"/>
+          </a:p>
+        </p:txBody>
+      </p:sp>
+      <p:sp>
+        <p:nvSpPr>
+          <p:cNvPr id="3" name="Text 1"/>
+          <p:cNvSpPr/>
+          <p:nvPr/>
+        </p:nvSpPr>
+        <p:spPr>
+          <a:xfrm>
+            <a:off x="640080" y="1078992"/>
+            <a:ext cx="10881360" cy="384048"/>
+          </a:xfrm>
+          <a:prstGeom prst="rect">
+            <a:avLst/>
+          </a:prstGeom>
+          <a:noFill/>
+          <a:ln/>
+        </p:spPr>
+        <p:txBody>
+          <a:bodyPr wrap="square" lIns="0" tIns="0" rIns="0" bIns="0" rtlCol="0" anchor="ctr"/>
+          <a:lstStyle/>
+          <a:p>
+            <a:pPr indent="0" marL="0">
+              <a:buNone/>
+            </a:pPr>
+            <a:r>
+              <a:rPr lang="en-US" sz="1400" i="1" dirty="0">
+                <a:solidFill>
+                  <a:srgbClr val="5E6E5E"/>
+                </a:solidFill>
+                <a:latin typeface="Calibri" pitchFamily="34" charset="0"/>
+                <a:ea typeface="Calibri" pitchFamily="34" charset="-122"/>
+                <a:cs typeface="Calibri" pitchFamily="34" charset="-120"/>
+              </a:rPr>
+              <a:t>Ce que le nuage dit quand on sait quoi y chercher</a:t>
+            </a:r>
+            <a:endParaRPr lang="en-US" sz="1400" dirty="0"/>
+          </a:p>
+        </p:txBody>
+      </p:sp>
+      <p:sp>
+        <p:nvSpPr>
+          <p:cNvPr id="4" name="Shape 2"/>
+          <p:cNvSpPr/>
+          <p:nvPr/>
+        </p:nvSpPr>
+        <p:spPr>
+          <a:xfrm>
+            <a:off x="640080" y="1691640"/>
+            <a:ext cx="5166360" cy="1920240"/>
+          </a:xfrm>
+          <a:prstGeom prst="roundRect">
+            <a:avLst>
+              <a:gd name="adj" fmla="val 3810"/>
+            </a:avLst>
+          </a:prstGeom>
+          <a:solidFill>
+            <a:srgbClr val="EDF2E6"/>
+          </a:solidFill>
+          <a:ln w="12700">
+            <a:solidFill>
+              <a:srgbClr val="EDF2E6"/>
+            </a:solidFill>
+            <a:prstDash val="solid"/>
+          </a:ln>
+        </p:spPr>
+      </p:sp>
+      <p:sp>
+        <p:nvSpPr>
+          <p:cNvPr id="5" name="Shape 3"/>
+          <p:cNvSpPr/>
+          <p:nvPr/>
+        </p:nvSpPr>
+        <p:spPr>
+          <a:xfrm>
+            <a:off x="932688" y="1984248"/>
+            <a:ext cx="420624" cy="420624"/>
+          </a:xfrm>
+          <a:prstGeom prst="ellipse">
+            <a:avLst/>
+          </a:prstGeom>
+          <a:solidFill>
+            <a:srgbClr val="2C5F2D"/>
+          </a:solidFill>
+          <a:ln w="12700">
+            <a:solidFill>
+              <a:srgbClr val="2C5F2D"/>
+            </a:solidFill>
+            <a:prstDash val="solid"/>
+          </a:ln>
+        </p:spPr>
+      </p:sp>
+      <p:sp>
+        <p:nvSpPr>
+          <p:cNvPr id="6" name="Text 4"/>
+          <p:cNvSpPr/>
+          <p:nvPr/>
+        </p:nvSpPr>
+        <p:spPr>
+          <a:xfrm>
+            <a:off x="932688" y="1984248"/>
+            <a:ext cx="420624" cy="420624"/>
+          </a:xfrm>
+          <a:prstGeom prst="rect">
+            <a:avLst/>
+          </a:prstGeom>
+          <a:noFill/>
+          <a:ln/>
+        </p:spPr>
+        <p:txBody>
+          <a:bodyPr wrap="square" lIns="0" tIns="0" rIns="0" bIns="0" rtlCol="0" anchor="ctr"/>
+          <a:lstStyle/>
+          <a:p>
+            <a:pPr algn="ctr" indent="0" marL="0">
+              <a:buNone/>
+            </a:pPr>
+            <a:r>
+              <a:rPr lang="en-US" sz="1500" b="1" dirty="0">
+                <a:solidFill>
+                  <a:srgbClr val="FFFFFF"/>
+                </a:solidFill>
+                <a:latin typeface="Calibri" pitchFamily="34" charset="0"/>
+                <a:ea typeface="Calibri" pitchFamily="34" charset="-122"/>
+                <a:cs typeface="Calibri" pitchFamily="34" charset="-120"/>
+              </a:rPr>
+              <a:t>1</a:t>
+            </a:r>
+            <a:endParaRPr lang="en-US" sz="1500" dirty="0"/>
+          </a:p>
+        </p:txBody>
+      </p:sp>
+      <p:sp>
+        <p:nvSpPr>
+          <p:cNvPr id="7" name="Text 5"/>
+          <p:cNvSpPr/>
+          <p:nvPr/>
+        </p:nvSpPr>
+        <p:spPr>
+          <a:xfrm>
+            <a:off x="1508760" y="2002536"/>
+            <a:ext cx="4023360" cy="310896"/>
+          </a:xfrm>
+          <a:prstGeom prst="rect">
+            <a:avLst/>
+          </a:prstGeom>
+          <a:noFill/>
+          <a:ln/>
+        </p:spPr>
+        <p:txBody>
+          <a:bodyPr wrap="square" lIns="0" tIns="0" rIns="0" bIns="0" rtlCol="0" anchor="ctr"/>
+          <a:lstStyle/>
+          <a:p>
+            <a:pPr indent="0" marL="0">
+              <a:buNone/>
+            </a:pPr>
+            <a:r>
+              <a:rPr lang="en-US" sz="1700" b="1" dirty="0">
+                <a:solidFill>
+                  <a:srgbClr val="2C5F2D"/>
+                </a:solidFill>
+                <a:latin typeface="Cambria" pitchFamily="34" charset="0"/>
+                <a:ea typeface="Cambria" pitchFamily="34" charset="-122"/>
+                <a:cs typeface="Cambria" pitchFamily="34" charset="-120"/>
+              </a:rPr>
+              <a:t>La dispersion s'évase</a:t>
+            </a:r>
+            <a:endParaRPr lang="en-US" sz="1700" dirty="0"/>
+          </a:p>
+        </p:txBody>
+      </p:sp>
+      <p:sp>
+        <p:nvSpPr>
+          <p:cNvPr id="8" name="Text 6"/>
+          <p:cNvSpPr/>
+          <p:nvPr/>
+        </p:nvSpPr>
+        <p:spPr>
+          <a:xfrm>
+            <a:off x="932688" y="2606040"/>
+            <a:ext cx="4572000" cy="868680"/>
+          </a:xfrm>
+          <a:prstGeom prst="rect">
+            <a:avLst/>
+          </a:prstGeom>
+          <a:noFill/>
+          <a:ln/>
+        </p:spPr>
+        <p:txBody>
+          <a:bodyPr wrap="square" lIns="0" tIns="0" rIns="0" bIns="0" rtlCol="0" anchor="t"/>
+          <a:lstStyle/>
+          <a:p>
+            <a:pPr indent="0" marL="0">
+              <a:lnSpc>
+                <a:spcPct val="115000"/>
+              </a:lnSpc>
+              <a:buNone/>
+            </a:pPr>
+            <a:r>
+              <a:rPr lang="en-US" sz="1300" dirty="0">
+                <a:solidFill>
+                  <a:srgbClr val="1F2A1F"/>
+                </a:solidFill>
+                <a:latin typeface="Calibri" pitchFamily="34" charset="0"/>
+                <a:ea typeface="Calibri" pitchFamily="34" charset="-122"/>
+                <a:cs typeface="Calibri" pitchFamily="34" charset="-120"/>
+              </a:rPr>
+              <a:t>L'erreur passe de 11,7 g/km en bas de gamme à 30,0 au-dessus de 300 kW. L'incertitude dépend du véhicule — le R² ne le dit pas.</a:t>
+            </a:r>
+            <a:endParaRPr lang="en-US" sz="1300" dirty="0"/>
+          </a:p>
+        </p:txBody>
+      </p:sp>
+      <p:sp>
+        <p:nvSpPr>
+          <p:cNvPr id="9" name="Shape 7"/>
+          <p:cNvSpPr/>
+          <p:nvPr/>
+        </p:nvSpPr>
+        <p:spPr>
+          <a:xfrm>
+            <a:off x="6355080" y="1691640"/>
+            <a:ext cx="5166360" cy="1920240"/>
+          </a:xfrm>
+          <a:prstGeom prst="roundRect">
+            <a:avLst>
+              <a:gd name="adj" fmla="val 3810"/>
+            </a:avLst>
+          </a:prstGeom>
+          <a:solidFill>
+            <a:srgbClr val="EDF2E6"/>
+          </a:solidFill>
+          <a:ln w="12700">
+            <a:solidFill>
+              <a:srgbClr val="EDF2E6"/>
+            </a:solidFill>
+            <a:prstDash val="solid"/>
+          </a:ln>
+        </p:spPr>
+      </p:sp>
+      <p:sp>
+        <p:nvSpPr>
+          <p:cNvPr id="10" name="Shape 8"/>
+          <p:cNvSpPr/>
+          <p:nvPr/>
+        </p:nvSpPr>
+        <p:spPr>
+          <a:xfrm>
+            <a:off x="6647688" y="1984248"/>
+            <a:ext cx="420624" cy="420624"/>
+          </a:xfrm>
+          <a:prstGeom prst="ellipse">
+            <a:avLst/>
+          </a:prstGeom>
+          <a:solidFill>
+            <a:srgbClr val="2C5F2D"/>
+          </a:solidFill>
+          <a:ln w="12700">
+            <a:solidFill>
+              <a:srgbClr val="2C5F2D"/>
+            </a:solidFill>
+            <a:prstDash val="solid"/>
+          </a:ln>
+        </p:spPr>
+      </p:sp>
+      <p:sp>
+        <p:nvSpPr>
+          <p:cNvPr id="11" name="Text 9"/>
+          <p:cNvSpPr/>
+          <p:nvPr/>
+        </p:nvSpPr>
+        <p:spPr>
+          <a:xfrm>
+            <a:off x="6647688" y="1984248"/>
+            <a:ext cx="420624" cy="420624"/>
+          </a:xfrm>
+          <a:prstGeom prst="rect">
+            <a:avLst/>
+          </a:prstGeom>
+          <a:noFill/>
+          <a:ln/>
+        </p:spPr>
+        <p:txBody>
+          <a:bodyPr wrap="square" lIns="0" tIns="0" rIns="0" bIns="0" rtlCol="0" anchor="ctr"/>
+          <a:lstStyle/>
+          <a:p>
+            <a:pPr algn="ctr" indent="0" marL="0">
+              <a:buNone/>
+            </a:pPr>
+            <a:r>
+              <a:rPr lang="en-US" sz="1500" b="1" dirty="0">
+                <a:solidFill>
+                  <a:srgbClr val="FFFFFF"/>
+                </a:solidFill>
+                <a:latin typeface="Calibri" pitchFamily="34" charset="0"/>
+                <a:ea typeface="Calibri" pitchFamily="34" charset="-122"/>
+                <a:cs typeface="Calibri" pitchFamily="34" charset="-120"/>
+              </a:rPr>
+              <a:t>2</a:t>
+            </a:r>
+            <a:endParaRPr lang="en-US" sz="1500" dirty="0"/>
+          </a:p>
+        </p:txBody>
+      </p:sp>
+      <p:sp>
+        <p:nvSpPr>
+          <p:cNvPr id="12" name="Text 10"/>
+          <p:cNvSpPr/>
+          <p:nvPr/>
+        </p:nvSpPr>
+        <p:spPr>
+          <a:xfrm>
+            <a:off x="7223760" y="2002536"/>
+            <a:ext cx="4023360" cy="310896"/>
+          </a:xfrm>
+          <a:prstGeom prst="rect">
+            <a:avLst/>
+          </a:prstGeom>
+          <a:noFill/>
+          <a:ln/>
+        </p:spPr>
+        <p:txBody>
+          <a:bodyPr wrap="square" lIns="0" tIns="0" rIns="0" bIns="0" rtlCol="0" anchor="ctr"/>
+          <a:lstStyle/>
+          <a:p>
+            <a:pPr indent="0" marL="0">
+              <a:buNone/>
+            </a:pPr>
+            <a:r>
+              <a:rPr lang="en-US" sz="1700" b="1" dirty="0">
+                <a:solidFill>
+                  <a:srgbClr val="2C5F2D"/>
+                </a:solidFill>
+                <a:latin typeface="Cambria" pitchFamily="34" charset="0"/>
+                <a:ea typeface="Cambria" pitchFamily="34" charset="-122"/>
+                <a:cs typeface="Cambria" pitchFamily="34" charset="-120"/>
+              </a:rPr>
+              <a:t>La traînée est d'un seul côté</a:t>
+            </a:r>
+            <a:endParaRPr lang="en-US" sz="1700" dirty="0"/>
+          </a:p>
+        </p:txBody>
+      </p:sp>
+      <p:sp>
+        <p:nvSpPr>
+          <p:cNvPr id="13" name="Text 11"/>
+          <p:cNvSpPr/>
+          <p:nvPr/>
+        </p:nvSpPr>
+        <p:spPr>
+          <a:xfrm>
+            <a:off x="6647688" y="2606040"/>
+            <a:ext cx="4572000" cy="868680"/>
+          </a:xfrm>
+          <a:prstGeom prst="rect">
+            <a:avLst/>
+          </a:prstGeom>
+          <a:noFill/>
+          <a:ln/>
+        </p:spPr>
+        <p:txBody>
+          <a:bodyPr wrap="square" lIns="0" tIns="0" rIns="0" bIns="0" rtlCol="0" anchor="t"/>
+          <a:lstStyle/>
+          <a:p>
+            <a:pPr indent="0" marL="0">
+              <a:lnSpc>
+                <a:spcPct val="115000"/>
+              </a:lnSpc>
+              <a:buNone/>
+            </a:pPr>
+            <a:r>
+              <a:rPr lang="en-US" sz="1300" dirty="0">
+                <a:solidFill>
+                  <a:srgbClr val="1F2A1F"/>
+                </a:solidFill>
+                <a:latin typeface="Calibri" pitchFamily="34" charset="0"/>
+                <a:ea typeface="Calibri" pitchFamily="34" charset="-122"/>
+                <a:cs typeface="Calibri" pitchFamily="34" charset="-120"/>
+              </a:rPr>
+              <a:t>Les vingt plus gros résidus sont tous positifs. Le modèle sous-estime sans jamais surestimer autant : signature d'une variable manquante.</a:t>
+            </a:r>
+            <a:endParaRPr lang="en-US" sz="1300" dirty="0"/>
+          </a:p>
+        </p:txBody>
+      </p:sp>
+      <p:sp>
+        <p:nvSpPr>
+          <p:cNvPr id="14" name="Shape 12"/>
+          <p:cNvSpPr/>
+          <p:nvPr/>
+        </p:nvSpPr>
+        <p:spPr>
+          <a:xfrm>
+            <a:off x="640080" y="3977640"/>
+            <a:ext cx="5166360" cy="1920240"/>
+          </a:xfrm>
+          <a:prstGeom prst="roundRect">
+            <a:avLst>
+              <a:gd name="adj" fmla="val 3810"/>
+            </a:avLst>
+          </a:prstGeom>
+          <a:solidFill>
+            <a:srgbClr val="EDF2E6"/>
+          </a:solidFill>
+          <a:ln w="12700">
+            <a:solidFill>
+              <a:srgbClr val="EDF2E6"/>
+            </a:solidFill>
+            <a:prstDash val="solid"/>
+          </a:ln>
+        </p:spPr>
+      </p:sp>
+      <p:sp>
+        <p:nvSpPr>
+          <p:cNvPr id="15" name="Shape 13"/>
+          <p:cNvSpPr/>
+          <p:nvPr/>
+        </p:nvSpPr>
+        <p:spPr>
+          <a:xfrm>
+            <a:off x="932688" y="4270248"/>
+            <a:ext cx="420624" cy="420624"/>
+          </a:xfrm>
+          <a:prstGeom prst="ellipse">
+            <a:avLst/>
+          </a:prstGeom>
+          <a:solidFill>
+            <a:srgbClr val="2C5F2D"/>
+          </a:solidFill>
+          <a:ln w="12700">
+            <a:solidFill>
+              <a:srgbClr val="2C5F2D"/>
+            </a:solidFill>
+            <a:prstDash val="solid"/>
+          </a:ln>
+        </p:spPr>
+      </p:sp>
+      <p:sp>
+        <p:nvSpPr>
+          <p:cNvPr id="16" name="Text 14"/>
+          <p:cNvSpPr/>
+          <p:nvPr/>
+        </p:nvSpPr>
+        <p:spPr>
+          <a:xfrm>
+            <a:off x="932688" y="4270248"/>
+            <a:ext cx="420624" cy="420624"/>
+          </a:xfrm>
+          <a:prstGeom prst="rect">
+            <a:avLst/>
+          </a:prstGeom>
+          <a:noFill/>
+          <a:ln/>
+        </p:spPr>
+        <p:txBody>
+          <a:bodyPr wrap="square" lIns="0" tIns="0" rIns="0" bIns="0" rtlCol="0" anchor="ctr"/>
+          <a:lstStyle/>
+          <a:p>
+            <a:pPr algn="ctr" indent="0" marL="0">
+              <a:buNone/>
+            </a:pPr>
+            <a:r>
+              <a:rPr lang="en-US" sz="1500" b="1" dirty="0">
+                <a:solidFill>
+                  <a:srgbClr val="FFFFFF"/>
+                </a:solidFill>
+                <a:latin typeface="Calibri" pitchFamily="34" charset="0"/>
+                <a:ea typeface="Calibri" pitchFamily="34" charset="-122"/>
+                <a:cs typeface="Calibri" pitchFamily="34" charset="-120"/>
+              </a:rPr>
+              <a:t>3</a:t>
+            </a:r>
+            <a:endParaRPr lang="en-US" sz="1500" dirty="0"/>
+          </a:p>
+        </p:txBody>
+      </p:sp>
+      <p:sp>
+        <p:nvSpPr>
+          <p:cNvPr id="17" name="Text 15"/>
+          <p:cNvSpPr/>
+          <p:nvPr/>
+        </p:nvSpPr>
+        <p:spPr>
+          <a:xfrm>
+            <a:off x="1508760" y="4288536"/>
+            <a:ext cx="4023360" cy="310896"/>
+          </a:xfrm>
+          <a:prstGeom prst="rect">
+            <a:avLst/>
+          </a:prstGeom>
+          <a:noFill/>
+          <a:ln/>
+        </p:spPr>
+        <p:txBody>
+          <a:bodyPr wrap="square" lIns="0" tIns="0" rIns="0" bIns="0" rtlCol="0" anchor="ctr"/>
+          <a:lstStyle/>
+          <a:p>
+            <a:pPr indent="0" marL="0">
+              <a:buNone/>
+            </a:pPr>
+            <a:r>
+              <a:rPr lang="en-US" sz="1700" b="1" dirty="0">
+                <a:solidFill>
+                  <a:srgbClr val="2C5F2D"/>
+                </a:solidFill>
+                <a:latin typeface="Cambria" pitchFamily="34" charset="0"/>
+                <a:ea typeface="Cambria" pitchFamily="34" charset="-122"/>
+                <a:cs typeface="Cambria" pitchFamily="34" charset="-120"/>
+              </a:rPr>
+              <a:t>Une courbure peut rester</a:t>
+            </a:r>
+            <a:endParaRPr lang="en-US" sz="1700" dirty="0"/>
+          </a:p>
+        </p:txBody>
+      </p:sp>
+      <p:sp>
+        <p:nvSpPr>
+          <p:cNvPr id="18" name="Text 16"/>
+          <p:cNvSpPr/>
+          <p:nvPr/>
+        </p:nvSpPr>
+        <p:spPr>
+          <a:xfrm>
+            <a:off x="932688" y="4892040"/>
+            <a:ext cx="4572000" cy="868680"/>
+          </a:xfrm>
+          <a:prstGeom prst="rect">
+            <a:avLst/>
+          </a:prstGeom>
+          <a:noFill/>
+          <a:ln/>
+        </p:spPr>
+        <p:txBody>
+          <a:bodyPr wrap="square" lIns="0" tIns="0" rIns="0" bIns="0" rtlCol="0" anchor="t"/>
+          <a:lstStyle/>
+          <a:p>
+            <a:pPr indent="0" marL="0">
+              <a:lnSpc>
+                <a:spcPct val="115000"/>
+              </a:lnSpc>
+              <a:buNone/>
+            </a:pPr>
+            <a:r>
+              <a:rPr lang="en-US" sz="1300" dirty="0">
+                <a:solidFill>
+                  <a:srgbClr val="1F2A1F"/>
+                </a:solidFill>
+                <a:latin typeface="Calibri" pitchFamily="34" charset="0"/>
+                <a:ea typeface="Calibri" pitchFamily="34" charset="-122"/>
+                <a:cs typeface="Calibri" pitchFamily="34" charset="-120"/>
+              </a:rPr>
+              <a:t>Moyenne des résidus par décile de prédiction. Un motif en U = non-linéarité non captée. L'œil seul surinterprète les nuages denses.</a:t>
+            </a:r>
+            <a:endParaRPr lang="en-US" sz="1300" dirty="0"/>
+          </a:p>
+        </p:txBody>
+      </p:sp>
+      <p:sp>
+        <p:nvSpPr>
+          <p:cNvPr id="19" name="Shape 17"/>
+          <p:cNvSpPr/>
+          <p:nvPr/>
+        </p:nvSpPr>
+        <p:spPr>
+          <a:xfrm>
+            <a:off x="6355080" y="3977640"/>
+            <a:ext cx="5166360" cy="1920240"/>
+          </a:xfrm>
+          <a:prstGeom prst="roundRect">
+            <a:avLst>
+              <a:gd name="adj" fmla="val 3810"/>
+            </a:avLst>
+          </a:prstGeom>
+          <a:solidFill>
+            <a:srgbClr val="EDF2E6"/>
+          </a:solidFill>
+          <a:ln w="12700">
+            <a:solidFill>
+              <a:srgbClr val="EDF2E6"/>
+            </a:solidFill>
+            <a:prstDash val="solid"/>
+          </a:ln>
+        </p:spPr>
+      </p:sp>
+      <p:sp>
+        <p:nvSpPr>
+          <p:cNvPr id="20" name="Shape 18"/>
+          <p:cNvSpPr/>
+          <p:nvPr/>
+        </p:nvSpPr>
+        <p:spPr>
+          <a:xfrm>
+            <a:off x="6647688" y="4270248"/>
+            <a:ext cx="420624" cy="420624"/>
+          </a:xfrm>
+          <a:prstGeom prst="ellipse">
+            <a:avLst/>
+          </a:prstGeom>
+          <a:solidFill>
+            <a:srgbClr val="2C5F2D"/>
+          </a:solidFill>
+          <a:ln w="12700">
+            <a:solidFill>
+              <a:srgbClr val="2C5F2D"/>
+            </a:solidFill>
+            <a:prstDash val="solid"/>
+          </a:ln>
+        </p:spPr>
+      </p:sp>
+      <p:sp>
+        <p:nvSpPr>
+          <p:cNvPr id="21" name="Text 19"/>
+          <p:cNvSpPr/>
+          <p:nvPr/>
+        </p:nvSpPr>
+        <p:spPr>
+          <a:xfrm>
+            <a:off x="6647688" y="4270248"/>
+            <a:ext cx="420624" cy="420624"/>
+          </a:xfrm>
+          <a:prstGeom prst="rect">
+            <a:avLst/>
+          </a:prstGeom>
+          <a:noFill/>
+          <a:ln/>
+        </p:spPr>
+        <p:txBody>
+          <a:bodyPr wrap="square" lIns="0" tIns="0" rIns="0" bIns="0" rtlCol="0" anchor="ctr"/>
+          <a:lstStyle/>
+          <a:p>
+            <a:pPr algn="ctr" indent="0" marL="0">
+              <a:buNone/>
+            </a:pPr>
+            <a:r>
+              <a:rPr lang="en-US" sz="1500" b="1" dirty="0">
+                <a:solidFill>
+                  <a:srgbClr val="FFFFFF"/>
+                </a:solidFill>
+                <a:latin typeface="Calibri" pitchFamily="34" charset="0"/>
+                <a:ea typeface="Calibri" pitchFamily="34" charset="-122"/>
+                <a:cs typeface="Calibri" pitchFamily="34" charset="-120"/>
+              </a:rPr>
+              <a:t>4</a:t>
+            </a:r>
+            <a:endParaRPr lang="en-US" sz="1500" dirty="0"/>
+          </a:p>
+        </p:txBody>
+      </p:sp>
+      <p:sp>
+        <p:nvSpPr>
+          <p:cNvPr id="22" name="Text 20"/>
+          <p:cNvSpPr/>
+          <p:nvPr/>
+        </p:nvSpPr>
+        <p:spPr>
+          <a:xfrm>
+            <a:off x="7223760" y="4288536"/>
+            <a:ext cx="4023360" cy="310896"/>
+          </a:xfrm>
+          <a:prstGeom prst="rect">
+            <a:avLst/>
+          </a:prstGeom>
+          <a:noFill/>
+          <a:ln/>
+        </p:spPr>
+        <p:txBody>
+          <a:bodyPr wrap="square" lIns="0" tIns="0" rIns="0" bIns="0" rtlCol="0" anchor="ctr"/>
+          <a:lstStyle/>
+          <a:p>
+            <a:pPr indent="0" marL="0">
+              <a:buNone/>
+            </a:pPr>
+            <a:r>
+              <a:rPr lang="en-US" sz="1700" b="1" dirty="0">
+                <a:solidFill>
+                  <a:srgbClr val="2C5F2D"/>
+                </a:solidFill>
+                <a:latin typeface="Cambria" pitchFamily="34" charset="0"/>
+                <a:ea typeface="Cambria" pitchFamily="34" charset="-122"/>
+                <a:cs typeface="Cambria" pitchFamily="34" charset="-120"/>
+              </a:rPr>
+              <a:t>Attention aux zéros mécaniques</a:t>
+            </a:r>
+            <a:endParaRPr lang="en-US" sz="1700" dirty="0"/>
+          </a:p>
+        </p:txBody>
+      </p:sp>
+      <p:sp>
+        <p:nvSpPr>
+          <p:cNvPr id="23" name="Text 21"/>
+          <p:cNvSpPr/>
+          <p:nvPr/>
+        </p:nvSpPr>
+        <p:spPr>
+          <a:xfrm>
+            <a:off x="6647688" y="4892040"/>
+            <a:ext cx="4572000" cy="868680"/>
+          </a:xfrm>
+          <a:prstGeom prst="rect">
+            <a:avLst/>
+          </a:prstGeom>
+          <a:noFill/>
+          <a:ln/>
+        </p:spPr>
+        <p:txBody>
+          <a:bodyPr wrap="square" lIns="0" tIns="0" rIns="0" bIns="0" rtlCol="0" anchor="t"/>
+          <a:lstStyle/>
+          <a:p>
+            <a:pPr indent="0" marL="0">
+              <a:lnSpc>
+                <a:spcPct val="115000"/>
+              </a:lnSpc>
+              <a:buNone/>
+            </a:pPr>
+            <a:r>
+              <a:rPr lang="en-US" sz="1300" dirty="0">
+                <a:solidFill>
+                  <a:srgbClr val="1F2A1F"/>
+                </a:solidFill>
+                <a:latin typeface="Calibri" pitchFamily="34" charset="0"/>
+                <a:ea typeface="Calibri" pitchFamily="34" charset="-122"/>
+                <a:cs typeface="Calibri" pitchFamily="34" charset="-120"/>
+              </a:rPr>
+              <a:t>Le résidu moyen par modalité d'une variable présente dans le modèle est nul par construction. Ça ne démontre rien.</a:t>
             </a:r>
             <a:endParaRPr lang="en-US" sz="1300" dirty="0"/>
           </a:p>

--- a/memo-machine-learning.pptx
+++ b/memo-machine-learning.pptx
@@ -4,6 +4,9 @@
   <p:sldMasterIdLst>
     <p:sldMasterId id="2147483648" r:id="rId1"/>
   </p:sldMasterIdLst>
+  <p:notesMasterIdLst>
+    <p:notesMasterId r:id="rId23"/>
+  </p:notesMasterIdLst>
   <p:sldIdLst>
     <p:sldId id="256" r:id="rId2"/>
     <p:sldId id="257" r:id="rId3"/>
@@ -18,18 +21,15 @@
     <p:sldId id="266" r:id="rId12"/>
     <p:sldId id="267" r:id="rId13"/>
     <p:sldId id="268" r:id="rId14"/>
-    <p:sldId id="271" r:id="rId22"/>
-    <p:sldId id="272" r:id="rId23"/>
-    <p:sldId id="273" r:id="rId24"/>
-    <p:sldId id="274" r:id="rId25"/>
-    <p:sldId id="275" r:id="rId26"/>
-    <p:sldId id="276" r:id="rId27"/>
-    <p:sldId id="269" r:id="rId15"/>
-    <p:sldId id="270" r:id="rId16"/>
+    <p:sldId id="271" r:id="rId15"/>
+    <p:sldId id="272" r:id="rId16"/>
+    <p:sldId id="273" r:id="rId17"/>
+    <p:sldId id="274" r:id="rId18"/>
+    <p:sldId id="275" r:id="rId19"/>
+    <p:sldId id="276" r:id="rId20"/>
+    <p:sldId id="269" r:id="rId21"/>
+    <p:sldId id="270" r:id="rId22"/>
   </p:sldIdLst>
-  <p:notesMasterIdLst>
-    <p:notesMasterId r:id="rId17"/>
-  </p:notesMasterIdLst>
   <p:sldSz cx="12192000" cy="6858000"/>
   <p:notesSz cx="6858000" cy="12192000"/>
   <p:defaultTextStyle>
@@ -124,13 +124,20 @@
       </a:defRPr>
     </a:lvl9pPr>
   </p:defaultTextStyle>
+  <p:extLst>
+    <p:ext uri="{EFAFB233-063F-42B5-8137-9DF3F51BA10A}">
+      <p15:sldGuideLst xmlns:p15="http://schemas.microsoft.com/office/powerpoint/2012/main"/>
+    </p:ext>
+  </p:extLst>
 </p:presentation>
 </file>
 
 <file path=ppt/charts/chart1.xml><?xml version="1.0" encoding="utf-8"?>
-<c:chartSpace xmlns:c="http://schemas.openxmlformats.org/drawingml/2006/chart" xmlns:a="http://schemas.openxmlformats.org/drawingml/2006/main" xmlns:r="http://schemas.openxmlformats.org/officeDocument/2006/relationships">
+<c:chartSpace xmlns:c="http://schemas.openxmlformats.org/drawingml/2006/chart" xmlns:a="http://schemas.openxmlformats.org/drawingml/2006/main" xmlns:r="http://schemas.openxmlformats.org/officeDocument/2006/relationships" xmlns:c16r2="http://schemas.microsoft.com/office/drawing/2015/06/chart">
   <c:date1904 val="0"/>
+  <c:lang val="en-US"/>
   <c:roundedCorners val="1"/>
+  <c:style val="2"/>
   <c:chart>
     <c:title>
       <c:tx>
@@ -158,7 +165,6 @@
           </a:p>
         </c:rich>
       </c:tx>
-      <c:layout/>
       <c:overlay val="0"/>
     </c:title>
     <c:autoTitleDeleted val="0"/>
@@ -191,18 +197,26 @@
           <c:invertIfNegative val="0"/>
           <c:dLbls>
             <c:numFmt formatCode="#,##0" sourceLinked="0"/>
+            <c:spPr>
+              <a:noFill/>
+              <a:ln>
+                <a:noFill/>
+              </a:ln>
+              <a:effectLst/>
+            </c:spPr>
             <c:txPr>
               <a:bodyPr/>
               <a:lstStyle/>
               <a:p>
                 <a:pPr>
-                  <a:defRPr b="0" i="0" strike="noStrike" sz="1100" u="none">
+                  <a:defRPr sz="1100" b="0" i="0" u="none" strike="noStrike">
                     <a:solidFill>
                       <a:srgbClr val="1F2A1F"/>
                     </a:solidFill>
                     <a:latin typeface="Calibri"/>
                   </a:defRPr>
                 </a:pPr>
+                <a:endParaRPr lang="en-US"/>
               </a:p>
             </c:txPr>
             <c:showLegendKey val="0"/>
@@ -212,25 +226,28 @@
             <c:showPercent val="0"/>
             <c:showBubbleSize val="0"/>
             <c:showLeaderLines val="0"/>
+            <c:extLst>
+              <c:ext xmlns:c15="http://schemas.microsoft.com/office/drawing/2012/chart" uri="{CE6537A1-D6FC-4f65-9D91-7224C49458BB}">
+                <c15:showLeaderLines val="0"/>
+              </c:ext>
+            </c:extLst>
           </c:dLbls>
           <c:cat>
-            <c:multiLvlStrRef>
+            <c:strRef>
               <c:f>Sheet1!$A$2:$A$4</c:f>
-              <c:multiLvlStrCache>
+              <c:strCache>
                 <c:ptCount val="3"/>
-                <c:lvl>
-                  <c:pt idx="0">
-                    <c:v>α = 0,01</c:v>
-                  </c:pt>
-                  <c:pt idx="1">
-                    <c:v>α = 0,1</c:v>
-                  </c:pt>
-                  <c:pt idx="2">
-                    <c:v>α = 0,4</c:v>
-                  </c:pt>
-                </c:lvl>
-              </c:multiLvlStrCache>
-            </c:multiLvlStrRef>
+                <c:pt idx="0">
+                  <c:v>α = 0,01</c:v>
+                </c:pt>
+                <c:pt idx="1">
+                  <c:v>α = 0,1</c:v>
+                </c:pt>
+                <c:pt idx="2">
+                  <c:v>α = 0,4</c:v>
+                </c:pt>
+              </c:strCache>
+            </c:strRef>
           </c:cat>
           <c:val>
             <c:numRef>
@@ -250,36 +267,23 @@
               </c:numCache>
             </c:numRef>
           </c:val>
+          <c:extLst>
+            <c:ext xmlns:c16="http://schemas.microsoft.com/office/drawing/2014/chart" uri="{C3380CC4-5D6E-409C-BE32-E72D297353CC}">
+              <c16:uniqueId val="{00000000-F85D-024E-9746-57559D68699D}"/>
+            </c:ext>
+          </c:extLst>
         </c:ser>
         <c:dLbls>
-          <c:numFmt formatCode="#,##0" sourceLinked="0"/>
-          <c:txPr>
-            <a:bodyPr/>
-            <a:lstStyle/>
-            <a:p>
-              <a:pPr>
-                <a:defRPr b="0" i="0" strike="noStrike" sz="1100" u="none">
-                  <a:solidFill>
-                    <a:srgbClr val="1F2A1F"/>
-                  </a:solidFill>
-                  <a:latin typeface="Calibri"/>
-                </a:defRPr>
-              </a:pPr>
-            </a:p>
-          </c:txPr>
           <c:showLegendKey val="0"/>
           <c:showVal val="1"/>
           <c:showCatName val="0"/>
           <c:showSerName val="0"/>
           <c:showPercent val="0"/>
           <c:showBubbleSize val="0"/>
-          <c:showLeaderLines val="0"/>
         </c:dLbls>
         <c:gapWidth val="150"/>
-        <c:overlap val="0"/>
         <c:axId val="2094734554"/>
         <c:axId val="2094734552"/>
-        <c:axId val="2094734556"/>
       </c:barChart>
       <c:catAx>
         <c:axId val="2094734554"/>
@@ -320,6 +324,7 @@
         <c:crosses val="autoZero"/>
         <c:auto val="1"/>
         <c:lblAlgn val="ctr"/>
+        <c:lblOffset val="100"/>
         <c:noMultiLvlLbl val="1"/>
       </c:catAx>
       <c:valAx>
@@ -382,6 +387,7 @@
     </c:plotArea>
     <c:plotVisOnly val="1"/>
     <c:dispBlanksAs val="span"/>
+    <c:showDLblsOverMax val="1"/>
   </c:chart>
   <c:spPr>
     <a:noFill/>
@@ -418,234 +424,10 @@
           <a:chExt cx="0" cy="0"/>
         </a:xfrm>
       </p:grpSpPr>
-      <p:sp>
-        <p:nvSpPr>
-          <p:cNvPr id="2" name="Header Placeholder 1"/>
-          <p:cNvSpPr>
-            <a:spLocks noGrp="1"/>
-          </p:cNvSpPr>
-          <p:nvPr>
-            <p:ph type="hdr" sz="quarter"/>
-          </p:nvPr>
-        </p:nvSpPr>
-        <p:spPr>
-          <a:xfrm>
-            <a:off x="0" y="0"/>
-            <a:ext cx="2971800" cy="458788"/>
-          </a:xfrm>
-          <a:prstGeom prst="rect">
-            <a:avLst/>
-          </a:prstGeom>
-        </p:spPr>
-        <p:txBody>
-          <a:bodyPr vert="horz" lIns="91440" tIns="45720" rIns="91440" bIns="45720" rtlCol="0"/>
-          <a:lstStyle>
-            <a:lvl1pPr algn="l">
-              <a:defRPr sz="1200"/>
-            </a:lvl1pPr>
-          </a:lstStyle>
-          <a:p>
-            <a:endParaRPr lang="en-US"/>
-          </a:p>
-        </p:txBody>
-      </p:sp>
-      <p:sp>
-        <p:nvSpPr>
-          <p:cNvPr id="3" name="Date Placeholder 2"/>
-          <p:cNvSpPr>
-            <a:spLocks noGrp="1"/>
-          </p:cNvSpPr>
-          <p:nvPr>
-            <p:ph type="dt" idx="1"/>
-          </p:nvPr>
-        </p:nvSpPr>
-        <p:spPr>
-          <a:xfrm>
-            <a:off x="3884613" y="0"/>
-            <a:ext cx="2971800" cy="458788"/>
-          </a:xfrm>
-          <a:prstGeom prst="rect">
-            <a:avLst/>
-          </a:prstGeom>
-        </p:spPr>
-        <p:txBody>
-          <a:bodyPr vert="horz" lIns="91440" tIns="45720" rIns="91440" bIns="45720" rtlCol="0"/>
-          <a:lstStyle>
-            <a:lvl1pPr algn="r">
-              <a:defRPr sz="1200"/>
-            </a:lvl1pPr>
-          </a:lstStyle>
-          <a:p>
-            <a:fld id="{5282F153-3F37-0F45-9E97-73ACFA13230C}" type="datetimeFigureOut">
-              <a:rPr lang="en-US"/>
-              <a:t>7/23/19</a:t>
-            </a:fld>
-            <a:endParaRPr lang="en-US"/>
-          </a:p>
-        </p:txBody>
-      </p:sp>
-      <p:sp>
-        <p:nvSpPr>
-          <p:cNvPr id="4" name="Slide Image Placeholder 3"/>
-          <p:cNvSpPr>
-            <a:spLocks noGrp="1" noRot="1" noChangeAspect="1"/>
-          </p:cNvSpPr>
-          <p:nvPr>
-            <p:ph type="sldImg" idx="2"/>
-          </p:nvPr>
-        </p:nvSpPr>
-        <p:spPr>
-          <a:xfrm>
-            <a:off x="685800" y="1143000"/>
-            <a:ext cx="5486400" cy="3086100"/>
-          </a:xfrm>
-          <a:prstGeom prst="rect">
-            <a:avLst/>
-          </a:prstGeom>
-          <a:noFill/>
-          <a:ln w="12700">
-            <a:solidFill>
-              <a:prstClr val="black"/>
-            </a:solidFill>
-          </a:ln>
-        </p:spPr>
-        <p:txBody>
-          <a:bodyPr vert="horz" lIns="91440" tIns="45720" rIns="91440" bIns="45720" rtlCol="0" anchor="ctr"/>
-          <a:lstStyle/>
-          <a:p>
-            <a:endParaRPr lang="en-US"/>
-          </a:p>
-        </p:txBody>
-      </p:sp>
-      <p:sp>
-        <p:nvSpPr>
-          <p:cNvPr id="5" name="Notes Placeholder 4"/>
-          <p:cNvSpPr>
-            <a:spLocks noGrp="1"/>
-          </p:cNvSpPr>
-          <p:nvPr>
-            <p:ph type="body" sz="quarter" idx="3"/>
-          </p:nvPr>
-        </p:nvSpPr>
-        <p:spPr>
-          <a:xfrm>
-            <a:off x="685800" y="4400550"/>
-            <a:ext cx="5486400" cy="3600450"/>
-          </a:xfrm>
-          <a:prstGeom prst="rect">
-            <a:avLst/>
-          </a:prstGeom>
-        </p:spPr>
-        <p:txBody>
-          <a:bodyPr vert="horz" lIns="91440" tIns="45720" rIns="91440" bIns="45720" rtlCol="0"/>
-          <a:lstStyle/>
-          <a:p>
-            <a:pPr lvl="0"/>
-            <a:r>
-              <a:rPr lang="en-US"/>
-              <a:t>Click to edit Master text styles</a:t>
-            </a:r>
-          </a:p>
-          <a:p>
-            <a:pPr lvl="1"/>
-            <a:r>
-              <a:rPr lang="en-US"/>
-              <a:t>Second level</a:t>
-            </a:r>
-          </a:p>
-          <a:p>
-            <a:pPr lvl="2"/>
-            <a:r>
-              <a:rPr lang="en-US"/>
-              <a:t>Third level</a:t>
-            </a:r>
-          </a:p>
-          <a:p>
-            <a:pPr lvl="3"/>
-            <a:r>
-              <a:rPr lang="en-US"/>
-              <a:t>Fourth level</a:t>
-            </a:r>
-          </a:p>
-          <a:p>
-            <a:pPr lvl="4"/>
-            <a:r>
-              <a:rPr lang="en-US"/>
-              <a:t>Fifth level</a:t>
-            </a:r>
-          </a:p>
-        </p:txBody>
-      </p:sp>
-      <p:sp>
-        <p:nvSpPr>
-          <p:cNvPr id="6" name="Footer Placeholder 5"/>
-          <p:cNvSpPr>
-            <a:spLocks noGrp="1"/>
-          </p:cNvSpPr>
-          <p:nvPr>
-            <p:ph type="ftr" sz="quarter" idx="4"/>
-          </p:nvPr>
-        </p:nvSpPr>
-        <p:spPr>
-          <a:xfrm>
-            <a:off x="0" y="8685213"/>
-            <a:ext cx="2971800" cy="458787"/>
-          </a:xfrm>
-          <a:prstGeom prst="rect">
-            <a:avLst/>
-          </a:prstGeom>
-        </p:spPr>
-        <p:txBody>
-          <a:bodyPr vert="horz" lIns="91440" tIns="45720" rIns="91440" bIns="45720" rtlCol="0" anchor="b"/>
-          <a:lstStyle>
-            <a:lvl1pPr algn="l">
-              <a:defRPr sz="1200"/>
-            </a:lvl1pPr>
-          </a:lstStyle>
-          <a:p>
-            <a:endParaRPr lang="en-US"/>
-          </a:p>
-        </p:txBody>
-      </p:sp>
-      <p:sp>
-        <p:nvSpPr>
-          <p:cNvPr id="7" name="Slide Number Placeholder 6"/>
-          <p:cNvSpPr>
-            <a:spLocks noGrp="1"/>
-          </p:cNvSpPr>
-          <p:nvPr>
-            <p:ph type="sldNum" sz="quarter" idx="5"/>
-          </p:nvPr>
-        </p:nvSpPr>
-        <p:spPr>
-          <a:xfrm>
-            <a:off x="3884613" y="8685213"/>
-            <a:ext cx="2971800" cy="458787"/>
-          </a:xfrm>
-          <a:prstGeom prst="rect">
-            <a:avLst/>
-          </a:prstGeom>
-        </p:spPr>
-        <p:txBody>
-          <a:bodyPr vert="horz" lIns="91440" tIns="45720" rIns="91440" bIns="45720" rtlCol="0" anchor="b"/>
-          <a:lstStyle>
-            <a:lvl1pPr algn="r">
-              <a:defRPr sz="1200"/>
-            </a:lvl1pPr>
-          </a:lstStyle>
-          <a:p>
-            <a:fld id="{CE5E9CC1-C706-0F49-92D6-E571CC5EEA8F}" type="slidenum">
-              <a:rPr lang="en-US"/>
-              <a:t>‹#›</a:t>
-            </a:fld>
-            <a:endParaRPr lang="en-US"/>
-          </a:p>
-        </p:txBody>
-      </p:sp>
     </p:spTree>
     <p:extLst>
       <p:ext uri="{BB962C8B-B14F-4D97-AF65-F5344CB8AC3E}">
-        <p14:creationId xmlns:p14="http://schemas.microsoft.com/office/powerpoint/2010/main" val="1024086991"/>
+        <p14:creationId xmlns:p14="http://schemas.microsoft.com/office/powerpoint/2010/main" val="2411826788"/>
       </p:ext>
     </p:extLst>
   </p:cSld>
@@ -793,7 +575,6 @@
               <a:rPr lang="en-US" dirty="0"/>
               <a:t>Mémo personnel. Une idée par slide, à relire avant chaque nouvelle semaine du cours.</a:t>
             </a:r>
-            <a:endParaRPr lang="en-US" dirty="0"/>
           </a:p>
         </p:txBody>
       </p:sp>
@@ -877,10 +658,6 @@
           <a:bodyPr/>
           <a:lstStyle/>
           <a:p>
-            <a:r>
-              <a:rPr lang="en-US" dirty="0"/>
-              <a:t/>
-            </a:r>
             <a:endParaRPr lang="en-US" dirty="0"/>
           </a:p>
         </p:txBody>
@@ -965,10 +742,6 @@
           <a:bodyPr/>
           <a:lstStyle/>
           <a:p>
-            <a:r>
-              <a:rPr lang="en-US" dirty="0"/>
-              <a:t/>
-            </a:r>
             <a:endParaRPr lang="en-US" dirty="0"/>
           </a:p>
         </p:txBody>
@@ -1053,10 +826,6 @@
           <a:bodyPr/>
           <a:lstStyle/>
           <a:p>
-            <a:r>
-              <a:rPr lang="en-US" dirty="0"/>
-              <a:t/>
-            </a:r>
             <a:endParaRPr lang="en-US" dirty="0"/>
           </a:p>
         </p:txBody>
@@ -1141,10 +910,6 @@
           <a:bodyPr/>
           <a:lstStyle/>
           <a:p>
-            <a:r>
-              <a:rPr lang="en-US" dirty="0"/>
-              <a:t/>
-            </a:r>
             <a:endParaRPr lang="en-US" dirty="0"/>
           </a:p>
         </p:txBody>
@@ -1229,10 +994,6 @@
           <a:bodyPr/>
           <a:lstStyle/>
           <a:p>
-            <a:r>
-              <a:rPr lang="en-US" dirty="0"/>
-              <a:t/>
-            </a:r>
             <a:endParaRPr lang="en-US" dirty="0"/>
           </a:p>
         </p:txBody>
@@ -1254,7 +1015,7 @@
           <a:p>
             <a:fld id="{F7021451-1387-4CA6-816F-3879F97B5CBC}" type="slidenum">
               <a:rPr lang="en-US"/>
-              <a:t>14</a:t>
+              <a:t>20</a:t>
             </a:fld>
             <a:endParaRPr lang="en-US"/>
           </a:p>
@@ -1317,10 +1078,6 @@
           <a:bodyPr/>
           <a:lstStyle/>
           <a:p>
-            <a:r>
-              <a:rPr lang="en-US" dirty="0"/>
-              <a:t/>
-            </a:r>
             <a:endParaRPr lang="en-US" dirty="0"/>
           </a:p>
         </p:txBody>
@@ -1342,7 +1099,7 @@
           <a:p>
             <a:fld id="{F7021451-1387-4CA6-816F-3879F97B5CBC}" type="slidenum">
               <a:rPr lang="en-US"/>
-              <a:t>15</a:t>
+              <a:t>21</a:t>
             </a:fld>
             <a:endParaRPr lang="en-US"/>
           </a:p>
@@ -1405,10 +1162,6 @@
           <a:bodyPr/>
           <a:lstStyle/>
           <a:p>
-            <a:r>
-              <a:rPr lang="en-US" dirty="0"/>
-              <a:t/>
-            </a:r>
             <a:endParaRPr lang="en-US" dirty="0"/>
           </a:p>
         </p:txBody>
@@ -1493,10 +1246,6 @@
           <a:bodyPr/>
           <a:lstStyle/>
           <a:p>
-            <a:r>
-              <a:rPr lang="en-US" dirty="0"/>
-              <a:t/>
-            </a:r>
             <a:endParaRPr lang="en-US" dirty="0"/>
           </a:p>
         </p:txBody>
@@ -1581,10 +1330,6 @@
           <a:bodyPr/>
           <a:lstStyle/>
           <a:p>
-            <a:r>
-              <a:rPr lang="en-US" dirty="0"/>
-              <a:t/>
-            </a:r>
             <a:endParaRPr lang="en-US" dirty="0"/>
           </a:p>
         </p:txBody>
@@ -1669,10 +1414,6 @@
           <a:bodyPr/>
           <a:lstStyle/>
           <a:p>
-            <a:r>
-              <a:rPr lang="en-US" dirty="0"/>
-              <a:t/>
-            </a:r>
             <a:endParaRPr lang="en-US" dirty="0"/>
           </a:p>
         </p:txBody>
@@ -1757,10 +1498,6 @@
           <a:bodyPr/>
           <a:lstStyle/>
           <a:p>
-            <a:r>
-              <a:rPr lang="en-US" dirty="0"/>
-              <a:t/>
-            </a:r>
             <a:endParaRPr lang="en-US" dirty="0"/>
           </a:p>
         </p:txBody>
@@ -1845,10 +1582,6 @@
           <a:bodyPr/>
           <a:lstStyle/>
           <a:p>
-            <a:r>
-              <a:rPr lang="en-US" dirty="0"/>
-              <a:t/>
-            </a:r>
             <a:endParaRPr lang="en-US" dirty="0"/>
           </a:p>
         </p:txBody>
@@ -1933,10 +1666,6 @@
           <a:bodyPr/>
           <a:lstStyle/>
           <a:p>
-            <a:r>
-              <a:rPr lang="en-US" dirty="0"/>
-              <a:t/>
-            </a:r>
             <a:endParaRPr lang="en-US" dirty="0"/>
           </a:p>
         </p:txBody>
@@ -2021,10 +1750,6 @@
           <a:bodyPr/>
           <a:lstStyle/>
           <a:p>
-            <a:r>
-              <a:rPr lang="en-US" dirty="0"/>
-              <a:t/>
-            </a:r>
             <a:endParaRPr lang="en-US" dirty="0"/>
           </a:p>
         </p:txBody>
@@ -2098,6 +1823,11 @@
 <file path=ppt/slideMasters/slideMaster1.xml><?xml version="1.0" encoding="utf-8"?>
 <p:sldMaster xmlns:a="http://schemas.openxmlformats.org/drawingml/2006/main" xmlns:r="http://schemas.openxmlformats.org/officeDocument/2006/relationships" xmlns:p="http://schemas.openxmlformats.org/presentationml/2006/main">
   <p:cSld>
+    <p:bg>
+      <p:bgRef idx="1001">
+        <a:schemeClr val="bg1"/>
+      </p:bgRef>
+    </p:bg>
     <p:spTree>
       <p:nvGrpSpPr>
         <p:cNvPr id="1" name=""/>
@@ -2380,6 +2110,7 @@
         <a:solidFill>
           <a:srgbClr val="1A3A1C"/>
         </a:solidFill>
+        <a:effectLst/>
       </p:bgPr>
     </p:bg>
     <p:spTree>
@@ -2420,6 +2151,13 @@
             <a:prstDash val="solid"/>
           </a:ln>
         </p:spPr>
+        <p:txBody>
+          <a:bodyPr/>
+          <a:lstStyle/>
+          <a:p>
+            <a:endParaRPr lang="en-US"/>
+          </a:p>
+        </p:txBody>
       </p:sp>
       <p:sp>
         <p:nvSpPr>
@@ -2445,6 +2183,13 @@
             <a:prstDash val="solid"/>
           </a:ln>
         </p:spPr>
+        <p:txBody>
+          <a:bodyPr/>
+          <a:lstStyle/>
+          <a:p>
+            <a:endParaRPr lang="en-US"/>
+          </a:p>
+        </p:txBody>
       </p:sp>
       <p:sp>
         <p:nvSpPr>
@@ -2467,11 +2212,11 @@
           <a:bodyPr wrap="square" lIns="0" tIns="0" rIns="0" bIns="0" rtlCol="0" anchor="ctr"/>
           <a:lstStyle/>
           <a:p>
-            <a:pPr indent="0" marL="0">
-              <a:buNone/>
-            </a:pPr>
-            <a:r>
-              <a:rPr lang="en-US" sz="1400" b="1" spc="400" kern="0" dirty="0">
+            <a:pPr marL="0" indent="0">
+              <a:buNone/>
+            </a:pPr>
+            <a:r>
+              <a:rPr lang="en-US" sz="1400" b="1" kern="0" spc="400" dirty="0">
                 <a:solidFill>
                   <a:srgbClr val="97BC62"/>
                 </a:solidFill>
@@ -2506,7 +2251,7 @@
           <a:bodyPr wrap="square" lIns="0" tIns="0" rIns="0" bIns="0" rtlCol="0" anchor="ctr"/>
           <a:lstStyle/>
           <a:p>
-            <a:pPr indent="0" marL="0">
+            <a:pPr marL="0" indent="0">
               <a:buNone/>
             </a:pPr>
             <a:r>
@@ -2545,7 +2290,7 @@
           <a:bodyPr wrap="square" lIns="0" tIns="0" rIns="0" bIns="0" rtlCol="0" anchor="ctr"/>
           <a:lstStyle/>
           <a:p>
-            <a:pPr indent="0" marL="0">
+            <a:pPr marL="0" indent="0">
               <a:buNone/>
             </a:pPr>
             <a:r>
@@ -2584,7 +2329,7 @@
           <a:bodyPr wrap="square" lIns="0" tIns="0" rIns="0" bIns="0" rtlCol="0" anchor="ctr"/>
           <a:lstStyle/>
           <a:p>
-            <a:pPr indent="0" marL="0">
+            <a:pPr marL="0" indent="0">
               <a:buNone/>
             </a:pPr>
             <a:r>
@@ -2648,7 +2393,7 @@
           <a:bodyPr wrap="square" lIns="0" tIns="0" rIns="0" bIns="0" rtlCol="0" anchor="ctr"/>
           <a:lstStyle/>
           <a:p>
-            <a:pPr indent="0" marL="0">
+            <a:pPr marL="0" indent="0">
               <a:buNone/>
             </a:pPr>
             <a:r>
@@ -2687,7 +2432,7 @@
           <a:bodyPr wrap="square" lIns="0" tIns="0" rIns="0" bIns="0" rtlCol="0" anchor="ctr"/>
           <a:lstStyle/>
           <a:p>
-            <a:pPr indent="0" marL="0">
+            <a:pPr marL="0" indent="0">
               <a:buNone/>
             </a:pPr>
             <a:r>
@@ -2707,7 +2452,7 @@
       </p:sp>
       <p:graphicFrame>
         <p:nvGraphicFramePr>
-          <p:cNvPr id="4" name="Chart 0" descr=""/>
+          <p:cNvPr id="4" name="Chart 0"/>
           <p:cNvGraphicFramePr/>
           <p:nvPr/>
         </p:nvGraphicFramePr>
@@ -2715,9 +2460,9 @@
           <a:off x="640080" y="1737360"/>
           <a:ext cx="6675120" cy="3200400"/>
         </p:xfrm>
-        <a:graphic xmlns:a="http://schemas.openxmlformats.org/drawingml/2006/main">
+        <a:graphic>
           <a:graphicData uri="http://schemas.openxmlformats.org/drawingml/2006/chart">
-            <c:chart xmlns:c="http://schemas.openxmlformats.org/drawingml/2006/chart" r:id="rId1"/>
+            <c:chart xmlns:c="http://schemas.openxmlformats.org/drawingml/2006/chart" xmlns:r="http://schemas.openxmlformats.org/officeDocument/2006/relationships" r:id="rId3"/>
           </a:graphicData>
         </a:graphic>
       </p:graphicFrame>
@@ -2747,6 +2492,13 @@
             <a:prstDash val="solid"/>
           </a:ln>
         </p:spPr>
+        <p:txBody>
+          <a:bodyPr/>
+          <a:lstStyle/>
+          <a:p>
+            <a:endParaRPr lang="en-US"/>
+          </a:p>
+        </p:txBody>
       </p:sp>
       <p:sp>
         <p:nvSpPr>
@@ -2769,7 +2521,7 @@
           <a:bodyPr wrap="square" lIns="0" tIns="0" rIns="0" bIns="0" rtlCol="0" anchor="ctr"/>
           <a:lstStyle/>
           <a:p>
-            <a:pPr indent="0" marL="0">
+            <a:pPr marL="0" indent="0">
               <a:buNone/>
             </a:pPr>
             <a:r>
@@ -2808,7 +2560,7 @@
           <a:bodyPr wrap="square" lIns="0" tIns="0" rIns="0" bIns="0" rtlCol="0" anchor="t"/>
           <a:lstStyle/>
           <a:p>
-            <a:pPr indent="0" marL="0">
+            <a:pPr marL="0" indent="0">
               <a:lnSpc>
                 <a:spcPct val="115000"/>
               </a:lnSpc>
@@ -2855,6 +2607,13 @@
             <a:prstDash val="solid"/>
           </a:ln>
         </p:spPr>
+        <p:txBody>
+          <a:bodyPr/>
+          <a:lstStyle/>
+          <a:p>
+            <a:endParaRPr lang="en-US"/>
+          </a:p>
+        </p:txBody>
       </p:sp>
       <p:sp>
         <p:nvSpPr>
@@ -2877,7 +2636,7 @@
           <a:bodyPr wrap="square" lIns="0" tIns="0" rIns="0" bIns="0" rtlCol="0" anchor="ctr"/>
           <a:lstStyle/>
           <a:p>
-            <a:pPr indent="0" marL="0">
+            <a:pPr marL="0" indent="0">
               <a:buNone/>
             </a:pPr>
             <a:r>
@@ -2916,7 +2675,7 @@
           <a:bodyPr wrap="square" lIns="0" tIns="0" rIns="0" bIns="0" rtlCol="0" anchor="ctr"/>
           <a:lstStyle/>
           <a:p>
-            <a:pPr indent="0" marL="0">
+            <a:pPr marL="0" indent="0">
               <a:lnSpc>
                 <a:spcPct val="115000"/>
               </a:lnSpc>
@@ -2963,6 +2722,13 @@
             <a:prstDash val="solid"/>
           </a:ln>
         </p:spPr>
+        <p:txBody>
+          <a:bodyPr/>
+          <a:lstStyle/>
+          <a:p>
+            <a:endParaRPr lang="en-US"/>
+          </a:p>
+        </p:txBody>
       </p:sp>
       <p:sp>
         <p:nvSpPr>
@@ -2985,7 +2751,7 @@
           <a:bodyPr wrap="square" lIns="0" tIns="0" rIns="0" bIns="0" rtlCol="0" anchor="ctr"/>
           <a:lstStyle/>
           <a:p>
-            <a:pPr indent="0" marL="0">
+            <a:pPr marL="0" indent="0">
               <a:buNone/>
             </a:pPr>
             <a:r>
@@ -3049,7 +2815,7 @@
           <a:bodyPr wrap="square" lIns="0" tIns="0" rIns="0" bIns="0" rtlCol="0" anchor="ctr"/>
           <a:lstStyle/>
           <a:p>
-            <a:pPr indent="0" marL="0">
+            <a:pPr marL="0" indent="0">
               <a:buNone/>
             </a:pPr>
             <a:r>
@@ -3088,7 +2854,7 @@
           <a:bodyPr wrap="square" lIns="0" tIns="0" rIns="0" bIns="0" rtlCol="0" anchor="ctr"/>
           <a:lstStyle/>
           <a:p>
-            <a:pPr indent="0" marL="0">
+            <a:pPr marL="0" indent="0">
               <a:buNone/>
             </a:pPr>
             <a:r>
@@ -3132,6 +2898,13 @@
             <a:prstDash val="solid"/>
           </a:ln>
         </p:spPr>
+        <p:txBody>
+          <a:bodyPr/>
+          <a:lstStyle/>
+          <a:p>
+            <a:endParaRPr lang="en-US"/>
+          </a:p>
+        </p:txBody>
       </p:sp>
       <p:sp>
         <p:nvSpPr>
@@ -3154,7 +2927,7 @@
           <a:bodyPr wrap="square" lIns="0" tIns="0" rIns="0" bIns="0" rtlCol="0" anchor="ctr"/>
           <a:lstStyle/>
           <a:p>
-            <a:pPr indent="0" marL="0">
+            <a:pPr marL="0" indent="0">
               <a:buNone/>
             </a:pPr>
             <a:r>
@@ -3193,7 +2966,7 @@
           <a:bodyPr wrap="square" lIns="0" tIns="0" rIns="0" bIns="0" rtlCol="0" anchor="t"/>
           <a:lstStyle/>
           <a:p>
-            <a:pPr indent="0" marL="0">
+            <a:pPr marL="0" indent="0">
               <a:lnSpc>
                 <a:spcPct val="115000"/>
               </a:lnSpc>
@@ -3240,6 +3013,13 @@
             <a:prstDash val="solid"/>
           </a:ln>
         </p:spPr>
+        <p:txBody>
+          <a:bodyPr/>
+          <a:lstStyle/>
+          <a:p>
+            <a:endParaRPr lang="en-US"/>
+          </a:p>
+        </p:txBody>
       </p:sp>
       <p:sp>
         <p:nvSpPr>
@@ -3262,7 +3042,7 @@
           <a:bodyPr wrap="square" lIns="0" tIns="0" rIns="0" bIns="0" rtlCol="0" anchor="ctr"/>
           <a:lstStyle/>
           <a:p>
-            <a:pPr indent="0" marL="0">
+            <a:pPr marL="0" indent="0">
               <a:buNone/>
             </a:pPr>
             <a:r>
@@ -3301,7 +3081,7 @@
           <a:bodyPr wrap="square" lIns="0" tIns="0" rIns="0" bIns="0" rtlCol="0" anchor="ctr"/>
           <a:lstStyle/>
           <a:p>
-            <a:pPr indent="0" marL="0">
+            <a:pPr marL="0" indent="0">
               <a:lnSpc>
                 <a:spcPct val="115000"/>
               </a:lnSpc>
@@ -3348,6 +3128,13 @@
             <a:prstDash val="solid"/>
           </a:ln>
         </p:spPr>
+        <p:txBody>
+          <a:bodyPr/>
+          <a:lstStyle/>
+          <a:p>
+            <a:endParaRPr lang="en-US"/>
+          </a:p>
+        </p:txBody>
       </p:sp>
       <p:sp>
         <p:nvSpPr>
@@ -3370,7 +3157,7 @@
           <a:bodyPr wrap="square" lIns="0" tIns="0" rIns="0" bIns="0" rtlCol="0" anchor="ctr"/>
           <a:lstStyle/>
           <a:p>
-            <a:pPr indent="0" marL="0">
+            <a:pPr marL="0" indent="0">
               <a:buNone/>
             </a:pPr>
             <a:r>
@@ -3409,7 +3196,7 @@
           <a:bodyPr wrap="square" lIns="0" tIns="0" rIns="0" bIns="0" rtlCol="0" anchor="ctr"/>
           <a:lstStyle/>
           <a:p>
-            <a:pPr indent="0" marL="0">
+            <a:pPr marL="0" indent="0">
               <a:buNone/>
             </a:pPr>
             <a:r>
@@ -3448,7 +3235,7 @@
           <a:bodyPr wrap="square" lIns="0" tIns="0" rIns="0" bIns="0" rtlCol="0" anchor="ctr"/>
           <a:lstStyle/>
           <a:p>
-            <a:pPr algn="ctr" indent="0" marL="0">
+            <a:pPr marL="0" indent="0" algn="ctr">
               <a:buNone/>
             </a:pPr>
             <a:r>
@@ -3487,7 +3274,7 @@
           <a:bodyPr wrap="square" lIns="0" tIns="0" rIns="0" bIns="0" rtlCol="0" anchor="ctr"/>
           <a:lstStyle/>
           <a:p>
-            <a:pPr indent="0" marL="0">
+            <a:pPr marL="0" indent="0">
               <a:buNone/>
             </a:pPr>
             <a:r>
@@ -3526,7 +3313,7 @@
           <a:bodyPr wrap="square" lIns="0" tIns="0" rIns="0" bIns="0" rtlCol="0" anchor="ctr"/>
           <a:lstStyle/>
           <a:p>
-            <a:pPr indent="0" marL="0">
+            <a:pPr marL="0" indent="0">
               <a:buNone/>
             </a:pPr>
             <a:r>
@@ -3570,6 +3357,13 @@
             <a:prstDash val="solid"/>
           </a:ln>
         </p:spPr>
+        <p:txBody>
+          <a:bodyPr/>
+          <a:lstStyle/>
+          <a:p>
+            <a:endParaRPr lang="en-US"/>
+          </a:p>
+        </p:txBody>
       </p:sp>
       <p:sp>
         <p:nvSpPr>
@@ -3592,7 +3386,7 @@
           <a:bodyPr wrap="square" lIns="0" tIns="0" rIns="0" bIns="0" rtlCol="0" anchor="ctr"/>
           <a:lstStyle/>
           <a:p>
-            <a:pPr indent="0" marL="0">
+            <a:pPr marL="0" indent="0">
               <a:buNone/>
             </a:pPr>
             <a:r>
@@ -3656,7 +3450,7 @@
           <a:bodyPr wrap="square" lIns="0" tIns="0" rIns="0" bIns="0" rtlCol="0" anchor="ctr"/>
           <a:lstStyle/>
           <a:p>
-            <a:pPr indent="0" marL="0">
+            <a:pPr marL="0" indent="0">
               <a:buNone/>
             </a:pPr>
             <a:r>
@@ -3695,7 +3489,7 @@
           <a:bodyPr wrap="square" lIns="0" tIns="0" rIns="0" bIns="0" rtlCol="0" anchor="ctr"/>
           <a:lstStyle/>
           <a:p>
-            <a:pPr indent="0" marL="0">
+            <a:pPr marL="0" indent="0">
               <a:buNone/>
             </a:pPr>
             <a:r>
@@ -3739,6 +3533,13 @@
             <a:prstDash val="solid"/>
           </a:ln>
         </p:spPr>
+        <p:txBody>
+          <a:bodyPr/>
+          <a:lstStyle/>
+          <a:p>
+            <a:endParaRPr lang="en-US"/>
+          </a:p>
+        </p:txBody>
       </p:sp>
       <p:sp>
         <p:nvSpPr>
@@ -3761,7 +3562,7 @@
           <a:bodyPr wrap="square" lIns="0" tIns="0" rIns="0" bIns="0" rtlCol="0" anchor="ctr"/>
           <a:lstStyle/>
           <a:p>
-            <a:pPr indent="0" marL="0">
+            <a:pPr marL="0" indent="0">
               <a:buNone/>
             </a:pPr>
             <a:r>
@@ -3800,7 +3601,7 @@
           <a:bodyPr wrap="square" lIns="0" tIns="0" rIns="0" bIns="0" rtlCol="0" anchor="t"/>
           <a:lstStyle/>
           <a:p>
-            <a:pPr indent="0" marL="0">
+            <a:pPr marL="0" indent="0">
               <a:lnSpc>
                 <a:spcPct val="115000"/>
               </a:lnSpc>
@@ -3847,6 +3648,13 @@
             <a:prstDash val="solid"/>
           </a:ln>
         </p:spPr>
+        <p:txBody>
+          <a:bodyPr/>
+          <a:lstStyle/>
+          <a:p>
+            <a:endParaRPr lang="en-US"/>
+          </a:p>
+        </p:txBody>
       </p:sp>
       <p:sp>
         <p:nvSpPr>
@@ -3869,7 +3677,7 @@
           <a:bodyPr wrap="square" lIns="0" tIns="0" rIns="0" bIns="0" rtlCol="0" anchor="ctr"/>
           <a:lstStyle/>
           <a:p>
-            <a:pPr indent="0" marL="0">
+            <a:pPr marL="0" indent="0">
               <a:buNone/>
             </a:pPr>
             <a:r>
@@ -3908,7 +3716,7 @@
           <a:bodyPr wrap="square" lIns="0" tIns="0" rIns="0" bIns="0" rtlCol="0" anchor="t"/>
           <a:lstStyle/>
           <a:p>
-            <a:pPr indent="0" marL="0">
+            <a:pPr marL="0" indent="0">
               <a:lnSpc>
                 <a:spcPct val="115000"/>
               </a:lnSpc>
@@ -3955,6 +3763,13 @@
             <a:prstDash val="solid"/>
           </a:ln>
         </p:spPr>
+        <p:txBody>
+          <a:bodyPr/>
+          <a:lstStyle/>
+          <a:p>
+            <a:endParaRPr lang="en-US"/>
+          </a:p>
+        </p:txBody>
       </p:sp>
       <p:sp>
         <p:nvSpPr>
@@ -3977,7 +3792,7 @@
           <a:bodyPr wrap="square" lIns="0" tIns="0" rIns="0" bIns="0" rtlCol="0" anchor="ctr"/>
           <a:lstStyle/>
           <a:p>
-            <a:pPr indent="0" marL="0">
+            <a:pPr marL="0" indent="0">
               <a:buNone/>
             </a:pPr>
             <a:r>
@@ -4016,7 +3831,7 @@
           <a:bodyPr wrap="square" lIns="0" tIns="0" rIns="0" bIns="0" rtlCol="0" anchor="t"/>
           <a:lstStyle/>
           <a:p>
-            <a:pPr indent="0" marL="0">
+            <a:pPr marL="0" indent="0">
               <a:lnSpc>
                 <a:spcPct val="115000"/>
               </a:lnSpc>
@@ -4063,6 +3878,13 @@
             <a:prstDash val="solid"/>
           </a:ln>
         </p:spPr>
+        <p:txBody>
+          <a:bodyPr/>
+          <a:lstStyle/>
+          <a:p>
+            <a:endParaRPr lang="en-US"/>
+          </a:p>
+        </p:txBody>
       </p:sp>
       <p:sp>
         <p:nvSpPr>
@@ -4085,7 +3907,7 @@
           <a:bodyPr wrap="square" lIns="0" tIns="0" rIns="0" bIns="0" rtlCol="0" anchor="ctr"/>
           <a:lstStyle/>
           <a:p>
-            <a:pPr indent="0" marL="0">
+            <a:pPr marL="0" indent="0">
               <a:buNone/>
             </a:pPr>
             <a:r>
@@ -4124,7 +3946,7 @@
           <a:bodyPr wrap="square" lIns="0" tIns="0" rIns="0" bIns="0" rtlCol="0" anchor="ctr"/>
           <a:lstStyle/>
           <a:p>
-            <a:pPr indent="0" marL="0">
+            <a:pPr marL="0" indent="0">
               <a:lnSpc>
                 <a:spcPct val="115000"/>
               </a:lnSpc>
@@ -4191,7 +4013,7 @@
           <a:bodyPr wrap="square" lIns="0" tIns="0" rIns="0" bIns="0" rtlCol="0" anchor="ctr"/>
           <a:lstStyle/>
           <a:p>
-            <a:pPr indent="0" marL="0">
+            <a:pPr marL="0" indent="0">
               <a:buNone/>
             </a:pPr>
             <a:r>
@@ -4230,7 +4052,7 @@
           <a:bodyPr wrap="square" lIns="0" tIns="0" rIns="0" bIns="0" rtlCol="0" anchor="ctr"/>
           <a:lstStyle/>
           <a:p>
-            <a:pPr indent="0" marL="0">
+            <a:pPr marL="0" indent="0">
               <a:buNone/>
             </a:pPr>
             <a:r>
@@ -4274,6 +4096,13 @@
             <a:prstDash val="solid"/>
           </a:ln>
         </p:spPr>
+        <p:txBody>
+          <a:bodyPr/>
+          <a:lstStyle/>
+          <a:p>
+            <a:endParaRPr lang="en-US"/>
+          </a:p>
+        </p:txBody>
       </p:sp>
       <p:sp>
         <p:nvSpPr>
@@ -4299,6 +4128,13 @@
             <a:prstDash val="solid"/>
           </a:ln>
         </p:spPr>
+        <p:txBody>
+          <a:bodyPr/>
+          <a:lstStyle/>
+          <a:p>
+            <a:endParaRPr lang="en-US"/>
+          </a:p>
+        </p:txBody>
       </p:sp>
       <p:sp>
         <p:nvSpPr>
@@ -4321,7 +4157,7 @@
           <a:bodyPr wrap="square" lIns="0" tIns="0" rIns="0" bIns="0" rtlCol="0" anchor="ctr"/>
           <a:lstStyle/>
           <a:p>
-            <a:pPr algn="ctr" indent="0" marL="0">
+            <a:pPr marL="0" indent="0" algn="ctr">
               <a:buNone/>
             </a:pPr>
             <a:r>
@@ -4360,7 +4196,7 @@
           <a:bodyPr wrap="square" lIns="0" tIns="0" rIns="0" bIns="0" rtlCol="0" anchor="ctr"/>
           <a:lstStyle/>
           <a:p>
-            <a:pPr indent="0" marL="0">
+            <a:pPr marL="0" indent="0">
               <a:buNone/>
             </a:pPr>
             <a:r>
@@ -4399,7 +4235,7 @@
           <a:bodyPr wrap="square" lIns="0" tIns="0" rIns="0" bIns="0" rtlCol="0" anchor="t"/>
           <a:lstStyle/>
           <a:p>
-            <a:pPr indent="0" marL="0">
+            <a:pPr marL="0" indent="0">
               <a:lnSpc>
                 <a:spcPct val="115000"/>
               </a:lnSpc>
@@ -4446,6 +4282,13 @@
             <a:prstDash val="solid"/>
           </a:ln>
         </p:spPr>
+        <p:txBody>
+          <a:bodyPr/>
+          <a:lstStyle/>
+          <a:p>
+            <a:endParaRPr lang="en-US"/>
+          </a:p>
+        </p:txBody>
       </p:sp>
       <p:sp>
         <p:nvSpPr>
@@ -4471,6 +4314,13 @@
             <a:prstDash val="solid"/>
           </a:ln>
         </p:spPr>
+        <p:txBody>
+          <a:bodyPr/>
+          <a:lstStyle/>
+          <a:p>
+            <a:endParaRPr lang="en-US"/>
+          </a:p>
+        </p:txBody>
       </p:sp>
       <p:sp>
         <p:nvSpPr>
@@ -4493,7 +4343,7 @@
           <a:bodyPr wrap="square" lIns="0" tIns="0" rIns="0" bIns="0" rtlCol="0" anchor="ctr"/>
           <a:lstStyle/>
           <a:p>
-            <a:pPr algn="ctr" indent="0" marL="0">
+            <a:pPr marL="0" indent="0" algn="ctr">
               <a:buNone/>
             </a:pPr>
             <a:r>
@@ -4532,7 +4382,7 @@
           <a:bodyPr wrap="square" lIns="0" tIns="0" rIns="0" bIns="0" rtlCol="0" anchor="ctr"/>
           <a:lstStyle/>
           <a:p>
-            <a:pPr indent="0" marL="0">
+            <a:pPr marL="0" indent="0">
               <a:buNone/>
             </a:pPr>
             <a:r>
@@ -4571,7 +4421,7 @@
           <a:bodyPr wrap="square" lIns="0" tIns="0" rIns="0" bIns="0" rtlCol="0" anchor="t"/>
           <a:lstStyle/>
           <a:p>
-            <a:pPr indent="0" marL="0">
+            <a:pPr marL="0" indent="0">
               <a:lnSpc>
                 <a:spcPct val="115000"/>
               </a:lnSpc>
@@ -4618,6 +4468,13 @@
             <a:prstDash val="solid"/>
           </a:ln>
         </p:spPr>
+        <p:txBody>
+          <a:bodyPr/>
+          <a:lstStyle/>
+          <a:p>
+            <a:endParaRPr lang="en-US"/>
+          </a:p>
+        </p:txBody>
       </p:sp>
       <p:sp>
         <p:nvSpPr>
@@ -4643,6 +4500,13 @@
             <a:prstDash val="solid"/>
           </a:ln>
         </p:spPr>
+        <p:txBody>
+          <a:bodyPr/>
+          <a:lstStyle/>
+          <a:p>
+            <a:endParaRPr lang="en-US"/>
+          </a:p>
+        </p:txBody>
       </p:sp>
       <p:sp>
         <p:nvSpPr>
@@ -4665,7 +4529,7 @@
           <a:bodyPr wrap="square" lIns="0" tIns="0" rIns="0" bIns="0" rtlCol="0" anchor="ctr"/>
           <a:lstStyle/>
           <a:p>
-            <a:pPr algn="ctr" indent="0" marL="0">
+            <a:pPr marL="0" indent="0" algn="ctr">
               <a:buNone/>
             </a:pPr>
             <a:r>
@@ -4704,7 +4568,7 @@
           <a:bodyPr wrap="square" lIns="0" tIns="0" rIns="0" bIns="0" rtlCol="0" anchor="ctr"/>
           <a:lstStyle/>
           <a:p>
-            <a:pPr indent="0" marL="0">
+            <a:pPr marL="0" indent="0">
               <a:buNone/>
             </a:pPr>
             <a:r>
@@ -4743,7 +4607,7 @@
           <a:bodyPr wrap="square" lIns="0" tIns="0" rIns="0" bIns="0" rtlCol="0" anchor="t"/>
           <a:lstStyle/>
           <a:p>
-            <a:pPr indent="0" marL="0">
+            <a:pPr marL="0" indent="0">
               <a:lnSpc>
                 <a:spcPct val="115000"/>
               </a:lnSpc>
@@ -4790,6 +4654,13 @@
             <a:prstDash val="solid"/>
           </a:ln>
         </p:spPr>
+        <p:txBody>
+          <a:bodyPr/>
+          <a:lstStyle/>
+          <a:p>
+            <a:endParaRPr lang="en-US"/>
+          </a:p>
+        </p:txBody>
       </p:sp>
       <p:sp>
         <p:nvSpPr>
@@ -4812,7 +4683,7 @@
           <a:bodyPr wrap="square" lIns="0" tIns="0" rIns="0" bIns="0" rtlCol="0" anchor="ctr"/>
           <a:lstStyle/>
           <a:p>
-            <a:pPr indent="0" marL="0">
+            <a:pPr marL="0" indent="0">
               <a:buNone/>
             </a:pPr>
             <a:r>
@@ -4839,1067 +4710,6 @@
 </file>
 
 <file path=ppt/slides/slide14.xml><?xml version="1.0" encoding="utf-8"?>
-<p:sld xmlns:a="http://schemas.openxmlformats.org/drawingml/2006/main" xmlns:r="http://schemas.openxmlformats.org/officeDocument/2006/relationships" xmlns:p="http://schemas.openxmlformats.org/presentationml/2006/main">
-  <p:cSld name="Slide 14">
-    <p:spTree>
-      <p:nvGrpSpPr>
-        <p:cNvPr id="1" name=""/>
-        <p:cNvGrpSpPr/>
-        <p:nvPr/>
-      </p:nvGrpSpPr>
-      <p:grpSpPr>
-        <a:xfrm>
-          <a:off x="0" y="0"/>
-          <a:ext cx="0" cy="0"/>
-          <a:chOff x="0" y="0"/>
-          <a:chExt cx="0" cy="0"/>
-        </a:xfrm>
-      </p:grpSpPr>
-      <p:sp>
-        <p:nvSpPr>
-          <p:cNvPr id="2" name="Text 0"/>
-          <p:cNvSpPr/>
-          <p:nvPr/>
-        </p:nvSpPr>
-        <p:spPr>
-          <a:xfrm>
-            <a:off x="640080" y="384048"/>
-            <a:ext cx="10881360" cy="685800"/>
-          </a:xfrm>
-          <a:prstGeom prst="rect">
-            <a:avLst/>
-          </a:prstGeom>
-          <a:noFill/>
-          <a:ln/>
-        </p:spPr>
-        <p:txBody>
-          <a:bodyPr wrap="square" lIns="0" tIns="0" rIns="0" bIns="0" rtlCol="0" anchor="ctr"/>
-          <a:lstStyle/>
-          <a:p>
-            <a:pPr indent="0" marL="0">
-              <a:buNone/>
-            </a:pPr>
-            <a:r>
-              <a:rPr lang="en-US" sz="3400" b="1" dirty="0">
-                <a:solidFill>
-                  <a:srgbClr val="1F2A1F"/>
-                </a:solidFill>
-                <a:latin typeface="Cambria" pitchFamily="34" charset="0"/>
-                <a:ea typeface="Cambria" pitchFamily="34" charset="-122"/>
-                <a:cs typeface="Cambria" pitchFamily="34" charset="-120"/>
-              </a:rPr>
-              <a:t>Hygiène de travail</a:t>
-            </a:r>
-            <a:endParaRPr lang="en-US" sz="3400" dirty="0"/>
-          </a:p>
-        </p:txBody>
-      </p:sp>
-      <p:sp>
-        <p:nvSpPr>
-          <p:cNvPr id="3" name="Text 1"/>
-          <p:cNvSpPr/>
-          <p:nvPr/>
-        </p:nvSpPr>
-        <p:spPr>
-          <a:xfrm>
-            <a:off x="640080" y="1078992"/>
-            <a:ext cx="10881360" cy="384048"/>
-          </a:xfrm>
-          <a:prstGeom prst="rect">
-            <a:avLst/>
-          </a:prstGeom>
-          <a:noFill/>
-          <a:ln/>
-        </p:spPr>
-        <p:txBody>
-          <a:bodyPr wrap="square" lIns="0" tIns="0" rIns="0" bIns="0" rtlCol="0" anchor="ctr"/>
-          <a:lstStyle/>
-          <a:p>
-            <a:pPr indent="0" marL="0">
-              <a:buNone/>
-            </a:pPr>
-            <a:r>
-              <a:rPr lang="en-US" sz="1400" i="1" dirty="0">
-                <a:solidFill>
-                  <a:srgbClr val="5E6E5E"/>
-                </a:solidFill>
-                <a:latin typeface="Calibri" pitchFamily="34" charset="0"/>
-                <a:ea typeface="Calibri" pitchFamily="34" charset="-122"/>
-                <a:cs typeface="Calibri" pitchFamily="34" charset="-120"/>
-              </a:rPr>
-              <a:t>Ce qui distingue un brouillon d'un livrable</a:t>
-            </a:r>
-            <a:endParaRPr lang="en-US" sz="1400" dirty="0"/>
-          </a:p>
-        </p:txBody>
-      </p:sp>
-      <p:sp>
-        <p:nvSpPr>
-          <p:cNvPr id="4" name="Shape 2"/>
-          <p:cNvSpPr/>
-          <p:nvPr/>
-        </p:nvSpPr>
-        <p:spPr>
-          <a:xfrm>
-            <a:off x="640080" y="1691640"/>
-            <a:ext cx="3538728" cy="3017520"/>
-          </a:xfrm>
-          <a:prstGeom prst="roundRect">
-            <a:avLst>
-              <a:gd name="adj" fmla="val 2424"/>
-            </a:avLst>
-          </a:prstGeom>
-          <a:solidFill>
-            <a:srgbClr val="EDF2E6"/>
-          </a:solidFill>
-          <a:ln w="12700">
-            <a:solidFill>
-              <a:srgbClr val="EDF2E6"/>
-            </a:solidFill>
-            <a:prstDash val="solid"/>
-          </a:ln>
-        </p:spPr>
-      </p:sp>
-      <p:sp>
-        <p:nvSpPr>
-          <p:cNvPr id="5" name="Text 3"/>
-          <p:cNvSpPr/>
-          <p:nvPr/>
-        </p:nvSpPr>
-        <p:spPr>
-          <a:xfrm>
-            <a:off x="914400" y="1874520"/>
-            <a:ext cx="3017520" cy="310896"/>
-          </a:xfrm>
-          <a:prstGeom prst="rect">
-            <a:avLst/>
-          </a:prstGeom>
-          <a:noFill/>
-          <a:ln/>
-        </p:spPr>
-        <p:txBody>
-          <a:bodyPr wrap="square" lIns="0" tIns="0" rIns="0" bIns="0" rtlCol="0" anchor="ctr"/>
-          <a:lstStyle/>
-          <a:p>
-            <a:pPr indent="0" marL="0">
-              <a:buNone/>
-            </a:pPr>
-            <a:r>
-              <a:rPr lang="en-US" sz="1700" b="1" dirty="0">
-                <a:solidFill>
-                  <a:srgbClr val="2C5F2D"/>
-                </a:solidFill>
-                <a:latin typeface="Cambria" pitchFamily="34" charset="0"/>
-                <a:ea typeface="Cambria" pitchFamily="34" charset="-122"/>
-                <a:cs typeface="Cambria" pitchFamily="34" charset="-120"/>
-              </a:rPr>
-              <a:t>Environnement</a:t>
-            </a:r>
-            <a:endParaRPr lang="en-US" sz="1700" dirty="0"/>
-          </a:p>
-        </p:txBody>
-      </p:sp>
-      <p:sp>
-        <p:nvSpPr>
-          <p:cNvPr id="6" name="Text 4"/>
-          <p:cNvSpPr/>
-          <p:nvPr/>
-        </p:nvSpPr>
-        <p:spPr>
-          <a:xfrm>
-            <a:off x="960120" y="2331720"/>
-            <a:ext cx="2971800" cy="1828800"/>
-          </a:xfrm>
-          <a:prstGeom prst="rect">
-            <a:avLst/>
-          </a:prstGeom>
-          <a:noFill/>
-          <a:ln/>
-        </p:spPr>
-        <p:txBody>
-          <a:bodyPr wrap="square" lIns="0" tIns="0" rIns="0" bIns="0" rtlCol="0" anchor="t"/>
-          <a:lstStyle/>
-          <a:p>
-            <a:pPr marL="342900" indent="-342900">
-              <a:spcAft>
-                <a:spcPts val="800"/>
-              </a:spcAft>
-              <a:buSzPct val="100000"/>
-              <a:buChar char="•"/>
-            </a:pPr>
-            <a:r>
-              <a:rPr lang="en-US" sz="1200" dirty="0">
-                <a:solidFill>
-                  <a:srgbClr val="1F2A1F"/>
-                </a:solidFill>
-                <a:latin typeface="Calibri" pitchFamily="34" charset="0"/>
-                <a:ea typeface="Calibri" pitchFamily="34" charset="-122"/>
-                <a:cs typeface="Calibri" pitchFamily="34" charset="-120"/>
-              </a:rPr>
-              <a:t>Un dossier = un projet = un .venv</a:t>
-            </a:r>
-            <a:endParaRPr lang="en-US" sz="1200" dirty="0"/>
-          </a:p>
-          <a:p>
-            <a:pPr marL="342900" indent="-342900">
-              <a:spcAft>
-                <a:spcPts val="800"/>
-              </a:spcAft>
-              <a:buSzPct val="100000"/>
-              <a:buChar char="•"/>
-            </a:pPr>
-            <a:r>
-              <a:rPr lang="en-US" sz="1200" dirty="0">
-                <a:solidFill>
-                  <a:srgbClr val="1F2A1F"/>
-                </a:solidFill>
-                <a:latin typeface="Calibri" pitchFamily="34" charset="0"/>
-                <a:ea typeface="Calibri" pitchFamily="34" charset="-122"/>
-                <a:cs typeface="Calibri" pitchFamily="34" charset="-120"/>
-              </a:rPr>
-              <a:t>Ouvrir le projet, pas le dossier parent</a:t>
-            </a:r>
-            <a:endParaRPr lang="en-US" sz="1200" dirty="0"/>
-          </a:p>
-          <a:p>
-            <a:pPr marL="342900" indent="-342900">
-              <a:spcAft>
-                <a:spcPts val="800"/>
-              </a:spcAft>
-              <a:buSzPct val="100000"/>
-              <a:buChar char="•"/>
-            </a:pPr>
-            <a:r>
-              <a:rPr lang="en-US" sz="1200" dirty="0">
-                <a:solidFill>
-                  <a:srgbClr val="1F2A1F"/>
-                </a:solidFill>
-                <a:latin typeface="Calibri" pitchFamily="34" charset="0"/>
-                <a:ea typeface="Calibri" pitchFamily="34" charset="-122"/>
-                <a:cs typeface="Calibri" pitchFamily="34" charset="-120"/>
-              </a:rPr>
-              <a:t>which python quand un import échoue</a:t>
-            </a:r>
-            <a:endParaRPr lang="en-US" sz="1200" dirty="0"/>
-          </a:p>
-          <a:p>
-            <a:pPr marL="342900" indent="-342900">
-              <a:spcAft>
-                <a:spcPts val="800"/>
-              </a:spcAft>
-              <a:buSzPct val="100000"/>
-              <a:buChar char="•"/>
-            </a:pPr>
-            <a:r>
-              <a:rPr lang="en-US" sz="1200" dirty="0">
-                <a:solidFill>
-                  <a:srgbClr val="1F2A1F"/>
-                </a:solidFill>
-                <a:latin typeface="Calibri" pitchFamily="34" charset="0"/>
-                <a:ea typeface="Calibri" pitchFamily="34" charset="-122"/>
-                <a:cs typeface="Calibri" pitchFamily="34" charset="-120"/>
-              </a:rPr>
-              <a:t>requirements.txt : dépendances directes</a:t>
-            </a:r>
-            <a:endParaRPr lang="en-US" sz="1200" dirty="0"/>
-          </a:p>
-        </p:txBody>
-      </p:sp>
-      <p:sp>
-        <p:nvSpPr>
-          <p:cNvPr id="7" name="Shape 5"/>
-          <p:cNvSpPr/>
-          <p:nvPr/>
-        </p:nvSpPr>
-        <p:spPr>
-          <a:xfrm>
-            <a:off x="4361688" y="1691640"/>
-            <a:ext cx="3538728" cy="3017520"/>
-          </a:xfrm>
-          <a:prstGeom prst="roundRect">
-            <a:avLst>
-              <a:gd name="adj" fmla="val 2424"/>
-            </a:avLst>
-          </a:prstGeom>
-          <a:solidFill>
-            <a:srgbClr val="1A3A1C"/>
-          </a:solidFill>
-          <a:ln w="12700">
-            <a:solidFill>
-              <a:srgbClr val="1A3A1C"/>
-            </a:solidFill>
-            <a:prstDash val="solid"/>
-          </a:ln>
-        </p:spPr>
-      </p:sp>
-      <p:sp>
-        <p:nvSpPr>
-          <p:cNvPr id="8" name="Text 6"/>
-          <p:cNvSpPr/>
-          <p:nvPr/>
-        </p:nvSpPr>
-        <p:spPr>
-          <a:xfrm>
-            <a:off x="4636008" y="1874520"/>
-            <a:ext cx="3017520" cy="310896"/>
-          </a:xfrm>
-          <a:prstGeom prst="rect">
-            <a:avLst/>
-          </a:prstGeom>
-          <a:noFill/>
-          <a:ln/>
-        </p:spPr>
-        <p:txBody>
-          <a:bodyPr wrap="square" lIns="0" tIns="0" rIns="0" bIns="0" rtlCol="0" anchor="ctr"/>
-          <a:lstStyle/>
-          <a:p>
-            <a:pPr indent="0" marL="0">
-              <a:buNone/>
-            </a:pPr>
-            <a:r>
-              <a:rPr lang="en-US" sz="1700" b="1" dirty="0">
-                <a:solidFill>
-                  <a:srgbClr val="97BC62"/>
-                </a:solidFill>
-                <a:latin typeface="Cambria" pitchFamily="34" charset="0"/>
-                <a:ea typeface="Cambria" pitchFamily="34" charset="-122"/>
-                <a:cs typeface="Cambria" pitchFamily="34" charset="-120"/>
-              </a:rPr>
-              <a:t>Notebook</a:t>
-            </a:r>
-            <a:endParaRPr lang="en-US" sz="1700" dirty="0"/>
-          </a:p>
-        </p:txBody>
-      </p:sp>
-      <p:sp>
-        <p:nvSpPr>
-          <p:cNvPr id="9" name="Text 7"/>
-          <p:cNvSpPr/>
-          <p:nvPr/>
-        </p:nvSpPr>
-        <p:spPr>
-          <a:xfrm>
-            <a:off x="4681728" y="2331720"/>
-            <a:ext cx="2971800" cy="1828800"/>
-          </a:xfrm>
-          <a:prstGeom prst="rect">
-            <a:avLst/>
-          </a:prstGeom>
-          <a:noFill/>
-          <a:ln/>
-        </p:spPr>
-        <p:txBody>
-          <a:bodyPr wrap="square" lIns="0" tIns="0" rIns="0" bIns="0" rtlCol="0" anchor="t"/>
-          <a:lstStyle/>
-          <a:p>
-            <a:pPr marL="342900" indent="-342900">
-              <a:spcAft>
-                <a:spcPts val="800"/>
-              </a:spcAft>
-              <a:buSzPct val="100000"/>
-              <a:buChar char="•"/>
-            </a:pPr>
-            <a:r>
-              <a:rPr lang="en-US" sz="1200" dirty="0">
-                <a:solidFill>
-                  <a:srgbClr val="FFFFFF"/>
-                </a:solidFill>
-                <a:latin typeface="Calibri" pitchFamily="34" charset="0"/>
-                <a:ea typeface="Calibri" pitchFamily="34" charset="-122"/>
-                <a:cs typeface="Calibri" pitchFamily="34" charset="-120"/>
-              </a:rPr>
-              <a:t>Restart and Run All avant chaque commit</a:t>
-            </a:r>
-            <a:endParaRPr lang="en-US" sz="1200" dirty="0"/>
-          </a:p>
-          <a:p>
-            <a:pPr marL="342900" indent="-342900">
-              <a:spcAft>
-                <a:spcPts val="800"/>
-              </a:spcAft>
-              <a:buSzPct val="100000"/>
-              <a:buChar char="•"/>
-            </a:pPr>
-            <a:r>
-              <a:rPr lang="en-US" sz="1200" dirty="0">
-                <a:solidFill>
-                  <a:srgbClr val="FFFFFF"/>
-                </a:solidFill>
-                <a:latin typeface="Calibri" pitchFamily="34" charset="0"/>
-                <a:ea typeface="Calibri" pitchFamily="34" charset="-122"/>
-                <a:cs typeface="Calibri" pitchFamily="34" charset="-120"/>
-              </a:rPr>
-              <a:t>Une variable réutilisée = état fantôme</a:t>
-            </a:r>
-            <a:endParaRPr lang="en-US" sz="1200" dirty="0"/>
-          </a:p>
-          <a:p>
-            <a:pPr marL="342900" indent="-342900">
-              <a:spcAft>
-                <a:spcPts val="800"/>
-              </a:spcAft>
-              <a:buSzPct val="100000"/>
-              <a:buChar char="•"/>
-            </a:pPr>
-            <a:r>
-              <a:rPr lang="en-US" sz="1200" dirty="0">
-                <a:solidFill>
-                  <a:srgbClr val="FFFFFF"/>
-                </a:solidFill>
-                <a:latin typeface="Calibri" pitchFamily="34" charset="0"/>
-                <a:ea typeface="Calibri" pitchFamily="34" charset="-122"/>
-                <a:cs typeface="Calibri" pitchFamily="34" charset="-120"/>
-              </a:rPr>
-              <a:t>Numéros d'exécution dans l'ordre</a:t>
-            </a:r>
-            <a:endParaRPr lang="en-US" sz="1200" dirty="0"/>
-          </a:p>
-          <a:p>
-            <a:pPr marL="342900" indent="-342900">
-              <a:spcAft>
-                <a:spcPts val="800"/>
-              </a:spcAft>
-              <a:buSzPct val="100000"/>
-              <a:buChar char="•"/>
-            </a:pPr>
-            <a:r>
-              <a:rPr lang="en-US" sz="1200" dirty="0">
-                <a:solidFill>
-                  <a:srgbClr val="FFFFFF"/>
-                </a:solidFill>
-                <a:latin typeface="Calibri" pitchFamily="34" charset="0"/>
-                <a:ea typeface="Calibri" pitchFamily="34" charset="-122"/>
-                <a:cs typeface="Calibri" pitchFamily="34" charset="-120"/>
-              </a:rPr>
-              <a:t>Chaque chiffre affiché doit être mesuré</a:t>
-            </a:r>
-            <a:endParaRPr lang="en-US" sz="1200" dirty="0"/>
-          </a:p>
-        </p:txBody>
-      </p:sp>
-      <p:sp>
-        <p:nvSpPr>
-          <p:cNvPr id="10" name="Shape 8"/>
-          <p:cNvSpPr/>
-          <p:nvPr/>
-        </p:nvSpPr>
-        <p:spPr>
-          <a:xfrm>
-            <a:off x="8083296" y="1691640"/>
-            <a:ext cx="3538728" cy="3017520"/>
-          </a:xfrm>
-          <a:prstGeom prst="roundRect">
-            <a:avLst>
-              <a:gd name="adj" fmla="val 2424"/>
-            </a:avLst>
-          </a:prstGeom>
-          <a:solidFill>
-            <a:srgbClr val="EDF2E6"/>
-          </a:solidFill>
-          <a:ln w="12700">
-            <a:solidFill>
-              <a:srgbClr val="EDF2E6"/>
-            </a:solidFill>
-            <a:prstDash val="solid"/>
-          </a:ln>
-        </p:spPr>
-      </p:sp>
-      <p:sp>
-        <p:nvSpPr>
-          <p:cNvPr id="11" name="Text 9"/>
-          <p:cNvSpPr/>
-          <p:nvPr/>
-        </p:nvSpPr>
-        <p:spPr>
-          <a:xfrm>
-            <a:off x="8357616" y="1874520"/>
-            <a:ext cx="3017520" cy="310896"/>
-          </a:xfrm>
-          <a:prstGeom prst="rect">
-            <a:avLst/>
-          </a:prstGeom>
-          <a:noFill/>
-          <a:ln/>
-        </p:spPr>
-        <p:txBody>
-          <a:bodyPr wrap="square" lIns="0" tIns="0" rIns="0" bIns="0" rtlCol="0" anchor="ctr"/>
-          <a:lstStyle/>
-          <a:p>
-            <a:pPr indent="0" marL="0">
-              <a:buNone/>
-            </a:pPr>
-            <a:r>
-              <a:rPr lang="en-US" sz="1700" b="1" dirty="0">
-                <a:solidFill>
-                  <a:srgbClr val="2C5F2D"/>
-                </a:solidFill>
-                <a:latin typeface="Cambria" pitchFamily="34" charset="0"/>
-                <a:ea typeface="Cambria" pitchFamily="34" charset="-122"/>
-                <a:cs typeface="Cambria" pitchFamily="34" charset="-120"/>
-              </a:rPr>
-              <a:t>Git &amp; portfolio</a:t>
-            </a:r>
-            <a:endParaRPr lang="en-US" sz="1700" dirty="0"/>
-          </a:p>
-        </p:txBody>
-      </p:sp>
-      <p:sp>
-        <p:nvSpPr>
-          <p:cNvPr id="12" name="Text 10"/>
-          <p:cNvSpPr/>
-          <p:nvPr/>
-        </p:nvSpPr>
-        <p:spPr>
-          <a:xfrm>
-            <a:off x="8403336" y="2331720"/>
-            <a:ext cx="2971800" cy="1828800"/>
-          </a:xfrm>
-          <a:prstGeom prst="rect">
-            <a:avLst/>
-          </a:prstGeom>
-          <a:noFill/>
-          <a:ln/>
-        </p:spPr>
-        <p:txBody>
-          <a:bodyPr wrap="square" lIns="0" tIns="0" rIns="0" bIns="0" rtlCol="0" anchor="t"/>
-          <a:lstStyle/>
-          <a:p>
-            <a:pPr marL="342900" indent="-342900">
-              <a:spcAft>
-                <a:spcPts val="800"/>
-              </a:spcAft>
-              <a:buSzPct val="100000"/>
-              <a:buChar char="•"/>
-            </a:pPr>
-            <a:r>
-              <a:rPr lang="en-US" sz="1200" dirty="0">
-                <a:solidFill>
-                  <a:srgbClr val="1F2A1F"/>
-                </a:solidFill>
-                <a:latin typeface="Calibri" pitchFamily="34" charset="0"/>
-                <a:ea typeface="Calibri" pitchFamily="34" charset="-122"/>
-                <a:cs typeface="Calibri" pitchFamily="34" charset="-120"/>
-              </a:rPr>
-              <a:t>add / commit / push, à chaque étape finie</a:t>
-            </a:r>
-            <a:endParaRPr lang="en-US" sz="1200" dirty="0"/>
-          </a:p>
-          <a:p>
-            <a:pPr marL="342900" indent="-342900">
-              <a:spcAft>
-                <a:spcPts val="800"/>
-              </a:spcAft>
-              <a:buSzPct val="100000"/>
-              <a:buChar char="•"/>
-            </a:pPr>
-            <a:r>
-              <a:rPr lang="en-US" sz="1200" dirty="0">
-                <a:solidFill>
-                  <a:srgbClr val="1F2A1F"/>
-                </a:solidFill>
-                <a:latin typeface="Calibri" pitchFamily="34" charset="0"/>
-                <a:ea typeface="Calibri" pitchFamily="34" charset="-122"/>
-                <a:cs typeface="Calibri" pitchFamily="34" charset="-120"/>
-              </a:rPr>
-              <a:t>.venv ignoré, jamais versionné</a:t>
-            </a:r>
-            <a:endParaRPr lang="en-US" sz="1200" dirty="0"/>
-          </a:p>
-          <a:p>
-            <a:pPr marL="342900" indent="-342900">
-              <a:spcAft>
-                <a:spcPts val="800"/>
-              </a:spcAft>
-              <a:buSzPct val="100000"/>
-              <a:buChar char="•"/>
-            </a:pPr>
-            <a:r>
-              <a:rPr lang="en-US" sz="1200" dirty="0">
-                <a:solidFill>
-                  <a:srgbClr val="1F2A1F"/>
-                </a:solidFill>
-                <a:latin typeface="Calibri" pitchFamily="34" charset="0"/>
-                <a:ea typeface="Calibri" pitchFamily="34" charset="-122"/>
-                <a:cs typeface="Calibri" pitchFamily="34" charset="-120"/>
-              </a:rPr>
-              <a:t>README : question, méthode, résultat, limites</a:t>
-            </a:r>
-            <a:endParaRPr lang="en-US" sz="1200" dirty="0"/>
-          </a:p>
-          <a:p>
-            <a:pPr marL="342900" indent="-342900">
-              <a:spcAft>
-                <a:spcPts val="800"/>
-              </a:spcAft>
-              <a:buSzPct val="100000"/>
-              <a:buChar char="•"/>
-            </a:pPr>
-            <a:r>
-              <a:rPr lang="en-US" sz="1200" dirty="0">
-                <a:solidFill>
-                  <a:srgbClr val="1F2A1F"/>
-                </a:solidFill>
-                <a:latin typeface="Calibri" pitchFamily="34" charset="0"/>
-                <a:ea typeface="Calibri" pitchFamily="34" charset="-122"/>
-                <a:cs typeface="Calibri" pitchFamily="34" charset="-120"/>
-              </a:rPr>
-              <a:t>Nommer les limites de son analyse</a:t>
-            </a:r>
-            <a:endParaRPr lang="en-US" sz="1200" dirty="0"/>
-          </a:p>
-        </p:txBody>
-      </p:sp>
-    </p:spTree>
-  </p:cSld>
-  <p:clrMapOvr>
-    <a:masterClrMapping/>
-  </p:clrMapOvr>
-</p:sld>
-</file>
-
-<file path=ppt/slides/slide15.xml><?xml version="1.0" encoding="utf-8"?>
-<p:sld xmlns:a="http://schemas.openxmlformats.org/drawingml/2006/main" xmlns:r="http://schemas.openxmlformats.org/officeDocument/2006/relationships" xmlns:p="http://schemas.openxmlformats.org/presentationml/2006/main">
-  <p:cSld name="Slide 15">
-    <p:bg>
-      <p:bgPr>
-        <a:solidFill>
-          <a:srgbClr val="1A3A1C"/>
-        </a:solidFill>
-      </p:bgPr>
-    </p:bg>
-    <p:spTree>
-      <p:nvGrpSpPr>
-        <p:cNvPr id="1" name=""/>
-        <p:cNvGrpSpPr/>
-        <p:nvPr/>
-      </p:nvGrpSpPr>
-      <p:grpSpPr>
-        <a:xfrm>
-          <a:off x="0" y="0"/>
-          <a:ext cx="0" cy="0"/>
-          <a:chOff x="0" y="0"/>
-          <a:chExt cx="0" cy="0"/>
-        </a:xfrm>
-      </p:grpSpPr>
-      <p:sp>
-        <p:nvSpPr>
-          <p:cNvPr id="2" name="Shape 0"/>
-          <p:cNvSpPr/>
-          <p:nvPr/>
-        </p:nvSpPr>
-        <p:spPr>
-          <a:xfrm>
-            <a:off x="-1645920" y="4023360"/>
-            <a:ext cx="4206240" cy="4206240"/>
-          </a:xfrm>
-          <a:prstGeom prst="ellipse">
-            <a:avLst/>
-          </a:prstGeom>
-          <a:solidFill>
-            <a:srgbClr val="2C5F2D"/>
-          </a:solidFill>
-          <a:ln w="12700">
-            <a:solidFill>
-              <a:srgbClr val="2C5F2D"/>
-            </a:solidFill>
-            <a:prstDash val="solid"/>
-          </a:ln>
-        </p:spPr>
-      </p:sp>
-      <p:sp>
-        <p:nvSpPr>
-          <p:cNvPr id="3" name="Text 1"/>
-          <p:cNvSpPr/>
-          <p:nvPr/>
-        </p:nvSpPr>
-        <p:spPr>
-          <a:xfrm>
-            <a:off x="4572000" y="822960"/>
-            <a:ext cx="6949440" cy="365760"/>
-          </a:xfrm>
-          <a:prstGeom prst="rect">
-            <a:avLst/>
-          </a:prstGeom>
-          <a:noFill/>
-          <a:ln/>
-        </p:spPr>
-        <p:txBody>
-          <a:bodyPr wrap="square" lIns="0" tIns="0" rIns="0" bIns="0" rtlCol="0" anchor="ctr"/>
-          <a:lstStyle/>
-          <a:p>
-            <a:pPr indent="0" marL="0">
-              <a:buNone/>
-            </a:pPr>
-            <a:r>
-              <a:rPr lang="en-US" sz="1400" b="1" spc="400" kern="0" dirty="0">
-                <a:solidFill>
-                  <a:srgbClr val="97BC62"/>
-                </a:solidFill>
-                <a:latin typeface="Calibri" pitchFamily="34" charset="0"/>
-                <a:ea typeface="Calibri" pitchFamily="34" charset="-122"/>
-                <a:cs typeface="Calibri" pitchFamily="34" charset="-120"/>
-              </a:rPr>
-              <a:t>Le fil rouge</a:t>
-            </a:r>
-            <a:endParaRPr lang="en-US" sz="1400" dirty="0"/>
-          </a:p>
-        </p:txBody>
-      </p:sp>
-      <p:sp>
-        <p:nvSpPr>
-          <p:cNvPr id="4" name="Text 2"/>
-          <p:cNvSpPr/>
-          <p:nvPr/>
-        </p:nvSpPr>
-        <p:spPr>
-          <a:xfrm>
-            <a:off x="4572000" y="1280160"/>
-            <a:ext cx="6949440" cy="1188720"/>
-          </a:xfrm>
-          <a:prstGeom prst="rect">
-            <a:avLst/>
-          </a:prstGeom>
-          <a:noFill/>
-          <a:ln/>
-        </p:spPr>
-        <p:txBody>
-          <a:bodyPr wrap="square" lIns="0" tIns="0" rIns="0" bIns="0" rtlCol="0" anchor="ctr"/>
-          <a:lstStyle/>
-          <a:p>
-            <a:pPr indent="0" marL="0">
-              <a:buNone/>
-            </a:pPr>
-            <a:r>
-              <a:rPr lang="en-US" sz="3400" b="1" dirty="0">
-                <a:solidFill>
-                  <a:srgbClr val="FFFFFF"/>
-                </a:solidFill>
-                <a:latin typeface="Cambria" pitchFamily="34" charset="0"/>
-                <a:ea typeface="Cambria" pitchFamily="34" charset="-122"/>
-                <a:cs typeface="Cambria" pitchFamily="34" charset="-120"/>
-              </a:rPr>
-              <a:t>Un résultat juste ne suffit pas</a:t>
-            </a:r>
-            <a:endParaRPr lang="en-US" sz="3400" dirty="0"/>
-          </a:p>
-        </p:txBody>
-      </p:sp>
-      <p:sp>
-        <p:nvSpPr>
-          <p:cNvPr id="5" name="Shape 3"/>
-          <p:cNvSpPr/>
-          <p:nvPr/>
-        </p:nvSpPr>
-        <p:spPr>
-          <a:xfrm>
-            <a:off x="4572000" y="2898648"/>
-            <a:ext cx="128016" cy="128016"/>
-          </a:xfrm>
-          <a:prstGeom prst="ellipse">
-            <a:avLst/>
-          </a:prstGeom>
-          <a:solidFill>
-            <a:srgbClr val="97BC62"/>
-          </a:solidFill>
-          <a:ln w="12700">
-            <a:solidFill>
-              <a:srgbClr val="97BC62"/>
-            </a:solidFill>
-            <a:prstDash val="solid"/>
-          </a:ln>
-        </p:spPr>
-      </p:sp>
-      <p:sp>
-        <p:nvSpPr>
-          <p:cNvPr id="6" name="Text 4"/>
-          <p:cNvSpPr/>
-          <p:nvPr/>
-        </p:nvSpPr>
-        <p:spPr>
-          <a:xfrm>
-            <a:off x="4892040" y="2660904"/>
-            <a:ext cx="6629400" cy="548640"/>
-          </a:xfrm>
-          <a:prstGeom prst="rect">
-            <a:avLst/>
-          </a:prstGeom>
-          <a:noFill/>
-          <a:ln/>
-        </p:spPr>
-        <p:txBody>
-          <a:bodyPr wrap="square" lIns="0" tIns="0" rIns="0" bIns="0" rtlCol="0" anchor="ctr"/>
-          <a:lstStyle/>
-          <a:p>
-            <a:pPr indent="0" marL="0">
-              <a:lnSpc>
-                <a:spcPct val="115000"/>
-              </a:lnSpc>
-              <a:buNone/>
-            </a:pPr>
-            <a:r>
-              <a:rPr lang="en-US" sz="1400" dirty="0">
-                <a:solidFill>
-                  <a:srgbClr val="E4EEDC"/>
-                </a:solidFill>
-                <a:latin typeface="Calibri" pitchFamily="34" charset="0"/>
-                <a:ea typeface="Calibri" pitchFamily="34" charset="-122"/>
-                <a:cs typeface="Calibri" pitchFamily="34" charset="-120"/>
-              </a:rPr>
-              <a:t>Il doit être calculable à l'échelle réelle — d'où le coût et la vectorisation.</a:t>
-            </a:r>
-            <a:endParaRPr lang="en-US" sz="1400" dirty="0"/>
-          </a:p>
-        </p:txBody>
-      </p:sp>
-      <p:sp>
-        <p:nvSpPr>
-          <p:cNvPr id="7" name="Shape 5"/>
-          <p:cNvSpPr/>
-          <p:nvPr/>
-        </p:nvSpPr>
-        <p:spPr>
-          <a:xfrm>
-            <a:off x="4572000" y="3648456"/>
-            <a:ext cx="128016" cy="128016"/>
-          </a:xfrm>
-          <a:prstGeom prst="ellipse">
-            <a:avLst/>
-          </a:prstGeom>
-          <a:solidFill>
-            <a:srgbClr val="97BC62"/>
-          </a:solidFill>
-          <a:ln w="12700">
-            <a:solidFill>
-              <a:srgbClr val="97BC62"/>
-            </a:solidFill>
-            <a:prstDash val="solid"/>
-          </a:ln>
-        </p:spPr>
-      </p:sp>
-      <p:sp>
-        <p:nvSpPr>
-          <p:cNvPr id="8" name="Text 6"/>
-          <p:cNvSpPr/>
-          <p:nvPr/>
-        </p:nvSpPr>
-        <p:spPr>
-          <a:xfrm>
-            <a:off x="4892040" y="3410712"/>
-            <a:ext cx="6629400" cy="548640"/>
-          </a:xfrm>
-          <a:prstGeom prst="rect">
-            <a:avLst/>
-          </a:prstGeom>
-          <a:noFill/>
-          <a:ln/>
-        </p:spPr>
-        <p:txBody>
-          <a:bodyPr wrap="square" lIns="0" tIns="0" rIns="0" bIns="0" rtlCol="0" anchor="ctr"/>
-          <a:lstStyle/>
-          <a:p>
-            <a:pPr indent="0" marL="0">
-              <a:lnSpc>
-                <a:spcPct val="115000"/>
-              </a:lnSpc>
-              <a:buNone/>
-            </a:pPr>
-            <a:r>
-              <a:rPr lang="en-US" sz="1400" dirty="0">
-                <a:solidFill>
-                  <a:srgbClr val="E4EEDC"/>
-                </a:solidFill>
-                <a:latin typeface="Calibri" pitchFamily="34" charset="0"/>
-                <a:ea typeface="Calibri" pitchFamily="34" charset="-122"/>
-                <a:cs typeface="Calibri" pitchFamily="34" charset="-120"/>
-              </a:rPr>
-              <a:t>Il doit être vérifié, car l'erreur la plus dangereuse ne plante pas.</a:t>
-            </a:r>
-            <a:endParaRPr lang="en-US" sz="1400" dirty="0"/>
-          </a:p>
-        </p:txBody>
-      </p:sp>
-      <p:sp>
-        <p:nvSpPr>
-          <p:cNvPr id="9" name="Shape 7"/>
-          <p:cNvSpPr/>
-          <p:nvPr/>
-        </p:nvSpPr>
-        <p:spPr>
-          <a:xfrm>
-            <a:off x="4572000" y="4398264"/>
-            <a:ext cx="128016" cy="128016"/>
-          </a:xfrm>
-          <a:prstGeom prst="ellipse">
-            <a:avLst/>
-          </a:prstGeom>
-          <a:solidFill>
-            <a:srgbClr val="97BC62"/>
-          </a:solidFill>
-          <a:ln w="12700">
-            <a:solidFill>
-              <a:srgbClr val="97BC62"/>
-            </a:solidFill>
-            <a:prstDash val="solid"/>
-          </a:ln>
-        </p:spPr>
-      </p:sp>
-      <p:sp>
-        <p:nvSpPr>
-          <p:cNvPr id="10" name="Text 8"/>
-          <p:cNvSpPr/>
-          <p:nvPr/>
-        </p:nvSpPr>
-        <p:spPr>
-          <a:xfrm>
-            <a:off x="4892040" y="4160520"/>
-            <a:ext cx="6629400" cy="548640"/>
-          </a:xfrm>
-          <a:prstGeom prst="rect">
-            <a:avLst/>
-          </a:prstGeom>
-          <a:noFill/>
-          <a:ln/>
-        </p:spPr>
-        <p:txBody>
-          <a:bodyPr wrap="square" lIns="0" tIns="0" rIns="0" bIns="0" rtlCol="0" anchor="ctr"/>
-          <a:lstStyle/>
-          <a:p>
-            <a:pPr indent="0" marL="0">
-              <a:lnSpc>
-                <a:spcPct val="115000"/>
-              </a:lnSpc>
-              <a:buNone/>
-            </a:pPr>
-            <a:r>
-              <a:rPr lang="en-US" sz="1400" dirty="0">
-                <a:solidFill>
-                  <a:srgbClr val="E4EEDC"/>
-                </a:solidFill>
-                <a:latin typeface="Calibri" pitchFamily="34" charset="0"/>
-                <a:ea typeface="Calibri" pitchFamily="34" charset="-122"/>
-                <a:cs typeface="Calibri" pitchFamily="34" charset="-120"/>
-              </a:rPr>
-              <a:t>Il doit être situé : sur quelle population, avec quelle métrique, dans quelles limites.</a:t>
-            </a:r>
-            <a:endParaRPr lang="en-US" sz="1400" dirty="0"/>
-          </a:p>
-        </p:txBody>
-      </p:sp>
-      <p:sp>
-        <p:nvSpPr>
-          <p:cNvPr id="11" name="Shape 9"/>
-          <p:cNvSpPr/>
-          <p:nvPr/>
-        </p:nvSpPr>
-        <p:spPr>
-          <a:xfrm>
-            <a:off x="4572000" y="5148072"/>
-            <a:ext cx="128016" cy="128016"/>
-          </a:xfrm>
-          <a:prstGeom prst="ellipse">
-            <a:avLst/>
-          </a:prstGeom>
-          <a:solidFill>
-            <a:srgbClr val="97BC62"/>
-          </a:solidFill>
-          <a:ln w="12700">
-            <a:solidFill>
-              <a:srgbClr val="97BC62"/>
-            </a:solidFill>
-            <a:prstDash val="solid"/>
-          </a:ln>
-        </p:spPr>
-      </p:sp>
-      <p:sp>
-        <p:nvSpPr>
-          <p:cNvPr id="12" name="Text 10"/>
-          <p:cNvSpPr/>
-          <p:nvPr/>
-        </p:nvSpPr>
-        <p:spPr>
-          <a:xfrm>
-            <a:off x="4892040" y="4910328"/>
-            <a:ext cx="6629400" cy="548640"/>
-          </a:xfrm>
-          <a:prstGeom prst="rect">
-            <a:avLst/>
-          </a:prstGeom>
-          <a:noFill/>
-          <a:ln/>
-        </p:spPr>
-        <p:txBody>
-          <a:bodyPr wrap="square" lIns="0" tIns="0" rIns="0" bIns="0" rtlCol="0" anchor="ctr"/>
-          <a:lstStyle/>
-          <a:p>
-            <a:pPr indent="0" marL="0">
-              <a:lnSpc>
-                <a:spcPct val="115000"/>
-              </a:lnSpc>
-              <a:buNone/>
-            </a:pPr>
-            <a:r>
-              <a:rPr lang="en-US" sz="1400" dirty="0">
-                <a:solidFill>
-                  <a:srgbClr val="E4EEDC"/>
-                </a:solidFill>
-                <a:latin typeface="Calibri" pitchFamily="34" charset="0"/>
-                <a:ea typeface="Calibri" pitchFamily="34" charset="-122"/>
-                <a:cs typeface="Calibri" pitchFamily="34" charset="-120"/>
-              </a:rPr>
-              <a:t>Il doit être reproductible par quelqu'un d'autre.</a:t>
-            </a:r>
-            <a:endParaRPr lang="en-US" sz="1400" dirty="0"/>
-          </a:p>
-        </p:txBody>
-      </p:sp>
-      <p:sp>
-        <p:nvSpPr>
-          <p:cNvPr id="13" name="Text 11"/>
-          <p:cNvSpPr/>
-          <p:nvPr/>
-        </p:nvSpPr>
-        <p:spPr>
-          <a:xfrm>
-            <a:off x="4572000" y="5852160"/>
-            <a:ext cx="6949440" cy="457200"/>
-          </a:xfrm>
-          <a:prstGeom prst="rect">
-            <a:avLst/>
-          </a:prstGeom>
-          <a:noFill/>
-          <a:ln/>
-        </p:spPr>
-        <p:txBody>
-          <a:bodyPr wrap="square" lIns="0" tIns="0" rIns="0" bIns="0" rtlCol="0" anchor="ctr"/>
-          <a:lstStyle/>
-          <a:p>
-            <a:pPr indent="0" marL="0">
-              <a:buNone/>
-            </a:pPr>
-            <a:r>
-              <a:rPr lang="en-US" sz="1250" i="1" dirty="0">
-                <a:solidFill>
-                  <a:srgbClr val="97BC62"/>
-                </a:solidFill>
-                <a:latin typeface="Calibri" pitchFamily="34" charset="0"/>
-                <a:ea typeface="Calibri" pitchFamily="34" charset="-122"/>
-                <a:cs typeface="Calibri" pitchFamily="34" charset="-120"/>
-              </a:rPr>
-              <a:t>Prochaine étape : classification — une cible binaire, une autre fonction de coût, d'autres métriques que le R².</a:t>
-            </a:r>
-            <a:endParaRPr lang="en-US" sz="1250" dirty="0"/>
-          </a:p>
-        </p:txBody>
-      </p:sp>
-    </p:spTree>
-  </p:cSld>
-  <p:clrMapOvr>
-    <a:masterClrMapping/>
-  </p:clrMapOvr>
-</p:sld>
-</file>
-
-<file path=ppt/slides/slide16.xml><?xml version="1.0" encoding="utf-8"?>
 <p:sld xmlns:a="http://schemas.openxmlformats.org/drawingml/2006/main" xmlns:r="http://schemas.openxmlformats.org/officeDocument/2006/relationships" xmlns:p="http://schemas.openxmlformats.org/presentationml/2006/main">
   <p:cSld name="Slide 8">
     <p:spTree>
@@ -5937,7 +4747,7 @@
           <a:bodyPr wrap="square" lIns="0" tIns="0" rIns="0" bIns="0" rtlCol="0" anchor="ctr"/>
           <a:lstStyle/>
           <a:p>
-            <a:pPr indent="0" marL="0">
+            <a:pPr marL="0" indent="0">
               <a:buNone/>
             </a:pPr>
             <a:r>
@@ -5976,7 +4786,7 @@
           <a:bodyPr wrap="square" lIns="0" tIns="0" rIns="0" bIns="0" rtlCol="0" anchor="ctr"/>
           <a:lstStyle/>
           <a:p>
-            <a:pPr indent="0" marL="0">
+            <a:pPr marL="0" indent="0">
               <a:buNone/>
             </a:pPr>
             <a:r>
@@ -6020,6 +4830,13 @@
             <a:prstDash val="solid"/>
           </a:ln>
         </p:spPr>
+        <p:txBody>
+          <a:bodyPr/>
+          <a:lstStyle/>
+          <a:p>
+            <a:endParaRPr lang="en-US"/>
+          </a:p>
+        </p:txBody>
       </p:sp>
       <p:sp>
         <p:nvSpPr>
@@ -6042,7 +4859,7 @@
           <a:bodyPr wrap="square" lIns="0" tIns="0" rIns="0" bIns="0" rtlCol="0" anchor="ctr"/>
           <a:lstStyle/>
           <a:p>
-            <a:pPr indent="0" marL="0">
+            <a:pPr marL="0" indent="0">
               <a:buNone/>
             </a:pPr>
             <a:r>
@@ -6081,7 +4898,7 @@
           <a:bodyPr wrap="square" lIns="0" tIns="0" rIns="0" bIns="0" rtlCol="0" anchor="t"/>
           <a:lstStyle/>
           <a:p>
-            <a:pPr indent="0" marL="0">
+            <a:pPr marL="0" indent="0">
               <a:lnSpc>
                 <a:spcPct val="115000"/>
               </a:lnSpc>
@@ -6101,7 +4918,7 @@
             <a:endParaRPr lang="en-US" sz="1200" dirty="0"/>
           </a:p>
           <a:p>
-            <a:pPr indent="0" marL="0">
+            <a:pPr marL="0" indent="0">
               <a:lnSpc>
                 <a:spcPct val="115000"/>
               </a:lnSpc>
@@ -6110,7 +4927,7 @@
             <a:endParaRPr lang="en-US" sz="1200" dirty="0"/>
           </a:p>
           <a:p>
-            <a:pPr indent="0" marL="0">
+            <a:pPr marL="0" indent="0">
               <a:lnSpc>
                 <a:spcPct val="115000"/>
               </a:lnSpc>
@@ -6130,7 +4947,7 @@
             <a:endParaRPr lang="en-US" sz="1200" dirty="0"/>
           </a:p>
           <a:p>
-            <a:pPr indent="0" marL="0">
+            <a:pPr marL="0" indent="0">
               <a:lnSpc>
                 <a:spcPct val="115000"/>
               </a:lnSpc>
@@ -6150,7 +4967,7 @@
             <a:endParaRPr lang="en-US" sz="1200" dirty="0"/>
           </a:p>
           <a:p>
-            <a:pPr indent="0" marL="0">
+            <a:pPr marL="0" indent="0">
               <a:lnSpc>
                 <a:spcPct val="115000"/>
               </a:lnSpc>
@@ -6159,7 +4976,7 @@
             <a:endParaRPr lang="en-US" sz="1200" dirty="0"/>
           </a:p>
           <a:p>
-            <a:pPr indent="0" marL="0">
+            <a:pPr marL="0" indent="0">
               <a:lnSpc>
                 <a:spcPct val="115000"/>
               </a:lnSpc>
@@ -6206,6 +5023,13 @@
             <a:prstDash val="solid"/>
           </a:ln>
         </p:spPr>
+        <p:txBody>
+          <a:bodyPr/>
+          <a:lstStyle/>
+          <a:p>
+            <a:endParaRPr lang="en-US"/>
+          </a:p>
+        </p:txBody>
       </p:sp>
       <p:sp>
         <p:nvSpPr>
@@ -6228,7 +5052,7 @@
           <a:bodyPr wrap="square" lIns="0" tIns="0" rIns="0" bIns="0" rtlCol="0" anchor="ctr"/>
           <a:lstStyle/>
           <a:p>
-            <a:pPr indent="0" marL="0">
+            <a:pPr marL="0" indent="0">
               <a:buNone/>
             </a:pPr>
             <a:r>
@@ -6267,7 +5091,7 @@
           <a:bodyPr wrap="square" lIns="0" tIns="0" rIns="0" bIns="0" rtlCol="0" anchor="t"/>
           <a:lstStyle/>
           <a:p>
-            <a:pPr indent="0" marL="0">
+            <a:pPr marL="0" indent="0">
               <a:lnSpc>
                 <a:spcPct val="115000"/>
               </a:lnSpc>
@@ -6287,7 +5111,7 @@
             <a:endParaRPr lang="en-US" sz="1200" dirty="0"/>
           </a:p>
           <a:p>
-            <a:pPr indent="0" marL="0">
+            <a:pPr marL="0" indent="0">
               <a:lnSpc>
                 <a:spcPct val="115000"/>
               </a:lnSpc>
@@ -6296,7 +5120,7 @@
             <a:endParaRPr lang="en-US" sz="1200" dirty="0"/>
           </a:p>
           <a:p>
-            <a:pPr indent="0" marL="0">
+            <a:pPr marL="0" indent="0">
               <a:lnSpc>
                 <a:spcPct val="115000"/>
               </a:lnSpc>
@@ -6316,7 +5140,7 @@
             <a:endParaRPr lang="en-US" sz="1200" dirty="0"/>
           </a:p>
           <a:p>
-            <a:pPr indent="0" marL="0">
+            <a:pPr marL="0" indent="0">
               <a:lnSpc>
                 <a:spcPct val="115000"/>
               </a:lnSpc>
@@ -6336,7 +5160,7 @@
             <a:endParaRPr lang="en-US" sz="1200" dirty="0"/>
           </a:p>
           <a:p>
-            <a:pPr indent="0" marL="0">
+            <a:pPr marL="0" indent="0">
               <a:lnSpc>
                 <a:spcPct val="115000"/>
               </a:lnSpc>
@@ -6345,7 +5169,7 @@
             <a:endParaRPr lang="en-US" sz="1200" dirty="0"/>
           </a:p>
           <a:p>
-            <a:pPr indent="0" marL="0">
+            <a:pPr marL="0" indent="0">
               <a:lnSpc>
                 <a:spcPct val="115000"/>
               </a:lnSpc>
@@ -6392,6 +5216,13 @@
             <a:prstDash val="solid"/>
           </a:ln>
         </p:spPr>
+        <p:txBody>
+          <a:bodyPr/>
+          <a:lstStyle/>
+          <a:p>
+            <a:endParaRPr lang="en-US"/>
+          </a:p>
+        </p:txBody>
       </p:sp>
       <p:sp>
         <p:nvSpPr>
@@ -6414,7 +5245,7 @@
           <a:bodyPr wrap="square" lIns="0" tIns="0" rIns="0" bIns="0" rtlCol="0" anchor="ctr"/>
           <a:lstStyle/>
           <a:p>
-            <a:pPr indent="0" marL="0">
+            <a:pPr marL="0" indent="0">
               <a:buNone/>
             </a:pPr>
             <a:r>
@@ -6440,7 +5271,7 @@
 </p:sld>
 </file>
 
-<file path=ppt/slides/slide17.xml><?xml version="1.0" encoding="utf-8"?>
+<file path=ppt/slides/slide15.xml><?xml version="1.0" encoding="utf-8"?>
 <p:sld xmlns:a="http://schemas.openxmlformats.org/drawingml/2006/main" xmlns:r="http://schemas.openxmlformats.org/officeDocument/2006/relationships" xmlns:p="http://schemas.openxmlformats.org/presentationml/2006/main">
   <p:cSld name="Slide 11">
     <p:spTree>
@@ -6478,7 +5309,7 @@
           <a:bodyPr wrap="square" lIns="0" tIns="0" rIns="0" bIns="0" rtlCol="0" anchor="ctr"/>
           <a:lstStyle/>
           <a:p>
-            <a:pPr indent="0" marL="0">
+            <a:pPr marL="0" indent="0">
               <a:buNone/>
             </a:pPr>
             <a:r>
@@ -6517,7 +5348,7 @@
           <a:bodyPr wrap="square" lIns="0" tIns="0" rIns="0" bIns="0" rtlCol="0" anchor="ctr"/>
           <a:lstStyle/>
           <a:p>
-            <a:pPr indent="0" marL="0">
+            <a:pPr marL="0" indent="0">
               <a:buNone/>
             </a:pPr>
             <a:r>
@@ -6561,6 +5392,13 @@
             <a:prstDash val="solid"/>
           </a:ln>
         </p:spPr>
+        <p:txBody>
+          <a:bodyPr/>
+          <a:lstStyle/>
+          <a:p>
+            <a:endParaRPr lang="en-US"/>
+          </a:p>
+        </p:txBody>
       </p:sp>
       <p:sp>
         <p:nvSpPr>
@@ -6583,7 +5421,7 @@
           <a:bodyPr wrap="square" lIns="0" tIns="0" rIns="0" bIns="0" rtlCol="0" anchor="ctr"/>
           <a:lstStyle/>
           <a:p>
-            <a:pPr indent="0" marL="0">
+            <a:pPr marL="0" indent="0">
               <a:buNone/>
             </a:pPr>
             <a:r>
@@ -6622,7 +5460,7 @@
           <a:bodyPr wrap="square" lIns="0" tIns="0" rIns="0" bIns="0" rtlCol="0" anchor="t"/>
           <a:lstStyle/>
           <a:p>
-            <a:pPr indent="0" marL="0">
+            <a:pPr marL="0" indent="0">
               <a:lnSpc>
                 <a:spcPct val="115000"/>
               </a:lnSpc>
@@ -6669,6 +5507,13 @@
             <a:prstDash val="solid"/>
           </a:ln>
         </p:spPr>
+        <p:txBody>
+          <a:bodyPr/>
+          <a:lstStyle/>
+          <a:p>
+            <a:endParaRPr lang="en-US"/>
+          </a:p>
+        </p:txBody>
       </p:sp>
       <p:sp>
         <p:nvSpPr>
@@ -6691,7 +5536,7 @@
           <a:bodyPr wrap="square" lIns="0" tIns="0" rIns="0" bIns="0" rtlCol="0" anchor="ctr"/>
           <a:lstStyle/>
           <a:p>
-            <a:pPr indent="0" marL="0">
+            <a:pPr marL="0" indent="0">
               <a:buNone/>
             </a:pPr>
             <a:r>
@@ -6730,7 +5575,7 @@
           <a:bodyPr wrap="square" lIns="0" tIns="0" rIns="0" bIns="0" rtlCol="0" anchor="ctr"/>
           <a:lstStyle/>
           <a:p>
-            <a:pPr indent="0" marL="0">
+            <a:pPr marL="0" indent="0">
               <a:lnSpc>
                 <a:spcPct val="115000"/>
               </a:lnSpc>
@@ -6777,6 +5622,13 @@
             <a:prstDash val="solid"/>
           </a:ln>
         </p:spPr>
+        <p:txBody>
+          <a:bodyPr/>
+          <a:lstStyle/>
+          <a:p>
+            <a:endParaRPr lang="en-US"/>
+          </a:p>
+        </p:txBody>
       </p:sp>
       <p:sp>
         <p:nvSpPr>
@@ -6799,7 +5651,7 @@
           <a:bodyPr wrap="square" lIns="0" tIns="0" rIns="0" bIns="0" rtlCol="0" anchor="ctr"/>
           <a:lstStyle/>
           <a:p>
-            <a:pPr indent="0" marL="0">
+            <a:pPr marL="0" indent="0">
               <a:buNone/>
             </a:pPr>
             <a:r>
@@ -6838,7 +5690,7 @@
           <a:bodyPr wrap="square" lIns="0" tIns="0" rIns="0" bIns="0" rtlCol="0" anchor="ctr"/>
           <a:lstStyle/>
           <a:p>
-            <a:pPr indent="0" marL="0">
+            <a:pPr marL="0" indent="0">
               <a:buNone/>
             </a:pPr>
             <a:r>
@@ -6877,7 +5729,7 @@
           <a:bodyPr wrap="square" lIns="0" tIns="0" rIns="0" bIns="0" rtlCol="0" anchor="ctr"/>
           <a:lstStyle/>
           <a:p>
-            <a:pPr algn="ctr" indent="0" marL="0">
+            <a:pPr marL="0" indent="0" algn="ctr">
               <a:buNone/>
             </a:pPr>
             <a:r>
@@ -6916,7 +5768,7 @@
           <a:bodyPr wrap="square" lIns="0" tIns="0" rIns="0" bIns="0" rtlCol="0" anchor="ctr"/>
           <a:lstStyle/>
           <a:p>
-            <a:pPr indent="0" marL="0">
+            <a:pPr marL="0" indent="0">
               <a:buNone/>
             </a:pPr>
             <a:r>
@@ -6955,7 +5807,7 @@
           <a:bodyPr wrap="square" lIns="0" tIns="0" rIns="0" bIns="0" rtlCol="0" anchor="ctr"/>
           <a:lstStyle/>
           <a:p>
-            <a:pPr indent="0" marL="0">
+            <a:pPr marL="0" indent="0">
               <a:buNone/>
             </a:pPr>
             <a:r>
@@ -6999,6 +5851,13 @@
             <a:prstDash val="solid"/>
           </a:ln>
         </p:spPr>
+        <p:txBody>
+          <a:bodyPr/>
+          <a:lstStyle/>
+          <a:p>
+            <a:endParaRPr lang="en-US"/>
+          </a:p>
+        </p:txBody>
       </p:sp>
       <p:sp>
         <p:nvSpPr>
@@ -7021,7 +5880,7 @@
           <a:bodyPr wrap="square" lIns="0" tIns="0" rIns="0" bIns="0" rtlCol="0" anchor="ctr"/>
           <a:lstStyle/>
           <a:p>
-            <a:pPr indent="0" marL="0">
+            <a:pPr marL="0" indent="0">
               <a:buNone/>
             </a:pPr>
             <a:r>
@@ -7047,7 +5906,7 @@
 </p:sld>
 </file>
 
-<file path=ppt/slides/slide18.xml><?xml version="1.0" encoding="utf-8"?>
+<file path=ppt/slides/slide16.xml><?xml version="1.0" encoding="utf-8"?>
 <p:sld xmlns:a="http://schemas.openxmlformats.org/drawingml/2006/main" xmlns:r="http://schemas.openxmlformats.org/officeDocument/2006/relationships" xmlns:p="http://schemas.openxmlformats.org/presentationml/2006/main">
   <p:cSld name="Slide 12">
     <p:spTree>
@@ -7085,7 +5944,7 @@
           <a:bodyPr wrap="square" lIns="0" tIns="0" rIns="0" bIns="0" rtlCol="0" anchor="ctr"/>
           <a:lstStyle/>
           <a:p>
-            <a:pPr indent="0" marL="0">
+            <a:pPr marL="0" indent="0">
               <a:buNone/>
             </a:pPr>
             <a:r>
@@ -7124,7 +5983,7 @@
           <a:bodyPr wrap="square" lIns="0" tIns="0" rIns="0" bIns="0" rtlCol="0" anchor="ctr"/>
           <a:lstStyle/>
           <a:p>
-            <a:pPr indent="0" marL="0">
+            <a:pPr marL="0" indent="0">
               <a:buNone/>
             </a:pPr>
             <a:r>
@@ -7168,6 +6027,13 @@
             <a:prstDash val="solid"/>
           </a:ln>
         </p:spPr>
+        <p:txBody>
+          <a:bodyPr/>
+          <a:lstStyle/>
+          <a:p>
+            <a:endParaRPr lang="en-US"/>
+          </a:p>
+        </p:txBody>
       </p:sp>
       <p:sp>
         <p:nvSpPr>
@@ -7190,7 +6056,7 @@
           <a:bodyPr wrap="square" lIns="0" tIns="0" rIns="0" bIns="0" rtlCol="0" anchor="ctr"/>
           <a:lstStyle/>
           <a:p>
-            <a:pPr indent="0" marL="0">
+            <a:pPr marL="0" indent="0">
               <a:buNone/>
             </a:pPr>
             <a:r>
@@ -7229,7 +6095,7 @@
           <a:bodyPr wrap="square" lIns="0" tIns="0" rIns="0" bIns="0" rtlCol="0" anchor="t"/>
           <a:lstStyle/>
           <a:p>
-            <a:pPr indent="0" marL="0">
+            <a:pPr marL="0" indent="0">
               <a:lnSpc>
                 <a:spcPct val="115000"/>
               </a:lnSpc>
@@ -7276,6 +6142,13 @@
             <a:prstDash val="solid"/>
           </a:ln>
         </p:spPr>
+        <p:txBody>
+          <a:bodyPr/>
+          <a:lstStyle/>
+          <a:p>
+            <a:endParaRPr lang="en-US"/>
+          </a:p>
+        </p:txBody>
       </p:sp>
       <p:sp>
         <p:nvSpPr>
@@ -7298,7 +6171,7 @@
           <a:bodyPr wrap="square" lIns="0" tIns="0" rIns="0" bIns="0" rtlCol="0" anchor="ctr"/>
           <a:lstStyle/>
           <a:p>
-            <a:pPr indent="0" marL="0">
+            <a:pPr marL="0" indent="0">
               <a:buNone/>
             </a:pPr>
             <a:r>
@@ -7337,7 +6210,7 @@
           <a:bodyPr wrap="square" lIns="0" tIns="0" rIns="0" bIns="0" rtlCol="0" anchor="t"/>
           <a:lstStyle/>
           <a:p>
-            <a:pPr indent="0" marL="0">
+            <a:pPr marL="0" indent="0">
               <a:lnSpc>
                 <a:spcPct val="115000"/>
               </a:lnSpc>
@@ -7384,6 +6257,13 @@
             <a:prstDash val="solid"/>
           </a:ln>
         </p:spPr>
+        <p:txBody>
+          <a:bodyPr/>
+          <a:lstStyle/>
+          <a:p>
+            <a:endParaRPr lang="en-US"/>
+          </a:p>
+        </p:txBody>
       </p:sp>
       <p:sp>
         <p:nvSpPr>
@@ -7406,7 +6286,7 @@
           <a:bodyPr wrap="square" lIns="0" tIns="0" rIns="0" bIns="0" rtlCol="0" anchor="ctr"/>
           <a:lstStyle/>
           <a:p>
-            <a:pPr indent="0" marL="0">
+            <a:pPr marL="0" indent="0">
               <a:buNone/>
             </a:pPr>
             <a:r>
@@ -7445,7 +6325,7 @@
           <a:bodyPr wrap="square" lIns="0" tIns="0" rIns="0" bIns="0" rtlCol="0" anchor="t"/>
           <a:lstStyle/>
           <a:p>
-            <a:pPr indent="0" marL="0">
+            <a:pPr marL="0" indent="0">
               <a:lnSpc>
                 <a:spcPct val="115000"/>
               </a:lnSpc>
@@ -7492,6 +6372,13 @@
             <a:prstDash val="solid"/>
           </a:ln>
         </p:spPr>
+        <p:txBody>
+          <a:bodyPr/>
+          <a:lstStyle/>
+          <a:p>
+            <a:endParaRPr lang="en-US"/>
+          </a:p>
+        </p:txBody>
       </p:sp>
       <p:sp>
         <p:nvSpPr>
@@ -7514,7 +6401,7 @@
           <a:bodyPr wrap="square" lIns="0" tIns="0" rIns="0" bIns="0" rtlCol="0" anchor="ctr"/>
           <a:lstStyle/>
           <a:p>
-            <a:pPr indent="0" marL="0">
+            <a:pPr marL="0" indent="0">
               <a:buNone/>
             </a:pPr>
             <a:r>
@@ -7553,7 +6440,7 @@
           <a:bodyPr wrap="square" lIns="0" tIns="0" rIns="0" bIns="0" rtlCol="0" anchor="ctr"/>
           <a:lstStyle/>
           <a:p>
-            <a:pPr indent="0" marL="0">
+            <a:pPr marL="0" indent="0">
               <a:lnSpc>
                 <a:spcPct val="115000"/>
               </a:lnSpc>
@@ -7582,7 +6469,7 @@
 </p:sld>
 </file>
 
-<file path=ppt/slides/slide19.xml><?xml version="1.0" encoding="utf-8"?>
+<file path=ppt/slides/slide17.xml><?xml version="1.0" encoding="utf-8"?>
 <p:sld xmlns:a="http://schemas.openxmlformats.org/drawingml/2006/main" xmlns:r="http://schemas.openxmlformats.org/officeDocument/2006/relationships" xmlns:p="http://schemas.openxmlformats.org/presentationml/2006/main">
   <p:cSld name="Slide 12">
     <p:spTree>
@@ -7620,7 +6507,7 @@
           <a:bodyPr wrap="square" lIns="0" tIns="0" rIns="0" bIns="0" rtlCol="0" anchor="ctr"/>
           <a:lstStyle/>
           <a:p>
-            <a:pPr indent="0" marL="0">
+            <a:pPr marL="0" indent="0">
               <a:buNone/>
             </a:pPr>
             <a:r>
@@ -7659,7 +6546,7 @@
           <a:bodyPr wrap="square" lIns="0" tIns="0" rIns="0" bIns="0" rtlCol="0" anchor="ctr"/>
           <a:lstStyle/>
           <a:p>
-            <a:pPr indent="0" marL="0">
+            <a:pPr marL="0" indent="0">
               <a:buNone/>
             </a:pPr>
             <a:r>
@@ -7703,6 +6590,13 @@
             <a:prstDash val="solid"/>
           </a:ln>
         </p:spPr>
+        <p:txBody>
+          <a:bodyPr/>
+          <a:lstStyle/>
+          <a:p>
+            <a:endParaRPr lang="en-US"/>
+          </a:p>
+        </p:txBody>
       </p:sp>
       <p:sp>
         <p:nvSpPr>
@@ -7725,7 +6619,7 @@
           <a:bodyPr wrap="square" lIns="0" tIns="0" rIns="0" bIns="0" rtlCol="0" anchor="ctr"/>
           <a:lstStyle/>
           <a:p>
-            <a:pPr indent="0" marL="0">
+            <a:pPr marL="0" indent="0">
               <a:buNone/>
             </a:pPr>
             <a:r>
@@ -7764,7 +6658,7 @@
           <a:bodyPr wrap="square" lIns="0" tIns="0" rIns="0" bIns="0" rtlCol="0" anchor="t"/>
           <a:lstStyle/>
           <a:p>
-            <a:pPr indent="0" marL="0">
+            <a:pPr marL="0" indent="0">
               <a:lnSpc>
                 <a:spcPct val="115000"/>
               </a:lnSpc>
@@ -7811,6 +6705,13 @@
             <a:prstDash val="solid"/>
           </a:ln>
         </p:spPr>
+        <p:txBody>
+          <a:bodyPr/>
+          <a:lstStyle/>
+          <a:p>
+            <a:endParaRPr lang="en-US"/>
+          </a:p>
+        </p:txBody>
       </p:sp>
       <p:sp>
         <p:nvSpPr>
@@ -7833,7 +6734,7 @@
           <a:bodyPr wrap="square" lIns="0" tIns="0" rIns="0" bIns="0" rtlCol="0" anchor="ctr"/>
           <a:lstStyle/>
           <a:p>
-            <a:pPr indent="0" marL="0">
+            <a:pPr marL="0" indent="0">
               <a:buNone/>
             </a:pPr>
             <a:r>
@@ -7872,7 +6773,7 @@
           <a:bodyPr wrap="square" lIns="0" tIns="0" rIns="0" bIns="0" rtlCol="0" anchor="t"/>
           <a:lstStyle/>
           <a:p>
-            <a:pPr indent="0" marL="0">
+            <a:pPr marL="0" indent="0">
               <a:lnSpc>
                 <a:spcPct val="115000"/>
               </a:lnSpc>
@@ -7919,6 +6820,13 @@
             <a:prstDash val="solid"/>
           </a:ln>
         </p:spPr>
+        <p:txBody>
+          <a:bodyPr/>
+          <a:lstStyle/>
+          <a:p>
+            <a:endParaRPr lang="en-US"/>
+          </a:p>
+        </p:txBody>
       </p:sp>
       <p:sp>
         <p:nvSpPr>
@@ -7941,7 +6849,7 @@
           <a:bodyPr wrap="square" lIns="0" tIns="0" rIns="0" bIns="0" rtlCol="0" anchor="ctr"/>
           <a:lstStyle/>
           <a:p>
-            <a:pPr indent="0" marL="0">
+            <a:pPr marL="0" indent="0">
               <a:buNone/>
             </a:pPr>
             <a:r>
@@ -7980,7 +6888,7 @@
           <a:bodyPr wrap="square" lIns="0" tIns="0" rIns="0" bIns="0" rtlCol="0" anchor="t"/>
           <a:lstStyle/>
           <a:p>
-            <a:pPr indent="0" marL="0">
+            <a:pPr marL="0" indent="0">
               <a:lnSpc>
                 <a:spcPct val="115000"/>
               </a:lnSpc>
@@ -8027,6 +6935,13 @@
             <a:prstDash val="solid"/>
           </a:ln>
         </p:spPr>
+        <p:txBody>
+          <a:bodyPr/>
+          <a:lstStyle/>
+          <a:p>
+            <a:endParaRPr lang="en-US"/>
+          </a:p>
+        </p:txBody>
       </p:sp>
       <p:sp>
         <p:nvSpPr>
@@ -8049,7 +6964,7 @@
           <a:bodyPr wrap="square" lIns="0" tIns="0" rIns="0" bIns="0" rtlCol="0" anchor="ctr"/>
           <a:lstStyle/>
           <a:p>
-            <a:pPr indent="0" marL="0">
+            <a:pPr marL="0" indent="0">
               <a:buNone/>
             </a:pPr>
             <a:r>
@@ -8088,7 +7003,7 @@
           <a:bodyPr wrap="square" lIns="0" tIns="0" rIns="0" bIns="0" rtlCol="0" anchor="ctr"/>
           <a:lstStyle/>
           <a:p>
-            <a:pPr indent="0" marL="0">
+            <a:pPr marL="0" indent="0">
               <a:lnSpc>
                 <a:spcPct val="115000"/>
               </a:lnSpc>
@@ -8106,6 +7021,1488 @@
               <a:t>Il signale un tirage favorable, pas un bon modèle. Le classement de plusieurs modèles reste valide s'ils partagent le même découpage ; les valeurs absolues, non. La validation croisée tranche.</a:t>
             </a:r>
             <a:endParaRPr lang="en-US" sz="1250" dirty="0"/>
+          </a:p>
+        </p:txBody>
+      </p:sp>
+    </p:spTree>
+  </p:cSld>
+  <p:clrMapOvr>
+    <a:masterClrMapping/>
+  </p:clrMapOvr>
+</p:sld>
+</file>
+
+<file path=ppt/slides/slide18.xml><?xml version="1.0" encoding="utf-8"?>
+<p:sld xmlns:a="http://schemas.openxmlformats.org/drawingml/2006/main" xmlns:r="http://schemas.openxmlformats.org/officeDocument/2006/relationships" xmlns:p="http://schemas.openxmlformats.org/presentationml/2006/main">
+  <p:cSld name="Slide 11">
+    <p:spTree>
+      <p:nvGrpSpPr>
+        <p:cNvPr id="1" name=""/>
+        <p:cNvGrpSpPr/>
+        <p:nvPr/>
+      </p:nvGrpSpPr>
+      <p:grpSpPr>
+        <a:xfrm>
+          <a:off x="0" y="0"/>
+          <a:ext cx="0" cy="0"/>
+          <a:chOff x="0" y="0"/>
+          <a:chExt cx="0" cy="0"/>
+        </a:xfrm>
+      </p:grpSpPr>
+      <p:sp>
+        <p:nvSpPr>
+          <p:cNvPr id="2" name="Text 0"/>
+          <p:cNvSpPr/>
+          <p:nvPr/>
+        </p:nvSpPr>
+        <p:spPr>
+          <a:xfrm>
+            <a:off x="640080" y="384048"/>
+            <a:ext cx="10881360" cy="685800"/>
+          </a:xfrm>
+          <a:prstGeom prst="rect">
+            <a:avLst/>
+          </a:prstGeom>
+          <a:noFill/>
+          <a:ln/>
+        </p:spPr>
+        <p:txBody>
+          <a:bodyPr wrap="square" lIns="0" tIns="0" rIns="0" bIns="0" rtlCol="0" anchor="ctr"/>
+          <a:lstStyle/>
+          <a:p>
+            <a:pPr marL="0" indent="0">
+              <a:buNone/>
+            </a:pPr>
+            <a:r>
+              <a:rPr lang="en-US" sz="3400" b="1" dirty="0">
+                <a:solidFill>
+                  <a:srgbClr val="1F2A1F"/>
+                </a:solidFill>
+                <a:latin typeface="Cambria" pitchFamily="34" charset="0"/>
+                <a:ea typeface="Cambria" pitchFamily="34" charset="-122"/>
+                <a:cs typeface="Cambria" pitchFamily="34" charset="-120"/>
+              </a:rPr>
+              <a:t>Comparer à quoi ?</a:t>
+            </a:r>
+            <a:endParaRPr lang="en-US" sz="3400" dirty="0"/>
+          </a:p>
+        </p:txBody>
+      </p:sp>
+      <p:sp>
+        <p:nvSpPr>
+          <p:cNvPr id="3" name="Text 1"/>
+          <p:cNvSpPr/>
+          <p:nvPr/>
+        </p:nvSpPr>
+        <p:spPr>
+          <a:xfrm>
+            <a:off x="640080" y="1078992"/>
+            <a:ext cx="10881360" cy="384048"/>
+          </a:xfrm>
+          <a:prstGeom prst="rect">
+            <a:avLst/>
+          </a:prstGeom>
+          <a:noFill/>
+          <a:ln/>
+        </p:spPr>
+        <p:txBody>
+          <a:bodyPr wrap="square" lIns="0" tIns="0" rIns="0" bIns="0" rtlCol="0" anchor="ctr"/>
+          <a:lstStyle/>
+          <a:p>
+            <a:pPr marL="0" indent="0">
+              <a:buNone/>
+            </a:pPr>
+            <a:r>
+              <a:rPr lang="en-US" sz="1400" i="1" dirty="0">
+                <a:solidFill>
+                  <a:srgbClr val="5E6E5E"/>
+                </a:solidFill>
+                <a:latin typeface="Calibri" pitchFamily="34" charset="0"/>
+                <a:ea typeface="Calibri" pitchFamily="34" charset="-122"/>
+                <a:cs typeface="Calibri" pitchFamily="34" charset="-120"/>
+              </a:rPr>
+              <a:t>Une erreur ne se juge que relativement</a:t>
+            </a:r>
+            <a:endParaRPr lang="en-US" sz="1400" dirty="0"/>
+          </a:p>
+        </p:txBody>
+      </p:sp>
+      <p:sp>
+        <p:nvSpPr>
+          <p:cNvPr id="4" name="Shape 2"/>
+          <p:cNvSpPr/>
+          <p:nvPr/>
+        </p:nvSpPr>
+        <p:spPr>
+          <a:xfrm>
+            <a:off x="640080" y="1737360"/>
+            <a:ext cx="5166360" cy="1828800"/>
+          </a:xfrm>
+          <a:prstGeom prst="roundRect">
+            <a:avLst>
+              <a:gd name="adj" fmla="val 4000"/>
+            </a:avLst>
+          </a:prstGeom>
+          <a:solidFill>
+            <a:srgbClr val="EDF2E6"/>
+          </a:solidFill>
+          <a:ln w="12700">
+            <a:solidFill>
+              <a:srgbClr val="EDF2E6"/>
+            </a:solidFill>
+            <a:prstDash val="solid"/>
+          </a:ln>
+        </p:spPr>
+        <p:txBody>
+          <a:bodyPr/>
+          <a:lstStyle/>
+          <a:p>
+            <a:endParaRPr lang="en-US"/>
+          </a:p>
+        </p:txBody>
+      </p:sp>
+      <p:sp>
+        <p:nvSpPr>
+          <p:cNvPr id="5" name="Text 3"/>
+          <p:cNvSpPr/>
+          <p:nvPr/>
+        </p:nvSpPr>
+        <p:spPr>
+          <a:xfrm>
+            <a:off x="960120" y="1920240"/>
+            <a:ext cx="4389120" cy="310896"/>
+          </a:xfrm>
+          <a:prstGeom prst="rect">
+            <a:avLst/>
+          </a:prstGeom>
+          <a:noFill/>
+          <a:ln/>
+        </p:spPr>
+        <p:txBody>
+          <a:bodyPr wrap="square" lIns="0" tIns="0" rIns="0" bIns="0" rtlCol="0" anchor="ctr"/>
+          <a:lstStyle/>
+          <a:p>
+            <a:pPr marL="0" indent="0">
+              <a:buNone/>
+            </a:pPr>
+            <a:r>
+              <a:rPr lang="en-US" sz="1700" b="1" dirty="0">
+                <a:solidFill>
+                  <a:srgbClr val="5E6E5E"/>
+                </a:solidFill>
+                <a:latin typeface="Cambria" pitchFamily="34" charset="0"/>
+                <a:ea typeface="Cambria" pitchFamily="34" charset="-122"/>
+                <a:cs typeface="Cambria" pitchFamily="34" charset="-120"/>
+              </a:rPr>
+              <a:t>La référence naïve</a:t>
+            </a:r>
+            <a:endParaRPr lang="en-US" sz="1700" dirty="0"/>
+          </a:p>
+        </p:txBody>
+      </p:sp>
+      <p:sp>
+        <p:nvSpPr>
+          <p:cNvPr id="6" name="Text 4"/>
+          <p:cNvSpPr/>
+          <p:nvPr/>
+        </p:nvSpPr>
+        <p:spPr>
+          <a:xfrm>
+            <a:off x="960120" y="2377440"/>
+            <a:ext cx="4572000" cy="1005840"/>
+          </a:xfrm>
+          <a:prstGeom prst="rect">
+            <a:avLst/>
+          </a:prstGeom>
+          <a:noFill/>
+          <a:ln/>
+        </p:spPr>
+        <p:txBody>
+          <a:bodyPr wrap="square" lIns="0" tIns="0" rIns="0" bIns="0" rtlCol="0" anchor="t"/>
+          <a:lstStyle/>
+          <a:p>
+            <a:pPr marL="0" indent="0">
+              <a:lnSpc>
+                <a:spcPct val="115000"/>
+              </a:lnSpc>
+              <a:buNone/>
+            </a:pPr>
+            <a:r>
+              <a:rPr lang="en-US" sz="1200" dirty="0">
+                <a:solidFill>
+                  <a:srgbClr val="1F2A1F"/>
+                </a:solidFill>
+                <a:latin typeface="Calibri" pitchFamily="34" charset="0"/>
+                <a:ea typeface="Calibri" pitchFamily="34" charset="-122"/>
+                <a:cs typeface="Calibri" pitchFamily="34" charset="-120"/>
+              </a:rPr>
+              <a:t>Prédire la moyenne du parc pour tous les véhicules, sans regarder aucune variable. C'est le modèle le plus bête possible — et le point de départ obligé.</a:t>
+            </a:r>
+            <a:endParaRPr lang="en-US" sz="1200" dirty="0"/>
+          </a:p>
+        </p:txBody>
+      </p:sp>
+      <p:sp>
+        <p:nvSpPr>
+          <p:cNvPr id="7" name="Shape 5"/>
+          <p:cNvSpPr/>
+          <p:nvPr/>
+        </p:nvSpPr>
+        <p:spPr>
+          <a:xfrm>
+            <a:off x="6355080" y="1737360"/>
+            <a:ext cx="5166360" cy="1828800"/>
+          </a:xfrm>
+          <a:prstGeom prst="roundRect">
+            <a:avLst>
+              <a:gd name="adj" fmla="val 4000"/>
+            </a:avLst>
+          </a:prstGeom>
+          <a:solidFill>
+            <a:srgbClr val="1A3A1C"/>
+          </a:solidFill>
+          <a:ln w="12700">
+            <a:solidFill>
+              <a:srgbClr val="1A3A1C"/>
+            </a:solidFill>
+            <a:prstDash val="solid"/>
+          </a:ln>
+        </p:spPr>
+        <p:txBody>
+          <a:bodyPr/>
+          <a:lstStyle/>
+          <a:p>
+            <a:endParaRPr lang="en-US"/>
+          </a:p>
+        </p:txBody>
+      </p:sp>
+      <p:sp>
+        <p:nvSpPr>
+          <p:cNvPr id="8" name="Text 6"/>
+          <p:cNvSpPr/>
+          <p:nvPr/>
+        </p:nvSpPr>
+        <p:spPr>
+          <a:xfrm>
+            <a:off x="6675120" y="1920240"/>
+            <a:ext cx="4389120" cy="310896"/>
+          </a:xfrm>
+          <a:prstGeom prst="rect">
+            <a:avLst/>
+          </a:prstGeom>
+          <a:noFill/>
+          <a:ln/>
+        </p:spPr>
+        <p:txBody>
+          <a:bodyPr wrap="square" lIns="0" tIns="0" rIns="0" bIns="0" rtlCol="0" anchor="ctr"/>
+          <a:lstStyle/>
+          <a:p>
+            <a:pPr marL="0" indent="0">
+              <a:buNone/>
+            </a:pPr>
+            <a:r>
+              <a:rPr lang="en-US" sz="1700" b="1" dirty="0">
+                <a:solidFill>
+                  <a:srgbClr val="97BC62"/>
+                </a:solidFill>
+                <a:latin typeface="Cambria" pitchFamily="34" charset="0"/>
+                <a:ea typeface="Cambria" pitchFamily="34" charset="-122"/>
+                <a:cs typeface="Cambria" pitchFamily="34" charset="-120"/>
+              </a:rPr>
+              <a:t>Ce qu'elle révèle</a:t>
+            </a:r>
+            <a:endParaRPr lang="en-US" sz="1700" dirty="0"/>
+          </a:p>
+        </p:txBody>
+      </p:sp>
+      <p:sp>
+        <p:nvSpPr>
+          <p:cNvPr id="9" name="Text 7"/>
+          <p:cNvSpPr/>
+          <p:nvPr/>
+        </p:nvSpPr>
+        <p:spPr>
+          <a:xfrm>
+            <a:off x="6675120" y="2377440"/>
+            <a:ext cx="4572000" cy="1005840"/>
+          </a:xfrm>
+          <a:prstGeom prst="rect">
+            <a:avLst/>
+          </a:prstGeom>
+          <a:noFill/>
+          <a:ln/>
+        </p:spPr>
+        <p:txBody>
+          <a:bodyPr wrap="square" lIns="0" tIns="0" rIns="0" bIns="0" rtlCol="0" anchor="ctr"/>
+          <a:lstStyle/>
+          <a:p>
+            <a:pPr marL="0" indent="0">
+              <a:lnSpc>
+                <a:spcPct val="115000"/>
+              </a:lnSpc>
+              <a:buNone/>
+            </a:pPr>
+            <a:r>
+              <a:rPr lang="en-US" sz="1200" dirty="0">
+                <a:solidFill>
+                  <a:srgbClr val="FFFFFF"/>
+                </a:solidFill>
+                <a:latin typeface="Calibri" pitchFamily="34" charset="0"/>
+                <a:ea typeface="Calibri" pitchFamily="34" charset="-122"/>
+                <a:cs typeface="Calibri" pitchFamily="34" charset="-120"/>
+              </a:rPr>
+              <a:t>15,5 g/km d'erreur ne veut rien dire seul. Rapporté à la référence, ça devient un résultat : masse, puissance et boîte divisent l'erreur par 2,8.</a:t>
+            </a:r>
+            <a:endParaRPr lang="en-US" sz="1200" dirty="0"/>
+          </a:p>
+        </p:txBody>
+      </p:sp>
+      <p:sp>
+        <p:nvSpPr>
+          <p:cNvPr id="10" name="Shape 8"/>
+          <p:cNvSpPr/>
+          <p:nvPr/>
+        </p:nvSpPr>
+        <p:spPr>
+          <a:xfrm>
+            <a:off x="640080" y="3794760"/>
+            <a:ext cx="10881360" cy="1051560"/>
+          </a:xfrm>
+          <a:prstGeom prst="roundRect">
+            <a:avLst>
+              <a:gd name="adj" fmla="val 6957"/>
+            </a:avLst>
+          </a:prstGeom>
+          <a:solidFill>
+            <a:srgbClr val="EDF2E6"/>
+          </a:solidFill>
+          <a:ln w="12700">
+            <a:solidFill>
+              <a:srgbClr val="EDF2E6"/>
+            </a:solidFill>
+            <a:prstDash val="solid"/>
+          </a:ln>
+        </p:spPr>
+        <p:txBody>
+          <a:bodyPr/>
+          <a:lstStyle/>
+          <a:p>
+            <a:endParaRPr lang="en-US"/>
+          </a:p>
+        </p:txBody>
+      </p:sp>
+      <p:sp>
+        <p:nvSpPr>
+          <p:cNvPr id="11" name="Text 9"/>
+          <p:cNvSpPr/>
+          <p:nvPr/>
+        </p:nvSpPr>
+        <p:spPr>
+          <a:xfrm>
+            <a:off x="1005840" y="3931920"/>
+            <a:ext cx="2743200" cy="685800"/>
+          </a:xfrm>
+          <a:prstGeom prst="rect">
+            <a:avLst/>
+          </a:prstGeom>
+          <a:noFill/>
+          <a:ln/>
+        </p:spPr>
+        <p:txBody>
+          <a:bodyPr wrap="square" lIns="0" tIns="0" rIns="0" bIns="0" rtlCol="0" anchor="ctr"/>
+          <a:lstStyle/>
+          <a:p>
+            <a:pPr marL="0" indent="0">
+              <a:buNone/>
+            </a:pPr>
+            <a:r>
+              <a:rPr lang="en-US" sz="3200" b="1" dirty="0">
+                <a:solidFill>
+                  <a:srgbClr val="5E6E5E"/>
+                </a:solidFill>
+                <a:latin typeface="Cambria" pitchFamily="34" charset="0"/>
+                <a:ea typeface="Cambria" pitchFamily="34" charset="-122"/>
+                <a:cs typeface="Cambria" pitchFamily="34" charset="-120"/>
+              </a:rPr>
+              <a:t>42,9 g/km</a:t>
+            </a:r>
+            <a:endParaRPr lang="en-US" sz="3200" dirty="0"/>
+          </a:p>
+        </p:txBody>
+      </p:sp>
+      <p:sp>
+        <p:nvSpPr>
+          <p:cNvPr id="12" name="Text 10"/>
+          <p:cNvSpPr/>
+          <p:nvPr/>
+        </p:nvSpPr>
+        <p:spPr>
+          <a:xfrm>
+            <a:off x="1005840" y="4526280"/>
+            <a:ext cx="3108960" cy="274320"/>
+          </a:xfrm>
+          <a:prstGeom prst="rect">
+            <a:avLst/>
+          </a:prstGeom>
+          <a:noFill/>
+          <a:ln/>
+        </p:spPr>
+        <p:txBody>
+          <a:bodyPr wrap="square" lIns="0" tIns="0" rIns="0" bIns="0" rtlCol="0" anchor="ctr"/>
+          <a:lstStyle/>
+          <a:p>
+            <a:pPr marL="0" indent="0">
+              <a:buNone/>
+            </a:pPr>
+            <a:r>
+              <a:rPr lang="en-US" sz="1150" dirty="0">
+                <a:solidFill>
+                  <a:srgbClr val="5E6E5E"/>
+                </a:solidFill>
+                <a:latin typeface="Calibri" pitchFamily="34" charset="0"/>
+                <a:ea typeface="Calibri" pitchFamily="34" charset="-122"/>
+                <a:cs typeface="Calibri" pitchFamily="34" charset="-120"/>
+              </a:rPr>
+              <a:t>erreur de la référence naïve</a:t>
+            </a:r>
+            <a:endParaRPr lang="en-US" sz="1150" dirty="0"/>
+          </a:p>
+        </p:txBody>
+      </p:sp>
+      <p:sp>
+        <p:nvSpPr>
+          <p:cNvPr id="13" name="Text 11"/>
+          <p:cNvSpPr/>
+          <p:nvPr/>
+        </p:nvSpPr>
+        <p:spPr>
+          <a:xfrm>
+            <a:off x="4480560" y="4023360"/>
+            <a:ext cx="731520" cy="457200"/>
+          </a:xfrm>
+          <a:prstGeom prst="rect">
+            <a:avLst/>
+          </a:prstGeom>
+          <a:noFill/>
+          <a:ln/>
+        </p:spPr>
+        <p:txBody>
+          <a:bodyPr wrap="square" lIns="0" tIns="0" rIns="0" bIns="0" rtlCol="0" anchor="ctr"/>
+          <a:lstStyle/>
+          <a:p>
+            <a:pPr marL="0" indent="0" algn="ctr">
+              <a:buNone/>
+            </a:pPr>
+            <a:r>
+              <a:rPr lang="en-US" sz="2600" b="1" dirty="0">
+                <a:solidFill>
+                  <a:srgbClr val="97BC62"/>
+                </a:solidFill>
+                <a:latin typeface="Calibri" pitchFamily="34" charset="0"/>
+                <a:ea typeface="Calibri" pitchFamily="34" charset="-122"/>
+                <a:cs typeface="Calibri" pitchFamily="34" charset="-120"/>
+              </a:rPr>
+              <a:t>→</a:t>
+            </a:r>
+            <a:endParaRPr lang="en-US" sz="2600" dirty="0"/>
+          </a:p>
+        </p:txBody>
+      </p:sp>
+      <p:sp>
+        <p:nvSpPr>
+          <p:cNvPr id="14" name="Text 12"/>
+          <p:cNvSpPr/>
+          <p:nvPr/>
+        </p:nvSpPr>
+        <p:spPr>
+          <a:xfrm>
+            <a:off x="5669280" y="3931920"/>
+            <a:ext cx="2743200" cy="685800"/>
+          </a:xfrm>
+          <a:prstGeom prst="rect">
+            <a:avLst/>
+          </a:prstGeom>
+          <a:noFill/>
+          <a:ln/>
+        </p:spPr>
+        <p:txBody>
+          <a:bodyPr wrap="square" lIns="0" tIns="0" rIns="0" bIns="0" rtlCol="0" anchor="ctr"/>
+          <a:lstStyle/>
+          <a:p>
+            <a:pPr marL="0" indent="0">
+              <a:buNone/>
+            </a:pPr>
+            <a:r>
+              <a:rPr lang="en-US" sz="3200" b="1" dirty="0">
+                <a:solidFill>
+                  <a:srgbClr val="2C5F2D"/>
+                </a:solidFill>
+                <a:latin typeface="Cambria" pitchFamily="34" charset="0"/>
+                <a:ea typeface="Cambria" pitchFamily="34" charset="-122"/>
+                <a:cs typeface="Cambria" pitchFamily="34" charset="-120"/>
+              </a:rPr>
+              <a:t>15,5 g/km</a:t>
+            </a:r>
+            <a:endParaRPr lang="en-US" sz="3200" dirty="0"/>
+          </a:p>
+        </p:txBody>
+      </p:sp>
+      <p:sp>
+        <p:nvSpPr>
+          <p:cNvPr id="15" name="Text 13"/>
+          <p:cNvSpPr/>
+          <p:nvPr/>
+        </p:nvSpPr>
+        <p:spPr>
+          <a:xfrm>
+            <a:off x="5669280" y="4526280"/>
+            <a:ext cx="5029200" cy="274320"/>
+          </a:xfrm>
+          <a:prstGeom prst="rect">
+            <a:avLst/>
+          </a:prstGeom>
+          <a:noFill/>
+          <a:ln/>
+        </p:spPr>
+        <p:txBody>
+          <a:bodyPr wrap="square" lIns="0" tIns="0" rIns="0" bIns="0" rtlCol="0" anchor="ctr"/>
+          <a:lstStyle/>
+          <a:p>
+            <a:pPr marL="0" indent="0">
+              <a:buNone/>
+            </a:pPr>
+            <a:r>
+              <a:rPr lang="en-US" sz="1150" dirty="0">
+                <a:solidFill>
+                  <a:srgbClr val="1F2A1F"/>
+                </a:solidFill>
+                <a:latin typeface="Calibri" pitchFamily="34" charset="0"/>
+                <a:ea typeface="Calibri" pitchFamily="34" charset="-122"/>
+                <a:cs typeface="Calibri" pitchFamily="34" charset="-120"/>
+              </a:rPr>
+              <a:t>erreur du modèle, sur le jeu de test</a:t>
+            </a:r>
+            <a:endParaRPr lang="en-US" sz="1150" dirty="0"/>
+          </a:p>
+        </p:txBody>
+      </p:sp>
+      <p:sp>
+        <p:nvSpPr>
+          <p:cNvPr id="16" name="Shape 14"/>
+          <p:cNvSpPr/>
+          <p:nvPr/>
+        </p:nvSpPr>
+        <p:spPr>
+          <a:xfrm>
+            <a:off x="640080" y="5074920"/>
+            <a:ext cx="10881360" cy="777240"/>
+          </a:xfrm>
+          <a:prstGeom prst="roundRect">
+            <a:avLst>
+              <a:gd name="adj" fmla="val 9412"/>
+            </a:avLst>
+          </a:prstGeom>
+          <a:solidFill>
+            <a:srgbClr val="EDF2E6"/>
+          </a:solidFill>
+          <a:ln w="12700">
+            <a:solidFill>
+              <a:srgbClr val="EDF2E6"/>
+            </a:solidFill>
+            <a:prstDash val="solid"/>
+          </a:ln>
+        </p:spPr>
+        <p:txBody>
+          <a:bodyPr/>
+          <a:lstStyle/>
+          <a:p>
+            <a:endParaRPr lang="en-US"/>
+          </a:p>
+        </p:txBody>
+      </p:sp>
+      <p:sp>
+        <p:nvSpPr>
+          <p:cNvPr id="17" name="Text 15"/>
+          <p:cNvSpPr/>
+          <p:nvPr/>
+        </p:nvSpPr>
+        <p:spPr>
+          <a:xfrm>
+            <a:off x="960120" y="5193792"/>
+            <a:ext cx="10241280" cy="548640"/>
+          </a:xfrm>
+          <a:prstGeom prst="rect">
+            <a:avLst/>
+          </a:prstGeom>
+          <a:noFill/>
+          <a:ln/>
+        </p:spPr>
+        <p:txBody>
+          <a:bodyPr wrap="square" lIns="0" tIns="0" rIns="0" bIns="0" rtlCol="0" anchor="ctr"/>
+          <a:lstStyle/>
+          <a:p>
+            <a:pPr marL="0" indent="0">
+              <a:buNone/>
+            </a:pPr>
+            <a:r>
+              <a:rPr lang="en-US" sz="1300" dirty="0">
+                <a:solidFill>
+                  <a:srgbClr val="1F2A1F"/>
+                </a:solidFill>
+                <a:latin typeface="Calibri" pitchFamily="34" charset="0"/>
+                <a:ea typeface="Calibri" pitchFamily="34" charset="-122"/>
+                <a:cs typeface="Calibri" pitchFamily="34" charset="-120"/>
+              </a:rPr>
+              <a:t>Même réflexe en classification : la classe majoritaire. Un modèle qui ne bat pas la référence naïve n'a rien appris.</a:t>
+            </a:r>
+            <a:endParaRPr lang="en-US" sz="1300" dirty="0"/>
+          </a:p>
+        </p:txBody>
+      </p:sp>
+    </p:spTree>
+  </p:cSld>
+  <p:clrMapOvr>
+    <a:masterClrMapping/>
+  </p:clrMapOvr>
+</p:sld>
+</file>
+
+<file path=ppt/slides/slide19.xml><?xml version="1.0" encoding="utf-8"?>
+<p:sld xmlns:a="http://schemas.openxmlformats.org/drawingml/2006/main" xmlns:r="http://schemas.openxmlformats.org/officeDocument/2006/relationships" xmlns:p="http://schemas.openxmlformats.org/presentationml/2006/main">
+  <p:cSld name="Slide 2">
+    <p:spTree>
+      <p:nvGrpSpPr>
+        <p:cNvPr id="1" name=""/>
+        <p:cNvGrpSpPr/>
+        <p:nvPr/>
+      </p:nvGrpSpPr>
+      <p:grpSpPr>
+        <a:xfrm>
+          <a:off x="0" y="0"/>
+          <a:ext cx="0" cy="0"/>
+          <a:chOff x="0" y="0"/>
+          <a:chExt cx="0" cy="0"/>
+        </a:xfrm>
+      </p:grpSpPr>
+      <p:sp>
+        <p:nvSpPr>
+          <p:cNvPr id="2" name="Text 0"/>
+          <p:cNvSpPr/>
+          <p:nvPr/>
+        </p:nvSpPr>
+        <p:spPr>
+          <a:xfrm>
+            <a:off x="640080" y="384048"/>
+            <a:ext cx="10881360" cy="685800"/>
+          </a:xfrm>
+          <a:prstGeom prst="rect">
+            <a:avLst/>
+          </a:prstGeom>
+          <a:noFill/>
+          <a:ln/>
+        </p:spPr>
+        <p:txBody>
+          <a:bodyPr wrap="square" lIns="0" tIns="0" rIns="0" bIns="0" rtlCol="0" anchor="ctr"/>
+          <a:lstStyle/>
+          <a:p>
+            <a:pPr marL="0" indent="0">
+              <a:buNone/>
+            </a:pPr>
+            <a:r>
+              <a:rPr lang="en-US" sz="3400" b="1" dirty="0">
+                <a:solidFill>
+                  <a:srgbClr val="1F2A1F"/>
+                </a:solidFill>
+                <a:latin typeface="Cambria" pitchFamily="34" charset="0"/>
+                <a:ea typeface="Cambria" pitchFamily="34" charset="-122"/>
+                <a:cs typeface="Cambria" pitchFamily="34" charset="-120"/>
+              </a:rPr>
+              <a:t>Les résidus, deuxième lecture</a:t>
+            </a:r>
+            <a:endParaRPr lang="en-US" sz="3400" dirty="0"/>
+          </a:p>
+        </p:txBody>
+      </p:sp>
+      <p:sp>
+        <p:nvSpPr>
+          <p:cNvPr id="3" name="Text 1"/>
+          <p:cNvSpPr/>
+          <p:nvPr/>
+        </p:nvSpPr>
+        <p:spPr>
+          <a:xfrm>
+            <a:off x="640080" y="1078992"/>
+            <a:ext cx="10881360" cy="384048"/>
+          </a:xfrm>
+          <a:prstGeom prst="rect">
+            <a:avLst/>
+          </a:prstGeom>
+          <a:noFill/>
+          <a:ln/>
+        </p:spPr>
+        <p:txBody>
+          <a:bodyPr wrap="square" lIns="0" tIns="0" rIns="0" bIns="0" rtlCol="0" anchor="ctr"/>
+          <a:lstStyle/>
+          <a:p>
+            <a:pPr marL="0" indent="0">
+              <a:buNone/>
+            </a:pPr>
+            <a:r>
+              <a:rPr lang="en-US" sz="1400" i="1" dirty="0">
+                <a:solidFill>
+                  <a:srgbClr val="5E6E5E"/>
+                </a:solidFill>
+                <a:latin typeface="Calibri" pitchFamily="34" charset="0"/>
+                <a:ea typeface="Calibri" pitchFamily="34" charset="-122"/>
+                <a:cs typeface="Calibri" pitchFamily="34" charset="-120"/>
+              </a:rPr>
+              <a:t>Ce que le nuage dit quand on sait quoi y chercher</a:t>
+            </a:r>
+            <a:endParaRPr lang="en-US" sz="1400" dirty="0"/>
+          </a:p>
+        </p:txBody>
+      </p:sp>
+      <p:sp>
+        <p:nvSpPr>
+          <p:cNvPr id="4" name="Shape 2"/>
+          <p:cNvSpPr/>
+          <p:nvPr/>
+        </p:nvSpPr>
+        <p:spPr>
+          <a:xfrm>
+            <a:off x="640080" y="1691640"/>
+            <a:ext cx="5166360" cy="1920240"/>
+          </a:xfrm>
+          <a:prstGeom prst="roundRect">
+            <a:avLst>
+              <a:gd name="adj" fmla="val 3810"/>
+            </a:avLst>
+          </a:prstGeom>
+          <a:solidFill>
+            <a:srgbClr val="EDF2E6"/>
+          </a:solidFill>
+          <a:ln w="12700">
+            <a:solidFill>
+              <a:srgbClr val="EDF2E6"/>
+            </a:solidFill>
+            <a:prstDash val="solid"/>
+          </a:ln>
+        </p:spPr>
+        <p:txBody>
+          <a:bodyPr/>
+          <a:lstStyle/>
+          <a:p>
+            <a:endParaRPr lang="en-US"/>
+          </a:p>
+        </p:txBody>
+      </p:sp>
+      <p:sp>
+        <p:nvSpPr>
+          <p:cNvPr id="5" name="Shape 3"/>
+          <p:cNvSpPr/>
+          <p:nvPr/>
+        </p:nvSpPr>
+        <p:spPr>
+          <a:xfrm>
+            <a:off x="932688" y="1984248"/>
+            <a:ext cx="420624" cy="420624"/>
+          </a:xfrm>
+          <a:prstGeom prst="ellipse">
+            <a:avLst/>
+          </a:prstGeom>
+          <a:solidFill>
+            <a:srgbClr val="2C5F2D"/>
+          </a:solidFill>
+          <a:ln w="12700">
+            <a:solidFill>
+              <a:srgbClr val="2C5F2D"/>
+            </a:solidFill>
+            <a:prstDash val="solid"/>
+          </a:ln>
+        </p:spPr>
+        <p:txBody>
+          <a:bodyPr/>
+          <a:lstStyle/>
+          <a:p>
+            <a:endParaRPr lang="en-US"/>
+          </a:p>
+        </p:txBody>
+      </p:sp>
+      <p:sp>
+        <p:nvSpPr>
+          <p:cNvPr id="6" name="Text 4"/>
+          <p:cNvSpPr/>
+          <p:nvPr/>
+        </p:nvSpPr>
+        <p:spPr>
+          <a:xfrm>
+            <a:off x="932688" y="1984248"/>
+            <a:ext cx="420624" cy="420624"/>
+          </a:xfrm>
+          <a:prstGeom prst="rect">
+            <a:avLst/>
+          </a:prstGeom>
+          <a:noFill/>
+          <a:ln/>
+        </p:spPr>
+        <p:txBody>
+          <a:bodyPr wrap="square" lIns="0" tIns="0" rIns="0" bIns="0" rtlCol="0" anchor="ctr"/>
+          <a:lstStyle/>
+          <a:p>
+            <a:pPr marL="0" indent="0" algn="ctr">
+              <a:buNone/>
+            </a:pPr>
+            <a:r>
+              <a:rPr lang="en-US" sz="1500" b="1" dirty="0">
+                <a:solidFill>
+                  <a:srgbClr val="FFFFFF"/>
+                </a:solidFill>
+                <a:latin typeface="Calibri" pitchFamily="34" charset="0"/>
+                <a:ea typeface="Calibri" pitchFamily="34" charset="-122"/>
+                <a:cs typeface="Calibri" pitchFamily="34" charset="-120"/>
+              </a:rPr>
+              <a:t>1</a:t>
+            </a:r>
+            <a:endParaRPr lang="en-US" sz="1500" dirty="0"/>
+          </a:p>
+        </p:txBody>
+      </p:sp>
+      <p:sp>
+        <p:nvSpPr>
+          <p:cNvPr id="7" name="Text 5"/>
+          <p:cNvSpPr/>
+          <p:nvPr/>
+        </p:nvSpPr>
+        <p:spPr>
+          <a:xfrm>
+            <a:off x="1508760" y="2002536"/>
+            <a:ext cx="4023360" cy="310896"/>
+          </a:xfrm>
+          <a:prstGeom prst="rect">
+            <a:avLst/>
+          </a:prstGeom>
+          <a:noFill/>
+          <a:ln/>
+        </p:spPr>
+        <p:txBody>
+          <a:bodyPr wrap="square" lIns="0" tIns="0" rIns="0" bIns="0" rtlCol="0" anchor="ctr"/>
+          <a:lstStyle/>
+          <a:p>
+            <a:pPr marL="0" indent="0">
+              <a:buNone/>
+            </a:pPr>
+            <a:r>
+              <a:rPr lang="en-US" sz="1700" b="1" dirty="0">
+                <a:solidFill>
+                  <a:srgbClr val="2C5F2D"/>
+                </a:solidFill>
+                <a:latin typeface="Cambria" pitchFamily="34" charset="0"/>
+                <a:ea typeface="Cambria" pitchFamily="34" charset="-122"/>
+                <a:cs typeface="Cambria" pitchFamily="34" charset="-120"/>
+              </a:rPr>
+              <a:t>La dispersion s'évase</a:t>
+            </a:r>
+            <a:endParaRPr lang="en-US" sz="1700" dirty="0"/>
+          </a:p>
+        </p:txBody>
+      </p:sp>
+      <p:sp>
+        <p:nvSpPr>
+          <p:cNvPr id="8" name="Text 6"/>
+          <p:cNvSpPr/>
+          <p:nvPr/>
+        </p:nvSpPr>
+        <p:spPr>
+          <a:xfrm>
+            <a:off x="932688" y="2606040"/>
+            <a:ext cx="4572000" cy="868680"/>
+          </a:xfrm>
+          <a:prstGeom prst="rect">
+            <a:avLst/>
+          </a:prstGeom>
+          <a:noFill/>
+          <a:ln/>
+        </p:spPr>
+        <p:txBody>
+          <a:bodyPr wrap="square" lIns="0" tIns="0" rIns="0" bIns="0" rtlCol="0" anchor="t"/>
+          <a:lstStyle/>
+          <a:p>
+            <a:pPr marL="0" indent="0">
+              <a:lnSpc>
+                <a:spcPct val="115000"/>
+              </a:lnSpc>
+              <a:buNone/>
+            </a:pPr>
+            <a:r>
+              <a:rPr lang="en-US" sz="1300" dirty="0">
+                <a:solidFill>
+                  <a:srgbClr val="1F2A1F"/>
+                </a:solidFill>
+                <a:latin typeface="Calibri" pitchFamily="34" charset="0"/>
+                <a:ea typeface="Calibri" pitchFamily="34" charset="-122"/>
+                <a:cs typeface="Calibri" pitchFamily="34" charset="-120"/>
+              </a:rPr>
+              <a:t>L'erreur passe de 11,5 g/km en bas de gamme à 31,7 au-dessus de 300 kW. L'incertitude dépend du véhicule — le R² ne le dit pas.</a:t>
+            </a:r>
+            <a:endParaRPr lang="en-US" sz="1300" dirty="0"/>
+          </a:p>
+        </p:txBody>
+      </p:sp>
+      <p:sp>
+        <p:nvSpPr>
+          <p:cNvPr id="9" name="Shape 7"/>
+          <p:cNvSpPr/>
+          <p:nvPr/>
+        </p:nvSpPr>
+        <p:spPr>
+          <a:xfrm>
+            <a:off x="6355080" y="1691640"/>
+            <a:ext cx="5166360" cy="1920240"/>
+          </a:xfrm>
+          <a:prstGeom prst="roundRect">
+            <a:avLst>
+              <a:gd name="adj" fmla="val 3810"/>
+            </a:avLst>
+          </a:prstGeom>
+          <a:solidFill>
+            <a:srgbClr val="EDF2E6"/>
+          </a:solidFill>
+          <a:ln w="12700">
+            <a:solidFill>
+              <a:srgbClr val="EDF2E6"/>
+            </a:solidFill>
+            <a:prstDash val="solid"/>
+          </a:ln>
+        </p:spPr>
+        <p:txBody>
+          <a:bodyPr/>
+          <a:lstStyle/>
+          <a:p>
+            <a:endParaRPr lang="en-US"/>
+          </a:p>
+        </p:txBody>
+      </p:sp>
+      <p:sp>
+        <p:nvSpPr>
+          <p:cNvPr id="10" name="Shape 8"/>
+          <p:cNvSpPr/>
+          <p:nvPr/>
+        </p:nvSpPr>
+        <p:spPr>
+          <a:xfrm>
+            <a:off x="6647688" y="1984248"/>
+            <a:ext cx="420624" cy="420624"/>
+          </a:xfrm>
+          <a:prstGeom prst="ellipse">
+            <a:avLst/>
+          </a:prstGeom>
+          <a:solidFill>
+            <a:srgbClr val="2C5F2D"/>
+          </a:solidFill>
+          <a:ln w="12700">
+            <a:solidFill>
+              <a:srgbClr val="2C5F2D"/>
+            </a:solidFill>
+            <a:prstDash val="solid"/>
+          </a:ln>
+        </p:spPr>
+        <p:txBody>
+          <a:bodyPr/>
+          <a:lstStyle/>
+          <a:p>
+            <a:endParaRPr lang="en-US"/>
+          </a:p>
+        </p:txBody>
+      </p:sp>
+      <p:sp>
+        <p:nvSpPr>
+          <p:cNvPr id="11" name="Text 9"/>
+          <p:cNvSpPr/>
+          <p:nvPr/>
+        </p:nvSpPr>
+        <p:spPr>
+          <a:xfrm>
+            <a:off x="6647688" y="1984248"/>
+            <a:ext cx="420624" cy="420624"/>
+          </a:xfrm>
+          <a:prstGeom prst="rect">
+            <a:avLst/>
+          </a:prstGeom>
+          <a:noFill/>
+          <a:ln/>
+        </p:spPr>
+        <p:txBody>
+          <a:bodyPr wrap="square" lIns="0" tIns="0" rIns="0" bIns="0" rtlCol="0" anchor="ctr"/>
+          <a:lstStyle/>
+          <a:p>
+            <a:pPr marL="0" indent="0" algn="ctr">
+              <a:buNone/>
+            </a:pPr>
+            <a:r>
+              <a:rPr lang="en-US" sz="1500" b="1" dirty="0">
+                <a:solidFill>
+                  <a:srgbClr val="FFFFFF"/>
+                </a:solidFill>
+                <a:latin typeface="Calibri" pitchFamily="34" charset="0"/>
+                <a:ea typeface="Calibri" pitchFamily="34" charset="-122"/>
+                <a:cs typeface="Calibri" pitchFamily="34" charset="-120"/>
+              </a:rPr>
+              <a:t>2</a:t>
+            </a:r>
+            <a:endParaRPr lang="en-US" sz="1500" dirty="0"/>
+          </a:p>
+        </p:txBody>
+      </p:sp>
+      <p:sp>
+        <p:nvSpPr>
+          <p:cNvPr id="12" name="Text 10"/>
+          <p:cNvSpPr/>
+          <p:nvPr/>
+        </p:nvSpPr>
+        <p:spPr>
+          <a:xfrm>
+            <a:off x="7223760" y="2002536"/>
+            <a:ext cx="4023360" cy="310896"/>
+          </a:xfrm>
+          <a:prstGeom prst="rect">
+            <a:avLst/>
+          </a:prstGeom>
+          <a:noFill/>
+          <a:ln/>
+        </p:spPr>
+        <p:txBody>
+          <a:bodyPr wrap="square" lIns="0" tIns="0" rIns="0" bIns="0" rtlCol="0" anchor="ctr"/>
+          <a:lstStyle/>
+          <a:p>
+            <a:pPr marL="0" indent="0">
+              <a:buNone/>
+            </a:pPr>
+            <a:r>
+              <a:rPr lang="en-US" sz="1700" b="1" dirty="0">
+                <a:solidFill>
+                  <a:srgbClr val="2C5F2D"/>
+                </a:solidFill>
+                <a:latin typeface="Cambria" pitchFamily="34" charset="0"/>
+                <a:ea typeface="Cambria" pitchFamily="34" charset="-122"/>
+                <a:cs typeface="Cambria" pitchFamily="34" charset="-120"/>
+              </a:rPr>
+              <a:t>La traînée est d'un seul côté</a:t>
+            </a:r>
+            <a:endParaRPr lang="en-US" sz="1700" dirty="0"/>
+          </a:p>
+        </p:txBody>
+      </p:sp>
+      <p:sp>
+        <p:nvSpPr>
+          <p:cNvPr id="13" name="Text 11"/>
+          <p:cNvSpPr/>
+          <p:nvPr/>
+        </p:nvSpPr>
+        <p:spPr>
+          <a:xfrm>
+            <a:off x="6647688" y="2606040"/>
+            <a:ext cx="4572000" cy="868680"/>
+          </a:xfrm>
+          <a:prstGeom prst="rect">
+            <a:avLst/>
+          </a:prstGeom>
+          <a:noFill/>
+          <a:ln/>
+        </p:spPr>
+        <p:txBody>
+          <a:bodyPr wrap="square" lIns="0" tIns="0" rIns="0" bIns="0" rtlCol="0" anchor="t"/>
+          <a:lstStyle/>
+          <a:p>
+            <a:pPr marL="0" indent="0">
+              <a:lnSpc>
+                <a:spcPct val="115000"/>
+              </a:lnSpc>
+              <a:buNone/>
+            </a:pPr>
+            <a:r>
+              <a:rPr lang="en-US" sz="1300" dirty="0">
+                <a:solidFill>
+                  <a:srgbClr val="1F2A1F"/>
+                </a:solidFill>
+                <a:latin typeface="Calibri" pitchFamily="34" charset="0"/>
+                <a:ea typeface="Calibri" pitchFamily="34" charset="-122"/>
+                <a:cs typeface="Calibri" pitchFamily="34" charset="-120"/>
+              </a:rPr>
+              <a:t>Les vingt plus gros résidus sont tous positifs. Le modèle sous-estime sans jamais surestimer autant : signature d'une variable manquante.</a:t>
+            </a:r>
+            <a:endParaRPr lang="en-US" sz="1300" dirty="0"/>
+          </a:p>
+        </p:txBody>
+      </p:sp>
+      <p:sp>
+        <p:nvSpPr>
+          <p:cNvPr id="14" name="Shape 12"/>
+          <p:cNvSpPr/>
+          <p:nvPr/>
+        </p:nvSpPr>
+        <p:spPr>
+          <a:xfrm>
+            <a:off x="640080" y="3977640"/>
+            <a:ext cx="5166360" cy="1920240"/>
+          </a:xfrm>
+          <a:prstGeom prst="roundRect">
+            <a:avLst>
+              <a:gd name="adj" fmla="val 3810"/>
+            </a:avLst>
+          </a:prstGeom>
+          <a:solidFill>
+            <a:srgbClr val="EDF2E6"/>
+          </a:solidFill>
+          <a:ln w="12700">
+            <a:solidFill>
+              <a:srgbClr val="EDF2E6"/>
+            </a:solidFill>
+            <a:prstDash val="solid"/>
+          </a:ln>
+        </p:spPr>
+        <p:txBody>
+          <a:bodyPr/>
+          <a:lstStyle/>
+          <a:p>
+            <a:endParaRPr lang="en-US"/>
+          </a:p>
+        </p:txBody>
+      </p:sp>
+      <p:sp>
+        <p:nvSpPr>
+          <p:cNvPr id="15" name="Shape 13"/>
+          <p:cNvSpPr/>
+          <p:nvPr/>
+        </p:nvSpPr>
+        <p:spPr>
+          <a:xfrm>
+            <a:off x="932688" y="4270248"/>
+            <a:ext cx="420624" cy="420624"/>
+          </a:xfrm>
+          <a:prstGeom prst="ellipse">
+            <a:avLst/>
+          </a:prstGeom>
+          <a:solidFill>
+            <a:srgbClr val="2C5F2D"/>
+          </a:solidFill>
+          <a:ln w="12700">
+            <a:solidFill>
+              <a:srgbClr val="2C5F2D"/>
+            </a:solidFill>
+            <a:prstDash val="solid"/>
+          </a:ln>
+        </p:spPr>
+        <p:txBody>
+          <a:bodyPr/>
+          <a:lstStyle/>
+          <a:p>
+            <a:endParaRPr lang="en-US"/>
+          </a:p>
+        </p:txBody>
+      </p:sp>
+      <p:sp>
+        <p:nvSpPr>
+          <p:cNvPr id="16" name="Text 14"/>
+          <p:cNvSpPr/>
+          <p:nvPr/>
+        </p:nvSpPr>
+        <p:spPr>
+          <a:xfrm>
+            <a:off x="932688" y="4270248"/>
+            <a:ext cx="420624" cy="420624"/>
+          </a:xfrm>
+          <a:prstGeom prst="rect">
+            <a:avLst/>
+          </a:prstGeom>
+          <a:noFill/>
+          <a:ln/>
+        </p:spPr>
+        <p:txBody>
+          <a:bodyPr wrap="square" lIns="0" tIns="0" rIns="0" bIns="0" rtlCol="0" anchor="ctr"/>
+          <a:lstStyle/>
+          <a:p>
+            <a:pPr marL="0" indent="0" algn="ctr">
+              <a:buNone/>
+            </a:pPr>
+            <a:r>
+              <a:rPr lang="en-US" sz="1500" b="1" dirty="0">
+                <a:solidFill>
+                  <a:srgbClr val="FFFFFF"/>
+                </a:solidFill>
+                <a:latin typeface="Calibri" pitchFamily="34" charset="0"/>
+                <a:ea typeface="Calibri" pitchFamily="34" charset="-122"/>
+                <a:cs typeface="Calibri" pitchFamily="34" charset="-120"/>
+              </a:rPr>
+              <a:t>3</a:t>
+            </a:r>
+            <a:endParaRPr lang="en-US" sz="1500" dirty="0"/>
+          </a:p>
+        </p:txBody>
+      </p:sp>
+      <p:sp>
+        <p:nvSpPr>
+          <p:cNvPr id="17" name="Text 15"/>
+          <p:cNvSpPr/>
+          <p:nvPr/>
+        </p:nvSpPr>
+        <p:spPr>
+          <a:xfrm>
+            <a:off x="1508760" y="4288536"/>
+            <a:ext cx="4023360" cy="310896"/>
+          </a:xfrm>
+          <a:prstGeom prst="rect">
+            <a:avLst/>
+          </a:prstGeom>
+          <a:noFill/>
+          <a:ln/>
+        </p:spPr>
+        <p:txBody>
+          <a:bodyPr wrap="square" lIns="0" tIns="0" rIns="0" bIns="0" rtlCol="0" anchor="ctr"/>
+          <a:lstStyle/>
+          <a:p>
+            <a:pPr marL="0" indent="0">
+              <a:buNone/>
+            </a:pPr>
+            <a:r>
+              <a:rPr lang="en-US" sz="1700" b="1" dirty="0">
+                <a:solidFill>
+                  <a:srgbClr val="2C5F2D"/>
+                </a:solidFill>
+                <a:latin typeface="Cambria" pitchFamily="34" charset="0"/>
+                <a:ea typeface="Cambria" pitchFamily="34" charset="-122"/>
+                <a:cs typeface="Cambria" pitchFamily="34" charset="-120"/>
+              </a:rPr>
+              <a:t>Une courbure peut rester</a:t>
+            </a:r>
+            <a:endParaRPr lang="en-US" sz="1700" dirty="0"/>
+          </a:p>
+        </p:txBody>
+      </p:sp>
+      <p:sp>
+        <p:nvSpPr>
+          <p:cNvPr id="18" name="Text 16"/>
+          <p:cNvSpPr/>
+          <p:nvPr/>
+        </p:nvSpPr>
+        <p:spPr>
+          <a:xfrm>
+            <a:off x="932688" y="4892040"/>
+            <a:ext cx="4572000" cy="868680"/>
+          </a:xfrm>
+          <a:prstGeom prst="rect">
+            <a:avLst/>
+          </a:prstGeom>
+          <a:noFill/>
+          <a:ln/>
+        </p:spPr>
+        <p:txBody>
+          <a:bodyPr wrap="square" lIns="0" tIns="0" rIns="0" bIns="0" rtlCol="0" anchor="t"/>
+          <a:lstStyle/>
+          <a:p>
+            <a:pPr marL="0" indent="0">
+              <a:lnSpc>
+                <a:spcPct val="115000"/>
+              </a:lnSpc>
+              <a:buNone/>
+            </a:pPr>
+            <a:r>
+              <a:rPr lang="en-US" sz="1300" dirty="0">
+                <a:solidFill>
+                  <a:srgbClr val="1F2A1F"/>
+                </a:solidFill>
+                <a:latin typeface="Calibri" pitchFamily="34" charset="0"/>
+                <a:ea typeface="Calibri" pitchFamily="34" charset="-122"/>
+                <a:cs typeface="Calibri" pitchFamily="34" charset="-120"/>
+              </a:rPr>
+              <a:t>Moyenne des résidus par décile de prédiction. Un motif en U = non-linéarité non captée. L'œil seul surinterprète les nuages denses.</a:t>
+            </a:r>
+            <a:endParaRPr lang="en-US" sz="1300" dirty="0"/>
+          </a:p>
+        </p:txBody>
+      </p:sp>
+      <p:sp>
+        <p:nvSpPr>
+          <p:cNvPr id="19" name="Shape 17"/>
+          <p:cNvSpPr/>
+          <p:nvPr/>
+        </p:nvSpPr>
+        <p:spPr>
+          <a:xfrm>
+            <a:off x="6355080" y="3977640"/>
+            <a:ext cx="5166360" cy="1920240"/>
+          </a:xfrm>
+          <a:prstGeom prst="roundRect">
+            <a:avLst>
+              <a:gd name="adj" fmla="val 3810"/>
+            </a:avLst>
+          </a:prstGeom>
+          <a:solidFill>
+            <a:srgbClr val="EDF2E6"/>
+          </a:solidFill>
+          <a:ln w="12700">
+            <a:solidFill>
+              <a:srgbClr val="EDF2E6"/>
+            </a:solidFill>
+            <a:prstDash val="solid"/>
+          </a:ln>
+        </p:spPr>
+        <p:txBody>
+          <a:bodyPr/>
+          <a:lstStyle/>
+          <a:p>
+            <a:endParaRPr lang="en-US"/>
+          </a:p>
+        </p:txBody>
+      </p:sp>
+      <p:sp>
+        <p:nvSpPr>
+          <p:cNvPr id="20" name="Shape 18"/>
+          <p:cNvSpPr/>
+          <p:nvPr/>
+        </p:nvSpPr>
+        <p:spPr>
+          <a:xfrm>
+            <a:off x="6647688" y="4270248"/>
+            <a:ext cx="420624" cy="420624"/>
+          </a:xfrm>
+          <a:prstGeom prst="ellipse">
+            <a:avLst/>
+          </a:prstGeom>
+          <a:solidFill>
+            <a:srgbClr val="2C5F2D"/>
+          </a:solidFill>
+          <a:ln w="12700">
+            <a:solidFill>
+              <a:srgbClr val="2C5F2D"/>
+            </a:solidFill>
+            <a:prstDash val="solid"/>
+          </a:ln>
+        </p:spPr>
+        <p:txBody>
+          <a:bodyPr/>
+          <a:lstStyle/>
+          <a:p>
+            <a:endParaRPr lang="en-US"/>
+          </a:p>
+        </p:txBody>
+      </p:sp>
+      <p:sp>
+        <p:nvSpPr>
+          <p:cNvPr id="21" name="Text 19"/>
+          <p:cNvSpPr/>
+          <p:nvPr/>
+        </p:nvSpPr>
+        <p:spPr>
+          <a:xfrm>
+            <a:off x="6647688" y="4270248"/>
+            <a:ext cx="420624" cy="420624"/>
+          </a:xfrm>
+          <a:prstGeom prst="rect">
+            <a:avLst/>
+          </a:prstGeom>
+          <a:noFill/>
+          <a:ln/>
+        </p:spPr>
+        <p:txBody>
+          <a:bodyPr wrap="square" lIns="0" tIns="0" rIns="0" bIns="0" rtlCol="0" anchor="ctr"/>
+          <a:lstStyle/>
+          <a:p>
+            <a:pPr marL="0" indent="0" algn="ctr">
+              <a:buNone/>
+            </a:pPr>
+            <a:r>
+              <a:rPr lang="en-US" sz="1500" b="1" dirty="0">
+                <a:solidFill>
+                  <a:srgbClr val="FFFFFF"/>
+                </a:solidFill>
+                <a:latin typeface="Calibri" pitchFamily="34" charset="0"/>
+                <a:ea typeface="Calibri" pitchFamily="34" charset="-122"/>
+                <a:cs typeface="Calibri" pitchFamily="34" charset="-120"/>
+              </a:rPr>
+              <a:t>4</a:t>
+            </a:r>
+            <a:endParaRPr lang="en-US" sz="1500" dirty="0"/>
+          </a:p>
+        </p:txBody>
+      </p:sp>
+      <p:sp>
+        <p:nvSpPr>
+          <p:cNvPr id="22" name="Text 20"/>
+          <p:cNvSpPr/>
+          <p:nvPr/>
+        </p:nvSpPr>
+        <p:spPr>
+          <a:xfrm>
+            <a:off x="7223760" y="4288536"/>
+            <a:ext cx="4023360" cy="310896"/>
+          </a:xfrm>
+          <a:prstGeom prst="rect">
+            <a:avLst/>
+          </a:prstGeom>
+          <a:noFill/>
+          <a:ln/>
+        </p:spPr>
+        <p:txBody>
+          <a:bodyPr wrap="square" lIns="0" tIns="0" rIns="0" bIns="0" rtlCol="0" anchor="ctr"/>
+          <a:lstStyle/>
+          <a:p>
+            <a:pPr marL="0" indent="0">
+              <a:buNone/>
+            </a:pPr>
+            <a:r>
+              <a:rPr lang="en-US" sz="1700" b="1" dirty="0">
+                <a:solidFill>
+                  <a:srgbClr val="2C5F2D"/>
+                </a:solidFill>
+                <a:latin typeface="Cambria" pitchFamily="34" charset="0"/>
+                <a:ea typeface="Cambria" pitchFamily="34" charset="-122"/>
+                <a:cs typeface="Cambria" pitchFamily="34" charset="-120"/>
+              </a:rPr>
+              <a:t>Attention aux zéros mécaniques</a:t>
+            </a:r>
+            <a:endParaRPr lang="en-US" sz="1700" dirty="0"/>
+          </a:p>
+        </p:txBody>
+      </p:sp>
+      <p:sp>
+        <p:nvSpPr>
+          <p:cNvPr id="23" name="Text 21"/>
+          <p:cNvSpPr/>
+          <p:nvPr/>
+        </p:nvSpPr>
+        <p:spPr>
+          <a:xfrm>
+            <a:off x="6647688" y="4892040"/>
+            <a:ext cx="4572000" cy="868680"/>
+          </a:xfrm>
+          <a:prstGeom prst="rect">
+            <a:avLst/>
+          </a:prstGeom>
+          <a:noFill/>
+          <a:ln/>
+        </p:spPr>
+        <p:txBody>
+          <a:bodyPr wrap="square" lIns="0" tIns="0" rIns="0" bIns="0" rtlCol="0" anchor="t"/>
+          <a:lstStyle/>
+          <a:p>
+            <a:pPr marL="0" indent="0">
+              <a:lnSpc>
+                <a:spcPct val="115000"/>
+              </a:lnSpc>
+              <a:buNone/>
+            </a:pPr>
+            <a:r>
+              <a:rPr lang="en-US" sz="1300" dirty="0">
+                <a:solidFill>
+                  <a:srgbClr val="1F2A1F"/>
+                </a:solidFill>
+                <a:latin typeface="Calibri" pitchFamily="34" charset="0"/>
+                <a:ea typeface="Calibri" pitchFamily="34" charset="-122"/>
+                <a:cs typeface="Calibri" pitchFamily="34" charset="-120"/>
+              </a:rPr>
+              <a:t>Le résidu moyen par modalité d'une variable présente dans le modèle est nul par construction. Ça ne démontre rien.</a:t>
+            </a:r>
+            <a:endParaRPr lang="en-US" sz="1300" dirty="0"/>
           </a:p>
         </p:txBody>
       </p:sp>
@@ -8155,7 +8552,7 @@
           <a:bodyPr wrap="square" lIns="0" tIns="0" rIns="0" bIns="0" rtlCol="0" anchor="ctr"/>
           <a:lstStyle/>
           <a:p>
-            <a:pPr indent="0" marL="0">
+            <a:pPr marL="0" indent="0">
               <a:buNone/>
             </a:pPr>
             <a:r>
@@ -8194,7 +8591,7 @@
           <a:bodyPr wrap="square" lIns="0" tIns="0" rIns="0" bIns="0" rtlCol="0" anchor="ctr"/>
           <a:lstStyle/>
           <a:p>
-            <a:pPr indent="0" marL="0">
+            <a:pPr marL="0" indent="0">
               <a:buNone/>
             </a:pPr>
             <a:r>
@@ -8238,6 +8635,13 @@
             <a:prstDash val="solid"/>
           </a:ln>
         </p:spPr>
+        <p:txBody>
+          <a:bodyPr/>
+          <a:lstStyle/>
+          <a:p>
+            <a:endParaRPr lang="en-US"/>
+          </a:p>
+        </p:txBody>
       </p:sp>
       <p:sp>
         <p:nvSpPr>
@@ -8263,6 +8667,13 @@
             <a:prstDash val="solid"/>
           </a:ln>
         </p:spPr>
+        <p:txBody>
+          <a:bodyPr/>
+          <a:lstStyle/>
+          <a:p>
+            <a:endParaRPr lang="en-US"/>
+          </a:p>
+        </p:txBody>
       </p:sp>
       <p:sp>
         <p:nvSpPr>
@@ -8285,7 +8696,7 @@
           <a:bodyPr wrap="square" lIns="0" tIns="0" rIns="0" bIns="0" rtlCol="0" anchor="ctr"/>
           <a:lstStyle/>
           <a:p>
-            <a:pPr algn="ctr" indent="0" marL="0">
+            <a:pPr marL="0" indent="0" algn="ctr">
               <a:buNone/>
             </a:pPr>
             <a:r>
@@ -8324,7 +8735,7 @@
           <a:bodyPr wrap="square" lIns="0" tIns="0" rIns="0" bIns="0" rtlCol="0" anchor="ctr"/>
           <a:lstStyle/>
           <a:p>
-            <a:pPr indent="0" marL="0">
+            <a:pPr marL="0" indent="0">
               <a:buNone/>
             </a:pPr>
             <a:r>
@@ -8363,7 +8774,7 @@
           <a:bodyPr wrap="square" lIns="0" tIns="0" rIns="0" bIns="0" rtlCol="0" anchor="t"/>
           <a:lstStyle/>
           <a:p>
-            <a:pPr indent="0" marL="0">
+            <a:pPr marL="0" indent="0">
               <a:lnSpc>
                 <a:spcPct val="115000"/>
               </a:lnSpc>
@@ -8410,6 +8821,13 @@
             <a:prstDash val="solid"/>
           </a:ln>
         </p:spPr>
+        <p:txBody>
+          <a:bodyPr/>
+          <a:lstStyle/>
+          <a:p>
+            <a:endParaRPr lang="en-US"/>
+          </a:p>
+        </p:txBody>
       </p:sp>
       <p:sp>
         <p:nvSpPr>
@@ -8435,6 +8853,13 @@
             <a:prstDash val="solid"/>
           </a:ln>
         </p:spPr>
+        <p:txBody>
+          <a:bodyPr/>
+          <a:lstStyle/>
+          <a:p>
+            <a:endParaRPr lang="en-US"/>
+          </a:p>
+        </p:txBody>
       </p:sp>
       <p:sp>
         <p:nvSpPr>
@@ -8457,7 +8882,7 @@
           <a:bodyPr wrap="square" lIns="0" tIns="0" rIns="0" bIns="0" rtlCol="0" anchor="ctr"/>
           <a:lstStyle/>
           <a:p>
-            <a:pPr algn="ctr" indent="0" marL="0">
+            <a:pPr marL="0" indent="0" algn="ctr">
               <a:buNone/>
             </a:pPr>
             <a:r>
@@ -8496,7 +8921,7 @@
           <a:bodyPr wrap="square" lIns="0" tIns="0" rIns="0" bIns="0" rtlCol="0" anchor="ctr"/>
           <a:lstStyle/>
           <a:p>
-            <a:pPr indent="0" marL="0">
+            <a:pPr marL="0" indent="0">
               <a:buNone/>
             </a:pPr>
             <a:r>
@@ -8535,7 +8960,7 @@
           <a:bodyPr wrap="square" lIns="0" tIns="0" rIns="0" bIns="0" rtlCol="0" anchor="t"/>
           <a:lstStyle/>
           <a:p>
-            <a:pPr indent="0" marL="0">
+            <a:pPr marL="0" indent="0">
               <a:lnSpc>
                 <a:spcPct val="115000"/>
               </a:lnSpc>
@@ -8582,6 +9007,13 @@
             <a:prstDash val="solid"/>
           </a:ln>
         </p:spPr>
+        <p:txBody>
+          <a:bodyPr/>
+          <a:lstStyle/>
+          <a:p>
+            <a:endParaRPr lang="en-US"/>
+          </a:p>
+        </p:txBody>
       </p:sp>
       <p:sp>
         <p:nvSpPr>
@@ -8607,6 +9039,13 @@
             <a:prstDash val="solid"/>
           </a:ln>
         </p:spPr>
+        <p:txBody>
+          <a:bodyPr/>
+          <a:lstStyle/>
+          <a:p>
+            <a:endParaRPr lang="en-US"/>
+          </a:p>
+        </p:txBody>
       </p:sp>
       <p:sp>
         <p:nvSpPr>
@@ -8629,7 +9068,7 @@
           <a:bodyPr wrap="square" lIns="0" tIns="0" rIns="0" bIns="0" rtlCol="0" anchor="ctr"/>
           <a:lstStyle/>
           <a:p>
-            <a:pPr algn="ctr" indent="0" marL="0">
+            <a:pPr marL="0" indent="0" algn="ctr">
               <a:buNone/>
             </a:pPr>
             <a:r>
@@ -8668,7 +9107,7 @@
           <a:bodyPr wrap="square" lIns="0" tIns="0" rIns="0" bIns="0" rtlCol="0" anchor="ctr"/>
           <a:lstStyle/>
           <a:p>
-            <a:pPr indent="0" marL="0">
+            <a:pPr marL="0" indent="0">
               <a:buNone/>
             </a:pPr>
             <a:r>
@@ -8707,7 +9146,7 @@
           <a:bodyPr wrap="square" lIns="0" tIns="0" rIns="0" bIns="0" rtlCol="0" anchor="t"/>
           <a:lstStyle/>
           <a:p>
-            <a:pPr indent="0" marL="0">
+            <a:pPr marL="0" indent="0">
               <a:lnSpc>
                 <a:spcPct val="115000"/>
               </a:lnSpc>
@@ -8754,6 +9193,13 @@
             <a:prstDash val="solid"/>
           </a:ln>
         </p:spPr>
+        <p:txBody>
+          <a:bodyPr/>
+          <a:lstStyle/>
+          <a:p>
+            <a:endParaRPr lang="en-US"/>
+          </a:p>
+        </p:txBody>
       </p:sp>
       <p:sp>
         <p:nvSpPr>
@@ -8779,6 +9225,13 @@
             <a:prstDash val="solid"/>
           </a:ln>
         </p:spPr>
+        <p:txBody>
+          <a:bodyPr/>
+          <a:lstStyle/>
+          <a:p>
+            <a:endParaRPr lang="en-US"/>
+          </a:p>
+        </p:txBody>
       </p:sp>
       <p:sp>
         <p:nvSpPr>
@@ -8801,7 +9254,7 @@
           <a:bodyPr wrap="square" lIns="0" tIns="0" rIns="0" bIns="0" rtlCol="0" anchor="ctr"/>
           <a:lstStyle/>
           <a:p>
-            <a:pPr algn="ctr" indent="0" marL="0">
+            <a:pPr marL="0" indent="0" algn="ctr">
               <a:buNone/>
             </a:pPr>
             <a:r>
@@ -8840,7 +9293,7 @@
           <a:bodyPr wrap="square" lIns="0" tIns="0" rIns="0" bIns="0" rtlCol="0" anchor="ctr"/>
           <a:lstStyle/>
           <a:p>
-            <a:pPr indent="0" marL="0">
+            <a:pPr marL="0" indent="0">
               <a:buNone/>
             </a:pPr>
             <a:r>
@@ -8879,7 +9332,7 @@
           <a:bodyPr wrap="square" lIns="0" tIns="0" rIns="0" bIns="0" rtlCol="0" anchor="t"/>
           <a:lstStyle/>
           <a:p>
-            <a:pPr indent="0" marL="0">
+            <a:pPr marL="0" indent="0">
               <a:lnSpc>
                 <a:spcPct val="115000"/>
               </a:lnSpc>
@@ -8910,7 +9363,7 @@
 
 <file path=ppt/slides/slide20.xml><?xml version="1.0" encoding="utf-8"?>
 <p:sld xmlns:a="http://schemas.openxmlformats.org/drawingml/2006/main" xmlns:r="http://schemas.openxmlformats.org/officeDocument/2006/relationships" xmlns:p="http://schemas.openxmlformats.org/presentationml/2006/main">
-  <p:cSld name="Slide 11">
+  <p:cSld name="Slide 14">
     <p:spTree>
       <p:nvGrpSpPr>
         <p:cNvPr id="1" name=""/>
@@ -8946,7 +9399,7 @@
           <a:bodyPr wrap="square" lIns="0" tIns="0" rIns="0" bIns="0" rtlCol="0" anchor="ctr"/>
           <a:lstStyle/>
           <a:p>
-            <a:pPr indent="0" marL="0">
+            <a:pPr marL="0" indent="0">
               <a:buNone/>
             </a:pPr>
             <a:r>
@@ -8958,7 +9411,7 @@
                 <a:ea typeface="Cambria" pitchFamily="34" charset="-122"/>
                 <a:cs typeface="Cambria" pitchFamily="34" charset="-120"/>
               </a:rPr>
-              <a:t>Comparer à quoi ?</a:t>
+              <a:t>Hygiène de travail</a:t>
             </a:r>
             <a:endParaRPr lang="en-US" sz="3400" dirty="0"/>
           </a:p>
@@ -8985,7 +9438,7 @@
           <a:bodyPr wrap="square" lIns="0" tIns="0" rIns="0" bIns="0" rtlCol="0" anchor="ctr"/>
           <a:lstStyle/>
           <a:p>
-            <a:pPr indent="0" marL="0">
+            <a:pPr marL="0" indent="0">
               <a:buNone/>
             </a:pPr>
             <a:r>
@@ -8997,7 +9450,7 @@
                 <a:ea typeface="Calibri" pitchFamily="34" charset="-122"/>
                 <a:cs typeface="Calibri" pitchFamily="34" charset="-120"/>
               </a:rPr>
-              <a:t>Une erreur ne se juge que relativement</a:t>
+              <a:t>Ce qui distingue un brouillon d'un livrable</a:t>
             </a:r>
             <a:endParaRPr lang="en-US" sz="1400" dirty="0"/>
           </a:p>
@@ -9011,12 +9464,12 @@
         </p:nvSpPr>
         <p:spPr>
           <a:xfrm>
-            <a:off x="640080" y="1737360"/>
-            <a:ext cx="5166360" cy="1828800"/>
+            <a:off x="640080" y="1691640"/>
+            <a:ext cx="3538728" cy="3017520"/>
           </a:xfrm>
           <a:prstGeom prst="roundRect">
             <a:avLst>
-              <a:gd name="adj" fmla="val 4000"/>
+              <a:gd name="adj" fmla="val 2424"/>
             </a:avLst>
           </a:prstGeom>
           <a:solidFill>
@@ -9029,6 +9482,13 @@
             <a:prstDash val="solid"/>
           </a:ln>
         </p:spPr>
+        <p:txBody>
+          <a:bodyPr/>
+          <a:lstStyle/>
+          <a:p>
+            <a:endParaRPr lang="en-US"/>
+          </a:p>
+        </p:txBody>
       </p:sp>
       <p:sp>
         <p:nvSpPr>
@@ -9038,32 +9498,32 @@
         </p:nvSpPr>
         <p:spPr>
           <a:xfrm>
-            <a:off x="960120" y="1920240"/>
-            <a:ext cx="4389120" cy="310896"/>
-          </a:xfrm>
-          <a:prstGeom prst="rect">
-            <a:avLst/>
-          </a:prstGeom>
-          <a:noFill/>
-          <a:ln/>
-        </p:spPr>
-        <p:txBody>
-          <a:bodyPr wrap="square" lIns="0" tIns="0" rIns="0" bIns="0" rtlCol="0" anchor="ctr"/>
-          <a:lstStyle/>
-          <a:p>
-            <a:pPr indent="0" marL="0">
+            <a:off x="914400" y="1874520"/>
+            <a:ext cx="3017520" cy="310896"/>
+          </a:xfrm>
+          <a:prstGeom prst="rect">
+            <a:avLst/>
+          </a:prstGeom>
+          <a:noFill/>
+          <a:ln/>
+        </p:spPr>
+        <p:txBody>
+          <a:bodyPr wrap="square" lIns="0" tIns="0" rIns="0" bIns="0" rtlCol="0" anchor="ctr"/>
+          <a:lstStyle/>
+          <a:p>
+            <a:pPr marL="0" indent="0">
               <a:buNone/>
             </a:pPr>
             <a:r>
               <a:rPr lang="en-US" sz="1700" b="1" dirty="0">
                 <a:solidFill>
-                  <a:srgbClr val="5E6E5E"/>
+                  <a:srgbClr val="2C5F2D"/>
                 </a:solidFill>
                 <a:latin typeface="Cambria" pitchFamily="34" charset="0"/>
                 <a:ea typeface="Cambria" pitchFamily="34" charset="-122"/>
                 <a:cs typeface="Cambria" pitchFamily="34" charset="-120"/>
               </a:rPr>
-              <a:t>La référence naïve</a:t>
+              <a:t>Environnement</a:t>
             </a:r>
             <a:endParaRPr lang="en-US" sz="1700" dirty="0"/>
           </a:p>
@@ -9077,8 +9537,8 @@
         </p:nvSpPr>
         <p:spPr>
           <a:xfrm>
-            <a:off x="960120" y="2377440"/>
-            <a:ext cx="4572000" cy="1005840"/>
+            <a:off x="960120" y="2331720"/>
+            <a:ext cx="2971800" cy="1828800"/>
           </a:xfrm>
           <a:prstGeom prst="rect">
             <a:avLst/>
@@ -9090,11 +9550,12 @@
           <a:bodyPr wrap="square" lIns="0" tIns="0" rIns="0" bIns="0" rtlCol="0" anchor="t"/>
           <a:lstStyle/>
           <a:p>
-            <a:pPr indent="0" marL="0">
-              <a:lnSpc>
-                <a:spcPct val="115000"/>
-              </a:lnSpc>
-              <a:buNone/>
+            <a:pPr marL="342900" indent="-342900">
+              <a:spcAft>
+                <a:spcPts val="800"/>
+              </a:spcAft>
+              <a:buSzPct val="100000"/>
+              <a:buChar char="•"/>
             </a:pPr>
             <a:r>
               <a:rPr lang="en-US" sz="1200" dirty="0">
@@ -9105,10 +9566,73 @@
                 <a:ea typeface="Calibri" pitchFamily="34" charset="-122"/>
                 <a:cs typeface="Calibri" pitchFamily="34" charset="-120"/>
               </a:rPr>
-              <a:t>Prédire la moyenne du parc pour tous les véhicules, sans regarder aucune variable. C'est le modèle le plus bête possible — et le point de départ obligé.</a:t>
+              <a:t>Un dossier = un projet = un .venv</a:t>
             </a:r>
             <a:endParaRPr lang="en-US" sz="1200" dirty="0"/>
           </a:p>
+          <a:p>
+            <a:pPr marL="342900" indent="-342900">
+              <a:spcAft>
+                <a:spcPts val="800"/>
+              </a:spcAft>
+              <a:buSzPct val="100000"/>
+              <a:buChar char="•"/>
+            </a:pPr>
+            <a:r>
+              <a:rPr lang="en-US" sz="1200" dirty="0">
+                <a:solidFill>
+                  <a:srgbClr val="1F2A1F"/>
+                </a:solidFill>
+                <a:latin typeface="Calibri" pitchFamily="34" charset="0"/>
+                <a:ea typeface="Calibri" pitchFamily="34" charset="-122"/>
+                <a:cs typeface="Calibri" pitchFamily="34" charset="-120"/>
+              </a:rPr>
+              <a:t>Ouvrir le projet, pas le dossier parent</a:t>
+            </a:r>
+            <a:endParaRPr lang="en-US" sz="1200" dirty="0"/>
+          </a:p>
+          <a:p>
+            <a:pPr marL="342900" indent="-342900">
+              <a:spcAft>
+                <a:spcPts val="800"/>
+              </a:spcAft>
+              <a:buSzPct val="100000"/>
+              <a:buChar char="•"/>
+            </a:pPr>
+            <a:r>
+              <a:rPr lang="en-US" sz="1200" dirty="0">
+                <a:solidFill>
+                  <a:srgbClr val="1F2A1F"/>
+                </a:solidFill>
+                <a:latin typeface="Calibri" pitchFamily="34" charset="0"/>
+                <a:ea typeface="Calibri" pitchFamily="34" charset="-122"/>
+                <a:cs typeface="Calibri" pitchFamily="34" charset="-120"/>
+              </a:rPr>
+              <a:t>which python quand un import échoue</a:t>
+            </a:r>
+            <a:endParaRPr lang="en-US" sz="1200" dirty="0"/>
+          </a:p>
+          <a:p>
+            <a:pPr marL="342900" indent="-342900">
+              <a:spcAft>
+                <a:spcPts val="800"/>
+              </a:spcAft>
+              <a:buSzPct val="100000"/>
+              <a:buChar char="•"/>
+            </a:pPr>
+            <a:r>
+              <a:rPr lang="en-US" sz="1200" dirty="0">
+                <a:solidFill>
+                  <a:srgbClr val="1F2A1F"/>
+                </a:solidFill>
+                <a:latin typeface="Calibri" pitchFamily="34" charset="0"/>
+                <a:ea typeface="Calibri" pitchFamily="34" charset="-122"/>
+                <a:cs typeface="Calibri" pitchFamily="34" charset="-120"/>
+              </a:rPr>
+              <a:t>requirements.txt : dépendances directes</a:t>
+            </a:r>
+            <a:endParaRPr lang="en-US" sz="1200" dirty="0"/>
+          </a:p>
         </p:txBody>
       </p:sp>
       <p:sp>
@@ -9119,12 +9643,12 @@
         </p:nvSpPr>
         <p:spPr>
           <a:xfrm>
-            <a:off x="6355080" y="1737360"/>
-            <a:ext cx="5166360" cy="1828800"/>
+            <a:off x="4361688" y="1691640"/>
+            <a:ext cx="3538728" cy="3017520"/>
           </a:xfrm>
           <a:prstGeom prst="roundRect">
             <a:avLst>
-              <a:gd name="adj" fmla="val 4000"/>
+              <a:gd name="adj" fmla="val 2424"/>
             </a:avLst>
           </a:prstGeom>
           <a:solidFill>
@@ -9137,6 +9661,13 @@
             <a:prstDash val="solid"/>
           </a:ln>
         </p:spPr>
+        <p:txBody>
+          <a:bodyPr/>
+          <a:lstStyle/>
+          <a:p>
+            <a:endParaRPr lang="en-US"/>
+          </a:p>
+        </p:txBody>
       </p:sp>
       <p:sp>
         <p:nvSpPr>
@@ -9146,20 +9677,20 @@
         </p:nvSpPr>
         <p:spPr>
           <a:xfrm>
-            <a:off x="6675120" y="1920240"/>
-            <a:ext cx="4389120" cy="310896"/>
-          </a:xfrm>
-          <a:prstGeom prst="rect">
-            <a:avLst/>
-          </a:prstGeom>
-          <a:noFill/>
-          <a:ln/>
-        </p:spPr>
-        <p:txBody>
-          <a:bodyPr wrap="square" lIns="0" tIns="0" rIns="0" bIns="0" rtlCol="0" anchor="ctr"/>
-          <a:lstStyle/>
-          <a:p>
-            <a:pPr indent="0" marL="0">
+            <a:off x="4636008" y="1874520"/>
+            <a:ext cx="3017520" cy="310896"/>
+          </a:xfrm>
+          <a:prstGeom prst="rect">
+            <a:avLst/>
+          </a:prstGeom>
+          <a:noFill/>
+          <a:ln/>
+        </p:spPr>
+        <p:txBody>
+          <a:bodyPr wrap="square" lIns="0" tIns="0" rIns="0" bIns="0" rtlCol="0" anchor="ctr"/>
+          <a:lstStyle/>
+          <a:p>
+            <a:pPr marL="0" indent="0">
               <a:buNone/>
             </a:pPr>
             <a:r>
@@ -9171,7 +9702,7 @@
                 <a:ea typeface="Cambria" pitchFamily="34" charset="-122"/>
                 <a:cs typeface="Cambria" pitchFamily="34" charset="-120"/>
               </a:rPr>
-              <a:t>Ce qu'elle révèle</a:t>
+              <a:t>Notebook</a:t>
             </a:r>
             <a:endParaRPr lang="en-US" sz="1700" dirty="0"/>
           </a:p>
@@ -9185,24 +9716,25 @@
         </p:nvSpPr>
         <p:spPr>
           <a:xfrm>
-            <a:off x="6675120" y="2377440"/>
-            <a:ext cx="4572000" cy="1005840"/>
-          </a:xfrm>
-          <a:prstGeom prst="rect">
-            <a:avLst/>
-          </a:prstGeom>
-          <a:noFill/>
-          <a:ln/>
-        </p:spPr>
-        <p:txBody>
-          <a:bodyPr wrap="square" lIns="0" tIns="0" rIns="0" bIns="0" rtlCol="0" anchor="ctr"/>
-          <a:lstStyle/>
-          <a:p>
-            <a:pPr indent="0" marL="0">
-              <a:lnSpc>
-                <a:spcPct val="115000"/>
-              </a:lnSpc>
-              <a:buNone/>
+            <a:off x="4681728" y="2331720"/>
+            <a:ext cx="2971800" cy="1828800"/>
+          </a:xfrm>
+          <a:prstGeom prst="rect">
+            <a:avLst/>
+          </a:prstGeom>
+          <a:noFill/>
+          <a:ln/>
+        </p:spPr>
+        <p:txBody>
+          <a:bodyPr wrap="square" lIns="0" tIns="0" rIns="0" bIns="0" rtlCol="0" anchor="t"/>
+          <a:lstStyle/>
+          <a:p>
+            <a:pPr marL="342900" indent="-342900">
+              <a:spcAft>
+                <a:spcPts val="800"/>
+              </a:spcAft>
+              <a:buSzPct val="100000"/>
+              <a:buChar char="•"/>
             </a:pPr>
             <a:r>
               <a:rPr lang="en-US" sz="1200" dirty="0">
@@ -9213,10 +9745,73 @@
                 <a:ea typeface="Calibri" pitchFamily="34" charset="-122"/>
                 <a:cs typeface="Calibri" pitchFamily="34" charset="-120"/>
               </a:rPr>
-              <a:t>15,5 g/km d'erreur ne veut rien dire seul. Rapporté à la référence, ça devient un résultat : masse, puissance et boîte divisent l'erreur par 2,8.</a:t>
+              <a:t>Restart and Run All avant chaque commit</a:t>
             </a:r>
             <a:endParaRPr lang="en-US" sz="1200" dirty="0"/>
           </a:p>
+          <a:p>
+            <a:pPr marL="342900" indent="-342900">
+              <a:spcAft>
+                <a:spcPts val="800"/>
+              </a:spcAft>
+              <a:buSzPct val="100000"/>
+              <a:buChar char="•"/>
+            </a:pPr>
+            <a:r>
+              <a:rPr lang="en-US" sz="1200" dirty="0">
+                <a:solidFill>
+                  <a:srgbClr val="FFFFFF"/>
+                </a:solidFill>
+                <a:latin typeface="Calibri" pitchFamily="34" charset="0"/>
+                <a:ea typeface="Calibri" pitchFamily="34" charset="-122"/>
+                <a:cs typeface="Calibri" pitchFamily="34" charset="-120"/>
+              </a:rPr>
+              <a:t>Une variable réutilisée = état fantôme</a:t>
+            </a:r>
+            <a:endParaRPr lang="en-US" sz="1200" dirty="0"/>
+          </a:p>
+          <a:p>
+            <a:pPr marL="342900" indent="-342900">
+              <a:spcAft>
+                <a:spcPts val="800"/>
+              </a:spcAft>
+              <a:buSzPct val="100000"/>
+              <a:buChar char="•"/>
+            </a:pPr>
+            <a:r>
+              <a:rPr lang="en-US" sz="1200" dirty="0">
+                <a:solidFill>
+                  <a:srgbClr val="FFFFFF"/>
+                </a:solidFill>
+                <a:latin typeface="Calibri" pitchFamily="34" charset="0"/>
+                <a:ea typeface="Calibri" pitchFamily="34" charset="-122"/>
+                <a:cs typeface="Calibri" pitchFamily="34" charset="-120"/>
+              </a:rPr>
+              <a:t>Numéros d'exécution dans l'ordre</a:t>
+            </a:r>
+            <a:endParaRPr lang="en-US" sz="1200" dirty="0"/>
+          </a:p>
+          <a:p>
+            <a:pPr marL="342900" indent="-342900">
+              <a:spcAft>
+                <a:spcPts val="800"/>
+              </a:spcAft>
+              <a:buSzPct val="100000"/>
+              <a:buChar char="•"/>
+            </a:pPr>
+            <a:r>
+              <a:rPr lang="en-US" sz="1200" dirty="0">
+                <a:solidFill>
+                  <a:srgbClr val="FFFFFF"/>
+                </a:solidFill>
+                <a:latin typeface="Calibri" pitchFamily="34" charset="0"/>
+                <a:ea typeface="Calibri" pitchFamily="34" charset="-122"/>
+                <a:cs typeface="Calibri" pitchFamily="34" charset="-120"/>
+              </a:rPr>
+              <a:t>Chaque chiffre affiché doit être mesuré</a:t>
+            </a:r>
+            <a:endParaRPr lang="en-US" sz="1200" dirty="0"/>
+          </a:p>
         </p:txBody>
       </p:sp>
       <p:sp>
@@ -9227,12 +9822,12 @@
         </p:nvSpPr>
         <p:spPr>
           <a:xfrm>
-            <a:off x="640080" y="3794760"/>
-            <a:ext cx="10881360" cy="1051560"/>
+            <a:off x="8083296" y="1691640"/>
+            <a:ext cx="3538728" cy="3017520"/>
           </a:xfrm>
           <a:prstGeom prst="roundRect">
             <a:avLst>
-              <a:gd name="adj" fmla="val 6957"/>
+              <a:gd name="adj" fmla="val 2424"/>
             </a:avLst>
           </a:prstGeom>
           <a:solidFill>
@@ -9245,6 +9840,13 @@
             <a:prstDash val="solid"/>
           </a:ln>
         </p:spPr>
+        <p:txBody>
+          <a:bodyPr/>
+          <a:lstStyle/>
+          <a:p>
+            <a:endParaRPr lang="en-US"/>
+          </a:p>
+        </p:txBody>
       </p:sp>
       <p:sp>
         <p:nvSpPr>
@@ -9254,34 +9856,34 @@
         </p:nvSpPr>
         <p:spPr>
           <a:xfrm>
-            <a:off x="1005840" y="3931920"/>
-            <a:ext cx="2743200" cy="685800"/>
-          </a:xfrm>
-          <a:prstGeom prst="rect">
-            <a:avLst/>
-          </a:prstGeom>
-          <a:noFill/>
-          <a:ln/>
-        </p:spPr>
-        <p:txBody>
-          <a:bodyPr wrap="square" lIns="0" tIns="0" rIns="0" bIns="0" rtlCol="0" anchor="ctr"/>
-          <a:lstStyle/>
-          <a:p>
-            <a:pPr indent="0" marL="0">
-              <a:buNone/>
-            </a:pPr>
-            <a:r>
-              <a:rPr lang="en-US" sz="3200" b="1" dirty="0">
-                <a:solidFill>
-                  <a:srgbClr val="5E6E5E"/>
+            <a:off x="8357616" y="1874520"/>
+            <a:ext cx="3017520" cy="310896"/>
+          </a:xfrm>
+          <a:prstGeom prst="rect">
+            <a:avLst/>
+          </a:prstGeom>
+          <a:noFill/>
+          <a:ln/>
+        </p:spPr>
+        <p:txBody>
+          <a:bodyPr wrap="square" lIns="0" tIns="0" rIns="0" bIns="0" rtlCol="0" anchor="ctr"/>
+          <a:lstStyle/>
+          <a:p>
+            <a:pPr marL="0" indent="0">
+              <a:buNone/>
+            </a:pPr>
+            <a:r>
+              <a:rPr lang="en-US" sz="1700" b="1" dirty="0">
+                <a:solidFill>
+                  <a:srgbClr val="2C5F2D"/>
                 </a:solidFill>
                 <a:latin typeface="Cambria" pitchFamily="34" charset="0"/>
                 <a:ea typeface="Cambria" pitchFamily="34" charset="-122"/>
                 <a:cs typeface="Cambria" pitchFamily="34" charset="-120"/>
               </a:rPr>
-              <a:t>42,9 g/km</a:t>
-            </a:r>
-            <a:endParaRPr lang="en-US" sz="3200" dirty="0"/>
+              <a:t>Git &amp; portfolio</a:t>
+            </a:r>
+            <a:endParaRPr lang="en-US" sz="1700" dirty="0"/>
           </a:p>
         </p:txBody>
       </p:sp>
@@ -9293,141 +9895,70 @@
         </p:nvSpPr>
         <p:spPr>
           <a:xfrm>
-            <a:off x="1005840" y="4526280"/>
-            <a:ext cx="3108960" cy="274320"/>
-          </a:xfrm>
-          <a:prstGeom prst="rect">
-            <a:avLst/>
-          </a:prstGeom>
-          <a:noFill/>
-          <a:ln/>
-        </p:spPr>
-        <p:txBody>
-          <a:bodyPr wrap="square" lIns="0" tIns="0" rIns="0" bIns="0" rtlCol="0" anchor="ctr"/>
-          <a:lstStyle/>
-          <a:p>
-            <a:pPr indent="0" marL="0">
-              <a:buNone/>
-            </a:pPr>
-            <a:r>
-              <a:rPr lang="en-US" sz="1150" dirty="0">
-                <a:solidFill>
-                  <a:srgbClr val="5E6E5E"/>
+            <a:off x="8403336" y="2331720"/>
+            <a:ext cx="2971800" cy="1828800"/>
+          </a:xfrm>
+          <a:prstGeom prst="rect">
+            <a:avLst/>
+          </a:prstGeom>
+          <a:noFill/>
+          <a:ln/>
+        </p:spPr>
+        <p:txBody>
+          <a:bodyPr wrap="square" lIns="0" tIns="0" rIns="0" bIns="0" rtlCol="0" anchor="t"/>
+          <a:lstStyle/>
+          <a:p>
+            <a:pPr marL="342900" indent="-342900">
+              <a:spcAft>
+                <a:spcPts val="800"/>
+              </a:spcAft>
+              <a:buSzPct val="100000"/>
+              <a:buChar char="•"/>
+            </a:pPr>
+            <a:r>
+              <a:rPr lang="en-US" sz="1200" dirty="0">
+                <a:solidFill>
+                  <a:srgbClr val="1F2A1F"/>
                 </a:solidFill>
                 <a:latin typeface="Calibri" pitchFamily="34" charset="0"/>
                 <a:ea typeface="Calibri" pitchFamily="34" charset="-122"/>
                 <a:cs typeface="Calibri" pitchFamily="34" charset="-120"/>
               </a:rPr>
-              <a:t>erreur de la référence naïve</a:t>
-            </a:r>
-            <a:endParaRPr lang="en-US" sz="1150" dirty="0"/>
-          </a:p>
-        </p:txBody>
-      </p:sp>
-      <p:sp>
-        <p:nvSpPr>
-          <p:cNvPr id="13" name="Text 11"/>
-          <p:cNvSpPr/>
-          <p:nvPr/>
-        </p:nvSpPr>
-        <p:spPr>
-          <a:xfrm>
-            <a:off x="4480560" y="4023360"/>
-            <a:ext cx="731520" cy="457200"/>
-          </a:xfrm>
-          <a:prstGeom prst="rect">
-            <a:avLst/>
-          </a:prstGeom>
-          <a:noFill/>
-          <a:ln/>
-        </p:spPr>
-        <p:txBody>
-          <a:bodyPr wrap="square" lIns="0" tIns="0" rIns="0" bIns="0" rtlCol="0" anchor="ctr"/>
-          <a:lstStyle/>
-          <a:p>
-            <a:pPr algn="ctr" indent="0" marL="0">
-              <a:buNone/>
-            </a:pPr>
-            <a:r>
-              <a:rPr lang="en-US" sz="2600" b="1" dirty="0">
-                <a:solidFill>
-                  <a:srgbClr val="97BC62"/>
+              <a:t>add / commit / push, à chaque étape finie</a:t>
+            </a:r>
+            <a:endParaRPr lang="en-US" sz="1200" dirty="0"/>
+          </a:p>
+          <a:p>
+            <a:pPr marL="342900" indent="-342900">
+              <a:spcAft>
+                <a:spcPts val="800"/>
+              </a:spcAft>
+              <a:buSzPct val="100000"/>
+              <a:buChar char="•"/>
+            </a:pPr>
+            <a:r>
+              <a:rPr lang="en-US" sz="1200" dirty="0">
+                <a:solidFill>
+                  <a:srgbClr val="1F2A1F"/>
                 </a:solidFill>
                 <a:latin typeface="Calibri" pitchFamily="34" charset="0"/>
                 <a:ea typeface="Calibri" pitchFamily="34" charset="-122"/>
                 <a:cs typeface="Calibri" pitchFamily="34" charset="-120"/>
               </a:rPr>
-              <a:t>→</a:t>
-            </a:r>
-            <a:endParaRPr lang="en-US" sz="2600" dirty="0"/>
-          </a:p>
-        </p:txBody>
-      </p:sp>
-      <p:sp>
-        <p:nvSpPr>
-          <p:cNvPr id="14" name="Text 12"/>
-          <p:cNvSpPr/>
-          <p:nvPr/>
-        </p:nvSpPr>
-        <p:spPr>
-          <a:xfrm>
-            <a:off x="5669280" y="3931920"/>
-            <a:ext cx="2743200" cy="685800"/>
-          </a:xfrm>
-          <a:prstGeom prst="rect">
-            <a:avLst/>
-          </a:prstGeom>
-          <a:noFill/>
-          <a:ln/>
-        </p:spPr>
-        <p:txBody>
-          <a:bodyPr wrap="square" lIns="0" tIns="0" rIns="0" bIns="0" rtlCol="0" anchor="ctr"/>
-          <a:lstStyle/>
-          <a:p>
-            <a:pPr indent="0" marL="0">
-              <a:buNone/>
-            </a:pPr>
-            <a:r>
-              <a:rPr lang="en-US" sz="3200" b="1" dirty="0">
-                <a:solidFill>
-                  <a:srgbClr val="2C5F2D"/>
-                </a:solidFill>
-                <a:latin typeface="Cambria" pitchFamily="34" charset="0"/>
-                <a:ea typeface="Cambria" pitchFamily="34" charset="-122"/>
-                <a:cs typeface="Cambria" pitchFamily="34" charset="-120"/>
-              </a:rPr>
-              <a:t>15,5 g/km</a:t>
-            </a:r>
-            <a:endParaRPr lang="en-US" sz="3200" dirty="0"/>
-          </a:p>
-        </p:txBody>
-      </p:sp>
-      <p:sp>
-        <p:nvSpPr>
-          <p:cNvPr id="15" name="Text 13"/>
-          <p:cNvSpPr/>
-          <p:nvPr/>
-        </p:nvSpPr>
-        <p:spPr>
-          <a:xfrm>
-            <a:off x="5669280" y="4526280"/>
-            <a:ext cx="5029200" cy="274320"/>
-          </a:xfrm>
-          <a:prstGeom prst="rect">
-            <a:avLst/>
-          </a:prstGeom>
-          <a:noFill/>
-          <a:ln/>
-        </p:spPr>
-        <p:txBody>
-          <a:bodyPr wrap="square" lIns="0" tIns="0" rIns="0" bIns="0" rtlCol="0" anchor="ctr"/>
-          <a:lstStyle/>
-          <a:p>
-            <a:pPr indent="0" marL="0">
-              <a:buNone/>
-            </a:pPr>
-            <a:r>
-              <a:rPr lang="en-US" sz="1150" dirty="0">
+              <a:t>.venv ignoré, jamais versionné</a:t>
+            </a:r>
+            <a:endParaRPr lang="en-US" sz="1200" dirty="0"/>
+          </a:p>
+          <a:p>
+            <a:pPr marL="342900" indent="-342900">
+              <a:spcAft>
+                <a:spcPts val="800"/>
+              </a:spcAft>
+              <a:buSzPct val="100000"/>
+              <a:buChar char="•"/>
+            </a:pPr>
+            <a:r>
+              <a:rPr lang="en-US" sz="1200" dirty="0">
                 <a:solidFill>
                   <a:srgbClr val="1F2A1F"/>
                 </a:solidFill>
@@ -9435,65 +9966,20 @@
                 <a:ea typeface="Calibri" pitchFamily="34" charset="-122"/>
                 <a:cs typeface="Calibri" pitchFamily="34" charset="-120"/>
               </a:rPr>
-              <a:t>erreur du modèle, sur le jeu de test</a:t>
-            </a:r>
-            <a:endParaRPr lang="en-US" sz="1150" dirty="0"/>
-          </a:p>
-        </p:txBody>
-      </p:sp>
-      <p:sp>
-        <p:nvSpPr>
-          <p:cNvPr id="16" name="Shape 14"/>
-          <p:cNvSpPr/>
-          <p:nvPr/>
-        </p:nvSpPr>
-        <p:spPr>
-          <a:xfrm>
-            <a:off x="640080" y="5074920"/>
-            <a:ext cx="10881360" cy="777240"/>
-          </a:xfrm>
-          <a:prstGeom prst="roundRect">
-            <a:avLst>
-              <a:gd name="adj" fmla="val 9412"/>
-            </a:avLst>
-          </a:prstGeom>
-          <a:solidFill>
-            <a:srgbClr val="EDF2E6"/>
-          </a:solidFill>
-          <a:ln w="12700">
-            <a:solidFill>
-              <a:srgbClr val="EDF2E6"/>
-            </a:solidFill>
-            <a:prstDash val="solid"/>
-          </a:ln>
-        </p:spPr>
-      </p:sp>
-      <p:sp>
-        <p:nvSpPr>
-          <p:cNvPr id="17" name="Text 15"/>
-          <p:cNvSpPr/>
-          <p:nvPr/>
-        </p:nvSpPr>
-        <p:spPr>
-          <a:xfrm>
-            <a:off x="960120" y="5193792"/>
-            <a:ext cx="10241280" cy="548640"/>
-          </a:xfrm>
-          <a:prstGeom prst="rect">
-            <a:avLst/>
-          </a:prstGeom>
-          <a:noFill/>
-          <a:ln/>
-        </p:spPr>
-        <p:txBody>
-          <a:bodyPr wrap="square" lIns="0" tIns="0" rIns="0" bIns="0" rtlCol="0" anchor="ctr"/>
-          <a:lstStyle/>
-          <a:p>
-            <a:pPr indent="0" marL="0">
-              <a:buNone/>
-            </a:pPr>
-            <a:r>
-              <a:rPr lang="en-US" sz="1300" dirty="0">
+              <a:t>README : question, méthode, résultat, limites</a:t>
+            </a:r>
+            <a:endParaRPr lang="en-US" sz="1200" dirty="0"/>
+          </a:p>
+          <a:p>
+            <a:pPr marL="342900" indent="-342900">
+              <a:spcAft>
+                <a:spcPts val="800"/>
+              </a:spcAft>
+              <a:buSzPct val="100000"/>
+              <a:buChar char="•"/>
+            </a:pPr>
+            <a:r>
+              <a:rPr lang="en-US" sz="1200" dirty="0">
                 <a:solidFill>
                   <a:srgbClr val="1F2A1F"/>
                 </a:solidFill>
@@ -9501,9 +9987,9 @@
                 <a:ea typeface="Calibri" pitchFamily="34" charset="-122"/>
                 <a:cs typeface="Calibri" pitchFamily="34" charset="-120"/>
               </a:rPr>
-              <a:t>Même réflexe en classification : la classe majoritaire. Un modèle qui ne bat pas la référence naïve n'a rien appris.</a:t>
-            </a:r>
-            <a:endParaRPr lang="en-US" sz="1300" dirty="0"/>
+              <a:t>Nommer les limites de son analyse</a:t>
+            </a:r>
+            <a:endParaRPr lang="en-US" sz="1200" dirty="0"/>
           </a:p>
         </p:txBody>
       </p:sp>
@@ -9517,7 +10003,15 @@
 
 <file path=ppt/slides/slide21.xml><?xml version="1.0" encoding="utf-8"?>
 <p:sld xmlns:a="http://schemas.openxmlformats.org/drawingml/2006/main" xmlns:r="http://schemas.openxmlformats.org/officeDocument/2006/relationships" xmlns:p="http://schemas.openxmlformats.org/presentationml/2006/main">
-  <p:cSld name="Slide 2">
+  <p:cSld name="Slide 15">
+    <p:bg>
+      <p:bgPr>
+        <a:solidFill>
+          <a:srgbClr val="1A3A1C"/>
+        </a:solidFill>
+        <a:effectLst/>
+      </p:bgPr>
+    </p:bg>
     <p:spTree>
       <p:nvGrpSpPr>
         <p:cNvPr id="1" name=""/>
@@ -9534,119 +10028,14 @@
       </p:grpSpPr>
       <p:sp>
         <p:nvSpPr>
-          <p:cNvPr id="2" name="Text 0"/>
-          <p:cNvSpPr/>
-          <p:nvPr/>
-        </p:nvSpPr>
-        <p:spPr>
-          <a:xfrm>
-            <a:off x="640080" y="384048"/>
-            <a:ext cx="10881360" cy="685800"/>
-          </a:xfrm>
-          <a:prstGeom prst="rect">
-            <a:avLst/>
-          </a:prstGeom>
-          <a:noFill/>
-          <a:ln/>
-        </p:spPr>
-        <p:txBody>
-          <a:bodyPr wrap="square" lIns="0" tIns="0" rIns="0" bIns="0" rtlCol="0" anchor="ctr"/>
-          <a:lstStyle/>
-          <a:p>
-            <a:pPr indent="0" marL="0">
-              <a:buNone/>
-            </a:pPr>
-            <a:r>
-              <a:rPr lang="en-US" sz="3400" b="1" dirty="0">
-                <a:solidFill>
-                  <a:srgbClr val="1F2A1F"/>
-                </a:solidFill>
-                <a:latin typeface="Cambria" pitchFamily="34" charset="0"/>
-                <a:ea typeface="Cambria" pitchFamily="34" charset="-122"/>
-                <a:cs typeface="Cambria" pitchFamily="34" charset="-120"/>
-              </a:rPr>
-              <a:t>Les résidus, deuxième lecture</a:t>
-            </a:r>
-            <a:endParaRPr lang="en-US" sz="3400" dirty="0"/>
-          </a:p>
-        </p:txBody>
-      </p:sp>
-      <p:sp>
-        <p:nvSpPr>
-          <p:cNvPr id="3" name="Text 1"/>
-          <p:cNvSpPr/>
-          <p:nvPr/>
-        </p:nvSpPr>
-        <p:spPr>
-          <a:xfrm>
-            <a:off x="640080" y="1078992"/>
-            <a:ext cx="10881360" cy="384048"/>
-          </a:xfrm>
-          <a:prstGeom prst="rect">
-            <a:avLst/>
-          </a:prstGeom>
-          <a:noFill/>
-          <a:ln/>
-        </p:spPr>
-        <p:txBody>
-          <a:bodyPr wrap="square" lIns="0" tIns="0" rIns="0" bIns="0" rtlCol="0" anchor="ctr"/>
-          <a:lstStyle/>
-          <a:p>
-            <a:pPr indent="0" marL="0">
-              <a:buNone/>
-            </a:pPr>
-            <a:r>
-              <a:rPr lang="en-US" sz="1400" i="1" dirty="0">
-                <a:solidFill>
-                  <a:srgbClr val="5E6E5E"/>
-                </a:solidFill>
-                <a:latin typeface="Calibri" pitchFamily="34" charset="0"/>
-                <a:ea typeface="Calibri" pitchFamily="34" charset="-122"/>
-                <a:cs typeface="Calibri" pitchFamily="34" charset="-120"/>
-              </a:rPr>
-              <a:t>Ce que le nuage dit quand on sait quoi y chercher</a:t>
-            </a:r>
-            <a:endParaRPr lang="en-US" sz="1400" dirty="0"/>
-          </a:p>
-        </p:txBody>
-      </p:sp>
-      <p:sp>
-        <p:nvSpPr>
-          <p:cNvPr id="4" name="Shape 2"/>
-          <p:cNvSpPr/>
-          <p:nvPr/>
-        </p:nvSpPr>
-        <p:spPr>
-          <a:xfrm>
-            <a:off x="640080" y="1691640"/>
-            <a:ext cx="5166360" cy="1920240"/>
-          </a:xfrm>
-          <a:prstGeom prst="roundRect">
-            <a:avLst>
-              <a:gd name="adj" fmla="val 3810"/>
-            </a:avLst>
-          </a:prstGeom>
-          <a:solidFill>
-            <a:srgbClr val="EDF2E6"/>
-          </a:solidFill>
-          <a:ln w="12700">
-            <a:solidFill>
-              <a:srgbClr val="EDF2E6"/>
-            </a:solidFill>
-            <a:prstDash val="solid"/>
-          </a:ln>
-        </p:spPr>
-      </p:sp>
-      <p:sp>
-        <p:nvSpPr>
-          <p:cNvPr id="5" name="Shape 3"/>
-          <p:cNvSpPr/>
-          <p:nvPr/>
-        </p:nvSpPr>
-        <p:spPr>
-          <a:xfrm>
-            <a:off x="932688" y="1984248"/>
-            <a:ext cx="420624" cy="420624"/>
+          <p:cNvPr id="2" name="Shape 0"/>
+          <p:cNvSpPr/>
+          <p:nvPr/>
+        </p:nvSpPr>
+        <p:spPr>
+          <a:xfrm>
+            <a:off x="-1645920" y="4023360"/>
+            <a:ext cx="4206240" cy="4206240"/>
           </a:xfrm>
           <a:prstGeom prst="ellipse">
             <a:avLst/>
@@ -9661,215 +10050,343 @@
             <a:prstDash val="solid"/>
           </a:ln>
         </p:spPr>
-      </p:sp>
-      <p:sp>
-        <p:nvSpPr>
-          <p:cNvPr id="6" name="Text 4"/>
-          <p:cNvSpPr/>
-          <p:nvPr/>
-        </p:nvSpPr>
-        <p:spPr>
-          <a:xfrm>
-            <a:off x="932688" y="1984248"/>
-            <a:ext cx="420624" cy="420624"/>
-          </a:xfrm>
-          <a:prstGeom prst="rect">
-            <a:avLst/>
-          </a:prstGeom>
-          <a:noFill/>
-          <a:ln/>
-        </p:spPr>
-        <p:txBody>
-          <a:bodyPr wrap="square" lIns="0" tIns="0" rIns="0" bIns="0" rtlCol="0" anchor="ctr"/>
-          <a:lstStyle/>
-          <a:p>
-            <a:pPr algn="ctr" indent="0" marL="0">
-              <a:buNone/>
-            </a:pPr>
-            <a:r>
-              <a:rPr lang="en-US" sz="1500" b="1" dirty="0">
-                <a:solidFill>
-                  <a:srgbClr val="FFFFFF"/>
+        <p:txBody>
+          <a:bodyPr/>
+          <a:lstStyle/>
+          <a:p>
+            <a:endParaRPr lang="en-US"/>
+          </a:p>
+        </p:txBody>
+      </p:sp>
+      <p:sp>
+        <p:nvSpPr>
+          <p:cNvPr id="3" name="Text 1"/>
+          <p:cNvSpPr/>
+          <p:nvPr/>
+        </p:nvSpPr>
+        <p:spPr>
+          <a:xfrm>
+            <a:off x="4572000" y="822960"/>
+            <a:ext cx="6949440" cy="365760"/>
+          </a:xfrm>
+          <a:prstGeom prst="rect">
+            <a:avLst/>
+          </a:prstGeom>
+          <a:noFill/>
+          <a:ln/>
+        </p:spPr>
+        <p:txBody>
+          <a:bodyPr wrap="square" lIns="0" tIns="0" rIns="0" bIns="0" rtlCol="0" anchor="ctr"/>
+          <a:lstStyle/>
+          <a:p>
+            <a:pPr marL="0" indent="0">
+              <a:buNone/>
+            </a:pPr>
+            <a:r>
+              <a:rPr lang="en-US" sz="1400" b="1" kern="0" spc="400" dirty="0">
+                <a:solidFill>
+                  <a:srgbClr val="97BC62"/>
                 </a:solidFill>
                 <a:latin typeface="Calibri" pitchFamily="34" charset="0"/>
                 <a:ea typeface="Calibri" pitchFamily="34" charset="-122"/>
                 <a:cs typeface="Calibri" pitchFamily="34" charset="-120"/>
               </a:rPr>
-              <a:t>1</a:t>
-            </a:r>
-            <a:endParaRPr lang="en-US" sz="1500" dirty="0"/>
-          </a:p>
-        </p:txBody>
-      </p:sp>
-      <p:sp>
-        <p:nvSpPr>
-          <p:cNvPr id="7" name="Text 5"/>
-          <p:cNvSpPr/>
-          <p:nvPr/>
-        </p:nvSpPr>
-        <p:spPr>
-          <a:xfrm>
-            <a:off x="1508760" y="2002536"/>
-            <a:ext cx="4023360" cy="310896"/>
-          </a:xfrm>
-          <a:prstGeom prst="rect">
-            <a:avLst/>
-          </a:prstGeom>
-          <a:noFill/>
-          <a:ln/>
-        </p:spPr>
-        <p:txBody>
-          <a:bodyPr wrap="square" lIns="0" tIns="0" rIns="0" bIns="0" rtlCol="0" anchor="ctr"/>
-          <a:lstStyle/>
-          <a:p>
-            <a:pPr indent="0" marL="0">
-              <a:buNone/>
-            </a:pPr>
-            <a:r>
-              <a:rPr lang="en-US" sz="1700" b="1" dirty="0">
-                <a:solidFill>
-                  <a:srgbClr val="2C5F2D"/>
+              <a:t>Le fil rouge</a:t>
+            </a:r>
+            <a:endParaRPr lang="en-US" sz="1400" dirty="0"/>
+          </a:p>
+        </p:txBody>
+      </p:sp>
+      <p:sp>
+        <p:nvSpPr>
+          <p:cNvPr id="4" name="Text 2"/>
+          <p:cNvSpPr/>
+          <p:nvPr/>
+        </p:nvSpPr>
+        <p:spPr>
+          <a:xfrm>
+            <a:off x="4572000" y="1280160"/>
+            <a:ext cx="6949440" cy="1188720"/>
+          </a:xfrm>
+          <a:prstGeom prst="rect">
+            <a:avLst/>
+          </a:prstGeom>
+          <a:noFill/>
+          <a:ln/>
+        </p:spPr>
+        <p:txBody>
+          <a:bodyPr wrap="square" lIns="0" tIns="0" rIns="0" bIns="0" rtlCol="0" anchor="ctr"/>
+          <a:lstStyle/>
+          <a:p>
+            <a:pPr marL="0" indent="0">
+              <a:buNone/>
+            </a:pPr>
+            <a:r>
+              <a:rPr lang="en-US" sz="3400" b="1" dirty="0">
+                <a:solidFill>
+                  <a:srgbClr val="FFFFFF"/>
                 </a:solidFill>
                 <a:latin typeface="Cambria" pitchFamily="34" charset="0"/>
                 <a:ea typeface="Cambria" pitchFamily="34" charset="-122"/>
                 <a:cs typeface="Cambria" pitchFamily="34" charset="-120"/>
               </a:rPr>
-              <a:t>La dispersion s'évase</a:t>
-            </a:r>
-            <a:endParaRPr lang="en-US" sz="1700" dirty="0"/>
-          </a:p>
-        </p:txBody>
-      </p:sp>
-      <p:sp>
-        <p:nvSpPr>
-          <p:cNvPr id="8" name="Text 6"/>
-          <p:cNvSpPr/>
-          <p:nvPr/>
-        </p:nvSpPr>
-        <p:spPr>
-          <a:xfrm>
-            <a:off x="932688" y="2606040"/>
-            <a:ext cx="4572000" cy="868680"/>
-          </a:xfrm>
-          <a:prstGeom prst="rect">
-            <a:avLst/>
-          </a:prstGeom>
-          <a:noFill/>
-          <a:ln/>
-        </p:spPr>
-        <p:txBody>
-          <a:bodyPr wrap="square" lIns="0" tIns="0" rIns="0" bIns="0" rtlCol="0" anchor="t"/>
-          <a:lstStyle/>
-          <a:p>
-            <a:pPr indent="0" marL="0">
+              <a:t>Un résultat juste ne suffit pas</a:t>
+            </a:r>
+            <a:endParaRPr lang="en-US" sz="3400" dirty="0"/>
+          </a:p>
+        </p:txBody>
+      </p:sp>
+      <p:sp>
+        <p:nvSpPr>
+          <p:cNvPr id="5" name="Shape 3"/>
+          <p:cNvSpPr/>
+          <p:nvPr/>
+        </p:nvSpPr>
+        <p:spPr>
+          <a:xfrm>
+            <a:off x="4572000" y="2898648"/>
+            <a:ext cx="128016" cy="128016"/>
+          </a:xfrm>
+          <a:prstGeom prst="ellipse">
+            <a:avLst/>
+          </a:prstGeom>
+          <a:solidFill>
+            <a:srgbClr val="97BC62"/>
+          </a:solidFill>
+          <a:ln w="12700">
+            <a:solidFill>
+              <a:srgbClr val="97BC62"/>
+            </a:solidFill>
+            <a:prstDash val="solid"/>
+          </a:ln>
+        </p:spPr>
+        <p:txBody>
+          <a:bodyPr/>
+          <a:lstStyle/>
+          <a:p>
+            <a:endParaRPr lang="en-US"/>
+          </a:p>
+        </p:txBody>
+      </p:sp>
+      <p:sp>
+        <p:nvSpPr>
+          <p:cNvPr id="6" name="Text 4"/>
+          <p:cNvSpPr/>
+          <p:nvPr/>
+        </p:nvSpPr>
+        <p:spPr>
+          <a:xfrm>
+            <a:off x="4892040" y="2660904"/>
+            <a:ext cx="6629400" cy="548640"/>
+          </a:xfrm>
+          <a:prstGeom prst="rect">
+            <a:avLst/>
+          </a:prstGeom>
+          <a:noFill/>
+          <a:ln/>
+        </p:spPr>
+        <p:txBody>
+          <a:bodyPr wrap="square" lIns="0" tIns="0" rIns="0" bIns="0" rtlCol="0" anchor="ctr"/>
+          <a:lstStyle/>
+          <a:p>
+            <a:pPr marL="0" indent="0">
               <a:lnSpc>
                 <a:spcPct val="115000"/>
               </a:lnSpc>
               <a:buNone/>
             </a:pPr>
             <a:r>
-              <a:rPr lang="en-US" sz="1300" dirty="0">
-                <a:solidFill>
-                  <a:srgbClr val="1F2A1F"/>
+              <a:rPr lang="en-US" sz="1400" dirty="0">
+                <a:solidFill>
+                  <a:srgbClr val="E4EEDC"/>
                 </a:solidFill>
                 <a:latin typeface="Calibri" pitchFamily="34" charset="0"/>
                 <a:ea typeface="Calibri" pitchFamily="34" charset="-122"/>
                 <a:cs typeface="Calibri" pitchFamily="34" charset="-120"/>
               </a:rPr>
-              <a:t>L'erreur passe de 11,7 g/km en bas de gamme à 30,0 au-dessus de 300 kW. L'incertitude dépend du véhicule — le R² ne le dit pas.</a:t>
-            </a:r>
-            <a:endParaRPr lang="en-US" sz="1300" dirty="0"/>
-          </a:p>
-        </p:txBody>
-      </p:sp>
-      <p:sp>
-        <p:nvSpPr>
-          <p:cNvPr id="9" name="Shape 7"/>
-          <p:cNvSpPr/>
-          <p:nvPr/>
-        </p:nvSpPr>
-        <p:spPr>
-          <a:xfrm>
-            <a:off x="6355080" y="1691640"/>
-            <a:ext cx="5166360" cy="1920240"/>
-          </a:xfrm>
-          <a:prstGeom prst="roundRect">
-            <a:avLst>
-              <a:gd name="adj" fmla="val 3810"/>
-            </a:avLst>
+              <a:t>Il doit être calculable à l'échelle réelle — d'où le coût et la vectorisation.</a:t>
+            </a:r>
+            <a:endParaRPr lang="en-US" sz="1400" dirty="0"/>
+          </a:p>
+        </p:txBody>
+      </p:sp>
+      <p:sp>
+        <p:nvSpPr>
+          <p:cNvPr id="7" name="Shape 5"/>
+          <p:cNvSpPr/>
+          <p:nvPr/>
+        </p:nvSpPr>
+        <p:spPr>
+          <a:xfrm>
+            <a:off x="4572000" y="3648456"/>
+            <a:ext cx="128016" cy="128016"/>
+          </a:xfrm>
+          <a:prstGeom prst="ellipse">
+            <a:avLst/>
           </a:prstGeom>
           <a:solidFill>
-            <a:srgbClr val="EDF2E6"/>
+            <a:srgbClr val="97BC62"/>
           </a:solidFill>
           <a:ln w="12700">
             <a:solidFill>
-              <a:srgbClr val="EDF2E6"/>
+              <a:srgbClr val="97BC62"/>
             </a:solidFill>
             <a:prstDash val="solid"/>
           </a:ln>
         </p:spPr>
-      </p:sp>
-      <p:sp>
-        <p:nvSpPr>
-          <p:cNvPr id="10" name="Shape 8"/>
-          <p:cNvSpPr/>
-          <p:nvPr/>
-        </p:nvSpPr>
-        <p:spPr>
-          <a:xfrm>
-            <a:off x="6647688" y="1984248"/>
-            <a:ext cx="420624" cy="420624"/>
+        <p:txBody>
+          <a:bodyPr/>
+          <a:lstStyle/>
+          <a:p>
+            <a:endParaRPr lang="en-US"/>
+          </a:p>
+        </p:txBody>
+      </p:sp>
+      <p:sp>
+        <p:nvSpPr>
+          <p:cNvPr id="8" name="Text 6"/>
+          <p:cNvSpPr/>
+          <p:nvPr/>
+        </p:nvSpPr>
+        <p:spPr>
+          <a:xfrm>
+            <a:off x="4892040" y="3410712"/>
+            <a:ext cx="6629400" cy="548640"/>
+          </a:xfrm>
+          <a:prstGeom prst="rect">
+            <a:avLst/>
+          </a:prstGeom>
+          <a:noFill/>
+          <a:ln/>
+        </p:spPr>
+        <p:txBody>
+          <a:bodyPr wrap="square" lIns="0" tIns="0" rIns="0" bIns="0" rtlCol="0" anchor="ctr"/>
+          <a:lstStyle/>
+          <a:p>
+            <a:pPr marL="0" indent="0">
+              <a:lnSpc>
+                <a:spcPct val="115000"/>
+              </a:lnSpc>
+              <a:buNone/>
+            </a:pPr>
+            <a:r>
+              <a:rPr lang="en-US" sz="1400" dirty="0">
+                <a:solidFill>
+                  <a:srgbClr val="E4EEDC"/>
+                </a:solidFill>
+                <a:latin typeface="Calibri" pitchFamily="34" charset="0"/>
+                <a:ea typeface="Calibri" pitchFamily="34" charset="-122"/>
+                <a:cs typeface="Calibri" pitchFamily="34" charset="-120"/>
+              </a:rPr>
+              <a:t>Il doit être vérifié, car l'erreur la plus dangereuse ne plante pas.</a:t>
+            </a:r>
+            <a:endParaRPr lang="en-US" sz="1400" dirty="0"/>
+          </a:p>
+        </p:txBody>
+      </p:sp>
+      <p:sp>
+        <p:nvSpPr>
+          <p:cNvPr id="9" name="Shape 7"/>
+          <p:cNvSpPr/>
+          <p:nvPr/>
+        </p:nvSpPr>
+        <p:spPr>
+          <a:xfrm>
+            <a:off x="4572000" y="4398264"/>
+            <a:ext cx="128016" cy="128016"/>
           </a:xfrm>
           <a:prstGeom prst="ellipse">
             <a:avLst/>
           </a:prstGeom>
           <a:solidFill>
-            <a:srgbClr val="2C5F2D"/>
+            <a:srgbClr val="97BC62"/>
           </a:solidFill>
           <a:ln w="12700">
             <a:solidFill>
-              <a:srgbClr val="2C5F2D"/>
+              <a:srgbClr val="97BC62"/>
             </a:solidFill>
             <a:prstDash val="solid"/>
           </a:ln>
         </p:spPr>
-      </p:sp>
-      <p:sp>
-        <p:nvSpPr>
-          <p:cNvPr id="11" name="Text 9"/>
-          <p:cNvSpPr/>
-          <p:nvPr/>
-        </p:nvSpPr>
-        <p:spPr>
-          <a:xfrm>
-            <a:off x="6647688" y="1984248"/>
-            <a:ext cx="420624" cy="420624"/>
-          </a:xfrm>
-          <a:prstGeom prst="rect">
-            <a:avLst/>
-          </a:prstGeom>
-          <a:noFill/>
-          <a:ln/>
-        </p:spPr>
-        <p:txBody>
-          <a:bodyPr wrap="square" lIns="0" tIns="0" rIns="0" bIns="0" rtlCol="0" anchor="ctr"/>
-          <a:lstStyle/>
-          <a:p>
-            <a:pPr algn="ctr" indent="0" marL="0">
-              <a:buNone/>
-            </a:pPr>
-            <a:r>
-              <a:rPr lang="en-US" sz="1500" b="1" dirty="0">
-                <a:solidFill>
-                  <a:srgbClr val="FFFFFF"/>
+        <p:txBody>
+          <a:bodyPr/>
+          <a:lstStyle/>
+          <a:p>
+            <a:endParaRPr lang="en-US"/>
+          </a:p>
+        </p:txBody>
+      </p:sp>
+      <p:sp>
+        <p:nvSpPr>
+          <p:cNvPr id="10" name="Text 8"/>
+          <p:cNvSpPr/>
+          <p:nvPr/>
+        </p:nvSpPr>
+        <p:spPr>
+          <a:xfrm>
+            <a:off x="4892040" y="4160520"/>
+            <a:ext cx="6629400" cy="548640"/>
+          </a:xfrm>
+          <a:prstGeom prst="rect">
+            <a:avLst/>
+          </a:prstGeom>
+          <a:noFill/>
+          <a:ln/>
+        </p:spPr>
+        <p:txBody>
+          <a:bodyPr wrap="square" lIns="0" tIns="0" rIns="0" bIns="0" rtlCol="0" anchor="ctr"/>
+          <a:lstStyle/>
+          <a:p>
+            <a:pPr marL="0" indent="0">
+              <a:lnSpc>
+                <a:spcPct val="115000"/>
+              </a:lnSpc>
+              <a:buNone/>
+            </a:pPr>
+            <a:r>
+              <a:rPr lang="en-US" sz="1400" dirty="0">
+                <a:solidFill>
+                  <a:srgbClr val="E4EEDC"/>
                 </a:solidFill>
                 <a:latin typeface="Calibri" pitchFamily="34" charset="0"/>
                 <a:ea typeface="Calibri" pitchFamily="34" charset="-122"/>
                 <a:cs typeface="Calibri" pitchFamily="34" charset="-120"/>
               </a:rPr>
-              <a:t>2</a:t>
-            </a:r>
-            <a:endParaRPr lang="en-US" sz="1500" dirty="0"/>
+              <a:t>Il doit être situé : sur quelle population, avec quelle métrique, dans quelles limites.</a:t>
+            </a:r>
+            <a:endParaRPr lang="en-US" sz="1400" dirty="0"/>
+          </a:p>
+        </p:txBody>
+      </p:sp>
+      <p:sp>
+        <p:nvSpPr>
+          <p:cNvPr id="11" name="Shape 9"/>
+          <p:cNvSpPr/>
+          <p:nvPr/>
+        </p:nvSpPr>
+        <p:spPr>
+          <a:xfrm>
+            <a:off x="4572000" y="5148072"/>
+            <a:ext cx="128016" cy="128016"/>
+          </a:xfrm>
+          <a:prstGeom prst="ellipse">
+            <a:avLst/>
+          </a:prstGeom>
+          <a:solidFill>
+            <a:srgbClr val="97BC62"/>
+          </a:solidFill>
+          <a:ln w="12700">
+            <a:solidFill>
+              <a:srgbClr val="97BC62"/>
+            </a:solidFill>
+            <a:prstDash val="solid"/>
+          </a:ln>
+        </p:spPr>
+        <p:txBody>
+          <a:bodyPr/>
+          <a:lstStyle/>
+          <a:p>
+            <a:endParaRPr lang="en-US"/>
           </a:p>
         </p:txBody>
       </p:sp>
@@ -9881,420 +10398,76 @@
         </p:nvSpPr>
         <p:spPr>
           <a:xfrm>
-            <a:off x="7223760" y="2002536"/>
-            <a:ext cx="4023360" cy="310896"/>
-          </a:xfrm>
-          <a:prstGeom prst="rect">
-            <a:avLst/>
-          </a:prstGeom>
-          <a:noFill/>
-          <a:ln/>
-        </p:spPr>
-        <p:txBody>
-          <a:bodyPr wrap="square" lIns="0" tIns="0" rIns="0" bIns="0" rtlCol="0" anchor="ctr"/>
-          <a:lstStyle/>
-          <a:p>
-            <a:pPr indent="0" marL="0">
-              <a:buNone/>
-            </a:pPr>
-            <a:r>
-              <a:rPr lang="en-US" sz="1700" b="1" dirty="0">
-                <a:solidFill>
-                  <a:srgbClr val="2C5F2D"/>
-                </a:solidFill>
-                <a:latin typeface="Cambria" pitchFamily="34" charset="0"/>
-                <a:ea typeface="Cambria" pitchFamily="34" charset="-122"/>
-                <a:cs typeface="Cambria" pitchFamily="34" charset="-120"/>
-              </a:rPr>
-              <a:t>La traînée est d'un seul côté</a:t>
-            </a:r>
-            <a:endParaRPr lang="en-US" sz="1700" dirty="0"/>
-          </a:p>
-        </p:txBody>
-      </p:sp>
-      <p:sp>
-        <p:nvSpPr>
-          <p:cNvPr id="13" name="Text 11"/>
-          <p:cNvSpPr/>
-          <p:nvPr/>
-        </p:nvSpPr>
-        <p:spPr>
-          <a:xfrm>
-            <a:off x="6647688" y="2606040"/>
-            <a:ext cx="4572000" cy="868680"/>
-          </a:xfrm>
-          <a:prstGeom prst="rect">
-            <a:avLst/>
-          </a:prstGeom>
-          <a:noFill/>
-          <a:ln/>
-        </p:spPr>
-        <p:txBody>
-          <a:bodyPr wrap="square" lIns="0" tIns="0" rIns="0" bIns="0" rtlCol="0" anchor="t"/>
-          <a:lstStyle/>
-          <a:p>
-            <a:pPr indent="0" marL="0">
+            <a:off x="4892040" y="4910328"/>
+            <a:ext cx="6629400" cy="548640"/>
+          </a:xfrm>
+          <a:prstGeom prst="rect">
+            <a:avLst/>
+          </a:prstGeom>
+          <a:noFill/>
+          <a:ln/>
+        </p:spPr>
+        <p:txBody>
+          <a:bodyPr wrap="square" lIns="0" tIns="0" rIns="0" bIns="0" rtlCol="0" anchor="ctr"/>
+          <a:lstStyle/>
+          <a:p>
+            <a:pPr marL="0" indent="0">
               <a:lnSpc>
                 <a:spcPct val="115000"/>
               </a:lnSpc>
               <a:buNone/>
             </a:pPr>
             <a:r>
-              <a:rPr lang="en-US" sz="1300" dirty="0">
-                <a:solidFill>
-                  <a:srgbClr val="1F2A1F"/>
+              <a:rPr lang="en-US" sz="1400" dirty="0">
+                <a:solidFill>
+                  <a:srgbClr val="E4EEDC"/>
                 </a:solidFill>
                 <a:latin typeface="Calibri" pitchFamily="34" charset="0"/>
                 <a:ea typeface="Calibri" pitchFamily="34" charset="-122"/>
                 <a:cs typeface="Calibri" pitchFamily="34" charset="-120"/>
               </a:rPr>
-              <a:t>Les vingt plus gros résidus sont tous positifs. Le modèle sous-estime sans jamais surestimer autant : signature d'une variable manquante.</a:t>
-            </a:r>
-            <a:endParaRPr lang="en-US" sz="1300" dirty="0"/>
-          </a:p>
-        </p:txBody>
-      </p:sp>
-      <p:sp>
-        <p:nvSpPr>
-          <p:cNvPr id="14" name="Shape 12"/>
-          <p:cNvSpPr/>
-          <p:nvPr/>
-        </p:nvSpPr>
-        <p:spPr>
-          <a:xfrm>
-            <a:off x="640080" y="3977640"/>
-            <a:ext cx="5166360" cy="1920240"/>
-          </a:xfrm>
-          <a:prstGeom prst="roundRect">
-            <a:avLst>
-              <a:gd name="adj" fmla="val 3810"/>
-            </a:avLst>
-          </a:prstGeom>
-          <a:solidFill>
-            <a:srgbClr val="EDF2E6"/>
-          </a:solidFill>
-          <a:ln w="12700">
-            <a:solidFill>
-              <a:srgbClr val="EDF2E6"/>
-            </a:solidFill>
-            <a:prstDash val="solid"/>
-          </a:ln>
-        </p:spPr>
-      </p:sp>
-      <p:sp>
-        <p:nvSpPr>
-          <p:cNvPr id="15" name="Shape 13"/>
-          <p:cNvSpPr/>
-          <p:nvPr/>
-        </p:nvSpPr>
-        <p:spPr>
-          <a:xfrm>
-            <a:off x="932688" y="4270248"/>
-            <a:ext cx="420624" cy="420624"/>
-          </a:xfrm>
-          <a:prstGeom prst="ellipse">
-            <a:avLst/>
-          </a:prstGeom>
-          <a:solidFill>
-            <a:srgbClr val="2C5F2D"/>
-          </a:solidFill>
-          <a:ln w="12700">
-            <a:solidFill>
-              <a:srgbClr val="2C5F2D"/>
-            </a:solidFill>
-            <a:prstDash val="solid"/>
-          </a:ln>
-        </p:spPr>
-      </p:sp>
-      <p:sp>
-        <p:nvSpPr>
-          <p:cNvPr id="16" name="Text 14"/>
-          <p:cNvSpPr/>
-          <p:nvPr/>
-        </p:nvSpPr>
-        <p:spPr>
-          <a:xfrm>
-            <a:off x="932688" y="4270248"/>
-            <a:ext cx="420624" cy="420624"/>
-          </a:xfrm>
-          <a:prstGeom prst="rect">
-            <a:avLst/>
-          </a:prstGeom>
-          <a:noFill/>
-          <a:ln/>
-        </p:spPr>
-        <p:txBody>
-          <a:bodyPr wrap="square" lIns="0" tIns="0" rIns="0" bIns="0" rtlCol="0" anchor="ctr"/>
-          <a:lstStyle/>
-          <a:p>
-            <a:pPr algn="ctr" indent="0" marL="0">
-              <a:buNone/>
-            </a:pPr>
-            <a:r>
-              <a:rPr lang="en-US" sz="1500" b="1" dirty="0">
-                <a:solidFill>
-                  <a:srgbClr val="FFFFFF"/>
+              <a:t>Il doit être reproductible par quelqu'un d'autre.</a:t>
+            </a:r>
+            <a:endParaRPr lang="en-US" sz="1400" dirty="0"/>
+          </a:p>
+        </p:txBody>
+      </p:sp>
+      <p:sp>
+        <p:nvSpPr>
+          <p:cNvPr id="13" name="Text 11"/>
+          <p:cNvSpPr/>
+          <p:nvPr/>
+        </p:nvSpPr>
+        <p:spPr>
+          <a:xfrm>
+            <a:off x="4572000" y="5852160"/>
+            <a:ext cx="6949440" cy="457200"/>
+          </a:xfrm>
+          <a:prstGeom prst="rect">
+            <a:avLst/>
+          </a:prstGeom>
+          <a:noFill/>
+          <a:ln/>
+        </p:spPr>
+        <p:txBody>
+          <a:bodyPr wrap="square" lIns="0" tIns="0" rIns="0" bIns="0" rtlCol="0" anchor="ctr"/>
+          <a:lstStyle/>
+          <a:p>
+            <a:pPr marL="0" indent="0">
+              <a:buNone/>
+            </a:pPr>
+            <a:r>
+              <a:rPr lang="en-US" sz="1250" i="1" dirty="0">
+                <a:solidFill>
+                  <a:srgbClr val="97BC62"/>
                 </a:solidFill>
                 <a:latin typeface="Calibri" pitchFamily="34" charset="0"/>
                 <a:ea typeface="Calibri" pitchFamily="34" charset="-122"/>
                 <a:cs typeface="Calibri" pitchFamily="34" charset="-120"/>
               </a:rPr>
-              <a:t>3</a:t>
-            </a:r>
-            <a:endParaRPr lang="en-US" sz="1500" dirty="0"/>
-          </a:p>
-        </p:txBody>
-      </p:sp>
-      <p:sp>
-        <p:nvSpPr>
-          <p:cNvPr id="17" name="Text 15"/>
-          <p:cNvSpPr/>
-          <p:nvPr/>
-        </p:nvSpPr>
-        <p:spPr>
-          <a:xfrm>
-            <a:off x="1508760" y="4288536"/>
-            <a:ext cx="4023360" cy="310896"/>
-          </a:xfrm>
-          <a:prstGeom prst="rect">
-            <a:avLst/>
-          </a:prstGeom>
-          <a:noFill/>
-          <a:ln/>
-        </p:spPr>
-        <p:txBody>
-          <a:bodyPr wrap="square" lIns="0" tIns="0" rIns="0" bIns="0" rtlCol="0" anchor="ctr"/>
-          <a:lstStyle/>
-          <a:p>
-            <a:pPr indent="0" marL="0">
-              <a:buNone/>
-            </a:pPr>
-            <a:r>
-              <a:rPr lang="en-US" sz="1700" b="1" dirty="0">
-                <a:solidFill>
-                  <a:srgbClr val="2C5F2D"/>
-                </a:solidFill>
-                <a:latin typeface="Cambria" pitchFamily="34" charset="0"/>
-                <a:ea typeface="Cambria" pitchFamily="34" charset="-122"/>
-                <a:cs typeface="Cambria" pitchFamily="34" charset="-120"/>
-              </a:rPr>
-              <a:t>Une courbure peut rester</a:t>
-            </a:r>
-            <a:endParaRPr lang="en-US" sz="1700" dirty="0"/>
-          </a:p>
-        </p:txBody>
-      </p:sp>
-      <p:sp>
-        <p:nvSpPr>
-          <p:cNvPr id="18" name="Text 16"/>
-          <p:cNvSpPr/>
-          <p:nvPr/>
-        </p:nvSpPr>
-        <p:spPr>
-          <a:xfrm>
-            <a:off x="932688" y="4892040"/>
-            <a:ext cx="4572000" cy="868680"/>
-          </a:xfrm>
-          <a:prstGeom prst="rect">
-            <a:avLst/>
-          </a:prstGeom>
-          <a:noFill/>
-          <a:ln/>
-        </p:spPr>
-        <p:txBody>
-          <a:bodyPr wrap="square" lIns="0" tIns="0" rIns="0" bIns="0" rtlCol="0" anchor="t"/>
-          <a:lstStyle/>
-          <a:p>
-            <a:pPr indent="0" marL="0">
-              <a:lnSpc>
-                <a:spcPct val="115000"/>
-              </a:lnSpc>
-              <a:buNone/>
-            </a:pPr>
-            <a:r>
-              <a:rPr lang="en-US" sz="1300" dirty="0">
-                <a:solidFill>
-                  <a:srgbClr val="1F2A1F"/>
-                </a:solidFill>
-                <a:latin typeface="Calibri" pitchFamily="34" charset="0"/>
-                <a:ea typeface="Calibri" pitchFamily="34" charset="-122"/>
-                <a:cs typeface="Calibri" pitchFamily="34" charset="-120"/>
-              </a:rPr>
-              <a:t>Moyenne des résidus par décile de prédiction. Un motif en U = non-linéarité non captée. L'œil seul surinterprète les nuages denses.</a:t>
-            </a:r>
-            <a:endParaRPr lang="en-US" sz="1300" dirty="0"/>
-          </a:p>
-        </p:txBody>
-      </p:sp>
-      <p:sp>
-        <p:nvSpPr>
-          <p:cNvPr id="19" name="Shape 17"/>
-          <p:cNvSpPr/>
-          <p:nvPr/>
-        </p:nvSpPr>
-        <p:spPr>
-          <a:xfrm>
-            <a:off x="6355080" y="3977640"/>
-            <a:ext cx="5166360" cy="1920240"/>
-          </a:xfrm>
-          <a:prstGeom prst="roundRect">
-            <a:avLst>
-              <a:gd name="adj" fmla="val 3810"/>
-            </a:avLst>
-          </a:prstGeom>
-          <a:solidFill>
-            <a:srgbClr val="EDF2E6"/>
-          </a:solidFill>
-          <a:ln w="12700">
-            <a:solidFill>
-              <a:srgbClr val="EDF2E6"/>
-            </a:solidFill>
-            <a:prstDash val="solid"/>
-          </a:ln>
-        </p:spPr>
-      </p:sp>
-      <p:sp>
-        <p:nvSpPr>
-          <p:cNvPr id="20" name="Shape 18"/>
-          <p:cNvSpPr/>
-          <p:nvPr/>
-        </p:nvSpPr>
-        <p:spPr>
-          <a:xfrm>
-            <a:off x="6647688" y="4270248"/>
-            <a:ext cx="420624" cy="420624"/>
-          </a:xfrm>
-          <a:prstGeom prst="ellipse">
-            <a:avLst/>
-          </a:prstGeom>
-          <a:solidFill>
-            <a:srgbClr val="2C5F2D"/>
-          </a:solidFill>
-          <a:ln w="12700">
-            <a:solidFill>
-              <a:srgbClr val="2C5F2D"/>
-            </a:solidFill>
-            <a:prstDash val="solid"/>
-          </a:ln>
-        </p:spPr>
-      </p:sp>
-      <p:sp>
-        <p:nvSpPr>
-          <p:cNvPr id="21" name="Text 19"/>
-          <p:cNvSpPr/>
-          <p:nvPr/>
-        </p:nvSpPr>
-        <p:spPr>
-          <a:xfrm>
-            <a:off x="6647688" y="4270248"/>
-            <a:ext cx="420624" cy="420624"/>
-          </a:xfrm>
-          <a:prstGeom prst="rect">
-            <a:avLst/>
-          </a:prstGeom>
-          <a:noFill/>
-          <a:ln/>
-        </p:spPr>
-        <p:txBody>
-          <a:bodyPr wrap="square" lIns="0" tIns="0" rIns="0" bIns="0" rtlCol="0" anchor="ctr"/>
-          <a:lstStyle/>
-          <a:p>
-            <a:pPr algn="ctr" indent="0" marL="0">
-              <a:buNone/>
-            </a:pPr>
-            <a:r>
-              <a:rPr lang="en-US" sz="1500" b="1" dirty="0">
-                <a:solidFill>
-                  <a:srgbClr val="FFFFFF"/>
-                </a:solidFill>
-                <a:latin typeface="Calibri" pitchFamily="34" charset="0"/>
-                <a:ea typeface="Calibri" pitchFamily="34" charset="-122"/>
-                <a:cs typeface="Calibri" pitchFamily="34" charset="-120"/>
-              </a:rPr>
-              <a:t>4</a:t>
-            </a:r>
-            <a:endParaRPr lang="en-US" sz="1500" dirty="0"/>
-          </a:p>
-        </p:txBody>
-      </p:sp>
-      <p:sp>
-        <p:nvSpPr>
-          <p:cNvPr id="22" name="Text 20"/>
-          <p:cNvSpPr/>
-          <p:nvPr/>
-        </p:nvSpPr>
-        <p:spPr>
-          <a:xfrm>
-            <a:off x="7223760" y="4288536"/>
-            <a:ext cx="4023360" cy="310896"/>
-          </a:xfrm>
-          <a:prstGeom prst="rect">
-            <a:avLst/>
-          </a:prstGeom>
-          <a:noFill/>
-          <a:ln/>
-        </p:spPr>
-        <p:txBody>
-          <a:bodyPr wrap="square" lIns="0" tIns="0" rIns="0" bIns="0" rtlCol="0" anchor="ctr"/>
-          <a:lstStyle/>
-          <a:p>
-            <a:pPr indent="0" marL="0">
-              <a:buNone/>
-            </a:pPr>
-            <a:r>
-              <a:rPr lang="en-US" sz="1700" b="1" dirty="0">
-                <a:solidFill>
-                  <a:srgbClr val="2C5F2D"/>
-                </a:solidFill>
-                <a:latin typeface="Cambria" pitchFamily="34" charset="0"/>
-                <a:ea typeface="Cambria" pitchFamily="34" charset="-122"/>
-                <a:cs typeface="Cambria" pitchFamily="34" charset="-120"/>
-              </a:rPr>
-              <a:t>Attention aux zéros mécaniques</a:t>
-            </a:r>
-            <a:endParaRPr lang="en-US" sz="1700" dirty="0"/>
-          </a:p>
-        </p:txBody>
-      </p:sp>
-      <p:sp>
-        <p:nvSpPr>
-          <p:cNvPr id="23" name="Text 21"/>
-          <p:cNvSpPr/>
-          <p:nvPr/>
-        </p:nvSpPr>
-        <p:spPr>
-          <a:xfrm>
-            <a:off x="6647688" y="4892040"/>
-            <a:ext cx="4572000" cy="868680"/>
-          </a:xfrm>
-          <a:prstGeom prst="rect">
-            <a:avLst/>
-          </a:prstGeom>
-          <a:noFill/>
-          <a:ln/>
-        </p:spPr>
-        <p:txBody>
-          <a:bodyPr wrap="square" lIns="0" tIns="0" rIns="0" bIns="0" rtlCol="0" anchor="t"/>
-          <a:lstStyle/>
-          <a:p>
-            <a:pPr indent="0" marL="0">
-              <a:lnSpc>
-                <a:spcPct val="115000"/>
-              </a:lnSpc>
-              <a:buNone/>
-            </a:pPr>
-            <a:r>
-              <a:rPr lang="en-US" sz="1300" dirty="0">
-                <a:solidFill>
-                  <a:srgbClr val="1F2A1F"/>
-                </a:solidFill>
-                <a:latin typeface="Calibri" pitchFamily="34" charset="0"/>
-                <a:ea typeface="Calibri" pitchFamily="34" charset="-122"/>
-                <a:cs typeface="Calibri" pitchFamily="34" charset="-120"/>
-              </a:rPr>
-              <a:t>Le résidu moyen par modalité d'une variable présente dans le modèle est nul par construction. Ça ne démontre rien.</a:t>
-            </a:r>
-            <a:endParaRPr lang="en-US" sz="1300" dirty="0"/>
+              <a:t>Prochaine étape : classification — une cible binaire, une autre fonction de coût, d'autres métriques que le R².</a:t>
+            </a:r>
+            <a:endParaRPr lang="en-US" sz="1250" dirty="0"/>
           </a:p>
         </p:txBody>
       </p:sp>
@@ -10344,7 +10517,7 @@
           <a:bodyPr wrap="square" lIns="0" tIns="0" rIns="0" bIns="0" rtlCol="0" anchor="ctr"/>
           <a:lstStyle/>
           <a:p>
-            <a:pPr indent="0" marL="0">
+            <a:pPr marL="0" indent="0">
               <a:buNone/>
             </a:pPr>
             <a:r>
@@ -10383,7 +10556,7 @@
           <a:bodyPr wrap="square" lIns="0" tIns="0" rIns="0" bIns="0" rtlCol="0" anchor="ctr"/>
           <a:lstStyle/>
           <a:p>
-            <a:pPr indent="0" marL="0">
+            <a:pPr marL="0" indent="0">
               <a:buNone/>
             </a:pPr>
             <a:r>
@@ -10424,9 +10597,27 @@
             <a:tbl>
               <a:tblPr/>
               <a:tblGrid>
-                <a:gridCol w="1554480"/>
-                <a:gridCol w="2651760"/>
-                <a:gridCol w="2743200"/>
+                <a:gridCol w="1554480">
+                  <a:extLst>
+                    <a:ext uri="{9D8B030D-6E8A-4147-A177-3AD203B41FA5}">
+                      <a16:colId xmlns:a16="http://schemas.microsoft.com/office/drawing/2014/main" val="20000"/>
+                    </a:ext>
+                  </a:extLst>
+                </a:gridCol>
+                <a:gridCol w="2651760">
+                  <a:extLst>
+                    <a:ext uri="{9D8B030D-6E8A-4147-A177-3AD203B41FA5}">
+                      <a16:colId xmlns:a16="http://schemas.microsoft.com/office/drawing/2014/main" val="20001"/>
+                    </a:ext>
+                  </a:extLst>
+                </a:gridCol>
+                <a:gridCol w="2743200">
+                  <a:extLst>
+                    <a:ext uri="{9D8B030D-6E8A-4147-A177-3AD203B41FA5}">
+                      <a16:colId xmlns:a16="http://schemas.microsoft.com/office/drawing/2014/main" val="20002"/>
+                    </a:ext>
+                  </a:extLst>
+                </a:gridCol>
               </a:tblGrid>
               <a:tr h="402336">
                 <a:tc>
@@ -10434,7 +10625,7 @@
                     <a:bodyPr/>
                     <a:lstStyle/>
                     <a:p>
-                      <a:pPr indent="0" marL="0">
+                      <a:pPr marL="0" indent="0">
                         <a:buNone/>
                       </a:pPr>
                       <a:r>
@@ -10455,7 +10646,7 @@
                       </a:endParaRPr>
                     </a:p>
                   </a:txBody>
-                  <a:tcPr marL="91440" marR="91440" marT="45720" marB="45720" anchor="ctr">
+                  <a:tcPr anchor="ctr">
                     <a:lnL w="0" cap="flat" cmpd="sng" algn="ctr">
                       <a:noFill/>
                     </a:lnL>
@@ -10478,7 +10669,7 @@
                     <a:bodyPr/>
                     <a:lstStyle/>
                     <a:p>
-                      <a:pPr indent="0" marL="0">
+                      <a:pPr marL="0" indent="0">
                         <a:buNone/>
                       </a:pPr>
                       <a:r>
@@ -10499,7 +10690,7 @@
                       </a:endParaRPr>
                     </a:p>
                   </a:txBody>
-                  <a:tcPr marL="91440" marR="91440" marT="45720" marB="45720" anchor="ctr">
+                  <a:tcPr anchor="ctr">
                     <a:lnL w="0" cap="flat" cmpd="sng" algn="ctr">
                       <a:noFill/>
                     </a:lnL>
@@ -10522,7 +10713,7 @@
                     <a:bodyPr/>
                     <a:lstStyle/>
                     <a:p>
-                      <a:pPr indent="0" marL="0">
+                      <a:pPr marL="0" indent="0">
                         <a:buNone/>
                       </a:pPr>
                       <a:r>
@@ -10543,7 +10734,7 @@
                       </a:endParaRPr>
                     </a:p>
                   </a:txBody>
-                  <a:tcPr marL="91440" marR="91440" marT="45720" marB="45720" anchor="ctr">
+                  <a:tcPr anchor="ctr">
                     <a:lnL w="0" cap="flat" cmpd="sng" algn="ctr">
                       <a:noFill/>
                     </a:lnL>
@@ -10561,6 +10752,11 @@
                     </a:solidFill>
                   </a:tcPr>
                 </a:tc>
+                <a:extLst>
+                  <a:ext uri="{0D108BD9-81ED-4DB2-BD59-A6C34878D82A}">
+                    <a16:rowId xmlns:a16="http://schemas.microsoft.com/office/drawing/2014/main" val="10000"/>
+                  </a:ext>
+                </a:extLst>
               </a:tr>
               <a:tr h="402336">
                 <a:tc>
@@ -10568,7 +10764,7 @@
                     <a:bodyPr/>
                     <a:lstStyle/>
                     <a:p>
-                      <a:pPr indent="0" marL="0">
+                      <a:pPr marL="0" indent="0">
                         <a:buNone/>
                       </a:pPr>
                       <a:r>
@@ -10589,7 +10785,7 @@
                       </a:endParaRPr>
                     </a:p>
                   </a:txBody>
-                  <a:tcPr marL="91440" marR="91440" marT="45720" marB="45720" anchor="ctr">
+                  <a:tcPr anchor="ctr">
                     <a:lnL w="0" cap="flat" cmpd="sng" algn="ctr">
                       <a:noFill/>
                     </a:lnL>
@@ -10612,7 +10808,7 @@
                     <a:bodyPr/>
                     <a:lstStyle/>
                     <a:p>
-                      <a:pPr indent="0" marL="0">
+                      <a:pPr marL="0" indent="0">
                         <a:buNone/>
                       </a:pPr>
                       <a:r>
@@ -10633,7 +10829,7 @@
                       </a:endParaRPr>
                     </a:p>
                   </a:txBody>
-                  <a:tcPr marL="91440" marR="91440" marT="45720" marB="45720" anchor="ctr">
+                  <a:tcPr anchor="ctr">
                     <a:lnL w="0" cap="flat" cmpd="sng" algn="ctr">
                       <a:noFill/>
                     </a:lnL>
@@ -10656,7 +10852,7 @@
                     <a:bodyPr/>
                     <a:lstStyle/>
                     <a:p>
-                      <a:pPr indent="0" marL="0">
+                      <a:pPr marL="0" indent="0">
                         <a:buNone/>
                       </a:pPr>
                       <a:r>
@@ -10677,7 +10873,7 @@
                       </a:endParaRPr>
                     </a:p>
                   </a:txBody>
-                  <a:tcPr marL="91440" marR="91440" marT="45720" marB="45720" anchor="ctr">
+                  <a:tcPr anchor="ctr">
                     <a:lnL w="0" cap="flat" cmpd="sng" algn="ctr">
                       <a:noFill/>
                     </a:lnL>
@@ -10695,6 +10891,11 @@
                     </a:solidFill>
                   </a:tcPr>
                 </a:tc>
+                <a:extLst>
+                  <a:ext uri="{0D108BD9-81ED-4DB2-BD59-A6C34878D82A}">
+                    <a16:rowId xmlns:a16="http://schemas.microsoft.com/office/drawing/2014/main" val="10001"/>
+                  </a:ext>
+                </a:extLst>
               </a:tr>
               <a:tr h="402336">
                 <a:tc>
@@ -10702,7 +10903,7 @@
                     <a:bodyPr/>
                     <a:lstStyle/>
                     <a:p>
-                      <a:pPr indent="0" marL="0">
+                      <a:pPr marL="0" indent="0">
                         <a:buNone/>
                       </a:pPr>
                       <a:r>
@@ -10723,7 +10924,7 @@
                       </a:endParaRPr>
                     </a:p>
                   </a:txBody>
-                  <a:tcPr marL="91440" marR="91440" marT="45720" marB="45720" anchor="ctr">
+                  <a:tcPr anchor="ctr">
                     <a:lnL w="0" cap="flat" cmpd="sng" algn="ctr">
                       <a:noFill/>
                     </a:lnL>
@@ -10746,7 +10947,7 @@
                     <a:bodyPr/>
                     <a:lstStyle/>
                     <a:p>
-                      <a:pPr indent="0" marL="0">
+                      <a:pPr marL="0" indent="0">
                         <a:buNone/>
                       </a:pPr>
                       <a:r>
@@ -10767,7 +10968,7 @@
                       </a:endParaRPr>
                     </a:p>
                   </a:txBody>
-                  <a:tcPr marL="91440" marR="91440" marT="45720" marB="45720" anchor="ctr">
+                  <a:tcPr anchor="ctr">
                     <a:lnL w="0" cap="flat" cmpd="sng" algn="ctr">
                       <a:noFill/>
                     </a:lnL>
@@ -10790,7 +10991,7 @@
                     <a:bodyPr/>
                     <a:lstStyle/>
                     <a:p>
-                      <a:pPr indent="0" marL="0">
+                      <a:pPr marL="0" indent="0">
                         <a:buNone/>
                       </a:pPr>
                       <a:r>
@@ -10811,7 +11012,7 @@
                       </a:endParaRPr>
                     </a:p>
                   </a:txBody>
-                  <a:tcPr marL="91440" marR="91440" marT="45720" marB="45720" anchor="ctr">
+                  <a:tcPr anchor="ctr">
                     <a:lnL w="0" cap="flat" cmpd="sng" algn="ctr">
                       <a:noFill/>
                     </a:lnL>
@@ -10829,6 +11030,11 @@
                     </a:solidFill>
                   </a:tcPr>
                 </a:tc>
+                <a:extLst>
+                  <a:ext uri="{0D108BD9-81ED-4DB2-BD59-A6C34878D82A}">
+                    <a16:rowId xmlns:a16="http://schemas.microsoft.com/office/drawing/2014/main" val="10002"/>
+                  </a:ext>
+                </a:extLst>
               </a:tr>
               <a:tr h="402336">
                 <a:tc>
@@ -10836,7 +11042,7 @@
                     <a:bodyPr/>
                     <a:lstStyle/>
                     <a:p>
-                      <a:pPr indent="0" marL="0">
+                      <a:pPr marL="0" indent="0">
                         <a:buNone/>
                       </a:pPr>
                       <a:r>
@@ -10857,7 +11063,7 @@
                       </a:endParaRPr>
                     </a:p>
                   </a:txBody>
-                  <a:tcPr marL="91440" marR="91440" marT="45720" marB="45720" anchor="ctr">
+                  <a:tcPr anchor="ctr">
                     <a:lnL w="0" cap="flat" cmpd="sng" algn="ctr">
                       <a:noFill/>
                     </a:lnL>
@@ -10880,7 +11086,7 @@
                     <a:bodyPr/>
                     <a:lstStyle/>
                     <a:p>
-                      <a:pPr indent="0" marL="0">
+                      <a:pPr marL="0" indent="0">
                         <a:buNone/>
                       </a:pPr>
                       <a:r>
@@ -10901,7 +11107,7 @@
                       </a:endParaRPr>
                     </a:p>
                   </a:txBody>
-                  <a:tcPr marL="91440" marR="91440" marT="45720" marB="45720" anchor="ctr">
+                  <a:tcPr anchor="ctr">
                     <a:lnL w="0" cap="flat" cmpd="sng" algn="ctr">
                       <a:noFill/>
                     </a:lnL>
@@ -10924,7 +11130,7 @@
                     <a:bodyPr/>
                     <a:lstStyle/>
                     <a:p>
-                      <a:pPr indent="0" marL="0">
+                      <a:pPr marL="0" indent="0">
                         <a:buNone/>
                       </a:pPr>
                       <a:r>
@@ -10945,7 +11151,7 @@
                       </a:endParaRPr>
                     </a:p>
                   </a:txBody>
-                  <a:tcPr marL="91440" marR="91440" marT="45720" marB="45720" anchor="ctr">
+                  <a:tcPr anchor="ctr">
                     <a:lnL w="0" cap="flat" cmpd="sng" algn="ctr">
                       <a:noFill/>
                     </a:lnL>
@@ -10963,6 +11169,11 @@
                     </a:solidFill>
                   </a:tcPr>
                 </a:tc>
+                <a:extLst>
+                  <a:ext uri="{0D108BD9-81ED-4DB2-BD59-A6C34878D82A}">
+                    <a16:rowId xmlns:a16="http://schemas.microsoft.com/office/drawing/2014/main" val="10003"/>
+                  </a:ext>
+                </a:extLst>
               </a:tr>
               <a:tr h="402336">
                 <a:tc>
@@ -10970,7 +11181,7 @@
                     <a:bodyPr/>
                     <a:lstStyle/>
                     <a:p>
-                      <a:pPr indent="0" marL="0">
+                      <a:pPr marL="0" indent="0">
                         <a:buNone/>
                       </a:pPr>
                       <a:r>
@@ -10991,7 +11202,7 @@
                       </a:endParaRPr>
                     </a:p>
                   </a:txBody>
-                  <a:tcPr marL="91440" marR="91440" marT="45720" marB="45720" anchor="ctr">
+                  <a:tcPr anchor="ctr">
                     <a:lnL w="0" cap="flat" cmpd="sng" algn="ctr">
                       <a:noFill/>
                     </a:lnL>
@@ -11014,7 +11225,7 @@
                     <a:bodyPr/>
                     <a:lstStyle/>
                     <a:p>
-                      <a:pPr indent="0" marL="0">
+                      <a:pPr marL="0" indent="0">
                         <a:buNone/>
                       </a:pPr>
                       <a:r>
@@ -11035,7 +11246,7 @@
                       </a:endParaRPr>
                     </a:p>
                   </a:txBody>
-                  <a:tcPr marL="91440" marR="91440" marT="45720" marB="45720" anchor="ctr">
+                  <a:tcPr anchor="ctr">
                     <a:lnL w="0" cap="flat" cmpd="sng" algn="ctr">
                       <a:noFill/>
                     </a:lnL>
@@ -11058,7 +11269,7 @@
                     <a:bodyPr/>
                     <a:lstStyle/>
                     <a:p>
-                      <a:pPr indent="0" marL="0">
+                      <a:pPr marL="0" indent="0">
                         <a:buNone/>
                       </a:pPr>
                       <a:r>
@@ -11079,7 +11290,7 @@
                       </a:endParaRPr>
                     </a:p>
                   </a:txBody>
-                  <a:tcPr marL="91440" marR="91440" marT="45720" marB="45720" anchor="ctr">
+                  <a:tcPr anchor="ctr">
                     <a:lnL w="0" cap="flat" cmpd="sng" algn="ctr">
                       <a:noFill/>
                     </a:lnL>
@@ -11097,6 +11308,11 @@
                     </a:solidFill>
                   </a:tcPr>
                 </a:tc>
+                <a:extLst>
+                  <a:ext uri="{0D108BD9-81ED-4DB2-BD59-A6C34878D82A}">
+                    <a16:rowId xmlns:a16="http://schemas.microsoft.com/office/drawing/2014/main" val="10004"/>
+                  </a:ext>
+                </a:extLst>
               </a:tr>
               <a:tr h="402336">
                 <a:tc>
@@ -11104,7 +11320,7 @@
                     <a:bodyPr/>
                     <a:lstStyle/>
                     <a:p>
-                      <a:pPr indent="0" marL="0">
+                      <a:pPr marL="0" indent="0">
                         <a:buNone/>
                       </a:pPr>
                       <a:r>
@@ -11125,7 +11341,7 @@
                       </a:endParaRPr>
                     </a:p>
                   </a:txBody>
-                  <a:tcPr marL="91440" marR="91440" marT="45720" marB="45720" anchor="ctr">
+                  <a:tcPr anchor="ctr">
                     <a:lnL w="0" cap="flat" cmpd="sng" algn="ctr">
                       <a:noFill/>
                     </a:lnL>
@@ -11148,7 +11364,7 @@
                     <a:bodyPr/>
                     <a:lstStyle/>
                     <a:p>
-                      <a:pPr indent="0" marL="0">
+                      <a:pPr marL="0" indent="0">
                         <a:buNone/>
                       </a:pPr>
                       <a:r>
@@ -11169,7 +11385,7 @@
                       </a:endParaRPr>
                     </a:p>
                   </a:txBody>
-                  <a:tcPr marL="91440" marR="91440" marT="45720" marB="45720" anchor="ctr">
+                  <a:tcPr anchor="ctr">
                     <a:lnL w="0" cap="flat" cmpd="sng" algn="ctr">
                       <a:noFill/>
                     </a:lnL>
@@ -11192,7 +11408,7 @@
                     <a:bodyPr/>
                     <a:lstStyle/>
                     <a:p>
-                      <a:pPr indent="0" marL="0">
+                      <a:pPr marL="0" indent="0">
                         <a:buNone/>
                       </a:pPr>
                       <a:r>
@@ -11213,7 +11429,7 @@
                       </a:endParaRPr>
                     </a:p>
                   </a:txBody>
-                  <a:tcPr marL="91440" marR="91440" marT="45720" marB="45720" anchor="ctr">
+                  <a:tcPr anchor="ctr">
                     <a:lnL w="0" cap="flat" cmpd="sng" algn="ctr">
                       <a:noFill/>
                     </a:lnL>
@@ -11231,6 +11447,11 @@
                     </a:solidFill>
                   </a:tcPr>
                 </a:tc>
+                <a:extLst>
+                  <a:ext uri="{0D108BD9-81ED-4DB2-BD59-A6C34878D82A}">
+                    <a16:rowId xmlns:a16="http://schemas.microsoft.com/office/drawing/2014/main" val="10005"/>
+                  </a:ext>
+                </a:extLst>
               </a:tr>
             </a:tbl>
           </a:graphicData>
@@ -11262,6 +11483,13 @@
             <a:prstDash val="solid"/>
           </a:ln>
         </p:spPr>
+        <p:txBody>
+          <a:bodyPr/>
+          <a:lstStyle/>
+          <a:p>
+            <a:endParaRPr lang="en-US"/>
+          </a:p>
+        </p:txBody>
       </p:sp>
       <p:sp>
         <p:nvSpPr>
@@ -11284,7 +11512,7 @@
           <a:bodyPr wrap="square" lIns="0" tIns="0" rIns="0" bIns="0" rtlCol="0" anchor="ctr"/>
           <a:lstStyle/>
           <a:p>
-            <a:pPr indent="0" marL="0">
+            <a:pPr marL="0" indent="0">
               <a:buNone/>
             </a:pPr>
             <a:r>
@@ -11323,7 +11551,7 @@
           <a:bodyPr wrap="square" lIns="0" tIns="0" rIns="0" bIns="0" rtlCol="0" anchor="ctr"/>
           <a:lstStyle/>
           <a:p>
-            <a:pPr indent="0" marL="0">
+            <a:pPr marL="0" indent="0">
               <a:buNone/>
             </a:pPr>
             <a:r>
@@ -11362,7 +11590,7 @@
           <a:bodyPr wrap="square" lIns="0" tIns="0" rIns="0" bIns="0" rtlCol="0" anchor="ctr"/>
           <a:lstStyle/>
           <a:p>
-            <a:pPr indent="0" marL="0">
+            <a:pPr marL="0" indent="0">
               <a:buNone/>
             </a:pPr>
             <a:r>
@@ -11401,7 +11629,7 @@
           <a:bodyPr wrap="square" lIns="0" tIns="0" rIns="0" bIns="0" rtlCol="0" anchor="ctr"/>
           <a:lstStyle/>
           <a:p>
-            <a:pPr indent="0" marL="0">
+            <a:pPr marL="0" indent="0">
               <a:buNone/>
             </a:pPr>
             <a:r>
@@ -11440,7 +11668,7 @@
           <a:bodyPr wrap="square" lIns="0" tIns="0" rIns="0" bIns="0" rtlCol="0" anchor="ctr"/>
           <a:lstStyle/>
           <a:p>
-            <a:pPr indent="0" marL="0">
+            <a:pPr marL="0" indent="0">
               <a:buNone/>
             </a:pPr>
             <a:r>
@@ -11484,6 +11712,13 @@
             <a:prstDash val="solid"/>
           </a:ln>
         </p:spPr>
+        <p:txBody>
+          <a:bodyPr/>
+          <a:lstStyle/>
+          <a:p>
+            <a:endParaRPr lang="en-US"/>
+          </a:p>
+        </p:txBody>
       </p:sp>
       <p:sp>
         <p:nvSpPr>
@@ -11506,7 +11741,7 @@
           <a:bodyPr wrap="square" lIns="0" tIns="0" rIns="0" bIns="0" rtlCol="0" anchor="ctr"/>
           <a:lstStyle/>
           <a:p>
-            <a:pPr indent="0" marL="0">
+            <a:pPr marL="0" indent="0">
               <a:buNone/>
             </a:pPr>
             <a:r>
@@ -11545,7 +11780,7 @@
           <a:bodyPr wrap="square" lIns="0" tIns="0" rIns="0" bIns="0" rtlCol="0" anchor="t"/>
           <a:lstStyle/>
           <a:p>
-            <a:pPr indent="0" marL="0">
+            <a:pPr marL="0" indent="0">
               <a:lnSpc>
                 <a:spcPct val="115000"/>
               </a:lnSpc>
@@ -11565,7 +11800,7 @@
             <a:endParaRPr lang="en-US" sz="1300" dirty="0"/>
           </a:p>
           <a:p>
-            <a:pPr indent="0" marL="0">
+            <a:pPr marL="0" indent="0">
               <a:lnSpc>
                 <a:spcPct val="115000"/>
               </a:lnSpc>
@@ -11632,7 +11867,7 @@
           <a:bodyPr wrap="square" lIns="0" tIns="0" rIns="0" bIns="0" rtlCol="0" anchor="ctr"/>
           <a:lstStyle/>
           <a:p>
-            <a:pPr indent="0" marL="0">
+            <a:pPr marL="0" indent="0">
               <a:buNone/>
             </a:pPr>
             <a:r>
@@ -11671,7 +11906,7 @@
           <a:bodyPr wrap="square" lIns="0" tIns="0" rIns="0" bIns="0" rtlCol="0" anchor="ctr"/>
           <a:lstStyle/>
           <a:p>
-            <a:pPr indent="0" marL="0">
+            <a:pPr marL="0" indent="0">
               <a:buNone/>
             </a:pPr>
             <a:r>
@@ -11715,6 +11950,13 @@
             <a:prstDash val="solid"/>
           </a:ln>
         </p:spPr>
+        <p:txBody>
+          <a:bodyPr/>
+          <a:lstStyle/>
+          <a:p>
+            <a:endParaRPr lang="en-US"/>
+          </a:p>
+        </p:txBody>
       </p:sp>
       <p:sp>
         <p:nvSpPr>
@@ -11737,7 +11979,7 @@
           <a:bodyPr wrap="square" lIns="0" tIns="0" rIns="0" bIns="0" rtlCol="0" anchor="ctr"/>
           <a:lstStyle/>
           <a:p>
-            <a:pPr indent="0" marL="0">
+            <a:pPr marL="0" indent="0">
               <a:buNone/>
             </a:pPr>
             <a:r>
@@ -11776,7 +12018,7 @@
           <a:bodyPr wrap="square" lIns="0" tIns="0" rIns="0" bIns="0" rtlCol="0" anchor="t"/>
           <a:lstStyle/>
           <a:p>
-            <a:pPr indent="0" marL="0">
+            <a:pPr marL="0" indent="0">
               <a:lnSpc>
                 <a:spcPct val="120000"/>
               </a:lnSpc>
@@ -11796,7 +12038,7 @@
             <a:endParaRPr lang="en-US" sz="1200" dirty="0"/>
           </a:p>
           <a:p>
-            <a:pPr indent="0" marL="0">
+            <a:pPr marL="0" indent="0">
               <a:lnSpc>
                 <a:spcPct val="120000"/>
               </a:lnSpc>
@@ -11816,7 +12058,7 @@
             <a:endParaRPr lang="en-US" sz="1200" dirty="0"/>
           </a:p>
           <a:p>
-            <a:pPr indent="0" marL="0">
+            <a:pPr marL="0" indent="0">
               <a:lnSpc>
                 <a:spcPct val="120000"/>
               </a:lnSpc>
@@ -11858,7 +12100,7 @@
           <a:bodyPr wrap="square" lIns="0" tIns="0" rIns="0" bIns="0" rtlCol="0" anchor="ctr"/>
           <a:lstStyle/>
           <a:p>
-            <a:pPr indent="0" marL="0">
+            <a:pPr marL="0" indent="0">
               <a:buNone/>
             </a:pPr>
             <a:r>
@@ -11902,6 +12144,13 @@
             <a:prstDash val="solid"/>
           </a:ln>
         </p:spPr>
+        <p:txBody>
+          <a:bodyPr/>
+          <a:lstStyle/>
+          <a:p>
+            <a:endParaRPr lang="en-US"/>
+          </a:p>
+        </p:txBody>
       </p:sp>
       <p:sp>
         <p:nvSpPr>
@@ -11924,7 +12173,7 @@
           <a:bodyPr wrap="square" lIns="0" tIns="0" rIns="0" bIns="0" rtlCol="0" anchor="ctr"/>
           <a:lstStyle/>
           <a:p>
-            <a:pPr indent="0" marL="0">
+            <a:pPr marL="0" indent="0">
               <a:buNone/>
             </a:pPr>
             <a:r>
@@ -11963,7 +12212,7 @@
           <a:bodyPr wrap="square" lIns="0" tIns="0" rIns="0" bIns="0" rtlCol="0" anchor="ctr"/>
           <a:lstStyle/>
           <a:p>
-            <a:pPr indent="0" marL="0">
+            <a:pPr marL="0" indent="0">
               <a:buNone/>
             </a:pPr>
             <a:r>
@@ -12002,7 +12251,7 @@
           <a:bodyPr wrap="square" lIns="0" tIns="0" rIns="0" bIns="0" rtlCol="0" anchor="ctr"/>
           <a:lstStyle/>
           <a:p>
-            <a:pPr indent="0" marL="0">
+            <a:pPr marL="0" indent="0">
               <a:buNone/>
             </a:pPr>
             <a:r>
@@ -12046,6 +12295,13 @@
             <a:prstDash val="solid"/>
           </a:ln>
         </p:spPr>
+        <p:txBody>
+          <a:bodyPr/>
+          <a:lstStyle/>
+          <a:p>
+            <a:endParaRPr lang="en-US"/>
+          </a:p>
+        </p:txBody>
       </p:sp>
       <p:sp>
         <p:nvSpPr>
@@ -12068,7 +12324,7 @@
           <a:bodyPr wrap="square" lIns="0" tIns="0" rIns="0" bIns="0" rtlCol="0" anchor="ctr"/>
           <a:lstStyle/>
           <a:p>
-            <a:pPr indent="0" marL="0">
+            <a:pPr marL="0" indent="0">
               <a:buNone/>
             </a:pPr>
             <a:r>
@@ -12107,7 +12363,7 @@
           <a:bodyPr wrap="square" lIns="0" tIns="0" rIns="0" bIns="0" rtlCol="0" anchor="ctr"/>
           <a:lstStyle/>
           <a:p>
-            <a:pPr indent="0" marL="0">
+            <a:pPr marL="0" indent="0">
               <a:buNone/>
             </a:pPr>
             <a:r>
@@ -12151,6 +12407,13 @@
             <a:prstDash val="solid"/>
           </a:ln>
         </p:spPr>
+        <p:txBody>
+          <a:bodyPr/>
+          <a:lstStyle/>
+          <a:p>
+            <a:endParaRPr lang="en-US"/>
+          </a:p>
+        </p:txBody>
       </p:sp>
       <p:sp>
         <p:nvSpPr>
@@ -12173,7 +12436,7 @@
           <a:bodyPr wrap="square" lIns="0" tIns="0" rIns="0" bIns="0" rtlCol="0" anchor="ctr"/>
           <a:lstStyle/>
           <a:p>
-            <a:pPr indent="0" marL="0">
+            <a:pPr marL="0" indent="0">
               <a:buNone/>
             </a:pPr>
             <a:r>
@@ -12212,7 +12475,7 @@
           <a:bodyPr wrap="square" lIns="0" tIns="0" rIns="0" bIns="0" rtlCol="0" anchor="ctr"/>
           <a:lstStyle/>
           <a:p>
-            <a:pPr indent="0" marL="0">
+            <a:pPr marL="0" indent="0">
               <a:buNone/>
             </a:pPr>
             <a:r>
@@ -12256,6 +12519,13 @@
             <a:prstDash val="solid"/>
           </a:ln>
         </p:spPr>
+        <p:txBody>
+          <a:bodyPr/>
+          <a:lstStyle/>
+          <a:p>
+            <a:endParaRPr lang="en-US"/>
+          </a:p>
+        </p:txBody>
       </p:sp>
       <p:sp>
         <p:nvSpPr>
@@ -12278,7 +12548,7 @@
           <a:bodyPr wrap="square" lIns="0" tIns="0" rIns="0" bIns="0" rtlCol="0" anchor="ctr"/>
           <a:lstStyle/>
           <a:p>
-            <a:pPr indent="0" marL="0">
+            <a:pPr marL="0" indent="0">
               <a:buNone/>
             </a:pPr>
             <a:r>
@@ -12317,7 +12587,7 @@
           <a:bodyPr wrap="square" lIns="0" tIns="0" rIns="0" bIns="0" rtlCol="0" anchor="ctr"/>
           <a:lstStyle/>
           <a:p>
-            <a:pPr indent="0" marL="0">
+            <a:pPr marL="0" indent="0">
               <a:buNone/>
             </a:pPr>
             <a:r>
@@ -12381,7 +12651,7 @@
           <a:bodyPr wrap="square" lIns="0" tIns="0" rIns="0" bIns="0" rtlCol="0" anchor="ctr"/>
           <a:lstStyle/>
           <a:p>
-            <a:pPr indent="0" marL="0">
+            <a:pPr marL="0" indent="0">
               <a:buNone/>
             </a:pPr>
             <a:r>
@@ -12420,7 +12690,7 @@
           <a:bodyPr wrap="square" lIns="0" tIns="0" rIns="0" bIns="0" rtlCol="0" anchor="ctr"/>
           <a:lstStyle/>
           <a:p>
-            <a:pPr indent="0" marL="0">
+            <a:pPr marL="0" indent="0">
               <a:buNone/>
             </a:pPr>
             <a:r>
@@ -12464,6 +12734,13 @@
             <a:prstDash val="solid"/>
           </a:ln>
         </p:spPr>
+        <p:txBody>
+          <a:bodyPr/>
+          <a:lstStyle/>
+          <a:p>
+            <a:endParaRPr lang="en-US"/>
+          </a:p>
+        </p:txBody>
       </p:sp>
       <p:sp>
         <p:nvSpPr>
@@ -12489,6 +12766,13 @@
             <a:prstDash val="solid"/>
           </a:ln>
         </p:spPr>
+        <p:txBody>
+          <a:bodyPr/>
+          <a:lstStyle/>
+          <a:p>
+            <a:endParaRPr lang="en-US"/>
+          </a:p>
+        </p:txBody>
       </p:sp>
       <p:sp>
         <p:nvSpPr>
@@ -12511,7 +12795,7 @@
           <a:bodyPr wrap="square" lIns="0" tIns="0" rIns="0" bIns="0" rtlCol="0" anchor="ctr"/>
           <a:lstStyle/>
           <a:p>
-            <a:pPr algn="ctr" indent="0" marL="0">
+            <a:pPr marL="0" indent="0" algn="ctr">
               <a:buNone/>
             </a:pPr>
             <a:r>
@@ -12550,7 +12834,7 @@
           <a:bodyPr wrap="square" lIns="0" tIns="0" rIns="0" bIns="0" rtlCol="0" anchor="ctr"/>
           <a:lstStyle/>
           <a:p>
-            <a:pPr indent="0" marL="0">
+            <a:pPr marL="0" indent="0">
               <a:buNone/>
             </a:pPr>
             <a:r>
@@ -12589,7 +12873,7 @@
           <a:bodyPr wrap="square" lIns="0" tIns="0" rIns="0" bIns="0" rtlCol="0" anchor="t"/>
           <a:lstStyle/>
           <a:p>
-            <a:pPr indent="0" marL="0">
+            <a:pPr marL="0" indent="0">
               <a:lnSpc>
                 <a:spcPct val="115000"/>
               </a:lnSpc>
@@ -12631,7 +12915,7 @@
           <a:bodyPr wrap="square" lIns="0" tIns="0" rIns="0" bIns="0" rtlCol="0" anchor="t"/>
           <a:lstStyle/>
           <a:p>
-            <a:pPr indent="0" marL="0">
+            <a:pPr marL="0" indent="0">
               <a:lnSpc>
                 <a:spcPct val="120000"/>
               </a:lnSpc>
@@ -12678,6 +12962,13 @@
             <a:prstDash val="solid"/>
           </a:ln>
         </p:spPr>
+        <p:txBody>
+          <a:bodyPr/>
+          <a:lstStyle/>
+          <a:p>
+            <a:endParaRPr lang="en-US"/>
+          </a:p>
+        </p:txBody>
       </p:sp>
       <p:sp>
         <p:nvSpPr>
@@ -12703,6 +12994,13 @@
             <a:prstDash val="solid"/>
           </a:ln>
         </p:spPr>
+        <p:txBody>
+          <a:bodyPr/>
+          <a:lstStyle/>
+          <a:p>
+            <a:endParaRPr lang="en-US"/>
+          </a:p>
+        </p:txBody>
       </p:sp>
       <p:sp>
         <p:nvSpPr>
@@ -12725,7 +13023,7 @@
           <a:bodyPr wrap="square" lIns="0" tIns="0" rIns="0" bIns="0" rtlCol="0" anchor="ctr"/>
           <a:lstStyle/>
           <a:p>
-            <a:pPr algn="ctr" indent="0" marL="0">
+            <a:pPr marL="0" indent="0" algn="ctr">
               <a:buNone/>
             </a:pPr>
             <a:r>
@@ -12764,7 +13062,7 @@
           <a:bodyPr wrap="square" lIns="0" tIns="0" rIns="0" bIns="0" rtlCol="0" anchor="ctr"/>
           <a:lstStyle/>
           <a:p>
-            <a:pPr indent="0" marL="0">
+            <a:pPr marL="0" indent="0">
               <a:buNone/>
             </a:pPr>
             <a:r>
@@ -12803,7 +13101,7 @@
           <a:bodyPr wrap="square" lIns="0" tIns="0" rIns="0" bIns="0" rtlCol="0" anchor="t"/>
           <a:lstStyle/>
           <a:p>
-            <a:pPr indent="0" marL="0">
+            <a:pPr marL="0" indent="0">
               <a:lnSpc>
                 <a:spcPct val="115000"/>
               </a:lnSpc>
@@ -12845,7 +13143,7 @@
           <a:bodyPr wrap="square" lIns="0" tIns="0" rIns="0" bIns="0" rtlCol="0" anchor="t"/>
           <a:lstStyle/>
           <a:p>
-            <a:pPr indent="0" marL="0">
+            <a:pPr marL="0" indent="0">
               <a:lnSpc>
                 <a:spcPct val="120000"/>
               </a:lnSpc>
@@ -12865,7 +13163,7 @@
             <a:endParaRPr lang="en-US" sz="1150" dirty="0"/>
           </a:p>
           <a:p>
-            <a:pPr indent="0" marL="0">
+            <a:pPr marL="0" indent="0">
               <a:lnSpc>
                 <a:spcPct val="120000"/>
               </a:lnSpc>
@@ -12885,7 +13183,7 @@
             <a:endParaRPr lang="en-US" sz="1150" dirty="0"/>
           </a:p>
           <a:p>
-            <a:pPr indent="0" marL="0">
+            <a:pPr marL="0" indent="0">
               <a:lnSpc>
                 <a:spcPct val="120000"/>
               </a:lnSpc>
@@ -12932,6 +13230,13 @@
             <a:prstDash val="solid"/>
           </a:ln>
         </p:spPr>
+        <p:txBody>
+          <a:bodyPr/>
+          <a:lstStyle/>
+          <a:p>
+            <a:endParaRPr lang="en-US"/>
+          </a:p>
+        </p:txBody>
       </p:sp>
       <p:sp>
         <p:nvSpPr>
@@ -12957,6 +13262,13 @@
             <a:prstDash val="solid"/>
           </a:ln>
         </p:spPr>
+        <p:txBody>
+          <a:bodyPr/>
+          <a:lstStyle/>
+          <a:p>
+            <a:endParaRPr lang="en-US"/>
+          </a:p>
+        </p:txBody>
       </p:sp>
       <p:sp>
         <p:nvSpPr>
@@ -12979,7 +13291,7 @@
           <a:bodyPr wrap="square" lIns="0" tIns="0" rIns="0" bIns="0" rtlCol="0" anchor="ctr"/>
           <a:lstStyle/>
           <a:p>
-            <a:pPr algn="ctr" indent="0" marL="0">
+            <a:pPr marL="0" indent="0" algn="ctr">
               <a:buNone/>
             </a:pPr>
             <a:r>
@@ -13018,7 +13330,7 @@
           <a:bodyPr wrap="square" lIns="0" tIns="0" rIns="0" bIns="0" rtlCol="0" anchor="ctr"/>
           <a:lstStyle/>
           <a:p>
-            <a:pPr indent="0" marL="0">
+            <a:pPr marL="0" indent="0">
               <a:buNone/>
             </a:pPr>
             <a:r>
@@ -13057,7 +13369,7 @@
           <a:bodyPr wrap="square" lIns="0" tIns="0" rIns="0" bIns="0" rtlCol="0" anchor="t"/>
           <a:lstStyle/>
           <a:p>
-            <a:pPr indent="0" marL="0">
+            <a:pPr marL="0" indent="0">
               <a:lnSpc>
                 <a:spcPct val="115000"/>
               </a:lnSpc>
@@ -13099,7 +13411,7 @@
           <a:bodyPr wrap="square" lIns="0" tIns="0" rIns="0" bIns="0" rtlCol="0" anchor="t"/>
           <a:lstStyle/>
           <a:p>
-            <a:pPr indent="0" marL="0">
+            <a:pPr marL="0" indent="0">
               <a:lnSpc>
                 <a:spcPct val="120000"/>
               </a:lnSpc>
@@ -13119,7 +13431,7 @@
             <a:endParaRPr lang="en-US" sz="1150" dirty="0"/>
           </a:p>
           <a:p>
-            <a:pPr indent="0" marL="0">
+            <a:pPr marL="0" indent="0">
               <a:lnSpc>
                 <a:spcPct val="120000"/>
               </a:lnSpc>
@@ -13166,6 +13478,13 @@
             <a:prstDash val="solid"/>
           </a:ln>
         </p:spPr>
+        <p:txBody>
+          <a:bodyPr/>
+          <a:lstStyle/>
+          <a:p>
+            <a:endParaRPr lang="en-US"/>
+          </a:p>
+        </p:txBody>
       </p:sp>
       <p:sp>
         <p:nvSpPr>
@@ -13191,6 +13510,13 @@
             <a:prstDash val="solid"/>
           </a:ln>
         </p:spPr>
+        <p:txBody>
+          <a:bodyPr/>
+          <a:lstStyle/>
+          <a:p>
+            <a:endParaRPr lang="en-US"/>
+          </a:p>
+        </p:txBody>
       </p:sp>
       <p:sp>
         <p:nvSpPr>
@@ -13213,7 +13539,7 @@
           <a:bodyPr wrap="square" lIns="0" tIns="0" rIns="0" bIns="0" rtlCol="0" anchor="ctr"/>
           <a:lstStyle/>
           <a:p>
-            <a:pPr algn="ctr" indent="0" marL="0">
+            <a:pPr marL="0" indent="0" algn="ctr">
               <a:buNone/>
             </a:pPr>
             <a:r>
@@ -13252,7 +13578,7 @@
           <a:bodyPr wrap="square" lIns="0" tIns="0" rIns="0" bIns="0" rtlCol="0" anchor="ctr"/>
           <a:lstStyle/>
           <a:p>
-            <a:pPr indent="0" marL="0">
+            <a:pPr marL="0" indent="0">
               <a:buNone/>
             </a:pPr>
             <a:r>
@@ -13291,7 +13617,7 @@
           <a:bodyPr wrap="square" lIns="0" tIns="0" rIns="0" bIns="0" rtlCol="0" anchor="t"/>
           <a:lstStyle/>
           <a:p>
-            <a:pPr indent="0" marL="0">
+            <a:pPr marL="0" indent="0">
               <a:lnSpc>
                 <a:spcPct val="115000"/>
               </a:lnSpc>
@@ -13333,7 +13659,7 @@
           <a:bodyPr wrap="square" lIns="0" tIns="0" rIns="0" bIns="0" rtlCol="0" anchor="t"/>
           <a:lstStyle/>
           <a:p>
-            <a:pPr indent="0" marL="0">
+            <a:pPr marL="0" indent="0">
               <a:lnSpc>
                 <a:spcPct val="120000"/>
               </a:lnSpc>
@@ -13400,7 +13726,7 @@
           <a:bodyPr wrap="square" lIns="0" tIns="0" rIns="0" bIns="0" rtlCol="0" anchor="ctr"/>
           <a:lstStyle/>
           <a:p>
-            <a:pPr indent="0" marL="0">
+            <a:pPr marL="0" indent="0">
               <a:buNone/>
             </a:pPr>
             <a:r>
@@ -13439,7 +13765,7 @@
           <a:bodyPr wrap="square" lIns="0" tIns="0" rIns="0" bIns="0" rtlCol="0" anchor="ctr"/>
           <a:lstStyle/>
           <a:p>
-            <a:pPr indent="0" marL="0">
+            <a:pPr marL="0" indent="0">
               <a:buNone/>
             </a:pPr>
             <a:r>
@@ -13483,6 +13809,13 @@
             <a:prstDash val="solid"/>
           </a:ln>
         </p:spPr>
+        <p:txBody>
+          <a:bodyPr/>
+          <a:lstStyle/>
+          <a:p>
+            <a:endParaRPr lang="en-US"/>
+          </a:p>
+        </p:txBody>
       </p:sp>
       <p:sp>
         <p:nvSpPr>
@@ -13505,7 +13838,7 @@
           <a:bodyPr wrap="square" lIns="0" tIns="0" rIns="0" bIns="0" rtlCol="0" anchor="ctr"/>
           <a:lstStyle/>
           <a:p>
-            <a:pPr indent="0" marL="0">
+            <a:pPr marL="0" indent="0">
               <a:buNone/>
             </a:pPr>
             <a:r>
@@ -13544,7 +13877,7 @@
           <a:bodyPr wrap="square" lIns="0" tIns="0" rIns="0" bIns="0" rtlCol="0" anchor="t"/>
           <a:lstStyle/>
           <a:p>
-            <a:pPr indent="0" marL="0">
+            <a:pPr marL="0" indent="0">
               <a:lnSpc>
                 <a:spcPct val="120000"/>
               </a:lnSpc>
@@ -13564,7 +13897,7 @@
             <a:endParaRPr lang="en-US" sz="1050" dirty="0"/>
           </a:p>
           <a:p>
-            <a:pPr indent="0" marL="0">
+            <a:pPr marL="0" indent="0">
               <a:lnSpc>
                 <a:spcPct val="120000"/>
               </a:lnSpc>
@@ -13584,7 +13917,7 @@
             <a:endParaRPr lang="en-US" sz="1050" dirty="0"/>
           </a:p>
           <a:p>
-            <a:pPr indent="0" marL="0">
+            <a:pPr marL="0" indent="0">
               <a:lnSpc>
                 <a:spcPct val="120000"/>
               </a:lnSpc>
@@ -13604,7 +13937,7 @@
             <a:endParaRPr lang="en-US" sz="1050" dirty="0"/>
           </a:p>
           <a:p>
-            <a:pPr indent="0" marL="0">
+            <a:pPr marL="0" indent="0">
               <a:lnSpc>
                 <a:spcPct val="120000"/>
               </a:lnSpc>
@@ -13624,7 +13957,7 @@
             <a:endParaRPr lang="en-US" sz="1050" dirty="0"/>
           </a:p>
           <a:p>
-            <a:pPr indent="0" marL="0">
+            <a:pPr marL="0" indent="0">
               <a:lnSpc>
                 <a:spcPct val="120000"/>
               </a:lnSpc>
@@ -13666,7 +13999,7 @@
           <a:bodyPr wrap="square" lIns="0" tIns="0" rIns="0" bIns="0" rtlCol="0" anchor="ctr"/>
           <a:lstStyle/>
           <a:p>
-            <a:pPr indent="0" marL="0">
+            <a:pPr marL="0" indent="0">
               <a:lnSpc>
                 <a:spcPct val="115000"/>
               </a:lnSpc>
@@ -13713,6 +14046,13 @@
             <a:prstDash val="solid"/>
           </a:ln>
         </p:spPr>
+        <p:txBody>
+          <a:bodyPr/>
+          <a:lstStyle/>
+          <a:p>
+            <a:endParaRPr lang="en-US"/>
+          </a:p>
+        </p:txBody>
       </p:sp>
       <p:sp>
         <p:nvSpPr>
@@ -13735,7 +14075,7 @@
           <a:bodyPr wrap="square" lIns="0" tIns="0" rIns="0" bIns="0" rtlCol="0" anchor="ctr"/>
           <a:lstStyle/>
           <a:p>
-            <a:pPr indent="0" marL="0">
+            <a:pPr marL="0" indent="0">
               <a:buNone/>
             </a:pPr>
             <a:r>
@@ -13774,7 +14114,7 @@
           <a:bodyPr wrap="square" lIns="0" tIns="0" rIns="0" bIns="0" rtlCol="0" anchor="t"/>
           <a:lstStyle/>
           <a:p>
-            <a:pPr indent="0" marL="0">
+            <a:pPr marL="0" indent="0">
               <a:lnSpc>
                 <a:spcPct val="120000"/>
               </a:lnSpc>
@@ -13794,7 +14134,7 @@
             <a:endParaRPr lang="en-US" sz="1050" dirty="0"/>
           </a:p>
           <a:p>
-            <a:pPr indent="0" marL="0">
+            <a:pPr marL="0" indent="0">
               <a:lnSpc>
                 <a:spcPct val="120000"/>
               </a:lnSpc>
@@ -13814,7 +14154,7 @@
             <a:endParaRPr lang="en-US" sz="1050" dirty="0"/>
           </a:p>
           <a:p>
-            <a:pPr indent="0" marL="0">
+            <a:pPr marL="0" indent="0">
               <a:lnSpc>
                 <a:spcPct val="120000"/>
               </a:lnSpc>
@@ -13834,7 +14174,7 @@
             <a:endParaRPr lang="en-US" sz="1050" dirty="0"/>
           </a:p>
           <a:p>
-            <a:pPr indent="0" marL="0">
+            <a:pPr marL="0" indent="0">
               <a:lnSpc>
                 <a:spcPct val="120000"/>
               </a:lnSpc>
@@ -13876,7 +14216,7 @@
           <a:bodyPr wrap="square" lIns="0" tIns="0" rIns="0" bIns="0" rtlCol="0" anchor="ctr"/>
           <a:lstStyle/>
           <a:p>
-            <a:pPr indent="0" marL="0">
+            <a:pPr marL="0" indent="0">
               <a:lnSpc>
                 <a:spcPct val="115000"/>
               </a:lnSpc>
@@ -13923,6 +14263,13 @@
             <a:prstDash val="solid"/>
           </a:ln>
         </p:spPr>
+        <p:txBody>
+          <a:bodyPr/>
+          <a:lstStyle/>
+          <a:p>
+            <a:endParaRPr lang="en-US"/>
+          </a:p>
+        </p:txBody>
       </p:sp>
       <p:sp>
         <p:nvSpPr>
@@ -13945,7 +14292,7 @@
           <a:bodyPr wrap="square" lIns="0" tIns="0" rIns="0" bIns="0" rtlCol="0" anchor="ctr"/>
           <a:lstStyle/>
           <a:p>
-            <a:pPr indent="0" marL="0">
+            <a:pPr marL="0" indent="0">
               <a:buNone/>
             </a:pPr>
             <a:r>
@@ -13984,7 +14331,7 @@
           <a:bodyPr wrap="square" lIns="0" tIns="0" rIns="0" bIns="0" rtlCol="0" anchor="t"/>
           <a:lstStyle/>
           <a:p>
-            <a:pPr indent="0" marL="0">
+            <a:pPr marL="0" indent="0">
               <a:lnSpc>
                 <a:spcPct val="120000"/>
               </a:lnSpc>
@@ -14004,7 +14351,7 @@
             <a:endParaRPr lang="en-US" sz="1050" dirty="0"/>
           </a:p>
           <a:p>
-            <a:pPr indent="0" marL="0">
+            <a:pPr marL="0" indent="0">
               <a:lnSpc>
                 <a:spcPct val="120000"/>
               </a:lnSpc>
@@ -14024,7 +14371,7 @@
             <a:endParaRPr lang="en-US" sz="1050" dirty="0"/>
           </a:p>
           <a:p>
-            <a:pPr indent="0" marL="0">
+            <a:pPr marL="0" indent="0">
               <a:lnSpc>
                 <a:spcPct val="120000"/>
               </a:lnSpc>
@@ -14066,7 +14413,7 @@
           <a:bodyPr wrap="square" lIns="0" tIns="0" rIns="0" bIns="0" rtlCol="0" anchor="ctr"/>
           <a:lstStyle/>
           <a:p>
-            <a:pPr indent="0" marL="0">
+            <a:pPr marL="0" indent="0">
               <a:lnSpc>
                 <a:spcPct val="115000"/>
               </a:lnSpc>
@@ -14133,7 +14480,7 @@
           <a:bodyPr wrap="square" lIns="0" tIns="0" rIns="0" bIns="0" rtlCol="0" anchor="ctr"/>
           <a:lstStyle/>
           <a:p>
-            <a:pPr indent="0" marL="0">
+            <a:pPr marL="0" indent="0">
               <a:buNone/>
             </a:pPr>
             <a:r>
@@ -14172,7 +14519,7 @@
           <a:bodyPr wrap="square" lIns="0" tIns="0" rIns="0" bIns="0" rtlCol="0" anchor="ctr"/>
           <a:lstStyle/>
           <a:p>
-            <a:pPr indent="0" marL="0">
+            <a:pPr marL="0" indent="0">
               <a:buNone/>
             </a:pPr>
             <a:r>
@@ -14216,6 +14563,13 @@
             <a:prstDash val="solid"/>
           </a:ln>
         </p:spPr>
+        <p:txBody>
+          <a:bodyPr/>
+          <a:lstStyle/>
+          <a:p>
+            <a:endParaRPr lang="en-US"/>
+          </a:p>
+        </p:txBody>
       </p:sp>
       <p:sp>
         <p:nvSpPr>
@@ -14241,6 +14595,13 @@
             <a:prstDash val="solid"/>
           </a:ln>
         </p:spPr>
+        <p:txBody>
+          <a:bodyPr/>
+          <a:lstStyle/>
+          <a:p>
+            <a:endParaRPr lang="en-US"/>
+          </a:p>
+        </p:txBody>
       </p:sp>
       <p:sp>
         <p:nvSpPr>
@@ -14263,7 +14624,7 @@
           <a:bodyPr wrap="square" lIns="0" tIns="0" rIns="0" bIns="0" rtlCol="0" anchor="ctr"/>
           <a:lstStyle/>
           <a:p>
-            <a:pPr indent="0" marL="0">
+            <a:pPr marL="0" indent="0">
               <a:buNone/>
             </a:pPr>
             <a:r>
@@ -14302,7 +14663,7 @@
           <a:bodyPr wrap="square" lIns="0" tIns="0" rIns="0" bIns="0" rtlCol="0" anchor="t"/>
           <a:lstStyle/>
           <a:p>
-            <a:pPr indent="0" marL="0">
+            <a:pPr marL="0" indent="0">
               <a:lnSpc>
                 <a:spcPct val="115000"/>
               </a:lnSpc>
@@ -14344,7 +14705,7 @@
           <a:bodyPr wrap="square" lIns="0" tIns="0" rIns="0" bIns="0" rtlCol="0" anchor="ctr"/>
           <a:lstStyle/>
           <a:p>
-            <a:pPr indent="0" marL="0">
+            <a:pPr marL="0" indent="0">
               <a:buNone/>
             </a:pPr>
             <a:r>
@@ -14388,6 +14749,13 @@
             <a:prstDash val="solid"/>
           </a:ln>
         </p:spPr>
+        <p:txBody>
+          <a:bodyPr/>
+          <a:lstStyle/>
+          <a:p>
+            <a:endParaRPr lang="en-US"/>
+          </a:p>
+        </p:txBody>
       </p:sp>
       <p:sp>
         <p:nvSpPr>
@@ -14413,6 +14781,13 @@
             <a:prstDash val="solid"/>
           </a:ln>
         </p:spPr>
+        <p:txBody>
+          <a:bodyPr/>
+          <a:lstStyle/>
+          <a:p>
+            <a:endParaRPr lang="en-US"/>
+          </a:p>
+        </p:txBody>
       </p:sp>
       <p:sp>
         <p:nvSpPr>
@@ -14435,7 +14810,7 @@
           <a:bodyPr wrap="square" lIns="0" tIns="0" rIns="0" bIns="0" rtlCol="0" anchor="ctr"/>
           <a:lstStyle/>
           <a:p>
-            <a:pPr indent="0" marL="0">
+            <a:pPr marL="0" indent="0">
               <a:buNone/>
             </a:pPr>
             <a:r>
@@ -14474,7 +14849,7 @@
           <a:bodyPr wrap="square" lIns="0" tIns="0" rIns="0" bIns="0" rtlCol="0" anchor="t"/>
           <a:lstStyle/>
           <a:p>
-            <a:pPr indent="0" marL="0">
+            <a:pPr marL="0" indent="0">
               <a:lnSpc>
                 <a:spcPct val="115000"/>
               </a:lnSpc>
@@ -14516,7 +14891,7 @@
           <a:bodyPr wrap="square" lIns="0" tIns="0" rIns="0" bIns="0" rtlCol="0" anchor="ctr"/>
           <a:lstStyle/>
           <a:p>
-            <a:pPr indent="0" marL="0">
+            <a:pPr marL="0" indent="0">
               <a:buNone/>
             </a:pPr>
             <a:r>
@@ -14560,6 +14935,13 @@
             <a:prstDash val="solid"/>
           </a:ln>
         </p:spPr>
+        <p:txBody>
+          <a:bodyPr/>
+          <a:lstStyle/>
+          <a:p>
+            <a:endParaRPr lang="en-US"/>
+          </a:p>
+        </p:txBody>
       </p:sp>
       <p:sp>
         <p:nvSpPr>
@@ -14585,6 +14967,13 @@
             <a:prstDash val="solid"/>
           </a:ln>
         </p:spPr>
+        <p:txBody>
+          <a:bodyPr/>
+          <a:lstStyle/>
+          <a:p>
+            <a:endParaRPr lang="en-US"/>
+          </a:p>
+        </p:txBody>
       </p:sp>
       <p:sp>
         <p:nvSpPr>
@@ -14607,7 +14996,7 @@
           <a:bodyPr wrap="square" lIns="0" tIns="0" rIns="0" bIns="0" rtlCol="0" anchor="ctr"/>
           <a:lstStyle/>
           <a:p>
-            <a:pPr indent="0" marL="0">
+            <a:pPr marL="0" indent="0">
               <a:buNone/>
             </a:pPr>
             <a:r>
@@ -14646,7 +15035,7 @@
           <a:bodyPr wrap="square" lIns="0" tIns="0" rIns="0" bIns="0" rtlCol="0" anchor="t"/>
           <a:lstStyle/>
           <a:p>
-            <a:pPr indent="0" marL="0">
+            <a:pPr marL="0" indent="0">
               <a:lnSpc>
                 <a:spcPct val="115000"/>
               </a:lnSpc>
@@ -14688,7 +15077,7 @@
           <a:bodyPr wrap="square" lIns="0" tIns="0" rIns="0" bIns="0" rtlCol="0" anchor="ctr"/>
           <a:lstStyle/>
           <a:p>
-            <a:pPr indent="0" marL="0">
+            <a:pPr marL="0" indent="0">
               <a:buNone/>
             </a:pPr>
             <a:r>
@@ -14732,6 +15121,13 @@
             <a:prstDash val="solid"/>
           </a:ln>
         </p:spPr>
+        <p:txBody>
+          <a:bodyPr/>
+          <a:lstStyle/>
+          <a:p>
+            <a:endParaRPr lang="en-US"/>
+          </a:p>
+        </p:txBody>
       </p:sp>
       <p:sp>
         <p:nvSpPr>
@@ -14757,6 +15153,13 @@
             <a:prstDash val="solid"/>
           </a:ln>
         </p:spPr>
+        <p:txBody>
+          <a:bodyPr/>
+          <a:lstStyle/>
+          <a:p>
+            <a:endParaRPr lang="en-US"/>
+          </a:p>
+        </p:txBody>
       </p:sp>
       <p:sp>
         <p:nvSpPr>
@@ -14779,7 +15182,7 @@
           <a:bodyPr wrap="square" lIns="0" tIns="0" rIns="0" bIns="0" rtlCol="0" anchor="ctr"/>
           <a:lstStyle/>
           <a:p>
-            <a:pPr indent="0" marL="0">
+            <a:pPr marL="0" indent="0">
               <a:buNone/>
             </a:pPr>
             <a:r>
@@ -14818,7 +15221,7 @@
           <a:bodyPr wrap="square" lIns="0" tIns="0" rIns="0" bIns="0" rtlCol="0" anchor="t"/>
           <a:lstStyle/>
           <a:p>
-            <a:pPr indent="0" marL="0">
+            <a:pPr marL="0" indent="0">
               <a:lnSpc>
                 <a:spcPct val="115000"/>
               </a:lnSpc>
@@ -14860,7 +15263,7 @@
           <a:bodyPr wrap="square" lIns="0" tIns="0" rIns="0" bIns="0" rtlCol="0" anchor="ctr"/>
           <a:lstStyle/>
           <a:p>
-            <a:pPr indent="0" marL="0">
+            <a:pPr marL="0" indent="0">
               <a:buNone/>
             </a:pPr>
             <a:r>
@@ -14924,7 +15327,7 @@
           <a:bodyPr wrap="square" lIns="0" tIns="0" rIns="0" bIns="0" rtlCol="0" anchor="ctr"/>
           <a:lstStyle/>
           <a:p>
-            <a:pPr indent="0" marL="0">
+            <a:pPr marL="0" indent="0">
               <a:buNone/>
             </a:pPr>
             <a:r>
@@ -14963,7 +15366,7 @@
           <a:bodyPr wrap="square" lIns="0" tIns="0" rIns="0" bIns="0" rtlCol="0" anchor="ctr"/>
           <a:lstStyle/>
           <a:p>
-            <a:pPr indent="0" marL="0">
+            <a:pPr marL="0" indent="0">
               <a:buNone/>
             </a:pPr>
             <a:r>
@@ -15007,6 +15410,13 @@
             <a:prstDash val="solid"/>
           </a:ln>
         </p:spPr>
+        <p:txBody>
+          <a:bodyPr/>
+          <a:lstStyle/>
+          <a:p>
+            <a:endParaRPr lang="en-US"/>
+          </a:p>
+        </p:txBody>
       </p:sp>
       <p:sp>
         <p:nvSpPr>
@@ -15029,7 +15439,7 @@
           <a:bodyPr wrap="square" lIns="0" tIns="0" rIns="0" bIns="0" rtlCol="0" anchor="ctr"/>
           <a:lstStyle/>
           <a:p>
-            <a:pPr indent="0" marL="0">
+            <a:pPr marL="0" indent="0">
               <a:buNone/>
             </a:pPr>
             <a:r>
@@ -15068,7 +15478,7 @@
           <a:bodyPr wrap="square" lIns="0" tIns="0" rIns="0" bIns="0" rtlCol="0" anchor="t"/>
           <a:lstStyle/>
           <a:p>
-            <a:pPr indent="0" marL="0">
+            <a:pPr marL="0" indent="0">
               <a:lnSpc>
                 <a:spcPct val="115000"/>
               </a:lnSpc>
@@ -15088,7 +15498,7 @@
             <a:endParaRPr lang="en-US" sz="1200" dirty="0"/>
           </a:p>
           <a:p>
-            <a:pPr indent="0" marL="0">
+            <a:pPr marL="0" indent="0">
               <a:lnSpc>
                 <a:spcPct val="115000"/>
               </a:lnSpc>
@@ -15097,7 +15507,7 @@
             <a:endParaRPr lang="en-US" sz="1200" dirty="0"/>
           </a:p>
           <a:p>
-            <a:pPr indent="0" marL="0">
+            <a:pPr marL="0" indent="0">
               <a:lnSpc>
                 <a:spcPct val="115000"/>
               </a:lnSpc>
@@ -15117,7 +15527,7 @@
             <a:endParaRPr lang="en-US" sz="1200" dirty="0"/>
           </a:p>
           <a:p>
-            <a:pPr indent="0" marL="0">
+            <a:pPr marL="0" indent="0">
               <a:lnSpc>
                 <a:spcPct val="115000"/>
               </a:lnSpc>
@@ -15137,7 +15547,7 @@
             <a:endParaRPr lang="en-US" sz="1200" dirty="0"/>
           </a:p>
           <a:p>
-            <a:pPr indent="0" marL="0">
+            <a:pPr marL="0" indent="0">
               <a:lnSpc>
                 <a:spcPct val="115000"/>
               </a:lnSpc>
@@ -15146,7 +15556,7 @@
             <a:endParaRPr lang="en-US" sz="1200" dirty="0"/>
           </a:p>
           <a:p>
-            <a:pPr indent="0" marL="0">
+            <a:pPr marL="0" indent="0">
               <a:lnSpc>
                 <a:spcPct val="115000"/>
               </a:lnSpc>
@@ -15193,6 +15603,13 @@
             <a:prstDash val="solid"/>
           </a:ln>
         </p:spPr>
+        <p:txBody>
+          <a:bodyPr/>
+          <a:lstStyle/>
+          <a:p>
+            <a:endParaRPr lang="en-US"/>
+          </a:p>
+        </p:txBody>
       </p:sp>
       <p:sp>
         <p:nvSpPr>
@@ -15215,7 +15632,7 @@
           <a:bodyPr wrap="square" lIns="0" tIns="0" rIns="0" bIns="0" rtlCol="0" anchor="ctr"/>
           <a:lstStyle/>
           <a:p>
-            <a:pPr indent="0" marL="0">
+            <a:pPr marL="0" indent="0">
               <a:buNone/>
             </a:pPr>
             <a:r>
@@ -15254,7 +15671,7 @@
           <a:bodyPr wrap="square" lIns="0" tIns="0" rIns="0" bIns="0" rtlCol="0" anchor="t"/>
           <a:lstStyle/>
           <a:p>
-            <a:pPr indent="0" marL="0">
+            <a:pPr marL="0" indent="0">
               <a:lnSpc>
                 <a:spcPct val="115000"/>
               </a:lnSpc>
@@ -15274,7 +15691,7 @@
             <a:endParaRPr lang="en-US" sz="1200" dirty="0"/>
           </a:p>
           <a:p>
-            <a:pPr indent="0" marL="0">
+            <a:pPr marL="0" indent="0">
               <a:lnSpc>
                 <a:spcPct val="115000"/>
               </a:lnSpc>
@@ -15283,7 +15700,7 @@
             <a:endParaRPr lang="en-US" sz="1200" dirty="0"/>
           </a:p>
           <a:p>
-            <a:pPr indent="0" marL="0">
+            <a:pPr marL="0" indent="0">
               <a:lnSpc>
                 <a:spcPct val="115000"/>
               </a:lnSpc>
@@ -15303,7 +15720,7 @@
             <a:endParaRPr lang="en-US" sz="1200" dirty="0"/>
           </a:p>
           <a:p>
-            <a:pPr indent="0" marL="0">
+            <a:pPr marL="0" indent="0">
               <a:lnSpc>
                 <a:spcPct val="115000"/>
               </a:lnSpc>
@@ -15323,7 +15740,7 @@
             <a:endParaRPr lang="en-US" sz="1200" dirty="0"/>
           </a:p>
           <a:p>
-            <a:pPr indent="0" marL="0">
+            <a:pPr marL="0" indent="0">
               <a:lnSpc>
                 <a:spcPct val="115000"/>
               </a:lnSpc>
@@ -15332,7 +15749,7 @@
             <a:endParaRPr lang="en-US" sz="1200" dirty="0"/>
           </a:p>
           <a:p>
-            <a:pPr indent="0" marL="0">
+            <a:pPr marL="0" indent="0">
               <a:lnSpc>
                 <a:spcPct val="115000"/>
               </a:lnSpc>
@@ -15379,6 +15796,13 @@
             <a:prstDash val="solid"/>
           </a:ln>
         </p:spPr>
+        <p:txBody>
+          <a:bodyPr/>
+          <a:lstStyle/>
+          <a:p>
+            <a:endParaRPr lang="en-US"/>
+          </a:p>
+        </p:txBody>
       </p:sp>
       <p:sp>
         <p:nvSpPr>
@@ -15401,7 +15825,7 @@
           <a:bodyPr wrap="square" lIns="0" tIns="0" rIns="0" bIns="0" rtlCol="0" anchor="ctr"/>
           <a:lstStyle/>
           <a:p>
-            <a:pPr indent="0" marL="0">
+            <a:pPr marL="0" indent="0">
               <a:buNone/>
             </a:pPr>
             <a:r>
@@ -15465,7 +15889,7 @@
           <a:bodyPr wrap="square" lIns="0" tIns="0" rIns="0" bIns="0" rtlCol="0" anchor="ctr"/>
           <a:lstStyle/>
           <a:p>
-            <a:pPr indent="0" marL="0">
+            <a:pPr marL="0" indent="0">
               <a:buNone/>
             </a:pPr>
             <a:r>
@@ -15504,7 +15928,7 @@
           <a:bodyPr wrap="square" lIns="0" tIns="0" rIns="0" bIns="0" rtlCol="0" anchor="ctr"/>
           <a:lstStyle/>
           <a:p>
-            <a:pPr indent="0" marL="0">
+            <a:pPr marL="0" indent="0">
               <a:buNone/>
             </a:pPr>
             <a:r>
@@ -15548,6 +15972,13 @@
             <a:prstDash val="solid"/>
           </a:ln>
         </p:spPr>
+        <p:txBody>
+          <a:bodyPr/>
+          <a:lstStyle/>
+          <a:p>
+            <a:endParaRPr lang="en-US"/>
+          </a:p>
+        </p:txBody>
       </p:sp>
       <p:sp>
         <p:nvSpPr>
@@ -15573,6 +16004,13 @@
             <a:prstDash val="solid"/>
           </a:ln>
         </p:spPr>
+        <p:txBody>
+          <a:bodyPr/>
+          <a:lstStyle/>
+          <a:p>
+            <a:endParaRPr lang="en-US"/>
+          </a:p>
+        </p:txBody>
       </p:sp>
       <p:sp>
         <p:nvSpPr>
@@ -15595,7 +16033,7 @@
           <a:bodyPr wrap="square" lIns="0" tIns="0" rIns="0" bIns="0" rtlCol="0" anchor="ctr"/>
           <a:lstStyle/>
           <a:p>
-            <a:pPr algn="ctr" indent="0" marL="0">
+            <a:pPr marL="0" indent="0" algn="ctr">
               <a:buNone/>
             </a:pPr>
             <a:r>
@@ -15634,7 +16072,7 @@
           <a:bodyPr wrap="square" lIns="0" tIns="0" rIns="0" bIns="0" rtlCol="0" anchor="ctr"/>
           <a:lstStyle/>
           <a:p>
-            <a:pPr indent="0" marL="0">
+            <a:pPr marL="0" indent="0">
               <a:buNone/>
             </a:pPr>
             <a:r>
@@ -15673,7 +16111,7 @@
           <a:bodyPr wrap="square" lIns="0" tIns="0" rIns="0" bIns="0" rtlCol="0" anchor="ctr"/>
           <a:lstStyle/>
           <a:p>
-            <a:pPr indent="0" marL="0">
+            <a:pPr marL="0" indent="0">
               <a:buNone/>
             </a:pPr>
             <a:r>
@@ -15712,7 +16150,7 @@
           <a:bodyPr wrap="square" lIns="0" tIns="0" rIns="0" bIns="0" rtlCol="0" anchor="ctr"/>
           <a:lstStyle/>
           <a:p>
-            <a:pPr indent="0" marL="0">
+            <a:pPr marL="0" indent="0">
               <a:lnSpc>
                 <a:spcPct val="115000"/>
               </a:lnSpc>
@@ -15754,7 +16192,7 @@
           <a:bodyPr wrap="square" lIns="0" tIns="0" rIns="0" bIns="0" rtlCol="0" anchor="ctr"/>
           <a:lstStyle/>
           <a:p>
-            <a:pPr algn="ctr" indent="0" marL="0">
+            <a:pPr marL="0" indent="0" algn="ctr">
               <a:buNone/>
             </a:pPr>
             <a:r>
@@ -15798,6 +16236,13 @@
             <a:prstDash val="solid"/>
           </a:ln>
         </p:spPr>
+        <p:txBody>
+          <a:bodyPr/>
+          <a:lstStyle/>
+          <a:p>
+            <a:endParaRPr lang="en-US"/>
+          </a:p>
+        </p:txBody>
       </p:sp>
       <p:sp>
         <p:nvSpPr>
@@ -15823,6 +16268,13 @@
             <a:prstDash val="solid"/>
           </a:ln>
         </p:spPr>
+        <p:txBody>
+          <a:bodyPr/>
+          <a:lstStyle/>
+          <a:p>
+            <a:endParaRPr lang="en-US"/>
+          </a:p>
+        </p:txBody>
       </p:sp>
       <p:sp>
         <p:nvSpPr>
@@ -15845,7 +16297,7 @@
           <a:bodyPr wrap="square" lIns="0" tIns="0" rIns="0" bIns="0" rtlCol="0" anchor="ctr"/>
           <a:lstStyle/>
           <a:p>
-            <a:pPr algn="ctr" indent="0" marL="0">
+            <a:pPr marL="0" indent="0" algn="ctr">
               <a:buNone/>
             </a:pPr>
             <a:r>
@@ -15884,7 +16336,7 @@
           <a:bodyPr wrap="square" lIns="0" tIns="0" rIns="0" bIns="0" rtlCol="0" anchor="ctr"/>
           <a:lstStyle/>
           <a:p>
-            <a:pPr indent="0" marL="0">
+            <a:pPr marL="0" indent="0">
               <a:buNone/>
             </a:pPr>
             <a:r>
@@ -15923,7 +16375,7 @@
           <a:bodyPr wrap="square" lIns="0" tIns="0" rIns="0" bIns="0" rtlCol="0" anchor="ctr"/>
           <a:lstStyle/>
           <a:p>
-            <a:pPr indent="0" marL="0">
+            <a:pPr marL="0" indent="0">
               <a:buNone/>
             </a:pPr>
             <a:r>
@@ -15962,7 +16414,7 @@
           <a:bodyPr wrap="square" lIns="0" tIns="0" rIns="0" bIns="0" rtlCol="0" anchor="ctr"/>
           <a:lstStyle/>
           <a:p>
-            <a:pPr indent="0" marL="0">
+            <a:pPr marL="0" indent="0">
               <a:lnSpc>
                 <a:spcPct val="115000"/>
               </a:lnSpc>
@@ -16004,7 +16456,7 @@
           <a:bodyPr wrap="square" lIns="0" tIns="0" rIns="0" bIns="0" rtlCol="0" anchor="ctr"/>
           <a:lstStyle/>
           <a:p>
-            <a:pPr algn="ctr" indent="0" marL="0">
+            <a:pPr marL="0" indent="0" algn="ctr">
               <a:buNone/>
             </a:pPr>
             <a:r>
@@ -16048,6 +16500,13 @@
             <a:prstDash val="solid"/>
           </a:ln>
         </p:spPr>
+        <p:txBody>
+          <a:bodyPr/>
+          <a:lstStyle/>
+          <a:p>
+            <a:endParaRPr lang="en-US"/>
+          </a:p>
+        </p:txBody>
       </p:sp>
       <p:sp>
         <p:nvSpPr>
@@ -16073,6 +16532,13 @@
             <a:prstDash val="solid"/>
           </a:ln>
         </p:spPr>
+        <p:txBody>
+          <a:bodyPr/>
+          <a:lstStyle/>
+          <a:p>
+            <a:endParaRPr lang="en-US"/>
+          </a:p>
+        </p:txBody>
       </p:sp>
       <p:sp>
         <p:nvSpPr>
@@ -16095,7 +16561,7 @@
           <a:bodyPr wrap="square" lIns="0" tIns="0" rIns="0" bIns="0" rtlCol="0" anchor="ctr"/>
           <a:lstStyle/>
           <a:p>
-            <a:pPr algn="ctr" indent="0" marL="0">
+            <a:pPr marL="0" indent="0" algn="ctr">
               <a:buNone/>
             </a:pPr>
             <a:r>
@@ -16134,7 +16600,7 @@
           <a:bodyPr wrap="square" lIns="0" tIns="0" rIns="0" bIns="0" rtlCol="0" anchor="ctr"/>
           <a:lstStyle/>
           <a:p>
-            <a:pPr indent="0" marL="0">
+            <a:pPr marL="0" indent="0">
               <a:buNone/>
             </a:pPr>
             <a:r>
@@ -16173,7 +16639,7 @@
           <a:bodyPr wrap="square" lIns="0" tIns="0" rIns="0" bIns="0" rtlCol="0" anchor="ctr"/>
           <a:lstStyle/>
           <a:p>
-            <a:pPr indent="0" marL="0">
+            <a:pPr marL="0" indent="0">
               <a:buNone/>
             </a:pPr>
             <a:r>
@@ -16212,7 +16678,7 @@
           <a:bodyPr wrap="square" lIns="0" tIns="0" rIns="0" bIns="0" rtlCol="0" anchor="ctr"/>
           <a:lstStyle/>
           <a:p>
-            <a:pPr indent="0" marL="0">
+            <a:pPr marL="0" indent="0">
               <a:lnSpc>
                 <a:spcPct val="115000"/>
               </a:lnSpc>
@@ -16259,6 +16725,13 @@
             <a:prstDash val="solid"/>
           </a:ln>
         </p:spPr>
+        <p:txBody>
+          <a:bodyPr/>
+          <a:lstStyle/>
+          <a:p>
+            <a:endParaRPr lang="en-US"/>
+          </a:p>
+        </p:txBody>
       </p:sp>
       <p:sp>
         <p:nvSpPr>
@@ -16281,7 +16754,7 @@
           <a:bodyPr wrap="square" lIns="0" tIns="0" rIns="0" bIns="0" rtlCol="0" anchor="ctr"/>
           <a:lstStyle/>
           <a:p>
-            <a:pPr indent="0" marL="0">
+            <a:pPr marL="0" indent="0">
               <a:buNone/>
             </a:pPr>
             <a:r>
@@ -16600,4 +17073,319 @@
     </a:ext>
   </a:extLst>
 </a:theme>
+</file>
+
+<file path=ppt/theme/theme2.xml><?xml version="1.0" encoding="utf-8"?>
+<a:theme xmlns:a="http://schemas.openxmlformats.org/drawingml/2006/main" name="Office Theme">
+  <a:themeElements>
+    <a:clrScheme name="Office">
+      <a:dk1>
+        <a:sysClr val="windowText" lastClr="000000"/>
+      </a:dk1>
+      <a:lt1>
+        <a:sysClr val="window" lastClr="FFFFFF"/>
+      </a:lt1>
+      <a:dk2>
+        <a:srgbClr val="0E2841"/>
+      </a:dk2>
+      <a:lt2>
+        <a:srgbClr val="E8E8E8"/>
+      </a:lt2>
+      <a:accent1>
+        <a:srgbClr val="156082"/>
+      </a:accent1>
+      <a:accent2>
+        <a:srgbClr val="E97132"/>
+      </a:accent2>
+      <a:accent3>
+        <a:srgbClr val="196B24"/>
+      </a:accent3>
+      <a:accent4>
+        <a:srgbClr val="0F9ED5"/>
+      </a:accent4>
+      <a:accent5>
+        <a:srgbClr val="A02B93"/>
+      </a:accent5>
+      <a:accent6>
+        <a:srgbClr val="4EA72E"/>
+      </a:accent6>
+      <a:hlink>
+        <a:srgbClr val="467886"/>
+      </a:hlink>
+      <a:folHlink>
+        <a:srgbClr val="96607D"/>
+      </a:folHlink>
+    </a:clrScheme>
+    <a:fontScheme name="Office">
+      <a:majorFont>
+        <a:latin typeface="Aptos Display" panose="02110004020202020204"/>
+        <a:ea typeface=""/>
+        <a:cs typeface=""/>
+        <a:font script="Jpan" typeface="游ゴシック Light"/>
+        <a:font script="Hang" typeface="맑은 고딕"/>
+        <a:font script="Hans" typeface="等线 Light"/>
+        <a:font script="Hant" typeface="新細明體"/>
+        <a:font script="Arab" typeface="Times New Roman"/>
+        <a:font script="Hebr" typeface="Times New Roman"/>
+        <a:font script="Thai" typeface="Angsana New"/>
+        <a:font script="Ethi" typeface="Nyala"/>
+        <a:font script="Beng" typeface="Vrinda"/>
+        <a:font script="Gujr" typeface="Shruti"/>
+        <a:font script="Khmr" typeface="MoolBoran"/>
+        <a:font script="Knda" typeface="Tunga"/>
+        <a:font script="Guru" typeface="Raavi"/>
+        <a:font script="Cans" typeface="Euphemia"/>
+        <a:font script="Cher" typeface="Plantagenet Cherokee"/>
+        <a:font script="Yiii" typeface="Microsoft Yi Baiti"/>
+        <a:font script="Tibt" typeface="Microsoft Himalaya"/>
+        <a:font script="Thaa" typeface="MV Boli"/>
+        <a:font script="Deva" typeface="Mangal"/>
+        <a:font script="Telu" typeface="Gautami"/>
+        <a:font script="Taml" typeface="Latha"/>
+        <a:font script="Syrc" typeface="Estrangelo Edessa"/>
+        <a:font script="Orya" typeface="Kalinga"/>
+        <a:font script="Mlym" typeface="Kartika"/>
+        <a:font script="Laoo" typeface="DokChampa"/>
+        <a:font script="Sinh" typeface="Iskoola Pota"/>
+        <a:font script="Mong" typeface="Mongolian Baiti"/>
+        <a:font script="Viet" typeface="Times New Roman"/>
+        <a:font script="Uigh" typeface="Microsoft Uighur"/>
+        <a:font script="Geor" typeface="Sylfaen"/>
+        <a:font script="Armn" typeface="Arial"/>
+        <a:font script="Bugi" typeface="Leelawadee UI"/>
+        <a:font script="Bopo" typeface="Microsoft JhengHei"/>
+        <a:font script="Java" typeface="Javanese Text"/>
+        <a:font script="Lisu" typeface="Segoe UI"/>
+        <a:font script="Mymr" typeface="Myanmar Text"/>
+        <a:font script="Nkoo" typeface="Ebrima"/>
+        <a:font script="Olck" typeface="Nirmala UI"/>
+        <a:font script="Osma" typeface="Ebrima"/>
+        <a:font script="Phag" typeface="Phagspa"/>
+        <a:font script="Syrn" typeface="Estrangelo Edessa"/>
+        <a:font script="Syrj" typeface="Estrangelo Edessa"/>
+        <a:font script="Syre" typeface="Estrangelo Edessa"/>
+        <a:font script="Sora" typeface="Nirmala UI"/>
+        <a:font script="Tale" typeface="Microsoft Tai Le"/>
+        <a:font script="Talu" typeface="Microsoft New Tai Lue"/>
+        <a:font script="Tfng" typeface="Ebrima"/>
+      </a:majorFont>
+      <a:minorFont>
+        <a:latin typeface="Aptos" panose="02110004020202020204"/>
+        <a:ea typeface=""/>
+        <a:cs typeface=""/>
+        <a:font script="Jpan" typeface="游ゴシック"/>
+        <a:font script="Hang" typeface="맑은 고딕"/>
+        <a:font script="Hans" typeface="等线"/>
+        <a:font script="Hant" typeface="新細明體"/>
+        <a:font script="Arab" typeface="Arial"/>
+        <a:font script="Hebr" typeface="Arial"/>
+        <a:font script="Thai" typeface="Cordia New"/>
+        <a:font script="Ethi" typeface="Nyala"/>
+        <a:font script="Beng" typeface="Vrinda"/>
+        <a:font script="Gujr" typeface="Shruti"/>
+        <a:font script="Khmr" typeface="DaunPenh"/>
+        <a:font script="Knda" typeface="Tunga"/>
+        <a:font script="Guru" typeface="Raavi"/>
+        <a:font script="Cans" typeface="Euphemia"/>
+        <a:font script="Cher" typeface="Plantagenet Cherokee"/>
+        <a:font script="Yiii" typeface="Microsoft Yi Baiti"/>
+        <a:font script="Tibt" typeface="Microsoft Himalaya"/>
+        <a:font script="Thaa" typeface="MV Boli"/>
+        <a:font script="Deva" typeface="Mangal"/>
+        <a:font script="Telu" typeface="Gautami"/>
+        <a:font script="Taml" typeface="Latha"/>
+        <a:font script="Syrc" typeface="Estrangelo Edessa"/>
+        <a:font script="Orya" typeface="Kalinga"/>
+        <a:font script="Mlym" typeface="Kartika"/>
+        <a:font script="Laoo" typeface="DokChampa"/>
+        <a:font script="Sinh" typeface="Iskoola Pota"/>
+        <a:font script="Mong" typeface="Mongolian Baiti"/>
+        <a:font script="Viet" typeface="Arial"/>
+        <a:font script="Uigh" typeface="Microsoft Uighur"/>
+        <a:font script="Geor" typeface="Sylfaen"/>
+        <a:font script="Armn" typeface="Arial"/>
+        <a:font script="Bugi" typeface="Leelawadee UI"/>
+        <a:font script="Bopo" typeface="Microsoft JhengHei"/>
+        <a:font script="Java" typeface="Javanese Text"/>
+        <a:font script="Lisu" typeface="Segoe UI"/>
+        <a:font script="Mymr" typeface="Myanmar Text"/>
+        <a:font script="Nkoo" typeface="Ebrima"/>
+        <a:font script="Olck" typeface="Nirmala UI"/>
+        <a:font script="Osma" typeface="Ebrima"/>
+        <a:font script="Phag" typeface="Phagspa"/>
+        <a:font script="Syrn" typeface="Estrangelo Edessa"/>
+        <a:font script="Syrj" typeface="Estrangelo Edessa"/>
+        <a:font script="Syre" typeface="Estrangelo Edessa"/>
+        <a:font script="Sora" typeface="Nirmala UI"/>
+        <a:font script="Tale" typeface="Microsoft Tai Le"/>
+        <a:font script="Talu" typeface="Microsoft New Tai Lue"/>
+        <a:font script="Tfng" typeface="Ebrima"/>
+      </a:minorFont>
+    </a:fontScheme>
+    <a:fmtScheme name="Office">
+      <a:fillStyleLst>
+        <a:solidFill>
+          <a:schemeClr val="phClr"/>
+        </a:solidFill>
+        <a:gradFill rotWithShape="1">
+          <a:gsLst>
+            <a:gs pos="0">
+              <a:schemeClr val="phClr">
+                <a:lumMod val="110000"/>
+                <a:satMod val="105000"/>
+                <a:tint val="67000"/>
+              </a:schemeClr>
+            </a:gs>
+            <a:gs pos="50000">
+              <a:schemeClr val="phClr">
+                <a:lumMod val="105000"/>
+                <a:satMod val="103000"/>
+                <a:tint val="73000"/>
+              </a:schemeClr>
+            </a:gs>
+            <a:gs pos="100000">
+              <a:schemeClr val="phClr">
+                <a:lumMod val="105000"/>
+                <a:satMod val="109000"/>
+                <a:tint val="81000"/>
+              </a:schemeClr>
+            </a:gs>
+          </a:gsLst>
+          <a:lin ang="5400000" scaled="0"/>
+        </a:gradFill>
+        <a:gradFill rotWithShape="1">
+          <a:gsLst>
+            <a:gs pos="0">
+              <a:schemeClr val="phClr">
+                <a:satMod val="103000"/>
+                <a:lumMod val="102000"/>
+                <a:tint val="94000"/>
+              </a:schemeClr>
+            </a:gs>
+            <a:gs pos="50000">
+              <a:schemeClr val="phClr">
+                <a:satMod val="110000"/>
+                <a:lumMod val="100000"/>
+                <a:shade val="100000"/>
+              </a:schemeClr>
+            </a:gs>
+            <a:gs pos="100000">
+              <a:schemeClr val="phClr">
+                <a:lumMod val="99000"/>
+                <a:satMod val="120000"/>
+                <a:shade val="78000"/>
+              </a:schemeClr>
+            </a:gs>
+          </a:gsLst>
+          <a:lin ang="5400000" scaled="0"/>
+        </a:gradFill>
+      </a:fillStyleLst>
+      <a:lnStyleLst>
+        <a:ln w="12700" cap="flat" cmpd="sng" algn="ctr">
+          <a:solidFill>
+            <a:schemeClr val="phClr"/>
+          </a:solidFill>
+          <a:prstDash val="solid"/>
+          <a:miter lim="800000"/>
+        </a:ln>
+        <a:ln w="19050" cap="flat" cmpd="sng" algn="ctr">
+          <a:solidFill>
+            <a:schemeClr val="phClr"/>
+          </a:solidFill>
+          <a:prstDash val="solid"/>
+          <a:miter lim="800000"/>
+        </a:ln>
+        <a:ln w="25400" cap="flat" cmpd="sng" algn="ctr">
+          <a:solidFill>
+            <a:schemeClr val="phClr"/>
+          </a:solidFill>
+          <a:prstDash val="solid"/>
+          <a:miter lim="800000"/>
+        </a:ln>
+      </a:lnStyleLst>
+      <a:effectStyleLst>
+        <a:effectStyle>
+          <a:effectLst/>
+        </a:effectStyle>
+        <a:effectStyle>
+          <a:effectLst/>
+        </a:effectStyle>
+        <a:effectStyle>
+          <a:effectLst>
+            <a:outerShdw blurRad="57150" dist="19050" dir="5400000" algn="ctr" rotWithShape="0">
+              <a:srgbClr val="000000">
+                <a:alpha val="63000"/>
+              </a:srgbClr>
+            </a:outerShdw>
+          </a:effectLst>
+        </a:effectStyle>
+      </a:effectStyleLst>
+      <a:bgFillStyleLst>
+        <a:solidFill>
+          <a:schemeClr val="phClr"/>
+        </a:solidFill>
+        <a:solidFill>
+          <a:schemeClr val="phClr">
+            <a:tint val="95000"/>
+            <a:satMod val="170000"/>
+          </a:schemeClr>
+        </a:solidFill>
+        <a:gradFill rotWithShape="1">
+          <a:gsLst>
+            <a:gs pos="0">
+              <a:schemeClr val="phClr">
+                <a:tint val="93000"/>
+                <a:satMod val="150000"/>
+                <a:shade val="98000"/>
+                <a:lumMod val="102000"/>
+              </a:schemeClr>
+            </a:gs>
+            <a:gs pos="50000">
+              <a:schemeClr val="phClr">
+                <a:tint val="98000"/>
+                <a:satMod val="130000"/>
+                <a:shade val="90000"/>
+                <a:lumMod val="103000"/>
+              </a:schemeClr>
+            </a:gs>
+            <a:gs pos="100000">
+              <a:schemeClr val="phClr">
+                <a:shade val="63000"/>
+                <a:satMod val="120000"/>
+              </a:schemeClr>
+            </a:gs>
+          </a:gsLst>
+          <a:lin ang="5400000" scaled="0"/>
+        </a:gradFill>
+      </a:bgFillStyleLst>
+    </a:fmtScheme>
+  </a:themeElements>
+  <a:objectDefaults>
+    <a:lnDef>
+      <a:spPr/>
+      <a:bodyPr/>
+      <a:lstStyle/>
+      <a:style>
+        <a:lnRef idx="2">
+          <a:schemeClr val="accent1"/>
+        </a:lnRef>
+        <a:fillRef idx="0">
+          <a:schemeClr val="accent1"/>
+        </a:fillRef>
+        <a:effectRef idx="1">
+          <a:schemeClr val="accent1"/>
+        </a:effectRef>
+        <a:fontRef idx="minor">
+          <a:schemeClr val="tx1"/>
+        </a:fontRef>
+      </a:style>
+    </a:lnDef>
+  </a:objectDefaults>
+  <a:extraClrSchemeLst/>
+  <a:extLst>
+    <a:ext uri="{05A4C25C-085E-4340-85A3-A5531E510DB2}">
+      <thm15:themeFamily xmlns:thm15="http://schemas.microsoft.com/office/thememl/2012/main" name="Office Theme" id="{2E142A2C-CD16-42D6-873A-C26D2A0506FA}" vid="{1BDDFF52-6CD6-40A5-AB3C-68EB2F1E4D0A}"/>
+    </a:ext>
+  </a:extLst>
+</a:theme>
 </file>
--- a/memo-machine-learning.pptx
+++ b/memo-machine-learning.pptx
@@ -13116,7 +13116,7 @@
                 <a:ea typeface="Calibri" pitchFamily="34" charset="-122"/>
                 <a:cs typeface="Calibri" pitchFamily="34" charset="-120"/>
               </a:rPr>
-              <a:t>NumPy aligne les formes en partant de la droite. Compatibles si égales, ou si l'une vaut 1.</a:t>
+              <a:t>NumPy aligne les formes en partant de la droite. Compatibles si égales, ou si l'une vaut 1. Un (3,) n'a pas d'orientation.</a:t>
             </a:r>
             <a:endParaRPr lang="en-US" sz="1150" dirty="0"/>
           </a:p>
@@ -13178,7 +13178,7 @@
                 <a:ea typeface="Courier New" pitchFamily="34" charset="-122"/>
                 <a:cs typeface="Courier New" pitchFamily="34" charset="-120"/>
               </a:rPr>
-              <a:t>(3,4) + (3,)   ✗</a:t>
+              <a:t>(3,4) + (3,)   ✗   → v[:, None]</a:t>
             </a:r>
             <a:endParaRPr lang="en-US" sz="1150" dirty="0"/>
           </a:p>

--- a/memo-machine-learning.pptx
+++ b/memo-machine-learning.pptx
@@ -22,6 +22,7 @@
     <p:sldId id="267" r:id="rId13"/>
     <p:sldId id="268" r:id="rId14"/>
     <p:sldId id="271" r:id="rId15"/>
+    <p:sldId id="277" r:id="rId28"/>
     <p:sldId id="272" r:id="rId16"/>
     <p:sldId id="273" r:id="rId17"/>
     <p:sldId id="274" r:id="rId18"/>
@@ -10466,6 +10467,569 @@
                 <a:cs typeface="Calibri" pitchFamily="34" charset="-120"/>
               </a:rPr>
               <a:t>Prochaine étape : classification — une cible binaire, une autre fonction de coût, d'autres métriques que le R².</a:t>
+            </a:r>
+            <a:endParaRPr lang="en-US" sz="1250" dirty="0"/>
+          </a:p>
+        </p:txBody>
+      </p:sp>
+    </p:spTree>
+  </p:cSld>
+  <p:clrMapOvr>
+    <a:masterClrMapping/>
+  </p:clrMapOvr>
+</p:sld>
+</file>
+
+<file path=ppt/slides/slide22.xml><?xml version="1.0" encoding="utf-8"?>
+<p:sld xmlns:a="http://schemas.openxmlformats.org/drawingml/2006/main" xmlns:r="http://schemas.openxmlformats.org/officeDocument/2006/relationships" xmlns:p="http://schemas.openxmlformats.org/presentationml/2006/main">
+  <p:cSld name="Slide 12">
+    <p:spTree>
+      <p:nvGrpSpPr>
+        <p:cNvPr id="1" name=""/>
+        <p:cNvGrpSpPr/>
+        <p:nvPr/>
+      </p:nvGrpSpPr>
+      <p:grpSpPr>
+        <a:xfrm>
+          <a:off x="0" y="0"/>
+          <a:ext cx="0" cy="0"/>
+          <a:chOff x="0" y="0"/>
+          <a:chExt cx="0" cy="0"/>
+        </a:xfrm>
+      </p:grpSpPr>
+      <p:sp>
+        <p:nvSpPr>
+          <p:cNvPr id="2" name="Text 0"/>
+          <p:cNvSpPr/>
+          <p:nvPr/>
+        </p:nvSpPr>
+        <p:spPr>
+          <a:xfrm>
+            <a:off x="640080" y="384048"/>
+            <a:ext cx="10881360" cy="685800"/>
+          </a:xfrm>
+          <a:prstGeom prst="rect">
+            <a:avLst/>
+          </a:prstGeom>
+          <a:noFill/>
+          <a:ln/>
+        </p:spPr>
+        <p:txBody>
+          <a:bodyPr wrap="square" lIns="0" tIns="0" rIns="0" bIns="0" rtlCol="0" anchor="ctr"/>
+          <a:lstStyle/>
+          <a:p>
+            <a:pPr marL="0" indent="0">
+              <a:buNone/>
+            </a:pPr>
+            <a:r>
+              <a:rPr lang="en-US" sz="3400" b="1" dirty="0">
+                <a:solidFill>
+                  <a:srgbClr val="1F2A1F"/>
+                </a:solidFill>
+                <a:latin typeface="Cambria" pitchFamily="34" charset="0"/>
+                <a:ea typeface="Cambria" pitchFamily="34" charset="-122"/>
+                <a:cs typeface="Cambria" pitchFamily="34" charset="-120"/>
+              </a:rPr>
+              <a:t>La préparation fait partie du modèle</a:t>
+            </a:r>
+            <a:endParaRPr lang="en-US" sz="3400" dirty="0"/>
+          </a:p>
+        </p:txBody>
+      </p:sp>
+      <p:sp>
+        <p:nvSpPr>
+          <p:cNvPr id="3" name="Text 1"/>
+          <p:cNvSpPr/>
+          <p:nvPr/>
+        </p:nvSpPr>
+        <p:spPr>
+          <a:xfrm>
+            <a:off x="640080" y="1078992"/>
+            <a:ext cx="10881360" cy="384048"/>
+          </a:xfrm>
+          <a:prstGeom prst="rect">
+            <a:avLst/>
+          </a:prstGeom>
+          <a:noFill/>
+          <a:ln/>
+        </p:spPr>
+        <p:txBody>
+          <a:bodyPr wrap="square" lIns="0" tIns="0" rIns="0" bIns="0" rtlCol="0" anchor="ctr"/>
+          <a:lstStyle/>
+          <a:p>
+            <a:pPr marL="0" indent="0">
+              <a:buNone/>
+            </a:pPr>
+            <a:r>
+              <a:rPr lang="en-US" sz="1400" i="1" dirty="0">
+                <a:solidFill>
+                  <a:srgbClr val="5E6E5E"/>
+                </a:solidFill>
+                <a:latin typeface="Calibri" pitchFamily="34" charset="0"/>
+                <a:ea typeface="Calibri" pitchFamily="34" charset="-122"/>
+                <a:cs typeface="Calibri" pitchFamily="34" charset="-120"/>
+              </a:rPr>
+              <a:t>Une fuite peut venir du code, pas seulement des données</a:t>
+            </a:r>
+            <a:endParaRPr lang="en-US" sz="1400" dirty="0"/>
+          </a:p>
+        </p:txBody>
+      </p:sp>
+      <p:sp>
+        <p:nvSpPr>
+          <p:cNvPr id="4" name="Shape 2"/>
+          <p:cNvSpPr/>
+          <p:nvPr/>
+        </p:nvSpPr>
+        <p:spPr>
+          <a:xfrm>
+            <a:off x="640080" y="1737360"/>
+            <a:ext cx="3538728" cy="2377440"/>
+          </a:xfrm>
+          <a:prstGeom prst="roundRect">
+            <a:avLst>
+              <a:gd name="adj" fmla="val 3077"/>
+            </a:avLst>
+          </a:prstGeom>
+          <a:solidFill>
+            <a:srgbClr val="EDF2E6"/>
+          </a:solidFill>
+          <a:ln w="12700">
+            <a:solidFill>
+              <a:srgbClr val="EDF2E6"/>
+            </a:solidFill>
+            <a:prstDash val="solid"/>
+          </a:ln>
+        </p:spPr>
+        <p:txBody>
+          <a:bodyPr/>
+          <a:lstStyle/>
+          <a:p>
+            <a:endParaRPr lang="en-US"/>
+          </a:p>
+        </p:txBody>
+      </p:sp>
+      <p:sp>
+        <p:nvSpPr>
+          <p:cNvPr id="5" name="Text 3"/>
+          <p:cNvSpPr/>
+          <p:nvPr/>
+        </p:nvSpPr>
+        <p:spPr>
+          <a:xfrm>
+            <a:off x="914400" y="1920240"/>
+            <a:ext cx="3017520" cy="502920"/>
+          </a:xfrm>
+          <a:prstGeom prst="rect">
+            <a:avLst/>
+          </a:prstGeom>
+          <a:noFill/>
+          <a:ln/>
+        </p:spPr>
+        <p:txBody>
+          <a:bodyPr wrap="square" lIns="0" tIns="0" rIns="0" bIns="0" rtlCol="0" anchor="ctr"/>
+          <a:lstStyle/>
+          <a:p>
+            <a:pPr marL="0" indent="0">
+              <a:buNone/>
+            </a:pPr>
+            <a:r>
+              <a:rPr lang="en-US" sz="2400" b="1" dirty="0">
+                <a:solidFill>
+                  <a:srgbClr val="2C5F2D"/>
+                </a:solidFill>
+                <a:latin typeface="Cambria" pitchFamily="34" charset="0"/>
+                <a:ea typeface="Cambria" pitchFamily="34" charset="-122"/>
+                <a:cs typeface="Cambria" pitchFamily="34" charset="-120"/>
+              </a:rPr>
+              <a:t>Le symptôme</a:t>
+            </a:r>
+            <a:endParaRPr lang="en-US" sz="2400" dirty="0"/>
+          </a:p>
+        </p:txBody>
+      </p:sp>
+      <p:sp>
+        <p:nvSpPr>
+          <p:cNvPr id="6" name="Text 4"/>
+          <p:cNvSpPr/>
+          <p:nvPr/>
+        </p:nvSpPr>
+        <p:spPr>
+          <a:xfrm>
+            <a:off x="914400" y="2542032"/>
+            <a:ext cx="3017520" cy="1371600"/>
+          </a:xfrm>
+          <a:prstGeom prst="rect">
+            <a:avLst/>
+          </a:prstGeom>
+          <a:noFill/>
+          <a:ln/>
+        </p:spPr>
+        <p:txBody>
+          <a:bodyPr wrap="square" lIns="0" tIns="0" rIns="0" bIns="0" rtlCol="0" anchor="t"/>
+          <a:lstStyle/>
+          <a:p>
+            <a:pPr marL="0" indent="0">
+              <a:lnSpc>
+                <a:spcPct val="115000"/>
+              </a:lnSpc>
+              <a:buNone/>
+            </a:pPr>
+            <a:r>
+              <a:rPr lang="en-US" sz="1200" dirty="0">
+                <a:solidFill>
+                  <a:srgbClr val="1F2A1F"/>
+                </a:solidFill>
+                <a:latin typeface="Calibri" pitchFamily="34" charset="0"/>
+                <a:ea typeface="Calibri" pitchFamily="34" charset="-122"/>
+                <a:cs typeface="Calibri" pitchFamily="34" charset="-120"/>
+              </a:rPr>
+              <a:t>Un score de test trop beau, jamais retrouvé ensuite. Rien ne plante, rien n'avertit : le chiffre est simplement faux.</a:t>
+            </a:r>
+            <a:endParaRPr lang="en-US" sz="1200" dirty="0"/>
+          </a:p>
+        </p:txBody>
+      </p:sp>
+      <p:sp>
+        <p:nvSpPr>
+          <p:cNvPr id="7" name="Shape 5"/>
+          <p:cNvSpPr/>
+          <p:nvPr/>
+        </p:nvSpPr>
+        <p:spPr>
+          <a:xfrm>
+            <a:off x="4361688" y="1737360"/>
+            <a:ext cx="3538728" cy="2377440"/>
+          </a:xfrm>
+          <a:prstGeom prst="roundRect">
+            <a:avLst>
+              <a:gd name="adj" fmla="val 3077"/>
+            </a:avLst>
+          </a:prstGeom>
+          <a:solidFill>
+            <a:srgbClr val="EDF2E6"/>
+          </a:solidFill>
+          <a:ln w="12700">
+            <a:solidFill>
+              <a:srgbClr val="EDF2E6"/>
+            </a:solidFill>
+            <a:prstDash val="solid"/>
+          </a:ln>
+        </p:spPr>
+        <p:txBody>
+          <a:bodyPr/>
+          <a:lstStyle/>
+          <a:p>
+            <a:endParaRPr lang="en-US"/>
+          </a:p>
+        </p:txBody>
+      </p:sp>
+      <p:sp>
+        <p:nvSpPr>
+          <p:cNvPr id="8" name="Text 6"/>
+          <p:cNvSpPr/>
+          <p:nvPr/>
+        </p:nvSpPr>
+        <p:spPr>
+          <a:xfrm>
+            <a:off x="4636008" y="1920240"/>
+            <a:ext cx="3017520" cy="502920"/>
+          </a:xfrm>
+          <a:prstGeom prst="rect">
+            <a:avLst/>
+          </a:prstGeom>
+          <a:noFill/>
+          <a:ln/>
+        </p:spPr>
+        <p:txBody>
+          <a:bodyPr wrap="square" lIns="0" tIns="0" rIns="0" bIns="0" rtlCol="0" anchor="ctr"/>
+          <a:lstStyle/>
+          <a:p>
+            <a:pPr marL="0" indent="0">
+              <a:buNone/>
+            </a:pPr>
+            <a:r>
+              <a:rPr lang="en-US" sz="2400" b="1" dirty="0">
+                <a:solidFill>
+                  <a:srgbClr val="2C5F2D"/>
+                </a:solidFill>
+                <a:latin typeface="Cambria" pitchFamily="34" charset="0"/>
+                <a:ea typeface="Cambria" pitchFamily="34" charset="-122"/>
+                <a:cs typeface="Cambria" pitchFamily="34" charset="-120"/>
+              </a:rPr>
+              <a:t>La cause</a:t>
+            </a:r>
+            <a:endParaRPr lang="en-US" sz="2400" dirty="0"/>
+          </a:p>
+        </p:txBody>
+      </p:sp>
+      <p:sp>
+        <p:nvSpPr>
+          <p:cNvPr id="9" name="Text 7"/>
+          <p:cNvSpPr/>
+          <p:nvPr/>
+        </p:nvSpPr>
+        <p:spPr>
+          <a:xfrm>
+            <a:off x="4636008" y="2542032"/>
+            <a:ext cx="3017520" cy="1371600"/>
+          </a:xfrm>
+          <a:prstGeom prst="rect">
+            <a:avLst/>
+          </a:prstGeom>
+          <a:noFill/>
+          <a:ln/>
+        </p:spPr>
+        <p:txBody>
+          <a:bodyPr wrap="square" lIns="0" tIns="0" rIns="0" bIns="0" rtlCol="0" anchor="t"/>
+          <a:lstStyle/>
+          <a:p>
+            <a:pPr marL="0" indent="0">
+              <a:lnSpc>
+                <a:spcPct val="115000"/>
+              </a:lnSpc>
+              <a:buNone/>
+            </a:pPr>
+            <a:r>
+              <a:rPr lang="en-US" sz="1200" dirty="0">
+                <a:solidFill>
+                  <a:srgbClr val="1F2A1F"/>
+                </a:solidFill>
+                <a:latin typeface="Calibri" pitchFamily="34" charset="0"/>
+                <a:ea typeface="Calibri" pitchFamily="34" charset="-122"/>
+                <a:cs typeface="Calibri" pitchFamily="34" charset="-120"/>
+              </a:rPr>
+              <a:t>μ et σ calculés sur tout X avant le découpage. L'information du jeu de test entre dans la préparation, donc dans le modèle.</a:t>
+            </a:r>
+            <a:endParaRPr lang="en-US" sz="1200" dirty="0"/>
+          </a:p>
+        </p:txBody>
+      </p:sp>
+      <p:sp>
+        <p:nvSpPr>
+          <p:cNvPr id="10" name="Shape 8"/>
+          <p:cNvSpPr/>
+          <p:nvPr/>
+        </p:nvSpPr>
+        <p:spPr>
+          <a:xfrm>
+            <a:off x="8083296" y="1737360"/>
+            <a:ext cx="3538728" cy="2377440"/>
+          </a:xfrm>
+          <a:prstGeom prst="roundRect">
+            <a:avLst>
+              <a:gd name="adj" fmla="val 3077"/>
+            </a:avLst>
+          </a:prstGeom>
+          <a:solidFill>
+            <a:srgbClr val="EDF2E6"/>
+          </a:solidFill>
+          <a:ln w="12700">
+            <a:solidFill>
+              <a:srgbClr val="EDF2E6"/>
+            </a:solidFill>
+            <a:prstDash val="solid"/>
+          </a:ln>
+        </p:spPr>
+        <p:txBody>
+          <a:bodyPr/>
+          <a:lstStyle/>
+          <a:p>
+            <a:endParaRPr lang="en-US"/>
+          </a:p>
+        </p:txBody>
+      </p:sp>
+      <p:sp>
+        <p:nvSpPr>
+          <p:cNvPr id="11" name="Text 9"/>
+          <p:cNvSpPr/>
+          <p:nvPr/>
+        </p:nvSpPr>
+        <p:spPr>
+          <a:xfrm>
+            <a:off x="8357616" y="1920240"/>
+            <a:ext cx="3017520" cy="502920"/>
+          </a:xfrm>
+          <a:prstGeom prst="rect">
+            <a:avLst/>
+          </a:prstGeom>
+          <a:noFill/>
+          <a:ln/>
+        </p:spPr>
+        <p:txBody>
+          <a:bodyPr wrap="square" lIns="0" tIns="0" rIns="0" bIns="0" rtlCol="0" anchor="ctr"/>
+          <a:lstStyle/>
+          <a:p>
+            <a:pPr marL="0" indent="0">
+              <a:buNone/>
+            </a:pPr>
+            <a:r>
+              <a:rPr lang="en-US" sz="2400" b="1" dirty="0">
+                <a:solidFill>
+                  <a:srgbClr val="C0562F"/>
+                </a:solidFill>
+                <a:latin typeface="Cambria" pitchFamily="34" charset="0"/>
+                <a:ea typeface="Cambria" pitchFamily="34" charset="-122"/>
+                <a:cs typeface="Cambria" pitchFamily="34" charset="-120"/>
+              </a:rPr>
+              <a:t>Le remède</a:t>
+            </a:r>
+            <a:endParaRPr lang="en-US" sz="2400" dirty="0"/>
+          </a:p>
+        </p:txBody>
+      </p:sp>
+      <p:sp>
+        <p:nvSpPr>
+          <p:cNvPr id="12" name="Text 10"/>
+          <p:cNvSpPr/>
+          <p:nvPr/>
+        </p:nvSpPr>
+        <p:spPr>
+          <a:xfrm>
+            <a:off x="8357616" y="2542032"/>
+            <a:ext cx="3017520" cy="1371600"/>
+          </a:xfrm>
+          <a:prstGeom prst="rect">
+            <a:avLst/>
+          </a:prstGeom>
+          <a:noFill/>
+          <a:ln/>
+        </p:spPr>
+        <p:txBody>
+          <a:bodyPr wrap="square" lIns="0" tIns="0" rIns="0" bIns="0" rtlCol="0" anchor="t"/>
+          <a:lstStyle/>
+          <a:p>
+            <a:pPr marL="0" indent="0">
+              <a:lnSpc>
+                <a:spcPct val="115000"/>
+              </a:lnSpc>
+              <a:buNone/>
+            </a:pPr>
+            <a:r>
+              <a:rPr lang="en-US" sz="1200" dirty="0">
+                <a:solidFill>
+                  <a:srgbClr val="1F2A1F"/>
+                </a:solidFill>
+                <a:latin typeface="Calibri" pitchFamily="34" charset="0"/>
+                <a:ea typeface="Calibri" pitchFamily="34" charset="-122"/>
+                <a:cs typeface="Calibri" pitchFamily="34" charset="-120"/>
+              </a:rPr>
+              <a:t>Le pipeline : la préparation et l'estimateur deviennent un seul objet, qui s'ajuste d'un bloc sur le seul jeu d'entraînement.</a:t>
+            </a:r>
+            <a:endParaRPr lang="en-US" sz="1200" dirty="0"/>
+          </a:p>
+        </p:txBody>
+      </p:sp>
+      <p:sp>
+        <p:nvSpPr>
+          <p:cNvPr id="13" name="Shape 11"/>
+          <p:cNvSpPr/>
+          <p:nvPr/>
+        </p:nvSpPr>
+        <p:spPr>
+          <a:xfrm>
+            <a:off x="640080" y="4389120"/>
+            <a:ext cx="10881360" cy="1371600"/>
+          </a:xfrm>
+          <a:prstGeom prst="roundRect">
+            <a:avLst>
+              <a:gd name="adj" fmla="val 5333"/>
+            </a:avLst>
+          </a:prstGeom>
+          <a:solidFill>
+            <a:srgbClr val="1A3A1C"/>
+          </a:solidFill>
+          <a:ln w="12700">
+            <a:solidFill>
+              <a:srgbClr val="1A3A1C"/>
+            </a:solidFill>
+            <a:prstDash val="solid"/>
+          </a:ln>
+        </p:spPr>
+        <p:txBody>
+          <a:bodyPr/>
+          <a:lstStyle/>
+          <a:p>
+            <a:endParaRPr lang="en-US"/>
+          </a:p>
+        </p:txBody>
+      </p:sp>
+      <p:sp>
+        <p:nvSpPr>
+          <p:cNvPr id="14" name="Text 12"/>
+          <p:cNvSpPr/>
+          <p:nvPr/>
+        </p:nvSpPr>
+        <p:spPr>
+          <a:xfrm>
+            <a:off x="960120" y="4553712"/>
+            <a:ext cx="10241280" cy="320040"/>
+          </a:xfrm>
+          <a:prstGeom prst="rect">
+            <a:avLst/>
+          </a:prstGeom>
+          <a:noFill/>
+          <a:ln/>
+        </p:spPr>
+        <p:txBody>
+          <a:bodyPr wrap="square" lIns="0" tIns="0" rIns="0" bIns="0" rtlCol="0" anchor="ctr"/>
+          <a:lstStyle/>
+          <a:p>
+            <a:pPr marL="0" indent="0">
+              <a:buNone/>
+            </a:pPr>
+            <a:r>
+              <a:rPr lang="en-US" sz="1500" b="1" dirty="0">
+                <a:solidFill>
+                  <a:srgbClr val="97BC62"/>
+                </a:solidFill>
+                <a:latin typeface="Cambria" pitchFamily="34" charset="0"/>
+                <a:ea typeface="Cambria" pitchFamily="34" charset="-122"/>
+                <a:cs typeface="Cambria" pitchFamily="34" charset="-120"/>
+              </a:rPr>
+              <a:t>Séquentiel ou parallèle</a:t>
+            </a:r>
+            <a:endParaRPr lang="en-US" sz="1500" dirty="0"/>
+          </a:p>
+        </p:txBody>
+      </p:sp>
+      <p:sp>
+        <p:nvSpPr>
+          <p:cNvPr id="15" name="Text 13"/>
+          <p:cNvSpPr/>
+          <p:nvPr/>
+        </p:nvSpPr>
+        <p:spPr>
+          <a:xfrm>
+            <a:off x="960120" y="4937760"/>
+            <a:ext cx="10241280" cy="685800"/>
+          </a:xfrm>
+          <a:prstGeom prst="rect">
+            <a:avLst/>
+          </a:prstGeom>
+          <a:noFill/>
+          <a:ln/>
+        </p:spPr>
+        <p:txBody>
+          <a:bodyPr wrap="square" lIns="0" tIns="0" rIns="0" bIns="0" rtlCol="0" anchor="ctr"/>
+          <a:lstStyle/>
+          <a:p>
+            <a:pPr marL="0" indent="0">
+              <a:lnSpc>
+                <a:spcPct val="115000"/>
+              </a:lnSpc>
+              <a:buNone/>
+            </a:pPr>
+            <a:r>
+              <a:rPr lang="en-US" sz="1250" dirty="0">
+                <a:solidFill>
+                  <a:srgbClr val="FFFFFF"/>
+                </a:solidFill>
+                <a:latin typeface="Calibri" pitchFamily="34" charset="0"/>
+                <a:ea typeface="Calibri" pitchFamily="34" charset="-122"/>
+                <a:cs typeface="Calibri" pitchFamily="34" charset="-120"/>
+              </a:rPr>
+              <a:t>Pipeline enchaîne : la sortie d'une étape est l'entrée de la suivante. ColumnTransformer découpe : chaque branche ses colonnes, sorties concaténées. Une liste de paires (nom, objet) des deux côtés — ces noms préfixent les hyperparamètres.</a:t>
             </a:r>
             <a:endParaRPr lang="en-US" sz="1250" dirty="0"/>
           </a:p>

--- a/memo-machine-learning.pptx
+++ b/memo-machine-learning.pptx
@@ -29,6 +29,9 @@
     <p:sldId id="275" r:id="rId19"/>
     <p:sldId id="276" r:id="rId20"/>
     <p:sldId id="269" r:id="rId21"/>
+    <p:sldId id="278" r:id="rId29"/>
+    <p:sldId id="279" r:id="rId30"/>
+    <p:sldId id="280" r:id="rId31"/>
     <p:sldId id="270" r:id="rId22"/>
   </p:sldIdLst>
   <p:sldSz cx="12192000" cy="6858000"/>
@@ -5274,6 +5277,569 @@
 
 <file path=ppt/slides/slide15.xml><?xml version="1.0" encoding="utf-8"?>
 <p:sld xmlns:a="http://schemas.openxmlformats.org/drawingml/2006/main" xmlns:r="http://schemas.openxmlformats.org/officeDocument/2006/relationships" xmlns:p="http://schemas.openxmlformats.org/presentationml/2006/main">
+  <p:cSld name="Slide 12">
+    <p:spTree>
+      <p:nvGrpSpPr>
+        <p:cNvPr id="1" name=""/>
+        <p:cNvGrpSpPr/>
+        <p:nvPr/>
+      </p:nvGrpSpPr>
+      <p:grpSpPr>
+        <a:xfrm>
+          <a:off x="0" y="0"/>
+          <a:ext cx="0" cy="0"/>
+          <a:chOff x="0" y="0"/>
+          <a:chExt cx="0" cy="0"/>
+        </a:xfrm>
+      </p:grpSpPr>
+      <p:sp>
+        <p:nvSpPr>
+          <p:cNvPr id="2" name="Text 0"/>
+          <p:cNvSpPr/>
+          <p:nvPr/>
+        </p:nvSpPr>
+        <p:spPr>
+          <a:xfrm>
+            <a:off x="640080" y="384048"/>
+            <a:ext cx="10881360" cy="685800"/>
+          </a:xfrm>
+          <a:prstGeom prst="rect">
+            <a:avLst/>
+          </a:prstGeom>
+          <a:noFill/>
+          <a:ln/>
+        </p:spPr>
+        <p:txBody>
+          <a:bodyPr wrap="square" lIns="0" tIns="0" rIns="0" bIns="0" rtlCol="0" anchor="ctr"/>
+          <a:lstStyle/>
+          <a:p>
+            <a:pPr marL="0" indent="0">
+              <a:buNone/>
+            </a:pPr>
+            <a:r>
+              <a:rPr lang="en-US" sz="3400" b="1" dirty="0">
+                <a:solidFill>
+                  <a:srgbClr val="1F2A1F"/>
+                </a:solidFill>
+                <a:latin typeface="Cambria" pitchFamily="34" charset="0"/>
+                <a:ea typeface="Cambria" pitchFamily="34" charset="-122"/>
+                <a:cs typeface="Cambria" pitchFamily="34" charset="-120"/>
+              </a:rPr>
+              <a:t>La préparation fait partie du modèle</a:t>
+            </a:r>
+            <a:endParaRPr lang="en-US" sz="3400" dirty="0"/>
+          </a:p>
+        </p:txBody>
+      </p:sp>
+      <p:sp>
+        <p:nvSpPr>
+          <p:cNvPr id="3" name="Text 1"/>
+          <p:cNvSpPr/>
+          <p:nvPr/>
+        </p:nvSpPr>
+        <p:spPr>
+          <a:xfrm>
+            <a:off x="640080" y="1078992"/>
+            <a:ext cx="10881360" cy="384048"/>
+          </a:xfrm>
+          <a:prstGeom prst="rect">
+            <a:avLst/>
+          </a:prstGeom>
+          <a:noFill/>
+          <a:ln/>
+        </p:spPr>
+        <p:txBody>
+          <a:bodyPr wrap="square" lIns="0" tIns="0" rIns="0" bIns="0" rtlCol="0" anchor="ctr"/>
+          <a:lstStyle/>
+          <a:p>
+            <a:pPr marL="0" indent="0">
+              <a:buNone/>
+            </a:pPr>
+            <a:r>
+              <a:rPr lang="en-US" sz="1400" i="1" dirty="0">
+                <a:solidFill>
+                  <a:srgbClr val="5E6E5E"/>
+                </a:solidFill>
+                <a:latin typeface="Calibri" pitchFamily="34" charset="0"/>
+                <a:ea typeface="Calibri" pitchFamily="34" charset="-122"/>
+                <a:cs typeface="Calibri" pitchFamily="34" charset="-120"/>
+              </a:rPr>
+              <a:t>Une fuite peut venir du code, pas seulement des données</a:t>
+            </a:r>
+            <a:endParaRPr lang="en-US" sz="1400" dirty="0"/>
+          </a:p>
+        </p:txBody>
+      </p:sp>
+      <p:sp>
+        <p:nvSpPr>
+          <p:cNvPr id="4" name="Shape 2"/>
+          <p:cNvSpPr/>
+          <p:nvPr/>
+        </p:nvSpPr>
+        <p:spPr>
+          <a:xfrm>
+            <a:off x="640080" y="1737360"/>
+            <a:ext cx="3538728" cy="2377440"/>
+          </a:xfrm>
+          <a:prstGeom prst="roundRect">
+            <a:avLst>
+              <a:gd name="adj" fmla="val 3077"/>
+            </a:avLst>
+          </a:prstGeom>
+          <a:solidFill>
+            <a:srgbClr val="EDF2E6"/>
+          </a:solidFill>
+          <a:ln w="12700">
+            <a:solidFill>
+              <a:srgbClr val="EDF2E6"/>
+            </a:solidFill>
+            <a:prstDash val="solid"/>
+          </a:ln>
+        </p:spPr>
+        <p:txBody>
+          <a:bodyPr/>
+          <a:lstStyle/>
+          <a:p>
+            <a:endParaRPr lang="en-US"/>
+          </a:p>
+        </p:txBody>
+      </p:sp>
+      <p:sp>
+        <p:nvSpPr>
+          <p:cNvPr id="5" name="Text 3"/>
+          <p:cNvSpPr/>
+          <p:nvPr/>
+        </p:nvSpPr>
+        <p:spPr>
+          <a:xfrm>
+            <a:off x="914400" y="1920240"/>
+            <a:ext cx="3017520" cy="502920"/>
+          </a:xfrm>
+          <a:prstGeom prst="rect">
+            <a:avLst/>
+          </a:prstGeom>
+          <a:noFill/>
+          <a:ln/>
+        </p:spPr>
+        <p:txBody>
+          <a:bodyPr wrap="square" lIns="0" tIns="0" rIns="0" bIns="0" rtlCol="0" anchor="ctr"/>
+          <a:lstStyle/>
+          <a:p>
+            <a:pPr marL="0" indent="0">
+              <a:buNone/>
+            </a:pPr>
+            <a:r>
+              <a:rPr lang="en-US" sz="2400" b="1" dirty="0">
+                <a:solidFill>
+                  <a:srgbClr val="2C5F2D"/>
+                </a:solidFill>
+                <a:latin typeface="Cambria" pitchFamily="34" charset="0"/>
+                <a:ea typeface="Cambria" pitchFamily="34" charset="-122"/>
+                <a:cs typeface="Cambria" pitchFamily="34" charset="-120"/>
+              </a:rPr>
+              <a:t>Le symptôme</a:t>
+            </a:r>
+            <a:endParaRPr lang="en-US" sz="2400" dirty="0"/>
+          </a:p>
+        </p:txBody>
+      </p:sp>
+      <p:sp>
+        <p:nvSpPr>
+          <p:cNvPr id="6" name="Text 4"/>
+          <p:cNvSpPr/>
+          <p:nvPr/>
+        </p:nvSpPr>
+        <p:spPr>
+          <a:xfrm>
+            <a:off x="914400" y="2542032"/>
+            <a:ext cx="3017520" cy="1371600"/>
+          </a:xfrm>
+          <a:prstGeom prst="rect">
+            <a:avLst/>
+          </a:prstGeom>
+          <a:noFill/>
+          <a:ln/>
+        </p:spPr>
+        <p:txBody>
+          <a:bodyPr wrap="square" lIns="0" tIns="0" rIns="0" bIns="0" rtlCol="0" anchor="t"/>
+          <a:lstStyle/>
+          <a:p>
+            <a:pPr marL="0" indent="0">
+              <a:lnSpc>
+                <a:spcPct val="115000"/>
+              </a:lnSpc>
+              <a:buNone/>
+            </a:pPr>
+            <a:r>
+              <a:rPr lang="en-US" sz="1200" dirty="0">
+                <a:solidFill>
+                  <a:srgbClr val="1F2A1F"/>
+                </a:solidFill>
+                <a:latin typeface="Calibri" pitchFamily="34" charset="0"/>
+                <a:ea typeface="Calibri" pitchFamily="34" charset="-122"/>
+                <a:cs typeface="Calibri" pitchFamily="34" charset="-120"/>
+              </a:rPr>
+              <a:t>Un score de test trop beau, jamais retrouvé ensuite. Rien ne plante, rien n'avertit : le chiffre est simplement faux.</a:t>
+            </a:r>
+            <a:endParaRPr lang="en-US" sz="1200" dirty="0"/>
+          </a:p>
+        </p:txBody>
+      </p:sp>
+      <p:sp>
+        <p:nvSpPr>
+          <p:cNvPr id="7" name="Shape 5"/>
+          <p:cNvSpPr/>
+          <p:nvPr/>
+        </p:nvSpPr>
+        <p:spPr>
+          <a:xfrm>
+            <a:off x="4361688" y="1737360"/>
+            <a:ext cx="3538728" cy="2377440"/>
+          </a:xfrm>
+          <a:prstGeom prst="roundRect">
+            <a:avLst>
+              <a:gd name="adj" fmla="val 3077"/>
+            </a:avLst>
+          </a:prstGeom>
+          <a:solidFill>
+            <a:srgbClr val="EDF2E6"/>
+          </a:solidFill>
+          <a:ln w="12700">
+            <a:solidFill>
+              <a:srgbClr val="EDF2E6"/>
+            </a:solidFill>
+            <a:prstDash val="solid"/>
+          </a:ln>
+        </p:spPr>
+        <p:txBody>
+          <a:bodyPr/>
+          <a:lstStyle/>
+          <a:p>
+            <a:endParaRPr lang="en-US"/>
+          </a:p>
+        </p:txBody>
+      </p:sp>
+      <p:sp>
+        <p:nvSpPr>
+          <p:cNvPr id="8" name="Text 6"/>
+          <p:cNvSpPr/>
+          <p:nvPr/>
+        </p:nvSpPr>
+        <p:spPr>
+          <a:xfrm>
+            <a:off x="4636008" y="1920240"/>
+            <a:ext cx="3017520" cy="502920"/>
+          </a:xfrm>
+          <a:prstGeom prst="rect">
+            <a:avLst/>
+          </a:prstGeom>
+          <a:noFill/>
+          <a:ln/>
+        </p:spPr>
+        <p:txBody>
+          <a:bodyPr wrap="square" lIns="0" tIns="0" rIns="0" bIns="0" rtlCol="0" anchor="ctr"/>
+          <a:lstStyle/>
+          <a:p>
+            <a:pPr marL="0" indent="0">
+              <a:buNone/>
+            </a:pPr>
+            <a:r>
+              <a:rPr lang="en-US" sz="2400" b="1" dirty="0">
+                <a:solidFill>
+                  <a:srgbClr val="2C5F2D"/>
+                </a:solidFill>
+                <a:latin typeface="Cambria" pitchFamily="34" charset="0"/>
+                <a:ea typeface="Cambria" pitchFamily="34" charset="-122"/>
+                <a:cs typeface="Cambria" pitchFamily="34" charset="-120"/>
+              </a:rPr>
+              <a:t>La cause</a:t>
+            </a:r>
+            <a:endParaRPr lang="en-US" sz="2400" dirty="0"/>
+          </a:p>
+        </p:txBody>
+      </p:sp>
+      <p:sp>
+        <p:nvSpPr>
+          <p:cNvPr id="9" name="Text 7"/>
+          <p:cNvSpPr/>
+          <p:nvPr/>
+        </p:nvSpPr>
+        <p:spPr>
+          <a:xfrm>
+            <a:off x="4636008" y="2542032"/>
+            <a:ext cx="3017520" cy="1371600"/>
+          </a:xfrm>
+          <a:prstGeom prst="rect">
+            <a:avLst/>
+          </a:prstGeom>
+          <a:noFill/>
+          <a:ln/>
+        </p:spPr>
+        <p:txBody>
+          <a:bodyPr wrap="square" lIns="0" tIns="0" rIns="0" bIns="0" rtlCol="0" anchor="t"/>
+          <a:lstStyle/>
+          <a:p>
+            <a:pPr marL="0" indent="0">
+              <a:lnSpc>
+                <a:spcPct val="115000"/>
+              </a:lnSpc>
+              <a:buNone/>
+            </a:pPr>
+            <a:r>
+              <a:rPr lang="en-US" sz="1200" dirty="0">
+                <a:solidFill>
+                  <a:srgbClr val="1F2A1F"/>
+                </a:solidFill>
+                <a:latin typeface="Calibri" pitchFamily="34" charset="0"/>
+                <a:ea typeface="Calibri" pitchFamily="34" charset="-122"/>
+                <a:cs typeface="Calibri" pitchFamily="34" charset="-120"/>
+              </a:rPr>
+              <a:t>μ et σ calculés sur tout X avant le découpage. L'information du jeu de test entre dans la préparation, donc dans le modèle.</a:t>
+            </a:r>
+            <a:endParaRPr lang="en-US" sz="1200" dirty="0"/>
+          </a:p>
+        </p:txBody>
+      </p:sp>
+      <p:sp>
+        <p:nvSpPr>
+          <p:cNvPr id="10" name="Shape 8"/>
+          <p:cNvSpPr/>
+          <p:nvPr/>
+        </p:nvSpPr>
+        <p:spPr>
+          <a:xfrm>
+            <a:off x="8083296" y="1737360"/>
+            <a:ext cx="3538728" cy="2377440"/>
+          </a:xfrm>
+          <a:prstGeom prst="roundRect">
+            <a:avLst>
+              <a:gd name="adj" fmla="val 3077"/>
+            </a:avLst>
+          </a:prstGeom>
+          <a:solidFill>
+            <a:srgbClr val="EDF2E6"/>
+          </a:solidFill>
+          <a:ln w="12700">
+            <a:solidFill>
+              <a:srgbClr val="EDF2E6"/>
+            </a:solidFill>
+            <a:prstDash val="solid"/>
+          </a:ln>
+        </p:spPr>
+        <p:txBody>
+          <a:bodyPr/>
+          <a:lstStyle/>
+          <a:p>
+            <a:endParaRPr lang="en-US"/>
+          </a:p>
+        </p:txBody>
+      </p:sp>
+      <p:sp>
+        <p:nvSpPr>
+          <p:cNvPr id="11" name="Text 9"/>
+          <p:cNvSpPr/>
+          <p:nvPr/>
+        </p:nvSpPr>
+        <p:spPr>
+          <a:xfrm>
+            <a:off x="8357616" y="1920240"/>
+            <a:ext cx="3017520" cy="502920"/>
+          </a:xfrm>
+          <a:prstGeom prst="rect">
+            <a:avLst/>
+          </a:prstGeom>
+          <a:noFill/>
+          <a:ln/>
+        </p:spPr>
+        <p:txBody>
+          <a:bodyPr wrap="square" lIns="0" tIns="0" rIns="0" bIns="0" rtlCol="0" anchor="ctr"/>
+          <a:lstStyle/>
+          <a:p>
+            <a:pPr marL="0" indent="0">
+              <a:buNone/>
+            </a:pPr>
+            <a:r>
+              <a:rPr lang="en-US" sz="2400" b="1" dirty="0">
+                <a:solidFill>
+                  <a:srgbClr val="C0562F"/>
+                </a:solidFill>
+                <a:latin typeface="Cambria" pitchFamily="34" charset="0"/>
+                <a:ea typeface="Cambria" pitchFamily="34" charset="-122"/>
+                <a:cs typeface="Cambria" pitchFamily="34" charset="-120"/>
+              </a:rPr>
+              <a:t>Le remède</a:t>
+            </a:r>
+            <a:endParaRPr lang="en-US" sz="2400" dirty="0"/>
+          </a:p>
+        </p:txBody>
+      </p:sp>
+      <p:sp>
+        <p:nvSpPr>
+          <p:cNvPr id="12" name="Text 10"/>
+          <p:cNvSpPr/>
+          <p:nvPr/>
+        </p:nvSpPr>
+        <p:spPr>
+          <a:xfrm>
+            <a:off x="8357616" y="2542032"/>
+            <a:ext cx="3017520" cy="1371600"/>
+          </a:xfrm>
+          <a:prstGeom prst="rect">
+            <a:avLst/>
+          </a:prstGeom>
+          <a:noFill/>
+          <a:ln/>
+        </p:spPr>
+        <p:txBody>
+          <a:bodyPr wrap="square" lIns="0" tIns="0" rIns="0" bIns="0" rtlCol="0" anchor="t"/>
+          <a:lstStyle/>
+          <a:p>
+            <a:pPr marL="0" indent="0">
+              <a:lnSpc>
+                <a:spcPct val="115000"/>
+              </a:lnSpc>
+              <a:buNone/>
+            </a:pPr>
+            <a:r>
+              <a:rPr lang="en-US" sz="1200" dirty="0">
+                <a:solidFill>
+                  <a:srgbClr val="1F2A1F"/>
+                </a:solidFill>
+                <a:latin typeface="Calibri" pitchFamily="34" charset="0"/>
+                <a:ea typeface="Calibri" pitchFamily="34" charset="-122"/>
+                <a:cs typeface="Calibri" pitchFamily="34" charset="-120"/>
+              </a:rPr>
+              <a:t>Le pipeline : la préparation et l'estimateur deviennent un seul objet, qui s'ajuste d'un bloc sur le seul jeu d'entraînement.</a:t>
+            </a:r>
+            <a:endParaRPr lang="en-US" sz="1200" dirty="0"/>
+          </a:p>
+        </p:txBody>
+      </p:sp>
+      <p:sp>
+        <p:nvSpPr>
+          <p:cNvPr id="13" name="Shape 11"/>
+          <p:cNvSpPr/>
+          <p:nvPr/>
+        </p:nvSpPr>
+        <p:spPr>
+          <a:xfrm>
+            <a:off x="640080" y="4389120"/>
+            <a:ext cx="10881360" cy="1371600"/>
+          </a:xfrm>
+          <a:prstGeom prst="roundRect">
+            <a:avLst>
+              <a:gd name="adj" fmla="val 5333"/>
+            </a:avLst>
+          </a:prstGeom>
+          <a:solidFill>
+            <a:srgbClr val="1A3A1C"/>
+          </a:solidFill>
+          <a:ln w="12700">
+            <a:solidFill>
+              <a:srgbClr val="1A3A1C"/>
+            </a:solidFill>
+            <a:prstDash val="solid"/>
+          </a:ln>
+        </p:spPr>
+        <p:txBody>
+          <a:bodyPr/>
+          <a:lstStyle/>
+          <a:p>
+            <a:endParaRPr lang="en-US"/>
+          </a:p>
+        </p:txBody>
+      </p:sp>
+      <p:sp>
+        <p:nvSpPr>
+          <p:cNvPr id="14" name="Text 12"/>
+          <p:cNvSpPr/>
+          <p:nvPr/>
+        </p:nvSpPr>
+        <p:spPr>
+          <a:xfrm>
+            <a:off x="960120" y="4553712"/>
+            <a:ext cx="10241280" cy="320040"/>
+          </a:xfrm>
+          <a:prstGeom prst="rect">
+            <a:avLst/>
+          </a:prstGeom>
+          <a:noFill/>
+          <a:ln/>
+        </p:spPr>
+        <p:txBody>
+          <a:bodyPr wrap="square" lIns="0" tIns="0" rIns="0" bIns="0" rtlCol="0" anchor="ctr"/>
+          <a:lstStyle/>
+          <a:p>
+            <a:pPr marL="0" indent="0">
+              <a:buNone/>
+            </a:pPr>
+            <a:r>
+              <a:rPr lang="en-US" sz="1500" b="1" dirty="0">
+                <a:solidFill>
+                  <a:srgbClr val="97BC62"/>
+                </a:solidFill>
+                <a:latin typeface="Cambria" pitchFamily="34" charset="0"/>
+                <a:ea typeface="Cambria" pitchFamily="34" charset="-122"/>
+                <a:cs typeface="Cambria" pitchFamily="34" charset="-120"/>
+              </a:rPr>
+              <a:t>Séquentiel ou parallèle</a:t>
+            </a:r>
+            <a:endParaRPr lang="en-US" sz="1500" dirty="0"/>
+          </a:p>
+        </p:txBody>
+      </p:sp>
+      <p:sp>
+        <p:nvSpPr>
+          <p:cNvPr id="15" name="Text 13"/>
+          <p:cNvSpPr/>
+          <p:nvPr/>
+        </p:nvSpPr>
+        <p:spPr>
+          <a:xfrm>
+            <a:off x="960120" y="4937760"/>
+            <a:ext cx="10241280" cy="685800"/>
+          </a:xfrm>
+          <a:prstGeom prst="rect">
+            <a:avLst/>
+          </a:prstGeom>
+          <a:noFill/>
+          <a:ln/>
+        </p:spPr>
+        <p:txBody>
+          <a:bodyPr wrap="square" lIns="0" tIns="0" rIns="0" bIns="0" rtlCol="0" anchor="ctr"/>
+          <a:lstStyle/>
+          <a:p>
+            <a:pPr marL="0" indent="0">
+              <a:lnSpc>
+                <a:spcPct val="115000"/>
+              </a:lnSpc>
+              <a:buNone/>
+            </a:pPr>
+            <a:r>
+              <a:rPr lang="en-US" sz="1250" dirty="0">
+                <a:solidFill>
+                  <a:srgbClr val="FFFFFF"/>
+                </a:solidFill>
+                <a:latin typeface="Calibri" pitchFamily="34" charset="0"/>
+                <a:ea typeface="Calibri" pitchFamily="34" charset="-122"/>
+                <a:cs typeface="Calibri" pitchFamily="34" charset="-120"/>
+              </a:rPr>
+              <a:t>Pipeline enchaîne : la sortie d'une étape est l'entrée de la suivante. ColumnTransformer découpe : chaque branche ses colonnes, sorties concaténées. Une liste de paires (nom, objet) des deux côtés — ces noms préfixent les hyperparamètres.</a:t>
+            </a:r>
+            <a:endParaRPr lang="en-US" sz="1250" dirty="0"/>
+          </a:p>
+        </p:txBody>
+      </p:sp>
+    </p:spTree>
+  </p:cSld>
+  <p:clrMapOvr>
+    <a:masterClrMapping/>
+  </p:clrMapOvr>
+</p:sld>
+</file>
+
+<file path=ppt/slides/slide16.xml><?xml version="1.0" encoding="utf-8"?>
+<p:sld xmlns:a="http://schemas.openxmlformats.org/drawingml/2006/main" xmlns:r="http://schemas.openxmlformats.org/officeDocument/2006/relationships" xmlns:p="http://schemas.openxmlformats.org/presentationml/2006/main">
   <p:cSld name="Slide 11">
     <p:spTree>
       <p:nvGrpSpPr>
@@ -5896,569 +6462,6 @@
               <a:t>Dédoublonner sur des clés métier explicites — et dire lesquelles. Ici : marque, modèle, masse, puissance, CO₂.</a:t>
             </a:r>
             <a:endParaRPr lang="en-US" sz="1300" dirty="0"/>
-          </a:p>
-        </p:txBody>
-      </p:sp>
-    </p:spTree>
-  </p:cSld>
-  <p:clrMapOvr>
-    <a:masterClrMapping/>
-  </p:clrMapOvr>
-</p:sld>
-</file>
-
-<file path=ppt/slides/slide16.xml><?xml version="1.0" encoding="utf-8"?>
-<p:sld xmlns:a="http://schemas.openxmlformats.org/drawingml/2006/main" xmlns:r="http://schemas.openxmlformats.org/officeDocument/2006/relationships" xmlns:p="http://schemas.openxmlformats.org/presentationml/2006/main">
-  <p:cSld name="Slide 12">
-    <p:spTree>
-      <p:nvGrpSpPr>
-        <p:cNvPr id="1" name=""/>
-        <p:cNvGrpSpPr/>
-        <p:nvPr/>
-      </p:nvGrpSpPr>
-      <p:grpSpPr>
-        <a:xfrm>
-          <a:off x="0" y="0"/>
-          <a:ext cx="0" cy="0"/>
-          <a:chOff x="0" y="0"/>
-          <a:chExt cx="0" cy="0"/>
-        </a:xfrm>
-      </p:grpSpPr>
-      <p:sp>
-        <p:nvSpPr>
-          <p:cNvPr id="2" name="Text 0"/>
-          <p:cNvSpPr/>
-          <p:nvPr/>
-        </p:nvSpPr>
-        <p:spPr>
-          <a:xfrm>
-            <a:off x="640080" y="384048"/>
-            <a:ext cx="10881360" cy="685800"/>
-          </a:xfrm>
-          <a:prstGeom prst="rect">
-            <a:avLst/>
-          </a:prstGeom>
-          <a:noFill/>
-          <a:ln/>
-        </p:spPr>
-        <p:txBody>
-          <a:bodyPr wrap="square" lIns="0" tIns="0" rIns="0" bIns="0" rtlCol="0" anchor="ctr"/>
-          <a:lstStyle/>
-          <a:p>
-            <a:pPr marL="0" indent="0">
-              <a:buNone/>
-            </a:pPr>
-            <a:r>
-              <a:rPr lang="en-US" sz="3400" b="1" dirty="0">
-                <a:solidFill>
-                  <a:srgbClr val="1F2A1F"/>
-                </a:solidFill>
-                <a:latin typeface="Cambria" pitchFamily="34" charset="0"/>
-                <a:ea typeface="Cambria" pitchFamily="34" charset="-122"/>
-                <a:cs typeface="Cambria" pitchFamily="34" charset="-120"/>
-              </a:rPr>
-              <a:t>Quand deux variables se recouvrent</a:t>
-            </a:r>
-            <a:endParaRPr lang="en-US" sz="3400" dirty="0"/>
-          </a:p>
-        </p:txBody>
-      </p:sp>
-      <p:sp>
-        <p:nvSpPr>
-          <p:cNvPr id="3" name="Text 1"/>
-          <p:cNvSpPr/>
-          <p:nvPr/>
-        </p:nvSpPr>
-        <p:spPr>
-          <a:xfrm>
-            <a:off x="640080" y="1078992"/>
-            <a:ext cx="10881360" cy="384048"/>
-          </a:xfrm>
-          <a:prstGeom prst="rect">
-            <a:avLst/>
-          </a:prstGeom>
-          <a:noFill/>
-          <a:ln/>
-        </p:spPr>
-        <p:txBody>
-          <a:bodyPr wrap="square" lIns="0" tIns="0" rIns="0" bIns="0" rtlCol="0" anchor="ctr"/>
-          <a:lstStyle/>
-          <a:p>
-            <a:pPr marL="0" indent="0">
-              <a:buNone/>
-            </a:pPr>
-            <a:r>
-              <a:rPr lang="en-US" sz="1400" i="1" dirty="0">
-                <a:solidFill>
-                  <a:srgbClr val="5E6E5E"/>
-                </a:solidFill>
-                <a:latin typeface="Calibri" pitchFamily="34" charset="0"/>
-                <a:ea typeface="Calibri" pitchFamily="34" charset="-122"/>
-                <a:cs typeface="Calibri" pitchFamily="34" charset="-120"/>
-              </a:rPr>
-              <a:t>La colinéarité ne fausse pas les prédictions — elle interdit de lire les coefficients</a:t>
-            </a:r>
-            <a:endParaRPr lang="en-US" sz="1400" dirty="0"/>
-          </a:p>
-        </p:txBody>
-      </p:sp>
-      <p:sp>
-        <p:nvSpPr>
-          <p:cNvPr id="4" name="Shape 2"/>
-          <p:cNvSpPr/>
-          <p:nvPr/>
-        </p:nvSpPr>
-        <p:spPr>
-          <a:xfrm>
-            <a:off x="640080" y="1737360"/>
-            <a:ext cx="3538728" cy="2377440"/>
-          </a:xfrm>
-          <a:prstGeom prst="roundRect">
-            <a:avLst>
-              <a:gd name="adj" fmla="val 3077"/>
-            </a:avLst>
-          </a:prstGeom>
-          <a:solidFill>
-            <a:srgbClr val="EDF2E6"/>
-          </a:solidFill>
-          <a:ln w="12700">
-            <a:solidFill>
-              <a:srgbClr val="EDF2E6"/>
-            </a:solidFill>
-            <a:prstDash val="solid"/>
-          </a:ln>
-        </p:spPr>
-        <p:txBody>
-          <a:bodyPr/>
-          <a:lstStyle/>
-          <a:p>
-            <a:endParaRPr lang="en-US"/>
-          </a:p>
-        </p:txBody>
-      </p:sp>
-      <p:sp>
-        <p:nvSpPr>
-          <p:cNvPr id="5" name="Text 3"/>
-          <p:cNvSpPr/>
-          <p:nvPr/>
-        </p:nvSpPr>
-        <p:spPr>
-          <a:xfrm>
-            <a:off x="914400" y="1920240"/>
-            <a:ext cx="3017520" cy="502920"/>
-          </a:xfrm>
-          <a:prstGeom prst="rect">
-            <a:avLst/>
-          </a:prstGeom>
-          <a:noFill/>
-          <a:ln/>
-        </p:spPr>
-        <p:txBody>
-          <a:bodyPr wrap="square" lIns="0" tIns="0" rIns="0" bIns="0" rtlCol="0" anchor="ctr"/>
-          <a:lstStyle/>
-          <a:p>
-            <a:pPr marL="0" indent="0">
-              <a:buNone/>
-            </a:pPr>
-            <a:r>
-              <a:rPr lang="en-US" sz="2400" b="1" dirty="0">
-                <a:solidFill>
-                  <a:srgbClr val="2C5F2D"/>
-                </a:solidFill>
-                <a:latin typeface="Cambria" pitchFamily="34" charset="0"/>
-                <a:ea typeface="Cambria" pitchFamily="34" charset="-122"/>
-                <a:cs typeface="Cambria" pitchFamily="34" charset="-120"/>
-              </a:rPr>
-              <a:t>Le symptôme</a:t>
-            </a:r>
-            <a:endParaRPr lang="en-US" sz="2400" dirty="0"/>
-          </a:p>
-        </p:txBody>
-      </p:sp>
-      <p:sp>
-        <p:nvSpPr>
-          <p:cNvPr id="6" name="Text 4"/>
-          <p:cNvSpPr/>
-          <p:nvPr/>
-        </p:nvSpPr>
-        <p:spPr>
-          <a:xfrm>
-            <a:off x="914400" y="2542032"/>
-            <a:ext cx="3017520" cy="1371600"/>
-          </a:xfrm>
-          <a:prstGeom prst="rect">
-            <a:avLst/>
-          </a:prstGeom>
-          <a:noFill/>
-          <a:ln/>
-        </p:spPr>
-        <p:txBody>
-          <a:bodyPr wrap="square" lIns="0" tIns="0" rIns="0" bIns="0" rtlCol="0" anchor="t"/>
-          <a:lstStyle/>
-          <a:p>
-            <a:pPr marL="0" indent="0">
-              <a:lnSpc>
-                <a:spcPct val="115000"/>
-              </a:lnSpc>
-              <a:buNone/>
-            </a:pPr>
-            <a:r>
-              <a:rPr lang="en-US" sz="1200" dirty="0">
-                <a:solidFill>
-                  <a:srgbClr val="1F2A1F"/>
-                </a:solidFill>
-                <a:latin typeface="Calibri" pitchFamily="34" charset="0"/>
-                <a:ea typeface="Calibri" pitchFamily="34" charset="-122"/>
-                <a:cs typeface="Calibri" pitchFamily="34" charset="-120"/>
-              </a:rPr>
-              <a:t>Un coefficient au signe physiquement absurde : à masse égale, plus le véhicule serait puissant, moins il émettrait.</a:t>
-            </a:r>
-            <a:endParaRPr lang="en-US" sz="1200" dirty="0"/>
-          </a:p>
-        </p:txBody>
-      </p:sp>
-      <p:sp>
-        <p:nvSpPr>
-          <p:cNvPr id="7" name="Shape 5"/>
-          <p:cNvSpPr/>
-          <p:nvPr/>
-        </p:nvSpPr>
-        <p:spPr>
-          <a:xfrm>
-            <a:off x="4361688" y="1737360"/>
-            <a:ext cx="3538728" cy="2377440"/>
-          </a:xfrm>
-          <a:prstGeom prst="roundRect">
-            <a:avLst>
-              <a:gd name="adj" fmla="val 3077"/>
-            </a:avLst>
-          </a:prstGeom>
-          <a:solidFill>
-            <a:srgbClr val="EDF2E6"/>
-          </a:solidFill>
-          <a:ln w="12700">
-            <a:solidFill>
-              <a:srgbClr val="EDF2E6"/>
-            </a:solidFill>
-            <a:prstDash val="solid"/>
-          </a:ln>
-        </p:spPr>
-        <p:txBody>
-          <a:bodyPr/>
-          <a:lstStyle/>
-          <a:p>
-            <a:endParaRPr lang="en-US"/>
-          </a:p>
-        </p:txBody>
-      </p:sp>
-      <p:sp>
-        <p:nvSpPr>
-          <p:cNvPr id="8" name="Text 6"/>
-          <p:cNvSpPr/>
-          <p:nvPr/>
-        </p:nvSpPr>
-        <p:spPr>
-          <a:xfrm>
-            <a:off x="4636008" y="1920240"/>
-            <a:ext cx="3017520" cy="502920"/>
-          </a:xfrm>
-          <a:prstGeom prst="rect">
-            <a:avLst/>
-          </a:prstGeom>
-          <a:noFill/>
-          <a:ln/>
-        </p:spPr>
-        <p:txBody>
-          <a:bodyPr wrap="square" lIns="0" tIns="0" rIns="0" bIns="0" rtlCol="0" anchor="ctr"/>
-          <a:lstStyle/>
-          <a:p>
-            <a:pPr marL="0" indent="0">
-              <a:buNone/>
-            </a:pPr>
-            <a:r>
-              <a:rPr lang="en-US" sz="2400" b="1" dirty="0">
-                <a:solidFill>
-                  <a:srgbClr val="2C5F2D"/>
-                </a:solidFill>
-                <a:latin typeface="Cambria" pitchFamily="34" charset="0"/>
-                <a:ea typeface="Cambria" pitchFamily="34" charset="-122"/>
-                <a:cs typeface="Cambria" pitchFamily="34" charset="-120"/>
-              </a:rPr>
-              <a:t>Le diagnostic</a:t>
-            </a:r>
-            <a:endParaRPr lang="en-US" sz="2400" dirty="0"/>
-          </a:p>
-        </p:txBody>
-      </p:sp>
-      <p:sp>
-        <p:nvSpPr>
-          <p:cNvPr id="9" name="Text 7"/>
-          <p:cNvSpPr/>
-          <p:nvPr/>
-        </p:nvSpPr>
-        <p:spPr>
-          <a:xfrm>
-            <a:off x="4636008" y="2542032"/>
-            <a:ext cx="3017520" cy="1371600"/>
-          </a:xfrm>
-          <a:prstGeom prst="rect">
-            <a:avLst/>
-          </a:prstGeom>
-          <a:noFill/>
-          <a:ln/>
-        </p:spPr>
-        <p:txBody>
-          <a:bodyPr wrap="square" lIns="0" tIns="0" rIns="0" bIns="0" rtlCol="0" anchor="t"/>
-          <a:lstStyle/>
-          <a:p>
-            <a:pPr marL="0" indent="0">
-              <a:lnSpc>
-                <a:spcPct val="115000"/>
-              </a:lnSpc>
-              <a:buNone/>
-            </a:pPr>
-            <a:r>
-              <a:rPr lang="en-US" sz="1200" dirty="0">
-                <a:solidFill>
-                  <a:srgbClr val="1F2A1F"/>
-                </a:solidFill>
-                <a:latin typeface="Calibri" pitchFamily="34" charset="0"/>
-                <a:ea typeface="Calibri" pitchFamily="34" charset="-122"/>
-                <a:cs typeface="Calibri" pitchFamily="34" charset="-120"/>
-              </a:rPr>
-              <a:t>Dans l'ordre : corrélation entre variables, R² de chacune seule, puis gain incrémental. Un gain nul = le coefficient ajuste du bruit.</a:t>
-            </a:r>
-            <a:endParaRPr lang="en-US" sz="1200" dirty="0"/>
-          </a:p>
-        </p:txBody>
-      </p:sp>
-      <p:sp>
-        <p:nvSpPr>
-          <p:cNvPr id="10" name="Shape 8"/>
-          <p:cNvSpPr/>
-          <p:nvPr/>
-        </p:nvSpPr>
-        <p:spPr>
-          <a:xfrm>
-            <a:off x="8083296" y="1737360"/>
-            <a:ext cx="3538728" cy="2377440"/>
-          </a:xfrm>
-          <a:prstGeom prst="roundRect">
-            <a:avLst>
-              <a:gd name="adj" fmla="val 3077"/>
-            </a:avLst>
-          </a:prstGeom>
-          <a:solidFill>
-            <a:srgbClr val="EDF2E6"/>
-          </a:solidFill>
-          <a:ln w="12700">
-            <a:solidFill>
-              <a:srgbClr val="EDF2E6"/>
-            </a:solidFill>
-            <a:prstDash val="solid"/>
-          </a:ln>
-        </p:spPr>
-        <p:txBody>
-          <a:bodyPr/>
-          <a:lstStyle/>
-          <a:p>
-            <a:endParaRPr lang="en-US"/>
-          </a:p>
-        </p:txBody>
-      </p:sp>
-      <p:sp>
-        <p:nvSpPr>
-          <p:cNvPr id="11" name="Text 9"/>
-          <p:cNvSpPr/>
-          <p:nvPr/>
-        </p:nvSpPr>
-        <p:spPr>
-          <a:xfrm>
-            <a:off x="8357616" y="1920240"/>
-            <a:ext cx="3017520" cy="502920"/>
-          </a:xfrm>
-          <a:prstGeom prst="rect">
-            <a:avLst/>
-          </a:prstGeom>
-          <a:noFill/>
-          <a:ln/>
-        </p:spPr>
-        <p:txBody>
-          <a:bodyPr wrap="square" lIns="0" tIns="0" rIns="0" bIns="0" rtlCol="0" anchor="ctr"/>
-          <a:lstStyle/>
-          <a:p>
-            <a:pPr marL="0" indent="0">
-              <a:buNone/>
-            </a:pPr>
-            <a:r>
-              <a:rPr lang="en-US" sz="2400" b="1" dirty="0">
-                <a:solidFill>
-                  <a:srgbClr val="C0562F"/>
-                </a:solidFill>
-                <a:latin typeface="Cambria" pitchFamily="34" charset="0"/>
-                <a:ea typeface="Cambria" pitchFamily="34" charset="-122"/>
-                <a:cs typeface="Cambria" pitchFamily="34" charset="-120"/>
-              </a:rPr>
-              <a:t>La conséquence</a:t>
-            </a:r>
-            <a:endParaRPr lang="en-US" sz="2400" dirty="0"/>
-          </a:p>
-        </p:txBody>
-      </p:sp>
-      <p:sp>
-        <p:nvSpPr>
-          <p:cNvPr id="12" name="Text 10"/>
-          <p:cNvSpPr/>
-          <p:nvPr/>
-        </p:nvSpPr>
-        <p:spPr>
-          <a:xfrm>
-            <a:off x="8357616" y="2542032"/>
-            <a:ext cx="3017520" cy="1371600"/>
-          </a:xfrm>
-          <a:prstGeom prst="rect">
-            <a:avLst/>
-          </a:prstGeom>
-          <a:noFill/>
-          <a:ln/>
-        </p:spPr>
-        <p:txBody>
-          <a:bodyPr wrap="square" lIns="0" tIns="0" rIns="0" bIns="0" rtlCol="0" anchor="t"/>
-          <a:lstStyle/>
-          <a:p>
-            <a:pPr marL="0" indent="0">
-              <a:lnSpc>
-                <a:spcPct val="115000"/>
-              </a:lnSpc>
-              <a:buNone/>
-            </a:pPr>
-            <a:r>
-              <a:rPr lang="en-US" sz="1200" dirty="0">
-                <a:solidFill>
-                  <a:srgbClr val="1F2A1F"/>
-                </a:solidFill>
-                <a:latin typeface="Calibri" pitchFamily="34" charset="0"/>
-                <a:ea typeface="Calibri" pitchFamily="34" charset="-122"/>
-                <a:cs typeface="Calibri" pitchFamily="34" charset="-120"/>
-              </a:rPr>
-              <a:t>Les coefficients ne s'interprètent plus un par un. Seule leur combinaison prédit — et le modèle reste utilisable.</a:t>
-            </a:r>
-            <a:endParaRPr lang="en-US" sz="1200" dirty="0"/>
-          </a:p>
-        </p:txBody>
-      </p:sp>
-      <p:sp>
-        <p:nvSpPr>
-          <p:cNvPr id="13" name="Shape 11"/>
-          <p:cNvSpPr/>
-          <p:nvPr/>
-        </p:nvSpPr>
-        <p:spPr>
-          <a:xfrm>
-            <a:off x="640080" y="4389120"/>
-            <a:ext cx="10881360" cy="1371600"/>
-          </a:xfrm>
-          <a:prstGeom prst="roundRect">
-            <a:avLst>
-              <a:gd name="adj" fmla="val 5333"/>
-            </a:avLst>
-          </a:prstGeom>
-          <a:solidFill>
-            <a:srgbClr val="1A3A1C"/>
-          </a:solidFill>
-          <a:ln w="12700">
-            <a:solidFill>
-              <a:srgbClr val="1A3A1C"/>
-            </a:solidFill>
-            <a:prstDash val="solid"/>
-          </a:ln>
-        </p:spPr>
-        <p:txBody>
-          <a:bodyPr/>
-          <a:lstStyle/>
-          <a:p>
-            <a:endParaRPr lang="en-US"/>
-          </a:p>
-        </p:txBody>
-      </p:sp>
-      <p:sp>
-        <p:nvSpPr>
-          <p:cNvPr id="14" name="Text 12"/>
-          <p:cNvSpPr/>
-          <p:nvPr/>
-        </p:nvSpPr>
-        <p:spPr>
-          <a:xfrm>
-            <a:off x="960120" y="4553712"/>
-            <a:ext cx="10241280" cy="320040"/>
-          </a:xfrm>
-          <a:prstGeom prst="rect">
-            <a:avLst/>
-          </a:prstGeom>
-          <a:noFill/>
-          <a:ln/>
-        </p:spPr>
-        <p:txBody>
-          <a:bodyPr wrap="square" lIns="0" tIns="0" rIns="0" bIns="0" rtlCol="0" anchor="ctr"/>
-          <a:lstStyle/>
-          <a:p>
-            <a:pPr marL="0" indent="0">
-              <a:buNone/>
-            </a:pPr>
-            <a:r>
-              <a:rPr lang="en-US" sz="1500" b="1" dirty="0">
-                <a:solidFill>
-                  <a:srgbClr val="97BC62"/>
-                </a:solidFill>
-                <a:latin typeface="Cambria" pitchFamily="34" charset="0"/>
-                <a:ea typeface="Cambria" pitchFamily="34" charset="-122"/>
-                <a:cs typeface="Cambria" pitchFamily="34" charset="-120"/>
-              </a:rPr>
-              <a:t>Les R² ne s'additionnent pas</a:t>
-            </a:r>
-            <a:endParaRPr lang="en-US" sz="1500" dirty="0"/>
-          </a:p>
-        </p:txBody>
-      </p:sp>
-      <p:sp>
-        <p:nvSpPr>
-          <p:cNvPr id="15" name="Text 13"/>
-          <p:cNvSpPr/>
-          <p:nvPr/>
-        </p:nvSpPr>
-        <p:spPr>
-          <a:xfrm>
-            <a:off x="960120" y="4937760"/>
-            <a:ext cx="10241280" cy="685800"/>
-          </a:xfrm>
-          <a:prstGeom prst="rect">
-            <a:avLst/>
-          </a:prstGeom>
-          <a:noFill/>
-          <a:ln/>
-        </p:spPr>
-        <p:txBody>
-          <a:bodyPr wrap="square" lIns="0" tIns="0" rIns="0" bIns="0" rtlCol="0" anchor="ctr"/>
-          <a:lstStyle/>
-          <a:p>
-            <a:pPr marL="0" indent="0">
-              <a:lnSpc>
-                <a:spcPct val="115000"/>
-              </a:lnSpc>
-              <a:buNone/>
-            </a:pPr>
-            <a:r>
-              <a:rPr lang="en-US" sz="1250" dirty="0">
-                <a:solidFill>
-                  <a:srgbClr val="FFFFFF"/>
-                </a:solidFill>
-                <a:latin typeface="Calibri" pitchFamily="34" charset="0"/>
-                <a:ea typeface="Calibri" pitchFamily="34" charset="-122"/>
-                <a:cs typeface="Calibri" pitchFamily="34" charset="-120"/>
-              </a:rPr>
-              <a:t>0,6158 pour la masse seule, 0,7618 pour la puissance seule, 0,7886 pour les deux ensemble. L'information commune est partagée, pas additive : c'est le gain incrémental qui compte, jamais le R² d'une variable prise seule.</a:t>
-            </a:r>
-            <a:endParaRPr lang="en-US" sz="1250" dirty="0"/>
           </a:p>
         </p:txBody>
       </p:sp>
@@ -6520,7 +6523,7 @@
                 <a:ea typeface="Cambria" pitchFamily="34" charset="-122"/>
                 <a:cs typeface="Cambria" pitchFamily="34" charset="-120"/>
               </a:rPr>
-              <a:t>Le R² d'entraînement ne peut que monter</a:t>
+              <a:t>Quand deux variables se recouvrent</a:t>
             </a:r>
             <a:endParaRPr lang="en-US" sz="3400" dirty="0"/>
           </a:p>
@@ -6559,7 +6562,7 @@
                 <a:ea typeface="Calibri" pitchFamily="34" charset="-122"/>
                 <a:cs typeface="Calibri" pitchFamily="34" charset="-120"/>
               </a:rPr>
-              <a:t>Dès que le nombre de paramètres varie, il cesse d'être un critère de comparaison</a:t>
+              <a:t>La colinéarité ne fausse pas les prédictions — elle interdit de lire les coefficients</a:t>
             </a:r>
             <a:endParaRPr lang="en-US" sz="1400" dirty="0"/>
           </a:p>
@@ -6632,7 +6635,7 @@
                 <a:ea typeface="Cambria" pitchFamily="34" charset="-122"/>
                 <a:cs typeface="Cambria" pitchFamily="34" charset="-120"/>
               </a:rPr>
-              <a:t>Le mécanisme</a:t>
+              <a:t>Le symptôme</a:t>
             </a:r>
             <a:endParaRPr lang="en-US" sz="2400" dirty="0"/>
           </a:p>
@@ -6674,7 +6677,7 @@
                 <a:ea typeface="Calibri" pitchFamily="34" charset="-122"/>
                 <a:cs typeface="Calibri" pitchFamily="34" charset="-120"/>
               </a:rPr>
-              <a:t>Une variable de plus donne un degré de liberté de plus. Même du bruit pur fait monter le R² d'entraînement.</a:t>
+              <a:t>Un coefficient au signe physiquement absurde : à masse égale, plus le véhicule serait puissant, moins il émettrait.</a:t>
             </a:r>
             <a:endParaRPr lang="en-US" sz="1200" dirty="0"/>
           </a:p>
@@ -6747,7 +6750,7 @@
                 <a:ea typeface="Cambria" pitchFamily="34" charset="-122"/>
                 <a:cs typeface="Cambria" pitchFamily="34" charset="-120"/>
               </a:rPr>
-              <a:t>Ce que ça masque</a:t>
+              <a:t>Le diagnostic</a:t>
             </a:r>
             <a:endParaRPr lang="en-US" sz="2400" dirty="0"/>
           </a:p>
@@ -6789,7 +6792,7 @@
                 <a:ea typeface="Calibri" pitchFamily="34" charset="-122"/>
                 <a:cs typeface="Calibri" pitchFamily="34" charset="-120"/>
               </a:rPr>
-              <a:t>Rien ne distingue alors l'information réelle de l'ajustement au bruit. Le ratio inutile et la variable décisive montent tous les deux.</a:t>
+              <a:t>Dans l'ordre : corrélation entre variables, R² de chacune seule, puis gain incrémental. Un gain nul = le coefficient ajuste du bruit.</a:t>
             </a:r>
             <a:endParaRPr lang="en-US" sz="1200" dirty="0"/>
           </a:p>
@@ -6862,7 +6865,7 @@
                 <a:ea typeface="Cambria" pitchFamily="34" charset="-122"/>
                 <a:cs typeface="Cambria" pitchFamily="34" charset="-120"/>
               </a:rPr>
-              <a:t>Ce qui le remplace</a:t>
+              <a:t>La conséquence</a:t>
             </a:r>
             <a:endParaRPr lang="en-US" sz="2400" dirty="0"/>
           </a:p>
@@ -6904,7 +6907,7 @@
                 <a:ea typeface="Calibri" pitchFamily="34" charset="-122"/>
                 <a:cs typeface="Calibri" pitchFamily="34" charset="-120"/>
               </a:rPr>
-              <a:t>Évaluer sur des données non vues : train_test_split puis R² de test. Ou un R² ajusté, qui pénalise le nombre de paramètres.</a:t>
+              <a:t>Les coefficients ne s'interprètent plus un par un. Seule leur combinaison prédit — et le modèle reste utilisable.</a:t>
             </a:r>
             <a:endParaRPr lang="en-US" sz="1200" dirty="0"/>
           </a:p>
@@ -6977,7 +6980,7 @@
                 <a:ea typeface="Cambria" pitchFamily="34" charset="-122"/>
                 <a:cs typeface="Cambria" pitchFamily="34" charset="-120"/>
               </a:rPr>
-              <a:t>Un R² de test supérieur au R² d'entraînement n'est pas une bonne nouvelle</a:t>
+              <a:t>Les R² ne s'additionnent pas</a:t>
             </a:r>
             <a:endParaRPr lang="en-US" sz="1500" dirty="0"/>
           </a:p>
@@ -7019,7 +7022,7 @@
                 <a:ea typeface="Calibri" pitchFamily="34" charset="-122"/>
                 <a:cs typeface="Calibri" pitchFamily="34" charset="-120"/>
               </a:rPr>
-              <a:t>Il signale un tirage favorable, pas un bon modèle. Le classement de plusieurs modèles reste valide s'ils partagent le même découpage ; les valeurs absolues, non. La validation croisée tranche.</a:t>
+              <a:t>0,6158 pour la masse seule, 0,7618 pour la puissance seule, 0,7886 pour les deux ensemble. L'information commune est partagée, pas additive : c'est le gain incrémental qui compte, jamais le R² d'une variable prise seule.</a:t>
             </a:r>
             <a:endParaRPr lang="en-US" sz="1250" dirty="0"/>
           </a:p>
@@ -7034,6 +7037,569 @@
 </file>
 
 <file path=ppt/slides/slide18.xml><?xml version="1.0" encoding="utf-8"?>
+<p:sld xmlns:a="http://schemas.openxmlformats.org/drawingml/2006/main" xmlns:r="http://schemas.openxmlformats.org/officeDocument/2006/relationships" xmlns:p="http://schemas.openxmlformats.org/presentationml/2006/main">
+  <p:cSld name="Slide 12">
+    <p:spTree>
+      <p:nvGrpSpPr>
+        <p:cNvPr id="1" name=""/>
+        <p:cNvGrpSpPr/>
+        <p:nvPr/>
+      </p:nvGrpSpPr>
+      <p:grpSpPr>
+        <a:xfrm>
+          <a:off x="0" y="0"/>
+          <a:ext cx="0" cy="0"/>
+          <a:chOff x="0" y="0"/>
+          <a:chExt cx="0" cy="0"/>
+        </a:xfrm>
+      </p:grpSpPr>
+      <p:sp>
+        <p:nvSpPr>
+          <p:cNvPr id="2" name="Text 0"/>
+          <p:cNvSpPr/>
+          <p:nvPr/>
+        </p:nvSpPr>
+        <p:spPr>
+          <a:xfrm>
+            <a:off x="640080" y="384048"/>
+            <a:ext cx="10881360" cy="685800"/>
+          </a:xfrm>
+          <a:prstGeom prst="rect">
+            <a:avLst/>
+          </a:prstGeom>
+          <a:noFill/>
+          <a:ln/>
+        </p:spPr>
+        <p:txBody>
+          <a:bodyPr wrap="square" lIns="0" tIns="0" rIns="0" bIns="0" rtlCol="0" anchor="ctr"/>
+          <a:lstStyle/>
+          <a:p>
+            <a:pPr marL="0" indent="0">
+              <a:buNone/>
+            </a:pPr>
+            <a:r>
+              <a:rPr lang="en-US" sz="3400" b="1" dirty="0">
+                <a:solidFill>
+                  <a:srgbClr val="1F2A1F"/>
+                </a:solidFill>
+                <a:latin typeface="Cambria" pitchFamily="34" charset="0"/>
+                <a:ea typeface="Cambria" pitchFamily="34" charset="-122"/>
+                <a:cs typeface="Cambria" pitchFamily="34" charset="-120"/>
+              </a:rPr>
+              <a:t>Le R² d'entraînement ne peut que monter</a:t>
+            </a:r>
+            <a:endParaRPr lang="en-US" sz="3400" dirty="0"/>
+          </a:p>
+        </p:txBody>
+      </p:sp>
+      <p:sp>
+        <p:nvSpPr>
+          <p:cNvPr id="3" name="Text 1"/>
+          <p:cNvSpPr/>
+          <p:nvPr/>
+        </p:nvSpPr>
+        <p:spPr>
+          <a:xfrm>
+            <a:off x="640080" y="1078992"/>
+            <a:ext cx="10881360" cy="384048"/>
+          </a:xfrm>
+          <a:prstGeom prst="rect">
+            <a:avLst/>
+          </a:prstGeom>
+          <a:noFill/>
+          <a:ln/>
+        </p:spPr>
+        <p:txBody>
+          <a:bodyPr wrap="square" lIns="0" tIns="0" rIns="0" bIns="0" rtlCol="0" anchor="ctr"/>
+          <a:lstStyle/>
+          <a:p>
+            <a:pPr marL="0" indent="0">
+              <a:buNone/>
+            </a:pPr>
+            <a:r>
+              <a:rPr lang="en-US" sz="1400" i="1" dirty="0">
+                <a:solidFill>
+                  <a:srgbClr val="5E6E5E"/>
+                </a:solidFill>
+                <a:latin typeface="Calibri" pitchFamily="34" charset="0"/>
+                <a:ea typeface="Calibri" pitchFamily="34" charset="-122"/>
+                <a:cs typeface="Calibri" pitchFamily="34" charset="-120"/>
+              </a:rPr>
+              <a:t>Dès que le nombre de paramètres varie, il cesse d'être un critère de comparaison</a:t>
+            </a:r>
+            <a:endParaRPr lang="en-US" sz="1400" dirty="0"/>
+          </a:p>
+        </p:txBody>
+      </p:sp>
+      <p:sp>
+        <p:nvSpPr>
+          <p:cNvPr id="4" name="Shape 2"/>
+          <p:cNvSpPr/>
+          <p:nvPr/>
+        </p:nvSpPr>
+        <p:spPr>
+          <a:xfrm>
+            <a:off x="640080" y="1737360"/>
+            <a:ext cx="3538728" cy="2377440"/>
+          </a:xfrm>
+          <a:prstGeom prst="roundRect">
+            <a:avLst>
+              <a:gd name="adj" fmla="val 3077"/>
+            </a:avLst>
+          </a:prstGeom>
+          <a:solidFill>
+            <a:srgbClr val="EDF2E6"/>
+          </a:solidFill>
+          <a:ln w="12700">
+            <a:solidFill>
+              <a:srgbClr val="EDF2E6"/>
+            </a:solidFill>
+            <a:prstDash val="solid"/>
+          </a:ln>
+        </p:spPr>
+        <p:txBody>
+          <a:bodyPr/>
+          <a:lstStyle/>
+          <a:p>
+            <a:endParaRPr lang="en-US"/>
+          </a:p>
+        </p:txBody>
+      </p:sp>
+      <p:sp>
+        <p:nvSpPr>
+          <p:cNvPr id="5" name="Text 3"/>
+          <p:cNvSpPr/>
+          <p:nvPr/>
+        </p:nvSpPr>
+        <p:spPr>
+          <a:xfrm>
+            <a:off x="914400" y="1920240"/>
+            <a:ext cx="3017520" cy="502920"/>
+          </a:xfrm>
+          <a:prstGeom prst="rect">
+            <a:avLst/>
+          </a:prstGeom>
+          <a:noFill/>
+          <a:ln/>
+        </p:spPr>
+        <p:txBody>
+          <a:bodyPr wrap="square" lIns="0" tIns="0" rIns="0" bIns="0" rtlCol="0" anchor="ctr"/>
+          <a:lstStyle/>
+          <a:p>
+            <a:pPr marL="0" indent="0">
+              <a:buNone/>
+            </a:pPr>
+            <a:r>
+              <a:rPr lang="en-US" sz="2400" b="1" dirty="0">
+                <a:solidFill>
+                  <a:srgbClr val="2C5F2D"/>
+                </a:solidFill>
+                <a:latin typeface="Cambria" pitchFamily="34" charset="0"/>
+                <a:ea typeface="Cambria" pitchFamily="34" charset="-122"/>
+                <a:cs typeface="Cambria" pitchFamily="34" charset="-120"/>
+              </a:rPr>
+              <a:t>Le mécanisme</a:t>
+            </a:r>
+            <a:endParaRPr lang="en-US" sz="2400" dirty="0"/>
+          </a:p>
+        </p:txBody>
+      </p:sp>
+      <p:sp>
+        <p:nvSpPr>
+          <p:cNvPr id="6" name="Text 4"/>
+          <p:cNvSpPr/>
+          <p:nvPr/>
+        </p:nvSpPr>
+        <p:spPr>
+          <a:xfrm>
+            <a:off x="914400" y="2542032"/>
+            <a:ext cx="3017520" cy="1371600"/>
+          </a:xfrm>
+          <a:prstGeom prst="rect">
+            <a:avLst/>
+          </a:prstGeom>
+          <a:noFill/>
+          <a:ln/>
+        </p:spPr>
+        <p:txBody>
+          <a:bodyPr wrap="square" lIns="0" tIns="0" rIns="0" bIns="0" rtlCol="0" anchor="t"/>
+          <a:lstStyle/>
+          <a:p>
+            <a:pPr marL="0" indent="0">
+              <a:lnSpc>
+                <a:spcPct val="115000"/>
+              </a:lnSpc>
+              <a:buNone/>
+            </a:pPr>
+            <a:r>
+              <a:rPr lang="en-US" sz="1200" dirty="0">
+                <a:solidFill>
+                  <a:srgbClr val="1F2A1F"/>
+                </a:solidFill>
+                <a:latin typeface="Calibri" pitchFamily="34" charset="0"/>
+                <a:ea typeface="Calibri" pitchFamily="34" charset="-122"/>
+                <a:cs typeface="Calibri" pitchFamily="34" charset="-120"/>
+              </a:rPr>
+              <a:t>Une variable de plus donne un degré de liberté de plus. Même du bruit pur fait monter le R² d'entraînement.</a:t>
+            </a:r>
+            <a:endParaRPr lang="en-US" sz="1200" dirty="0"/>
+          </a:p>
+        </p:txBody>
+      </p:sp>
+      <p:sp>
+        <p:nvSpPr>
+          <p:cNvPr id="7" name="Shape 5"/>
+          <p:cNvSpPr/>
+          <p:nvPr/>
+        </p:nvSpPr>
+        <p:spPr>
+          <a:xfrm>
+            <a:off x="4361688" y="1737360"/>
+            <a:ext cx="3538728" cy="2377440"/>
+          </a:xfrm>
+          <a:prstGeom prst="roundRect">
+            <a:avLst>
+              <a:gd name="adj" fmla="val 3077"/>
+            </a:avLst>
+          </a:prstGeom>
+          <a:solidFill>
+            <a:srgbClr val="EDF2E6"/>
+          </a:solidFill>
+          <a:ln w="12700">
+            <a:solidFill>
+              <a:srgbClr val="EDF2E6"/>
+            </a:solidFill>
+            <a:prstDash val="solid"/>
+          </a:ln>
+        </p:spPr>
+        <p:txBody>
+          <a:bodyPr/>
+          <a:lstStyle/>
+          <a:p>
+            <a:endParaRPr lang="en-US"/>
+          </a:p>
+        </p:txBody>
+      </p:sp>
+      <p:sp>
+        <p:nvSpPr>
+          <p:cNvPr id="8" name="Text 6"/>
+          <p:cNvSpPr/>
+          <p:nvPr/>
+        </p:nvSpPr>
+        <p:spPr>
+          <a:xfrm>
+            <a:off x="4636008" y="1920240"/>
+            <a:ext cx="3017520" cy="502920"/>
+          </a:xfrm>
+          <a:prstGeom prst="rect">
+            <a:avLst/>
+          </a:prstGeom>
+          <a:noFill/>
+          <a:ln/>
+        </p:spPr>
+        <p:txBody>
+          <a:bodyPr wrap="square" lIns="0" tIns="0" rIns="0" bIns="0" rtlCol="0" anchor="ctr"/>
+          <a:lstStyle/>
+          <a:p>
+            <a:pPr marL="0" indent="0">
+              <a:buNone/>
+            </a:pPr>
+            <a:r>
+              <a:rPr lang="en-US" sz="2400" b="1" dirty="0">
+                <a:solidFill>
+                  <a:srgbClr val="2C5F2D"/>
+                </a:solidFill>
+                <a:latin typeface="Cambria" pitchFamily="34" charset="0"/>
+                <a:ea typeface="Cambria" pitchFamily="34" charset="-122"/>
+                <a:cs typeface="Cambria" pitchFamily="34" charset="-120"/>
+              </a:rPr>
+              <a:t>Ce que ça masque</a:t>
+            </a:r>
+            <a:endParaRPr lang="en-US" sz="2400" dirty="0"/>
+          </a:p>
+        </p:txBody>
+      </p:sp>
+      <p:sp>
+        <p:nvSpPr>
+          <p:cNvPr id="9" name="Text 7"/>
+          <p:cNvSpPr/>
+          <p:nvPr/>
+        </p:nvSpPr>
+        <p:spPr>
+          <a:xfrm>
+            <a:off x="4636008" y="2542032"/>
+            <a:ext cx="3017520" cy="1371600"/>
+          </a:xfrm>
+          <a:prstGeom prst="rect">
+            <a:avLst/>
+          </a:prstGeom>
+          <a:noFill/>
+          <a:ln/>
+        </p:spPr>
+        <p:txBody>
+          <a:bodyPr wrap="square" lIns="0" tIns="0" rIns="0" bIns="0" rtlCol="0" anchor="t"/>
+          <a:lstStyle/>
+          <a:p>
+            <a:pPr marL="0" indent="0">
+              <a:lnSpc>
+                <a:spcPct val="115000"/>
+              </a:lnSpc>
+              <a:buNone/>
+            </a:pPr>
+            <a:r>
+              <a:rPr lang="en-US" sz="1200" dirty="0">
+                <a:solidFill>
+                  <a:srgbClr val="1F2A1F"/>
+                </a:solidFill>
+                <a:latin typeface="Calibri" pitchFamily="34" charset="0"/>
+                <a:ea typeface="Calibri" pitchFamily="34" charset="-122"/>
+                <a:cs typeface="Calibri" pitchFamily="34" charset="-120"/>
+              </a:rPr>
+              <a:t>Rien ne distingue alors l'information réelle de l'ajustement au bruit. Le ratio inutile et la variable décisive montent tous les deux.</a:t>
+            </a:r>
+            <a:endParaRPr lang="en-US" sz="1200" dirty="0"/>
+          </a:p>
+        </p:txBody>
+      </p:sp>
+      <p:sp>
+        <p:nvSpPr>
+          <p:cNvPr id="10" name="Shape 8"/>
+          <p:cNvSpPr/>
+          <p:nvPr/>
+        </p:nvSpPr>
+        <p:spPr>
+          <a:xfrm>
+            <a:off x="8083296" y="1737360"/>
+            <a:ext cx="3538728" cy="2377440"/>
+          </a:xfrm>
+          <a:prstGeom prst="roundRect">
+            <a:avLst>
+              <a:gd name="adj" fmla="val 3077"/>
+            </a:avLst>
+          </a:prstGeom>
+          <a:solidFill>
+            <a:srgbClr val="EDF2E6"/>
+          </a:solidFill>
+          <a:ln w="12700">
+            <a:solidFill>
+              <a:srgbClr val="EDF2E6"/>
+            </a:solidFill>
+            <a:prstDash val="solid"/>
+          </a:ln>
+        </p:spPr>
+        <p:txBody>
+          <a:bodyPr/>
+          <a:lstStyle/>
+          <a:p>
+            <a:endParaRPr lang="en-US"/>
+          </a:p>
+        </p:txBody>
+      </p:sp>
+      <p:sp>
+        <p:nvSpPr>
+          <p:cNvPr id="11" name="Text 9"/>
+          <p:cNvSpPr/>
+          <p:nvPr/>
+        </p:nvSpPr>
+        <p:spPr>
+          <a:xfrm>
+            <a:off x="8357616" y="1920240"/>
+            <a:ext cx="3017520" cy="502920"/>
+          </a:xfrm>
+          <a:prstGeom prst="rect">
+            <a:avLst/>
+          </a:prstGeom>
+          <a:noFill/>
+          <a:ln/>
+        </p:spPr>
+        <p:txBody>
+          <a:bodyPr wrap="square" lIns="0" tIns="0" rIns="0" bIns="0" rtlCol="0" anchor="ctr"/>
+          <a:lstStyle/>
+          <a:p>
+            <a:pPr marL="0" indent="0">
+              <a:buNone/>
+            </a:pPr>
+            <a:r>
+              <a:rPr lang="en-US" sz="2400" b="1" dirty="0">
+                <a:solidFill>
+                  <a:srgbClr val="C0562F"/>
+                </a:solidFill>
+                <a:latin typeface="Cambria" pitchFamily="34" charset="0"/>
+                <a:ea typeface="Cambria" pitchFamily="34" charset="-122"/>
+                <a:cs typeface="Cambria" pitchFamily="34" charset="-120"/>
+              </a:rPr>
+              <a:t>Ce qui le remplace</a:t>
+            </a:r>
+            <a:endParaRPr lang="en-US" sz="2400" dirty="0"/>
+          </a:p>
+        </p:txBody>
+      </p:sp>
+      <p:sp>
+        <p:nvSpPr>
+          <p:cNvPr id="12" name="Text 10"/>
+          <p:cNvSpPr/>
+          <p:nvPr/>
+        </p:nvSpPr>
+        <p:spPr>
+          <a:xfrm>
+            <a:off x="8357616" y="2542032"/>
+            <a:ext cx="3017520" cy="1371600"/>
+          </a:xfrm>
+          <a:prstGeom prst="rect">
+            <a:avLst/>
+          </a:prstGeom>
+          <a:noFill/>
+          <a:ln/>
+        </p:spPr>
+        <p:txBody>
+          <a:bodyPr wrap="square" lIns="0" tIns="0" rIns="0" bIns="0" rtlCol="0" anchor="t"/>
+          <a:lstStyle/>
+          <a:p>
+            <a:pPr marL="0" indent="0">
+              <a:lnSpc>
+                <a:spcPct val="115000"/>
+              </a:lnSpc>
+              <a:buNone/>
+            </a:pPr>
+            <a:r>
+              <a:rPr lang="en-US" sz="1200" dirty="0">
+                <a:solidFill>
+                  <a:srgbClr val="1F2A1F"/>
+                </a:solidFill>
+                <a:latin typeface="Calibri" pitchFamily="34" charset="0"/>
+                <a:ea typeface="Calibri" pitchFamily="34" charset="-122"/>
+                <a:cs typeface="Calibri" pitchFamily="34" charset="-120"/>
+              </a:rPr>
+              <a:t>Évaluer sur des données non vues : train_test_split puis R² de test. Ou un R² ajusté, qui pénalise le nombre de paramètres.</a:t>
+            </a:r>
+            <a:endParaRPr lang="en-US" sz="1200" dirty="0"/>
+          </a:p>
+        </p:txBody>
+      </p:sp>
+      <p:sp>
+        <p:nvSpPr>
+          <p:cNvPr id="13" name="Shape 11"/>
+          <p:cNvSpPr/>
+          <p:nvPr/>
+        </p:nvSpPr>
+        <p:spPr>
+          <a:xfrm>
+            <a:off x="640080" y="4389120"/>
+            <a:ext cx="10881360" cy="1371600"/>
+          </a:xfrm>
+          <a:prstGeom prst="roundRect">
+            <a:avLst>
+              <a:gd name="adj" fmla="val 5333"/>
+            </a:avLst>
+          </a:prstGeom>
+          <a:solidFill>
+            <a:srgbClr val="1A3A1C"/>
+          </a:solidFill>
+          <a:ln w="12700">
+            <a:solidFill>
+              <a:srgbClr val="1A3A1C"/>
+            </a:solidFill>
+            <a:prstDash val="solid"/>
+          </a:ln>
+        </p:spPr>
+        <p:txBody>
+          <a:bodyPr/>
+          <a:lstStyle/>
+          <a:p>
+            <a:endParaRPr lang="en-US"/>
+          </a:p>
+        </p:txBody>
+      </p:sp>
+      <p:sp>
+        <p:nvSpPr>
+          <p:cNvPr id="14" name="Text 12"/>
+          <p:cNvSpPr/>
+          <p:nvPr/>
+        </p:nvSpPr>
+        <p:spPr>
+          <a:xfrm>
+            <a:off x="960120" y="4553712"/>
+            <a:ext cx="10241280" cy="320040"/>
+          </a:xfrm>
+          <a:prstGeom prst="rect">
+            <a:avLst/>
+          </a:prstGeom>
+          <a:noFill/>
+          <a:ln/>
+        </p:spPr>
+        <p:txBody>
+          <a:bodyPr wrap="square" lIns="0" tIns="0" rIns="0" bIns="0" rtlCol="0" anchor="ctr"/>
+          <a:lstStyle/>
+          <a:p>
+            <a:pPr marL="0" indent="0">
+              <a:buNone/>
+            </a:pPr>
+            <a:r>
+              <a:rPr lang="en-US" sz="1500" b="1" dirty="0">
+                <a:solidFill>
+                  <a:srgbClr val="97BC62"/>
+                </a:solidFill>
+                <a:latin typeface="Cambria" pitchFamily="34" charset="0"/>
+                <a:ea typeface="Cambria" pitchFamily="34" charset="-122"/>
+                <a:cs typeface="Cambria" pitchFamily="34" charset="-120"/>
+              </a:rPr>
+              <a:t>Un R² de test supérieur au R² d'entraînement n'est pas une bonne nouvelle</a:t>
+            </a:r>
+            <a:endParaRPr lang="en-US" sz="1500" dirty="0"/>
+          </a:p>
+        </p:txBody>
+      </p:sp>
+      <p:sp>
+        <p:nvSpPr>
+          <p:cNvPr id="15" name="Text 13"/>
+          <p:cNvSpPr/>
+          <p:nvPr/>
+        </p:nvSpPr>
+        <p:spPr>
+          <a:xfrm>
+            <a:off x="960120" y="4937760"/>
+            <a:ext cx="10241280" cy="685800"/>
+          </a:xfrm>
+          <a:prstGeom prst="rect">
+            <a:avLst/>
+          </a:prstGeom>
+          <a:noFill/>
+          <a:ln/>
+        </p:spPr>
+        <p:txBody>
+          <a:bodyPr wrap="square" lIns="0" tIns="0" rIns="0" bIns="0" rtlCol="0" anchor="ctr"/>
+          <a:lstStyle/>
+          <a:p>
+            <a:pPr marL="0" indent="0">
+              <a:lnSpc>
+                <a:spcPct val="115000"/>
+              </a:lnSpc>
+              <a:buNone/>
+            </a:pPr>
+            <a:r>
+              <a:rPr lang="en-US" sz="1250" dirty="0">
+                <a:solidFill>
+                  <a:srgbClr val="FFFFFF"/>
+                </a:solidFill>
+                <a:latin typeface="Calibri" pitchFamily="34" charset="0"/>
+                <a:ea typeface="Calibri" pitchFamily="34" charset="-122"/>
+                <a:cs typeface="Calibri" pitchFamily="34" charset="-120"/>
+              </a:rPr>
+              <a:t>Il signale un tirage favorable, pas un bon modèle. Le classement de plusieurs modèles reste valide s'ils partagent le même découpage ; les valeurs absolues, non. La validation croisée tranche.</a:t>
+            </a:r>
+            <a:endParaRPr lang="en-US" sz="1250" dirty="0"/>
+          </a:p>
+        </p:txBody>
+      </p:sp>
+    </p:spTree>
+  </p:cSld>
+  <p:clrMapOvr>
+    <a:masterClrMapping/>
+  </p:clrMapOvr>
+</p:sld>
+</file>
+
+<file path=ppt/slides/slide19.xml><?xml version="1.0" encoding="utf-8"?>
 <p:sld xmlns:a="http://schemas.openxmlformats.org/drawingml/2006/main" xmlns:r="http://schemas.openxmlformats.org/officeDocument/2006/relationships" xmlns:p="http://schemas.openxmlformats.org/presentationml/2006/main">
   <p:cSld name="Slide 11">
     <p:spTree>
@@ -7655,853 +8221,6 @@
                 <a:cs typeface="Calibri" pitchFamily="34" charset="-120"/>
               </a:rPr>
               <a:t>Même réflexe en classification : la classe majoritaire. Un modèle qui ne bat pas la référence naïve n'a rien appris.</a:t>
-            </a:r>
-            <a:endParaRPr lang="en-US" sz="1300" dirty="0"/>
-          </a:p>
-        </p:txBody>
-      </p:sp>
-    </p:spTree>
-  </p:cSld>
-  <p:clrMapOvr>
-    <a:masterClrMapping/>
-  </p:clrMapOvr>
-</p:sld>
-</file>
-
-<file path=ppt/slides/slide19.xml><?xml version="1.0" encoding="utf-8"?>
-<p:sld xmlns:a="http://schemas.openxmlformats.org/drawingml/2006/main" xmlns:r="http://schemas.openxmlformats.org/officeDocument/2006/relationships" xmlns:p="http://schemas.openxmlformats.org/presentationml/2006/main">
-  <p:cSld name="Slide 2">
-    <p:spTree>
-      <p:nvGrpSpPr>
-        <p:cNvPr id="1" name=""/>
-        <p:cNvGrpSpPr/>
-        <p:nvPr/>
-      </p:nvGrpSpPr>
-      <p:grpSpPr>
-        <a:xfrm>
-          <a:off x="0" y="0"/>
-          <a:ext cx="0" cy="0"/>
-          <a:chOff x="0" y="0"/>
-          <a:chExt cx="0" cy="0"/>
-        </a:xfrm>
-      </p:grpSpPr>
-      <p:sp>
-        <p:nvSpPr>
-          <p:cNvPr id="2" name="Text 0"/>
-          <p:cNvSpPr/>
-          <p:nvPr/>
-        </p:nvSpPr>
-        <p:spPr>
-          <a:xfrm>
-            <a:off x="640080" y="384048"/>
-            <a:ext cx="10881360" cy="685800"/>
-          </a:xfrm>
-          <a:prstGeom prst="rect">
-            <a:avLst/>
-          </a:prstGeom>
-          <a:noFill/>
-          <a:ln/>
-        </p:spPr>
-        <p:txBody>
-          <a:bodyPr wrap="square" lIns="0" tIns="0" rIns="0" bIns="0" rtlCol="0" anchor="ctr"/>
-          <a:lstStyle/>
-          <a:p>
-            <a:pPr marL="0" indent="0">
-              <a:buNone/>
-            </a:pPr>
-            <a:r>
-              <a:rPr lang="en-US" sz="3400" b="1" dirty="0">
-                <a:solidFill>
-                  <a:srgbClr val="1F2A1F"/>
-                </a:solidFill>
-                <a:latin typeface="Cambria" pitchFamily="34" charset="0"/>
-                <a:ea typeface="Cambria" pitchFamily="34" charset="-122"/>
-                <a:cs typeface="Cambria" pitchFamily="34" charset="-120"/>
-              </a:rPr>
-              <a:t>Les résidus, deuxième lecture</a:t>
-            </a:r>
-            <a:endParaRPr lang="en-US" sz="3400" dirty="0"/>
-          </a:p>
-        </p:txBody>
-      </p:sp>
-      <p:sp>
-        <p:nvSpPr>
-          <p:cNvPr id="3" name="Text 1"/>
-          <p:cNvSpPr/>
-          <p:nvPr/>
-        </p:nvSpPr>
-        <p:spPr>
-          <a:xfrm>
-            <a:off x="640080" y="1078992"/>
-            <a:ext cx="10881360" cy="384048"/>
-          </a:xfrm>
-          <a:prstGeom prst="rect">
-            <a:avLst/>
-          </a:prstGeom>
-          <a:noFill/>
-          <a:ln/>
-        </p:spPr>
-        <p:txBody>
-          <a:bodyPr wrap="square" lIns="0" tIns="0" rIns="0" bIns="0" rtlCol="0" anchor="ctr"/>
-          <a:lstStyle/>
-          <a:p>
-            <a:pPr marL="0" indent="0">
-              <a:buNone/>
-            </a:pPr>
-            <a:r>
-              <a:rPr lang="en-US" sz="1400" i="1" dirty="0">
-                <a:solidFill>
-                  <a:srgbClr val="5E6E5E"/>
-                </a:solidFill>
-                <a:latin typeface="Calibri" pitchFamily="34" charset="0"/>
-                <a:ea typeface="Calibri" pitchFamily="34" charset="-122"/>
-                <a:cs typeface="Calibri" pitchFamily="34" charset="-120"/>
-              </a:rPr>
-              <a:t>Ce que le nuage dit quand on sait quoi y chercher</a:t>
-            </a:r>
-            <a:endParaRPr lang="en-US" sz="1400" dirty="0"/>
-          </a:p>
-        </p:txBody>
-      </p:sp>
-      <p:sp>
-        <p:nvSpPr>
-          <p:cNvPr id="4" name="Shape 2"/>
-          <p:cNvSpPr/>
-          <p:nvPr/>
-        </p:nvSpPr>
-        <p:spPr>
-          <a:xfrm>
-            <a:off x="640080" y="1691640"/>
-            <a:ext cx="5166360" cy="1920240"/>
-          </a:xfrm>
-          <a:prstGeom prst="roundRect">
-            <a:avLst>
-              <a:gd name="adj" fmla="val 3810"/>
-            </a:avLst>
-          </a:prstGeom>
-          <a:solidFill>
-            <a:srgbClr val="EDF2E6"/>
-          </a:solidFill>
-          <a:ln w="12700">
-            <a:solidFill>
-              <a:srgbClr val="EDF2E6"/>
-            </a:solidFill>
-            <a:prstDash val="solid"/>
-          </a:ln>
-        </p:spPr>
-        <p:txBody>
-          <a:bodyPr/>
-          <a:lstStyle/>
-          <a:p>
-            <a:endParaRPr lang="en-US"/>
-          </a:p>
-        </p:txBody>
-      </p:sp>
-      <p:sp>
-        <p:nvSpPr>
-          <p:cNvPr id="5" name="Shape 3"/>
-          <p:cNvSpPr/>
-          <p:nvPr/>
-        </p:nvSpPr>
-        <p:spPr>
-          <a:xfrm>
-            <a:off x="932688" y="1984248"/>
-            <a:ext cx="420624" cy="420624"/>
-          </a:xfrm>
-          <a:prstGeom prst="ellipse">
-            <a:avLst/>
-          </a:prstGeom>
-          <a:solidFill>
-            <a:srgbClr val="2C5F2D"/>
-          </a:solidFill>
-          <a:ln w="12700">
-            <a:solidFill>
-              <a:srgbClr val="2C5F2D"/>
-            </a:solidFill>
-            <a:prstDash val="solid"/>
-          </a:ln>
-        </p:spPr>
-        <p:txBody>
-          <a:bodyPr/>
-          <a:lstStyle/>
-          <a:p>
-            <a:endParaRPr lang="en-US"/>
-          </a:p>
-        </p:txBody>
-      </p:sp>
-      <p:sp>
-        <p:nvSpPr>
-          <p:cNvPr id="6" name="Text 4"/>
-          <p:cNvSpPr/>
-          <p:nvPr/>
-        </p:nvSpPr>
-        <p:spPr>
-          <a:xfrm>
-            <a:off x="932688" y="1984248"/>
-            <a:ext cx="420624" cy="420624"/>
-          </a:xfrm>
-          <a:prstGeom prst="rect">
-            <a:avLst/>
-          </a:prstGeom>
-          <a:noFill/>
-          <a:ln/>
-        </p:spPr>
-        <p:txBody>
-          <a:bodyPr wrap="square" lIns="0" tIns="0" rIns="0" bIns="0" rtlCol="0" anchor="ctr"/>
-          <a:lstStyle/>
-          <a:p>
-            <a:pPr marL="0" indent="0" algn="ctr">
-              <a:buNone/>
-            </a:pPr>
-            <a:r>
-              <a:rPr lang="en-US" sz="1500" b="1" dirty="0">
-                <a:solidFill>
-                  <a:srgbClr val="FFFFFF"/>
-                </a:solidFill>
-                <a:latin typeface="Calibri" pitchFamily="34" charset="0"/>
-                <a:ea typeface="Calibri" pitchFamily="34" charset="-122"/>
-                <a:cs typeface="Calibri" pitchFamily="34" charset="-120"/>
-              </a:rPr>
-              <a:t>1</a:t>
-            </a:r>
-            <a:endParaRPr lang="en-US" sz="1500" dirty="0"/>
-          </a:p>
-        </p:txBody>
-      </p:sp>
-      <p:sp>
-        <p:nvSpPr>
-          <p:cNvPr id="7" name="Text 5"/>
-          <p:cNvSpPr/>
-          <p:nvPr/>
-        </p:nvSpPr>
-        <p:spPr>
-          <a:xfrm>
-            <a:off x="1508760" y="2002536"/>
-            <a:ext cx="4023360" cy="310896"/>
-          </a:xfrm>
-          <a:prstGeom prst="rect">
-            <a:avLst/>
-          </a:prstGeom>
-          <a:noFill/>
-          <a:ln/>
-        </p:spPr>
-        <p:txBody>
-          <a:bodyPr wrap="square" lIns="0" tIns="0" rIns="0" bIns="0" rtlCol="0" anchor="ctr"/>
-          <a:lstStyle/>
-          <a:p>
-            <a:pPr marL="0" indent="0">
-              <a:buNone/>
-            </a:pPr>
-            <a:r>
-              <a:rPr lang="en-US" sz="1700" b="1" dirty="0">
-                <a:solidFill>
-                  <a:srgbClr val="2C5F2D"/>
-                </a:solidFill>
-                <a:latin typeface="Cambria" pitchFamily="34" charset="0"/>
-                <a:ea typeface="Cambria" pitchFamily="34" charset="-122"/>
-                <a:cs typeface="Cambria" pitchFamily="34" charset="-120"/>
-              </a:rPr>
-              <a:t>La dispersion s'évase</a:t>
-            </a:r>
-            <a:endParaRPr lang="en-US" sz="1700" dirty="0"/>
-          </a:p>
-        </p:txBody>
-      </p:sp>
-      <p:sp>
-        <p:nvSpPr>
-          <p:cNvPr id="8" name="Text 6"/>
-          <p:cNvSpPr/>
-          <p:nvPr/>
-        </p:nvSpPr>
-        <p:spPr>
-          <a:xfrm>
-            <a:off x="932688" y="2606040"/>
-            <a:ext cx="4572000" cy="868680"/>
-          </a:xfrm>
-          <a:prstGeom prst="rect">
-            <a:avLst/>
-          </a:prstGeom>
-          <a:noFill/>
-          <a:ln/>
-        </p:spPr>
-        <p:txBody>
-          <a:bodyPr wrap="square" lIns="0" tIns="0" rIns="0" bIns="0" rtlCol="0" anchor="t"/>
-          <a:lstStyle/>
-          <a:p>
-            <a:pPr marL="0" indent="0">
-              <a:lnSpc>
-                <a:spcPct val="115000"/>
-              </a:lnSpc>
-              <a:buNone/>
-            </a:pPr>
-            <a:r>
-              <a:rPr lang="en-US" sz="1300" dirty="0">
-                <a:solidFill>
-                  <a:srgbClr val="1F2A1F"/>
-                </a:solidFill>
-                <a:latin typeface="Calibri" pitchFamily="34" charset="0"/>
-                <a:ea typeface="Calibri" pitchFamily="34" charset="-122"/>
-                <a:cs typeface="Calibri" pitchFamily="34" charset="-120"/>
-              </a:rPr>
-              <a:t>L'erreur passe de 11,5 g/km en bas de gamme à 31,7 au-dessus de 300 kW. L'incertitude dépend du véhicule — le R² ne le dit pas.</a:t>
-            </a:r>
-            <a:endParaRPr lang="en-US" sz="1300" dirty="0"/>
-          </a:p>
-        </p:txBody>
-      </p:sp>
-      <p:sp>
-        <p:nvSpPr>
-          <p:cNvPr id="9" name="Shape 7"/>
-          <p:cNvSpPr/>
-          <p:nvPr/>
-        </p:nvSpPr>
-        <p:spPr>
-          <a:xfrm>
-            <a:off x="6355080" y="1691640"/>
-            <a:ext cx="5166360" cy="1920240"/>
-          </a:xfrm>
-          <a:prstGeom prst="roundRect">
-            <a:avLst>
-              <a:gd name="adj" fmla="val 3810"/>
-            </a:avLst>
-          </a:prstGeom>
-          <a:solidFill>
-            <a:srgbClr val="EDF2E6"/>
-          </a:solidFill>
-          <a:ln w="12700">
-            <a:solidFill>
-              <a:srgbClr val="EDF2E6"/>
-            </a:solidFill>
-            <a:prstDash val="solid"/>
-          </a:ln>
-        </p:spPr>
-        <p:txBody>
-          <a:bodyPr/>
-          <a:lstStyle/>
-          <a:p>
-            <a:endParaRPr lang="en-US"/>
-          </a:p>
-        </p:txBody>
-      </p:sp>
-      <p:sp>
-        <p:nvSpPr>
-          <p:cNvPr id="10" name="Shape 8"/>
-          <p:cNvSpPr/>
-          <p:nvPr/>
-        </p:nvSpPr>
-        <p:spPr>
-          <a:xfrm>
-            <a:off x="6647688" y="1984248"/>
-            <a:ext cx="420624" cy="420624"/>
-          </a:xfrm>
-          <a:prstGeom prst="ellipse">
-            <a:avLst/>
-          </a:prstGeom>
-          <a:solidFill>
-            <a:srgbClr val="2C5F2D"/>
-          </a:solidFill>
-          <a:ln w="12700">
-            <a:solidFill>
-              <a:srgbClr val="2C5F2D"/>
-            </a:solidFill>
-            <a:prstDash val="solid"/>
-          </a:ln>
-        </p:spPr>
-        <p:txBody>
-          <a:bodyPr/>
-          <a:lstStyle/>
-          <a:p>
-            <a:endParaRPr lang="en-US"/>
-          </a:p>
-        </p:txBody>
-      </p:sp>
-      <p:sp>
-        <p:nvSpPr>
-          <p:cNvPr id="11" name="Text 9"/>
-          <p:cNvSpPr/>
-          <p:nvPr/>
-        </p:nvSpPr>
-        <p:spPr>
-          <a:xfrm>
-            <a:off x="6647688" y="1984248"/>
-            <a:ext cx="420624" cy="420624"/>
-          </a:xfrm>
-          <a:prstGeom prst="rect">
-            <a:avLst/>
-          </a:prstGeom>
-          <a:noFill/>
-          <a:ln/>
-        </p:spPr>
-        <p:txBody>
-          <a:bodyPr wrap="square" lIns="0" tIns="0" rIns="0" bIns="0" rtlCol="0" anchor="ctr"/>
-          <a:lstStyle/>
-          <a:p>
-            <a:pPr marL="0" indent="0" algn="ctr">
-              <a:buNone/>
-            </a:pPr>
-            <a:r>
-              <a:rPr lang="en-US" sz="1500" b="1" dirty="0">
-                <a:solidFill>
-                  <a:srgbClr val="FFFFFF"/>
-                </a:solidFill>
-                <a:latin typeface="Calibri" pitchFamily="34" charset="0"/>
-                <a:ea typeface="Calibri" pitchFamily="34" charset="-122"/>
-                <a:cs typeface="Calibri" pitchFamily="34" charset="-120"/>
-              </a:rPr>
-              <a:t>2</a:t>
-            </a:r>
-            <a:endParaRPr lang="en-US" sz="1500" dirty="0"/>
-          </a:p>
-        </p:txBody>
-      </p:sp>
-      <p:sp>
-        <p:nvSpPr>
-          <p:cNvPr id="12" name="Text 10"/>
-          <p:cNvSpPr/>
-          <p:nvPr/>
-        </p:nvSpPr>
-        <p:spPr>
-          <a:xfrm>
-            <a:off x="7223760" y="2002536"/>
-            <a:ext cx="4023360" cy="310896"/>
-          </a:xfrm>
-          <a:prstGeom prst="rect">
-            <a:avLst/>
-          </a:prstGeom>
-          <a:noFill/>
-          <a:ln/>
-        </p:spPr>
-        <p:txBody>
-          <a:bodyPr wrap="square" lIns="0" tIns="0" rIns="0" bIns="0" rtlCol="0" anchor="ctr"/>
-          <a:lstStyle/>
-          <a:p>
-            <a:pPr marL="0" indent="0">
-              <a:buNone/>
-            </a:pPr>
-            <a:r>
-              <a:rPr lang="en-US" sz="1700" b="1" dirty="0">
-                <a:solidFill>
-                  <a:srgbClr val="2C5F2D"/>
-                </a:solidFill>
-                <a:latin typeface="Cambria" pitchFamily="34" charset="0"/>
-                <a:ea typeface="Cambria" pitchFamily="34" charset="-122"/>
-                <a:cs typeface="Cambria" pitchFamily="34" charset="-120"/>
-              </a:rPr>
-              <a:t>La traînée est d'un seul côté</a:t>
-            </a:r>
-            <a:endParaRPr lang="en-US" sz="1700" dirty="0"/>
-          </a:p>
-        </p:txBody>
-      </p:sp>
-      <p:sp>
-        <p:nvSpPr>
-          <p:cNvPr id="13" name="Text 11"/>
-          <p:cNvSpPr/>
-          <p:nvPr/>
-        </p:nvSpPr>
-        <p:spPr>
-          <a:xfrm>
-            <a:off x="6647688" y="2606040"/>
-            <a:ext cx="4572000" cy="868680"/>
-          </a:xfrm>
-          <a:prstGeom prst="rect">
-            <a:avLst/>
-          </a:prstGeom>
-          <a:noFill/>
-          <a:ln/>
-        </p:spPr>
-        <p:txBody>
-          <a:bodyPr wrap="square" lIns="0" tIns="0" rIns="0" bIns="0" rtlCol="0" anchor="t"/>
-          <a:lstStyle/>
-          <a:p>
-            <a:pPr marL="0" indent="0">
-              <a:lnSpc>
-                <a:spcPct val="115000"/>
-              </a:lnSpc>
-              <a:buNone/>
-            </a:pPr>
-            <a:r>
-              <a:rPr lang="en-US" sz="1300" dirty="0">
-                <a:solidFill>
-                  <a:srgbClr val="1F2A1F"/>
-                </a:solidFill>
-                <a:latin typeface="Calibri" pitchFamily="34" charset="0"/>
-                <a:ea typeface="Calibri" pitchFamily="34" charset="-122"/>
-                <a:cs typeface="Calibri" pitchFamily="34" charset="-120"/>
-              </a:rPr>
-              <a:t>Les vingt plus gros résidus sont tous positifs. Le modèle sous-estime sans jamais surestimer autant : signature d'une variable manquante.</a:t>
-            </a:r>
-            <a:endParaRPr lang="en-US" sz="1300" dirty="0"/>
-          </a:p>
-        </p:txBody>
-      </p:sp>
-      <p:sp>
-        <p:nvSpPr>
-          <p:cNvPr id="14" name="Shape 12"/>
-          <p:cNvSpPr/>
-          <p:nvPr/>
-        </p:nvSpPr>
-        <p:spPr>
-          <a:xfrm>
-            <a:off x="640080" y="3977640"/>
-            <a:ext cx="5166360" cy="1920240"/>
-          </a:xfrm>
-          <a:prstGeom prst="roundRect">
-            <a:avLst>
-              <a:gd name="adj" fmla="val 3810"/>
-            </a:avLst>
-          </a:prstGeom>
-          <a:solidFill>
-            <a:srgbClr val="EDF2E6"/>
-          </a:solidFill>
-          <a:ln w="12700">
-            <a:solidFill>
-              <a:srgbClr val="EDF2E6"/>
-            </a:solidFill>
-            <a:prstDash val="solid"/>
-          </a:ln>
-        </p:spPr>
-        <p:txBody>
-          <a:bodyPr/>
-          <a:lstStyle/>
-          <a:p>
-            <a:endParaRPr lang="en-US"/>
-          </a:p>
-        </p:txBody>
-      </p:sp>
-      <p:sp>
-        <p:nvSpPr>
-          <p:cNvPr id="15" name="Shape 13"/>
-          <p:cNvSpPr/>
-          <p:nvPr/>
-        </p:nvSpPr>
-        <p:spPr>
-          <a:xfrm>
-            <a:off x="932688" y="4270248"/>
-            <a:ext cx="420624" cy="420624"/>
-          </a:xfrm>
-          <a:prstGeom prst="ellipse">
-            <a:avLst/>
-          </a:prstGeom>
-          <a:solidFill>
-            <a:srgbClr val="2C5F2D"/>
-          </a:solidFill>
-          <a:ln w="12700">
-            <a:solidFill>
-              <a:srgbClr val="2C5F2D"/>
-            </a:solidFill>
-            <a:prstDash val="solid"/>
-          </a:ln>
-        </p:spPr>
-        <p:txBody>
-          <a:bodyPr/>
-          <a:lstStyle/>
-          <a:p>
-            <a:endParaRPr lang="en-US"/>
-          </a:p>
-        </p:txBody>
-      </p:sp>
-      <p:sp>
-        <p:nvSpPr>
-          <p:cNvPr id="16" name="Text 14"/>
-          <p:cNvSpPr/>
-          <p:nvPr/>
-        </p:nvSpPr>
-        <p:spPr>
-          <a:xfrm>
-            <a:off x="932688" y="4270248"/>
-            <a:ext cx="420624" cy="420624"/>
-          </a:xfrm>
-          <a:prstGeom prst="rect">
-            <a:avLst/>
-          </a:prstGeom>
-          <a:noFill/>
-          <a:ln/>
-        </p:spPr>
-        <p:txBody>
-          <a:bodyPr wrap="square" lIns="0" tIns="0" rIns="0" bIns="0" rtlCol="0" anchor="ctr"/>
-          <a:lstStyle/>
-          <a:p>
-            <a:pPr marL="0" indent="0" algn="ctr">
-              <a:buNone/>
-            </a:pPr>
-            <a:r>
-              <a:rPr lang="en-US" sz="1500" b="1" dirty="0">
-                <a:solidFill>
-                  <a:srgbClr val="FFFFFF"/>
-                </a:solidFill>
-                <a:latin typeface="Calibri" pitchFamily="34" charset="0"/>
-                <a:ea typeface="Calibri" pitchFamily="34" charset="-122"/>
-                <a:cs typeface="Calibri" pitchFamily="34" charset="-120"/>
-              </a:rPr>
-              <a:t>3</a:t>
-            </a:r>
-            <a:endParaRPr lang="en-US" sz="1500" dirty="0"/>
-          </a:p>
-        </p:txBody>
-      </p:sp>
-      <p:sp>
-        <p:nvSpPr>
-          <p:cNvPr id="17" name="Text 15"/>
-          <p:cNvSpPr/>
-          <p:nvPr/>
-        </p:nvSpPr>
-        <p:spPr>
-          <a:xfrm>
-            <a:off x="1508760" y="4288536"/>
-            <a:ext cx="4023360" cy="310896"/>
-          </a:xfrm>
-          <a:prstGeom prst="rect">
-            <a:avLst/>
-          </a:prstGeom>
-          <a:noFill/>
-          <a:ln/>
-        </p:spPr>
-        <p:txBody>
-          <a:bodyPr wrap="square" lIns="0" tIns="0" rIns="0" bIns="0" rtlCol="0" anchor="ctr"/>
-          <a:lstStyle/>
-          <a:p>
-            <a:pPr marL="0" indent="0">
-              <a:buNone/>
-            </a:pPr>
-            <a:r>
-              <a:rPr lang="en-US" sz="1700" b="1" dirty="0">
-                <a:solidFill>
-                  <a:srgbClr val="2C5F2D"/>
-                </a:solidFill>
-                <a:latin typeface="Cambria" pitchFamily="34" charset="0"/>
-                <a:ea typeface="Cambria" pitchFamily="34" charset="-122"/>
-                <a:cs typeface="Cambria" pitchFamily="34" charset="-120"/>
-              </a:rPr>
-              <a:t>Une courbure peut rester</a:t>
-            </a:r>
-            <a:endParaRPr lang="en-US" sz="1700" dirty="0"/>
-          </a:p>
-        </p:txBody>
-      </p:sp>
-      <p:sp>
-        <p:nvSpPr>
-          <p:cNvPr id="18" name="Text 16"/>
-          <p:cNvSpPr/>
-          <p:nvPr/>
-        </p:nvSpPr>
-        <p:spPr>
-          <a:xfrm>
-            <a:off x="932688" y="4892040"/>
-            <a:ext cx="4572000" cy="868680"/>
-          </a:xfrm>
-          <a:prstGeom prst="rect">
-            <a:avLst/>
-          </a:prstGeom>
-          <a:noFill/>
-          <a:ln/>
-        </p:spPr>
-        <p:txBody>
-          <a:bodyPr wrap="square" lIns="0" tIns="0" rIns="0" bIns="0" rtlCol="0" anchor="t"/>
-          <a:lstStyle/>
-          <a:p>
-            <a:pPr marL="0" indent="0">
-              <a:lnSpc>
-                <a:spcPct val="115000"/>
-              </a:lnSpc>
-              <a:buNone/>
-            </a:pPr>
-            <a:r>
-              <a:rPr lang="en-US" sz="1300" dirty="0">
-                <a:solidFill>
-                  <a:srgbClr val="1F2A1F"/>
-                </a:solidFill>
-                <a:latin typeface="Calibri" pitchFamily="34" charset="0"/>
-                <a:ea typeface="Calibri" pitchFamily="34" charset="-122"/>
-                <a:cs typeface="Calibri" pitchFamily="34" charset="-120"/>
-              </a:rPr>
-              <a:t>Moyenne des résidus par décile de prédiction. Un motif en U = non-linéarité non captée. L'œil seul surinterprète les nuages denses.</a:t>
-            </a:r>
-            <a:endParaRPr lang="en-US" sz="1300" dirty="0"/>
-          </a:p>
-        </p:txBody>
-      </p:sp>
-      <p:sp>
-        <p:nvSpPr>
-          <p:cNvPr id="19" name="Shape 17"/>
-          <p:cNvSpPr/>
-          <p:nvPr/>
-        </p:nvSpPr>
-        <p:spPr>
-          <a:xfrm>
-            <a:off x="6355080" y="3977640"/>
-            <a:ext cx="5166360" cy="1920240"/>
-          </a:xfrm>
-          <a:prstGeom prst="roundRect">
-            <a:avLst>
-              <a:gd name="adj" fmla="val 3810"/>
-            </a:avLst>
-          </a:prstGeom>
-          <a:solidFill>
-            <a:srgbClr val="EDF2E6"/>
-          </a:solidFill>
-          <a:ln w="12700">
-            <a:solidFill>
-              <a:srgbClr val="EDF2E6"/>
-            </a:solidFill>
-            <a:prstDash val="solid"/>
-          </a:ln>
-        </p:spPr>
-        <p:txBody>
-          <a:bodyPr/>
-          <a:lstStyle/>
-          <a:p>
-            <a:endParaRPr lang="en-US"/>
-          </a:p>
-        </p:txBody>
-      </p:sp>
-      <p:sp>
-        <p:nvSpPr>
-          <p:cNvPr id="20" name="Shape 18"/>
-          <p:cNvSpPr/>
-          <p:nvPr/>
-        </p:nvSpPr>
-        <p:spPr>
-          <a:xfrm>
-            <a:off x="6647688" y="4270248"/>
-            <a:ext cx="420624" cy="420624"/>
-          </a:xfrm>
-          <a:prstGeom prst="ellipse">
-            <a:avLst/>
-          </a:prstGeom>
-          <a:solidFill>
-            <a:srgbClr val="2C5F2D"/>
-          </a:solidFill>
-          <a:ln w="12700">
-            <a:solidFill>
-              <a:srgbClr val="2C5F2D"/>
-            </a:solidFill>
-            <a:prstDash val="solid"/>
-          </a:ln>
-        </p:spPr>
-        <p:txBody>
-          <a:bodyPr/>
-          <a:lstStyle/>
-          <a:p>
-            <a:endParaRPr lang="en-US"/>
-          </a:p>
-        </p:txBody>
-      </p:sp>
-      <p:sp>
-        <p:nvSpPr>
-          <p:cNvPr id="21" name="Text 19"/>
-          <p:cNvSpPr/>
-          <p:nvPr/>
-        </p:nvSpPr>
-        <p:spPr>
-          <a:xfrm>
-            <a:off x="6647688" y="4270248"/>
-            <a:ext cx="420624" cy="420624"/>
-          </a:xfrm>
-          <a:prstGeom prst="rect">
-            <a:avLst/>
-          </a:prstGeom>
-          <a:noFill/>
-          <a:ln/>
-        </p:spPr>
-        <p:txBody>
-          <a:bodyPr wrap="square" lIns="0" tIns="0" rIns="0" bIns="0" rtlCol="0" anchor="ctr"/>
-          <a:lstStyle/>
-          <a:p>
-            <a:pPr marL="0" indent="0" algn="ctr">
-              <a:buNone/>
-            </a:pPr>
-            <a:r>
-              <a:rPr lang="en-US" sz="1500" b="1" dirty="0">
-                <a:solidFill>
-                  <a:srgbClr val="FFFFFF"/>
-                </a:solidFill>
-                <a:latin typeface="Calibri" pitchFamily="34" charset="0"/>
-                <a:ea typeface="Calibri" pitchFamily="34" charset="-122"/>
-                <a:cs typeface="Calibri" pitchFamily="34" charset="-120"/>
-              </a:rPr>
-              <a:t>4</a:t>
-            </a:r>
-            <a:endParaRPr lang="en-US" sz="1500" dirty="0"/>
-          </a:p>
-        </p:txBody>
-      </p:sp>
-      <p:sp>
-        <p:nvSpPr>
-          <p:cNvPr id="22" name="Text 20"/>
-          <p:cNvSpPr/>
-          <p:nvPr/>
-        </p:nvSpPr>
-        <p:spPr>
-          <a:xfrm>
-            <a:off x="7223760" y="4288536"/>
-            <a:ext cx="4023360" cy="310896"/>
-          </a:xfrm>
-          <a:prstGeom prst="rect">
-            <a:avLst/>
-          </a:prstGeom>
-          <a:noFill/>
-          <a:ln/>
-        </p:spPr>
-        <p:txBody>
-          <a:bodyPr wrap="square" lIns="0" tIns="0" rIns="0" bIns="0" rtlCol="0" anchor="ctr"/>
-          <a:lstStyle/>
-          <a:p>
-            <a:pPr marL="0" indent="0">
-              <a:buNone/>
-            </a:pPr>
-            <a:r>
-              <a:rPr lang="en-US" sz="1700" b="1" dirty="0">
-                <a:solidFill>
-                  <a:srgbClr val="2C5F2D"/>
-                </a:solidFill>
-                <a:latin typeface="Cambria" pitchFamily="34" charset="0"/>
-                <a:ea typeface="Cambria" pitchFamily="34" charset="-122"/>
-                <a:cs typeface="Cambria" pitchFamily="34" charset="-120"/>
-              </a:rPr>
-              <a:t>Attention aux zéros mécaniques</a:t>
-            </a:r>
-            <a:endParaRPr lang="en-US" sz="1700" dirty="0"/>
-          </a:p>
-        </p:txBody>
-      </p:sp>
-      <p:sp>
-        <p:nvSpPr>
-          <p:cNvPr id="23" name="Text 21"/>
-          <p:cNvSpPr/>
-          <p:nvPr/>
-        </p:nvSpPr>
-        <p:spPr>
-          <a:xfrm>
-            <a:off x="6647688" y="4892040"/>
-            <a:ext cx="4572000" cy="868680"/>
-          </a:xfrm>
-          <a:prstGeom prst="rect">
-            <a:avLst/>
-          </a:prstGeom>
-          <a:noFill/>
-          <a:ln/>
-        </p:spPr>
-        <p:txBody>
-          <a:bodyPr wrap="square" lIns="0" tIns="0" rIns="0" bIns="0" rtlCol="0" anchor="t"/>
-          <a:lstStyle/>
-          <a:p>
-            <a:pPr marL="0" indent="0">
-              <a:lnSpc>
-                <a:spcPct val="115000"/>
-              </a:lnSpc>
-              <a:buNone/>
-            </a:pPr>
-            <a:r>
-              <a:rPr lang="en-US" sz="1300" dirty="0">
-                <a:solidFill>
-                  <a:srgbClr val="1F2A1F"/>
-                </a:solidFill>
-                <a:latin typeface="Calibri" pitchFamily="34" charset="0"/>
-                <a:ea typeface="Calibri" pitchFamily="34" charset="-122"/>
-                <a:cs typeface="Calibri" pitchFamily="34" charset="-120"/>
-              </a:rPr>
-              <a:t>Le résidu moyen par modalité d'une variable présente dans le modèle est nul par construction. Ça ne démontre rien.</a:t>
             </a:r>
             <a:endParaRPr lang="en-US" sz="1300" dirty="0"/>
           </a:p>
@@ -9364,6 +9083,853 @@
 
 <file path=ppt/slides/slide20.xml><?xml version="1.0" encoding="utf-8"?>
 <p:sld xmlns:a="http://schemas.openxmlformats.org/drawingml/2006/main" xmlns:r="http://schemas.openxmlformats.org/officeDocument/2006/relationships" xmlns:p="http://schemas.openxmlformats.org/presentationml/2006/main">
+  <p:cSld name="Slide 2">
+    <p:spTree>
+      <p:nvGrpSpPr>
+        <p:cNvPr id="1" name=""/>
+        <p:cNvGrpSpPr/>
+        <p:nvPr/>
+      </p:nvGrpSpPr>
+      <p:grpSpPr>
+        <a:xfrm>
+          <a:off x="0" y="0"/>
+          <a:ext cx="0" cy="0"/>
+          <a:chOff x="0" y="0"/>
+          <a:chExt cx="0" cy="0"/>
+        </a:xfrm>
+      </p:grpSpPr>
+      <p:sp>
+        <p:nvSpPr>
+          <p:cNvPr id="2" name="Text 0"/>
+          <p:cNvSpPr/>
+          <p:nvPr/>
+        </p:nvSpPr>
+        <p:spPr>
+          <a:xfrm>
+            <a:off x="640080" y="384048"/>
+            <a:ext cx="10881360" cy="685800"/>
+          </a:xfrm>
+          <a:prstGeom prst="rect">
+            <a:avLst/>
+          </a:prstGeom>
+          <a:noFill/>
+          <a:ln/>
+        </p:spPr>
+        <p:txBody>
+          <a:bodyPr wrap="square" lIns="0" tIns="0" rIns="0" bIns="0" rtlCol="0" anchor="ctr"/>
+          <a:lstStyle/>
+          <a:p>
+            <a:pPr marL="0" indent="0">
+              <a:buNone/>
+            </a:pPr>
+            <a:r>
+              <a:rPr lang="en-US" sz="3400" b="1" dirty="0">
+                <a:solidFill>
+                  <a:srgbClr val="1F2A1F"/>
+                </a:solidFill>
+                <a:latin typeface="Cambria" pitchFamily="34" charset="0"/>
+                <a:ea typeface="Cambria" pitchFamily="34" charset="-122"/>
+                <a:cs typeface="Cambria" pitchFamily="34" charset="-120"/>
+              </a:rPr>
+              <a:t>Les résidus, deuxième lecture</a:t>
+            </a:r>
+            <a:endParaRPr lang="en-US" sz="3400" dirty="0"/>
+          </a:p>
+        </p:txBody>
+      </p:sp>
+      <p:sp>
+        <p:nvSpPr>
+          <p:cNvPr id="3" name="Text 1"/>
+          <p:cNvSpPr/>
+          <p:nvPr/>
+        </p:nvSpPr>
+        <p:spPr>
+          <a:xfrm>
+            <a:off x="640080" y="1078992"/>
+            <a:ext cx="10881360" cy="384048"/>
+          </a:xfrm>
+          <a:prstGeom prst="rect">
+            <a:avLst/>
+          </a:prstGeom>
+          <a:noFill/>
+          <a:ln/>
+        </p:spPr>
+        <p:txBody>
+          <a:bodyPr wrap="square" lIns="0" tIns="0" rIns="0" bIns="0" rtlCol="0" anchor="ctr"/>
+          <a:lstStyle/>
+          <a:p>
+            <a:pPr marL="0" indent="0">
+              <a:buNone/>
+            </a:pPr>
+            <a:r>
+              <a:rPr lang="en-US" sz="1400" i="1" dirty="0">
+                <a:solidFill>
+                  <a:srgbClr val="5E6E5E"/>
+                </a:solidFill>
+                <a:latin typeface="Calibri" pitchFamily="34" charset="0"/>
+                <a:ea typeface="Calibri" pitchFamily="34" charset="-122"/>
+                <a:cs typeface="Calibri" pitchFamily="34" charset="-120"/>
+              </a:rPr>
+              <a:t>Ce que le nuage dit quand on sait quoi y chercher</a:t>
+            </a:r>
+            <a:endParaRPr lang="en-US" sz="1400" dirty="0"/>
+          </a:p>
+        </p:txBody>
+      </p:sp>
+      <p:sp>
+        <p:nvSpPr>
+          <p:cNvPr id="4" name="Shape 2"/>
+          <p:cNvSpPr/>
+          <p:nvPr/>
+        </p:nvSpPr>
+        <p:spPr>
+          <a:xfrm>
+            <a:off x="640080" y="1691640"/>
+            <a:ext cx="5166360" cy="1920240"/>
+          </a:xfrm>
+          <a:prstGeom prst="roundRect">
+            <a:avLst>
+              <a:gd name="adj" fmla="val 3810"/>
+            </a:avLst>
+          </a:prstGeom>
+          <a:solidFill>
+            <a:srgbClr val="EDF2E6"/>
+          </a:solidFill>
+          <a:ln w="12700">
+            <a:solidFill>
+              <a:srgbClr val="EDF2E6"/>
+            </a:solidFill>
+            <a:prstDash val="solid"/>
+          </a:ln>
+        </p:spPr>
+        <p:txBody>
+          <a:bodyPr/>
+          <a:lstStyle/>
+          <a:p>
+            <a:endParaRPr lang="en-US"/>
+          </a:p>
+        </p:txBody>
+      </p:sp>
+      <p:sp>
+        <p:nvSpPr>
+          <p:cNvPr id="5" name="Shape 3"/>
+          <p:cNvSpPr/>
+          <p:nvPr/>
+        </p:nvSpPr>
+        <p:spPr>
+          <a:xfrm>
+            <a:off x="932688" y="1984248"/>
+            <a:ext cx="420624" cy="420624"/>
+          </a:xfrm>
+          <a:prstGeom prst="ellipse">
+            <a:avLst/>
+          </a:prstGeom>
+          <a:solidFill>
+            <a:srgbClr val="2C5F2D"/>
+          </a:solidFill>
+          <a:ln w="12700">
+            <a:solidFill>
+              <a:srgbClr val="2C5F2D"/>
+            </a:solidFill>
+            <a:prstDash val="solid"/>
+          </a:ln>
+        </p:spPr>
+        <p:txBody>
+          <a:bodyPr/>
+          <a:lstStyle/>
+          <a:p>
+            <a:endParaRPr lang="en-US"/>
+          </a:p>
+        </p:txBody>
+      </p:sp>
+      <p:sp>
+        <p:nvSpPr>
+          <p:cNvPr id="6" name="Text 4"/>
+          <p:cNvSpPr/>
+          <p:nvPr/>
+        </p:nvSpPr>
+        <p:spPr>
+          <a:xfrm>
+            <a:off x="932688" y="1984248"/>
+            <a:ext cx="420624" cy="420624"/>
+          </a:xfrm>
+          <a:prstGeom prst="rect">
+            <a:avLst/>
+          </a:prstGeom>
+          <a:noFill/>
+          <a:ln/>
+        </p:spPr>
+        <p:txBody>
+          <a:bodyPr wrap="square" lIns="0" tIns="0" rIns="0" bIns="0" rtlCol="0" anchor="ctr"/>
+          <a:lstStyle/>
+          <a:p>
+            <a:pPr marL="0" indent="0" algn="ctr">
+              <a:buNone/>
+            </a:pPr>
+            <a:r>
+              <a:rPr lang="en-US" sz="1500" b="1" dirty="0">
+                <a:solidFill>
+                  <a:srgbClr val="FFFFFF"/>
+                </a:solidFill>
+                <a:latin typeface="Calibri" pitchFamily="34" charset="0"/>
+                <a:ea typeface="Calibri" pitchFamily="34" charset="-122"/>
+                <a:cs typeface="Calibri" pitchFamily="34" charset="-120"/>
+              </a:rPr>
+              <a:t>1</a:t>
+            </a:r>
+            <a:endParaRPr lang="en-US" sz="1500" dirty="0"/>
+          </a:p>
+        </p:txBody>
+      </p:sp>
+      <p:sp>
+        <p:nvSpPr>
+          <p:cNvPr id="7" name="Text 5"/>
+          <p:cNvSpPr/>
+          <p:nvPr/>
+        </p:nvSpPr>
+        <p:spPr>
+          <a:xfrm>
+            <a:off x="1508760" y="2002536"/>
+            <a:ext cx="4023360" cy="310896"/>
+          </a:xfrm>
+          <a:prstGeom prst="rect">
+            <a:avLst/>
+          </a:prstGeom>
+          <a:noFill/>
+          <a:ln/>
+        </p:spPr>
+        <p:txBody>
+          <a:bodyPr wrap="square" lIns="0" tIns="0" rIns="0" bIns="0" rtlCol="0" anchor="ctr"/>
+          <a:lstStyle/>
+          <a:p>
+            <a:pPr marL="0" indent="0">
+              <a:buNone/>
+            </a:pPr>
+            <a:r>
+              <a:rPr lang="en-US" sz="1700" b="1" dirty="0">
+                <a:solidFill>
+                  <a:srgbClr val="2C5F2D"/>
+                </a:solidFill>
+                <a:latin typeface="Cambria" pitchFamily="34" charset="0"/>
+                <a:ea typeface="Cambria" pitchFamily="34" charset="-122"/>
+                <a:cs typeface="Cambria" pitchFamily="34" charset="-120"/>
+              </a:rPr>
+              <a:t>La dispersion s'évase</a:t>
+            </a:r>
+            <a:endParaRPr lang="en-US" sz="1700" dirty="0"/>
+          </a:p>
+        </p:txBody>
+      </p:sp>
+      <p:sp>
+        <p:nvSpPr>
+          <p:cNvPr id="8" name="Text 6"/>
+          <p:cNvSpPr/>
+          <p:nvPr/>
+        </p:nvSpPr>
+        <p:spPr>
+          <a:xfrm>
+            <a:off x="932688" y="2606040"/>
+            <a:ext cx="4572000" cy="868680"/>
+          </a:xfrm>
+          <a:prstGeom prst="rect">
+            <a:avLst/>
+          </a:prstGeom>
+          <a:noFill/>
+          <a:ln/>
+        </p:spPr>
+        <p:txBody>
+          <a:bodyPr wrap="square" lIns="0" tIns="0" rIns="0" bIns="0" rtlCol="0" anchor="t"/>
+          <a:lstStyle/>
+          <a:p>
+            <a:pPr marL="0" indent="0">
+              <a:lnSpc>
+                <a:spcPct val="115000"/>
+              </a:lnSpc>
+              <a:buNone/>
+            </a:pPr>
+            <a:r>
+              <a:rPr lang="en-US" sz="1300" dirty="0">
+                <a:solidFill>
+                  <a:srgbClr val="1F2A1F"/>
+                </a:solidFill>
+                <a:latin typeface="Calibri" pitchFamily="34" charset="0"/>
+                <a:ea typeface="Calibri" pitchFamily="34" charset="-122"/>
+                <a:cs typeface="Calibri" pitchFamily="34" charset="-120"/>
+              </a:rPr>
+              <a:t>L'erreur passe de 11,5 g/km en bas de gamme à 31,7 au-dessus de 300 kW. L'incertitude dépend du véhicule — le R² ne le dit pas.</a:t>
+            </a:r>
+            <a:endParaRPr lang="en-US" sz="1300" dirty="0"/>
+          </a:p>
+        </p:txBody>
+      </p:sp>
+      <p:sp>
+        <p:nvSpPr>
+          <p:cNvPr id="9" name="Shape 7"/>
+          <p:cNvSpPr/>
+          <p:nvPr/>
+        </p:nvSpPr>
+        <p:spPr>
+          <a:xfrm>
+            <a:off x="6355080" y="1691640"/>
+            <a:ext cx="5166360" cy="1920240"/>
+          </a:xfrm>
+          <a:prstGeom prst="roundRect">
+            <a:avLst>
+              <a:gd name="adj" fmla="val 3810"/>
+            </a:avLst>
+          </a:prstGeom>
+          <a:solidFill>
+            <a:srgbClr val="EDF2E6"/>
+          </a:solidFill>
+          <a:ln w="12700">
+            <a:solidFill>
+              <a:srgbClr val="EDF2E6"/>
+            </a:solidFill>
+            <a:prstDash val="solid"/>
+          </a:ln>
+        </p:spPr>
+        <p:txBody>
+          <a:bodyPr/>
+          <a:lstStyle/>
+          <a:p>
+            <a:endParaRPr lang="en-US"/>
+          </a:p>
+        </p:txBody>
+      </p:sp>
+      <p:sp>
+        <p:nvSpPr>
+          <p:cNvPr id="10" name="Shape 8"/>
+          <p:cNvSpPr/>
+          <p:nvPr/>
+        </p:nvSpPr>
+        <p:spPr>
+          <a:xfrm>
+            <a:off x="6647688" y="1984248"/>
+            <a:ext cx="420624" cy="420624"/>
+          </a:xfrm>
+          <a:prstGeom prst="ellipse">
+            <a:avLst/>
+          </a:prstGeom>
+          <a:solidFill>
+            <a:srgbClr val="2C5F2D"/>
+          </a:solidFill>
+          <a:ln w="12700">
+            <a:solidFill>
+              <a:srgbClr val="2C5F2D"/>
+            </a:solidFill>
+            <a:prstDash val="solid"/>
+          </a:ln>
+        </p:spPr>
+        <p:txBody>
+          <a:bodyPr/>
+          <a:lstStyle/>
+          <a:p>
+            <a:endParaRPr lang="en-US"/>
+          </a:p>
+        </p:txBody>
+      </p:sp>
+      <p:sp>
+        <p:nvSpPr>
+          <p:cNvPr id="11" name="Text 9"/>
+          <p:cNvSpPr/>
+          <p:nvPr/>
+        </p:nvSpPr>
+        <p:spPr>
+          <a:xfrm>
+            <a:off x="6647688" y="1984248"/>
+            <a:ext cx="420624" cy="420624"/>
+          </a:xfrm>
+          <a:prstGeom prst="rect">
+            <a:avLst/>
+          </a:prstGeom>
+          <a:noFill/>
+          <a:ln/>
+        </p:spPr>
+        <p:txBody>
+          <a:bodyPr wrap="square" lIns="0" tIns="0" rIns="0" bIns="0" rtlCol="0" anchor="ctr"/>
+          <a:lstStyle/>
+          <a:p>
+            <a:pPr marL="0" indent="0" algn="ctr">
+              <a:buNone/>
+            </a:pPr>
+            <a:r>
+              <a:rPr lang="en-US" sz="1500" b="1" dirty="0">
+                <a:solidFill>
+                  <a:srgbClr val="FFFFFF"/>
+                </a:solidFill>
+                <a:latin typeface="Calibri" pitchFamily="34" charset="0"/>
+                <a:ea typeface="Calibri" pitchFamily="34" charset="-122"/>
+                <a:cs typeface="Calibri" pitchFamily="34" charset="-120"/>
+              </a:rPr>
+              <a:t>2</a:t>
+            </a:r>
+            <a:endParaRPr lang="en-US" sz="1500" dirty="0"/>
+          </a:p>
+        </p:txBody>
+      </p:sp>
+      <p:sp>
+        <p:nvSpPr>
+          <p:cNvPr id="12" name="Text 10"/>
+          <p:cNvSpPr/>
+          <p:nvPr/>
+        </p:nvSpPr>
+        <p:spPr>
+          <a:xfrm>
+            <a:off x="7223760" y="2002536"/>
+            <a:ext cx="4023360" cy="310896"/>
+          </a:xfrm>
+          <a:prstGeom prst="rect">
+            <a:avLst/>
+          </a:prstGeom>
+          <a:noFill/>
+          <a:ln/>
+        </p:spPr>
+        <p:txBody>
+          <a:bodyPr wrap="square" lIns="0" tIns="0" rIns="0" bIns="0" rtlCol="0" anchor="ctr"/>
+          <a:lstStyle/>
+          <a:p>
+            <a:pPr marL="0" indent="0">
+              <a:buNone/>
+            </a:pPr>
+            <a:r>
+              <a:rPr lang="en-US" sz="1700" b="1" dirty="0">
+                <a:solidFill>
+                  <a:srgbClr val="2C5F2D"/>
+                </a:solidFill>
+                <a:latin typeface="Cambria" pitchFamily="34" charset="0"/>
+                <a:ea typeface="Cambria" pitchFamily="34" charset="-122"/>
+                <a:cs typeface="Cambria" pitchFamily="34" charset="-120"/>
+              </a:rPr>
+              <a:t>La traînée est d'un seul côté</a:t>
+            </a:r>
+            <a:endParaRPr lang="en-US" sz="1700" dirty="0"/>
+          </a:p>
+        </p:txBody>
+      </p:sp>
+      <p:sp>
+        <p:nvSpPr>
+          <p:cNvPr id="13" name="Text 11"/>
+          <p:cNvSpPr/>
+          <p:nvPr/>
+        </p:nvSpPr>
+        <p:spPr>
+          <a:xfrm>
+            <a:off x="6647688" y="2606040"/>
+            <a:ext cx="4572000" cy="868680"/>
+          </a:xfrm>
+          <a:prstGeom prst="rect">
+            <a:avLst/>
+          </a:prstGeom>
+          <a:noFill/>
+          <a:ln/>
+        </p:spPr>
+        <p:txBody>
+          <a:bodyPr wrap="square" lIns="0" tIns="0" rIns="0" bIns="0" rtlCol="0" anchor="t"/>
+          <a:lstStyle/>
+          <a:p>
+            <a:pPr marL="0" indent="0">
+              <a:lnSpc>
+                <a:spcPct val="115000"/>
+              </a:lnSpc>
+              <a:buNone/>
+            </a:pPr>
+            <a:r>
+              <a:rPr lang="en-US" sz="1300" dirty="0">
+                <a:solidFill>
+                  <a:srgbClr val="1F2A1F"/>
+                </a:solidFill>
+                <a:latin typeface="Calibri" pitchFamily="34" charset="0"/>
+                <a:ea typeface="Calibri" pitchFamily="34" charset="-122"/>
+                <a:cs typeface="Calibri" pitchFamily="34" charset="-120"/>
+              </a:rPr>
+              <a:t>Les vingt plus gros résidus sont tous positifs. Le modèle sous-estime sans jamais surestimer autant : signature d'une variable manquante.</a:t>
+            </a:r>
+            <a:endParaRPr lang="en-US" sz="1300" dirty="0"/>
+          </a:p>
+        </p:txBody>
+      </p:sp>
+      <p:sp>
+        <p:nvSpPr>
+          <p:cNvPr id="14" name="Shape 12"/>
+          <p:cNvSpPr/>
+          <p:nvPr/>
+        </p:nvSpPr>
+        <p:spPr>
+          <a:xfrm>
+            <a:off x="640080" y="3977640"/>
+            <a:ext cx="5166360" cy="1920240"/>
+          </a:xfrm>
+          <a:prstGeom prst="roundRect">
+            <a:avLst>
+              <a:gd name="adj" fmla="val 3810"/>
+            </a:avLst>
+          </a:prstGeom>
+          <a:solidFill>
+            <a:srgbClr val="EDF2E6"/>
+          </a:solidFill>
+          <a:ln w="12700">
+            <a:solidFill>
+              <a:srgbClr val="EDF2E6"/>
+            </a:solidFill>
+            <a:prstDash val="solid"/>
+          </a:ln>
+        </p:spPr>
+        <p:txBody>
+          <a:bodyPr/>
+          <a:lstStyle/>
+          <a:p>
+            <a:endParaRPr lang="en-US"/>
+          </a:p>
+        </p:txBody>
+      </p:sp>
+      <p:sp>
+        <p:nvSpPr>
+          <p:cNvPr id="15" name="Shape 13"/>
+          <p:cNvSpPr/>
+          <p:nvPr/>
+        </p:nvSpPr>
+        <p:spPr>
+          <a:xfrm>
+            <a:off x="932688" y="4270248"/>
+            <a:ext cx="420624" cy="420624"/>
+          </a:xfrm>
+          <a:prstGeom prst="ellipse">
+            <a:avLst/>
+          </a:prstGeom>
+          <a:solidFill>
+            <a:srgbClr val="2C5F2D"/>
+          </a:solidFill>
+          <a:ln w="12700">
+            <a:solidFill>
+              <a:srgbClr val="2C5F2D"/>
+            </a:solidFill>
+            <a:prstDash val="solid"/>
+          </a:ln>
+        </p:spPr>
+        <p:txBody>
+          <a:bodyPr/>
+          <a:lstStyle/>
+          <a:p>
+            <a:endParaRPr lang="en-US"/>
+          </a:p>
+        </p:txBody>
+      </p:sp>
+      <p:sp>
+        <p:nvSpPr>
+          <p:cNvPr id="16" name="Text 14"/>
+          <p:cNvSpPr/>
+          <p:nvPr/>
+        </p:nvSpPr>
+        <p:spPr>
+          <a:xfrm>
+            <a:off x="932688" y="4270248"/>
+            <a:ext cx="420624" cy="420624"/>
+          </a:xfrm>
+          <a:prstGeom prst="rect">
+            <a:avLst/>
+          </a:prstGeom>
+          <a:noFill/>
+          <a:ln/>
+        </p:spPr>
+        <p:txBody>
+          <a:bodyPr wrap="square" lIns="0" tIns="0" rIns="0" bIns="0" rtlCol="0" anchor="ctr"/>
+          <a:lstStyle/>
+          <a:p>
+            <a:pPr marL="0" indent="0" algn="ctr">
+              <a:buNone/>
+            </a:pPr>
+            <a:r>
+              <a:rPr lang="en-US" sz="1500" b="1" dirty="0">
+                <a:solidFill>
+                  <a:srgbClr val="FFFFFF"/>
+                </a:solidFill>
+                <a:latin typeface="Calibri" pitchFamily="34" charset="0"/>
+                <a:ea typeface="Calibri" pitchFamily="34" charset="-122"/>
+                <a:cs typeface="Calibri" pitchFamily="34" charset="-120"/>
+              </a:rPr>
+              <a:t>3</a:t>
+            </a:r>
+            <a:endParaRPr lang="en-US" sz="1500" dirty="0"/>
+          </a:p>
+        </p:txBody>
+      </p:sp>
+      <p:sp>
+        <p:nvSpPr>
+          <p:cNvPr id="17" name="Text 15"/>
+          <p:cNvSpPr/>
+          <p:nvPr/>
+        </p:nvSpPr>
+        <p:spPr>
+          <a:xfrm>
+            <a:off x="1508760" y="4288536"/>
+            <a:ext cx="4023360" cy="310896"/>
+          </a:xfrm>
+          <a:prstGeom prst="rect">
+            <a:avLst/>
+          </a:prstGeom>
+          <a:noFill/>
+          <a:ln/>
+        </p:spPr>
+        <p:txBody>
+          <a:bodyPr wrap="square" lIns="0" tIns="0" rIns="0" bIns="0" rtlCol="0" anchor="ctr"/>
+          <a:lstStyle/>
+          <a:p>
+            <a:pPr marL="0" indent="0">
+              <a:buNone/>
+            </a:pPr>
+            <a:r>
+              <a:rPr lang="en-US" sz="1700" b="1" dirty="0">
+                <a:solidFill>
+                  <a:srgbClr val="2C5F2D"/>
+                </a:solidFill>
+                <a:latin typeface="Cambria" pitchFamily="34" charset="0"/>
+                <a:ea typeface="Cambria" pitchFamily="34" charset="-122"/>
+                <a:cs typeface="Cambria" pitchFamily="34" charset="-120"/>
+              </a:rPr>
+              <a:t>Une courbure peut rester</a:t>
+            </a:r>
+            <a:endParaRPr lang="en-US" sz="1700" dirty="0"/>
+          </a:p>
+        </p:txBody>
+      </p:sp>
+      <p:sp>
+        <p:nvSpPr>
+          <p:cNvPr id="18" name="Text 16"/>
+          <p:cNvSpPr/>
+          <p:nvPr/>
+        </p:nvSpPr>
+        <p:spPr>
+          <a:xfrm>
+            <a:off x="932688" y="4892040"/>
+            <a:ext cx="4572000" cy="868680"/>
+          </a:xfrm>
+          <a:prstGeom prst="rect">
+            <a:avLst/>
+          </a:prstGeom>
+          <a:noFill/>
+          <a:ln/>
+        </p:spPr>
+        <p:txBody>
+          <a:bodyPr wrap="square" lIns="0" tIns="0" rIns="0" bIns="0" rtlCol="0" anchor="t"/>
+          <a:lstStyle/>
+          <a:p>
+            <a:pPr marL="0" indent="0">
+              <a:lnSpc>
+                <a:spcPct val="115000"/>
+              </a:lnSpc>
+              <a:buNone/>
+            </a:pPr>
+            <a:r>
+              <a:rPr lang="en-US" sz="1300" dirty="0">
+                <a:solidFill>
+                  <a:srgbClr val="1F2A1F"/>
+                </a:solidFill>
+                <a:latin typeface="Calibri" pitchFamily="34" charset="0"/>
+                <a:ea typeface="Calibri" pitchFamily="34" charset="-122"/>
+                <a:cs typeface="Calibri" pitchFamily="34" charset="-120"/>
+              </a:rPr>
+              <a:t>Moyenne des résidus par décile de prédiction. Un motif en U = non-linéarité non captée. L'œil seul surinterprète les nuages denses.</a:t>
+            </a:r>
+            <a:endParaRPr lang="en-US" sz="1300" dirty="0"/>
+          </a:p>
+        </p:txBody>
+      </p:sp>
+      <p:sp>
+        <p:nvSpPr>
+          <p:cNvPr id="19" name="Shape 17"/>
+          <p:cNvSpPr/>
+          <p:nvPr/>
+        </p:nvSpPr>
+        <p:spPr>
+          <a:xfrm>
+            <a:off x="6355080" y="3977640"/>
+            <a:ext cx="5166360" cy="1920240"/>
+          </a:xfrm>
+          <a:prstGeom prst="roundRect">
+            <a:avLst>
+              <a:gd name="adj" fmla="val 3810"/>
+            </a:avLst>
+          </a:prstGeom>
+          <a:solidFill>
+            <a:srgbClr val="EDF2E6"/>
+          </a:solidFill>
+          <a:ln w="12700">
+            <a:solidFill>
+              <a:srgbClr val="EDF2E6"/>
+            </a:solidFill>
+            <a:prstDash val="solid"/>
+          </a:ln>
+        </p:spPr>
+        <p:txBody>
+          <a:bodyPr/>
+          <a:lstStyle/>
+          <a:p>
+            <a:endParaRPr lang="en-US"/>
+          </a:p>
+        </p:txBody>
+      </p:sp>
+      <p:sp>
+        <p:nvSpPr>
+          <p:cNvPr id="20" name="Shape 18"/>
+          <p:cNvSpPr/>
+          <p:nvPr/>
+        </p:nvSpPr>
+        <p:spPr>
+          <a:xfrm>
+            <a:off x="6647688" y="4270248"/>
+            <a:ext cx="420624" cy="420624"/>
+          </a:xfrm>
+          <a:prstGeom prst="ellipse">
+            <a:avLst/>
+          </a:prstGeom>
+          <a:solidFill>
+            <a:srgbClr val="2C5F2D"/>
+          </a:solidFill>
+          <a:ln w="12700">
+            <a:solidFill>
+              <a:srgbClr val="2C5F2D"/>
+            </a:solidFill>
+            <a:prstDash val="solid"/>
+          </a:ln>
+        </p:spPr>
+        <p:txBody>
+          <a:bodyPr/>
+          <a:lstStyle/>
+          <a:p>
+            <a:endParaRPr lang="en-US"/>
+          </a:p>
+        </p:txBody>
+      </p:sp>
+      <p:sp>
+        <p:nvSpPr>
+          <p:cNvPr id="21" name="Text 19"/>
+          <p:cNvSpPr/>
+          <p:nvPr/>
+        </p:nvSpPr>
+        <p:spPr>
+          <a:xfrm>
+            <a:off x="6647688" y="4270248"/>
+            <a:ext cx="420624" cy="420624"/>
+          </a:xfrm>
+          <a:prstGeom prst="rect">
+            <a:avLst/>
+          </a:prstGeom>
+          <a:noFill/>
+          <a:ln/>
+        </p:spPr>
+        <p:txBody>
+          <a:bodyPr wrap="square" lIns="0" tIns="0" rIns="0" bIns="0" rtlCol="0" anchor="ctr"/>
+          <a:lstStyle/>
+          <a:p>
+            <a:pPr marL="0" indent="0" algn="ctr">
+              <a:buNone/>
+            </a:pPr>
+            <a:r>
+              <a:rPr lang="en-US" sz="1500" b="1" dirty="0">
+                <a:solidFill>
+                  <a:srgbClr val="FFFFFF"/>
+                </a:solidFill>
+                <a:latin typeface="Calibri" pitchFamily="34" charset="0"/>
+                <a:ea typeface="Calibri" pitchFamily="34" charset="-122"/>
+                <a:cs typeface="Calibri" pitchFamily="34" charset="-120"/>
+              </a:rPr>
+              <a:t>4</a:t>
+            </a:r>
+            <a:endParaRPr lang="en-US" sz="1500" dirty="0"/>
+          </a:p>
+        </p:txBody>
+      </p:sp>
+      <p:sp>
+        <p:nvSpPr>
+          <p:cNvPr id="22" name="Text 20"/>
+          <p:cNvSpPr/>
+          <p:nvPr/>
+        </p:nvSpPr>
+        <p:spPr>
+          <a:xfrm>
+            <a:off x="7223760" y="4288536"/>
+            <a:ext cx="4023360" cy="310896"/>
+          </a:xfrm>
+          <a:prstGeom prst="rect">
+            <a:avLst/>
+          </a:prstGeom>
+          <a:noFill/>
+          <a:ln/>
+        </p:spPr>
+        <p:txBody>
+          <a:bodyPr wrap="square" lIns="0" tIns="0" rIns="0" bIns="0" rtlCol="0" anchor="ctr"/>
+          <a:lstStyle/>
+          <a:p>
+            <a:pPr marL="0" indent="0">
+              <a:buNone/>
+            </a:pPr>
+            <a:r>
+              <a:rPr lang="en-US" sz="1700" b="1" dirty="0">
+                <a:solidFill>
+                  <a:srgbClr val="2C5F2D"/>
+                </a:solidFill>
+                <a:latin typeface="Cambria" pitchFamily="34" charset="0"/>
+                <a:ea typeface="Cambria" pitchFamily="34" charset="-122"/>
+                <a:cs typeface="Cambria" pitchFamily="34" charset="-120"/>
+              </a:rPr>
+              <a:t>Attention aux zéros mécaniques</a:t>
+            </a:r>
+            <a:endParaRPr lang="en-US" sz="1700" dirty="0"/>
+          </a:p>
+        </p:txBody>
+      </p:sp>
+      <p:sp>
+        <p:nvSpPr>
+          <p:cNvPr id="23" name="Text 21"/>
+          <p:cNvSpPr/>
+          <p:nvPr/>
+        </p:nvSpPr>
+        <p:spPr>
+          <a:xfrm>
+            <a:off x="6647688" y="4892040"/>
+            <a:ext cx="4572000" cy="868680"/>
+          </a:xfrm>
+          <a:prstGeom prst="rect">
+            <a:avLst/>
+          </a:prstGeom>
+          <a:noFill/>
+          <a:ln/>
+        </p:spPr>
+        <p:txBody>
+          <a:bodyPr wrap="square" lIns="0" tIns="0" rIns="0" bIns="0" rtlCol="0" anchor="t"/>
+          <a:lstStyle/>
+          <a:p>
+            <a:pPr marL="0" indent="0">
+              <a:lnSpc>
+                <a:spcPct val="115000"/>
+              </a:lnSpc>
+              <a:buNone/>
+            </a:pPr>
+            <a:r>
+              <a:rPr lang="en-US" sz="1300" dirty="0">
+                <a:solidFill>
+                  <a:srgbClr val="1F2A1F"/>
+                </a:solidFill>
+                <a:latin typeface="Calibri" pitchFamily="34" charset="0"/>
+                <a:ea typeface="Calibri" pitchFamily="34" charset="-122"/>
+                <a:cs typeface="Calibri" pitchFamily="34" charset="-120"/>
+              </a:rPr>
+              <a:t>Le résidu moyen par modalité d'une variable présente dans le modèle est nul par construction. Ça ne démontre rien.</a:t>
+            </a:r>
+            <a:endParaRPr lang="en-US" sz="1300" dirty="0"/>
+          </a:p>
+        </p:txBody>
+      </p:sp>
+    </p:spTree>
+  </p:cSld>
+  <p:clrMapOvr>
+    <a:masterClrMapping/>
+  </p:clrMapOvr>
+</p:sld>
+</file>
+
+<file path=ppt/slides/slide21.xml><?xml version="1.0" encoding="utf-8"?>
+<p:sld xmlns:a="http://schemas.openxmlformats.org/drawingml/2006/main" xmlns:r="http://schemas.openxmlformats.org/officeDocument/2006/relationships" xmlns:p="http://schemas.openxmlformats.org/presentationml/2006/main">
   <p:cSld name="Slide 14">
     <p:spTree>
       <p:nvGrpSpPr>
@@ -10002,7 +10568,7 @@
 </p:sld>
 </file>
 
-<file path=ppt/slides/slide21.xml><?xml version="1.0" encoding="utf-8"?>
+<file path=ppt/slides/slide22.xml><?xml version="1.0" encoding="utf-8"?>
 <p:sld xmlns:a="http://schemas.openxmlformats.org/drawingml/2006/main" xmlns:r="http://schemas.openxmlformats.org/officeDocument/2006/relationships" xmlns:p="http://schemas.openxmlformats.org/presentationml/2006/main">
   <p:cSld name="Slide 15">
     <p:bg>
@@ -10466,7 +11032,7 @@
                 <a:ea typeface="Calibri" pitchFamily="34" charset="-122"/>
                 <a:cs typeface="Calibri" pitchFamily="34" charset="-120"/>
               </a:rPr>
-              <a:t>Prochaine étape : classification — une cible binaire, une autre fonction de coût, d'autres métriques que le R².</a:t>
+              <a:t>Même en classification, le fil rouge ne change pas : vérifier, situer, rendre reproductible.</a:t>
             </a:r>
             <a:endParaRPr lang="en-US" sz="1250" dirty="0"/>
           </a:p>
@@ -10480,27 +11046,20 @@
 </p:sld>
 </file>
 
-<file path=ppt/slides/slide22.xml><?xml version="1.0" encoding="utf-8"?>
-<p:sld xmlns:a="http://schemas.openxmlformats.org/drawingml/2006/main" xmlns:r="http://schemas.openxmlformats.org/officeDocument/2006/relationships" xmlns:p="http://schemas.openxmlformats.org/presentationml/2006/main">
-  <p:cSld name="Slide 12">
+<file path=ppt/slides/slide23.xml><?xml version="1.0" encoding="utf-8"?>
+<p:sld xmlns:a="http://schemas.openxmlformats.org/drawingml/2006/main" xmlns:p="http://schemas.openxmlformats.org/presentationml/2006/main" xmlns:r="http://schemas.openxmlformats.org/officeDocument/2006/relationships">
+  <p:cSld>
     <p:spTree>
       <p:nvGrpSpPr>
         <p:cNvPr id="1" name=""/>
         <p:cNvGrpSpPr/>
         <p:nvPr/>
       </p:nvGrpSpPr>
-      <p:grpSpPr>
-        <a:xfrm>
-          <a:off x="0" y="0"/>
-          <a:ext cx="0" cy="0"/>
-          <a:chOff x="0" y="0"/>
-          <a:chExt cx="0" cy="0"/>
-        </a:xfrm>
-      </p:grpSpPr>
-      <p:sp>
-        <p:nvSpPr>
-          <p:cNvPr id="2" name="Text 0"/>
-          <p:cNvSpPr/>
+      <p:grpSpPr/>
+      <p:sp>
+        <p:nvSpPr>
+          <p:cNvPr id="2" name="TextBox 1"/>
+          <p:cNvSpPr txBox="1"/>
           <p:nvPr/>
         </p:nvSpPr>
         <p:spPr>
@@ -10512,34 +11071,32 @@
             <a:avLst/>
           </a:prstGeom>
           <a:noFill/>
-          <a:ln/>
-        </p:spPr>
-        <p:txBody>
-          <a:bodyPr wrap="square" lIns="0" tIns="0" rIns="0" bIns="0" rtlCol="0" anchor="ctr"/>
-          <a:lstStyle/>
-          <a:p>
-            <a:pPr marL="0" indent="0">
-              <a:buNone/>
-            </a:pPr>
-            <a:r>
-              <a:rPr lang="en-US" sz="3400" b="1" dirty="0">
+        </p:spPr>
+        <p:txBody>
+          <a:bodyPr wrap="square" lIns="0" rIns="0" tIns="0" bIns="0" anchor="ctr">
+            <a:spAutoFit/>
+          </a:bodyPr>
+          <a:lstStyle/>
+          <a:p>
+            <a:pPr marL="0" indent="0">
+              <a:buNone/>
+            </a:pPr>
+            <a:r>
+              <a:rPr sz="3400" b="1" i="0">
                 <a:solidFill>
                   <a:srgbClr val="1F2A1F"/>
                 </a:solidFill>
-                <a:latin typeface="Cambria" pitchFamily="34" charset="0"/>
-                <a:ea typeface="Cambria" pitchFamily="34" charset="-122"/>
-                <a:cs typeface="Cambria" pitchFamily="34" charset="-120"/>
-              </a:rPr>
-              <a:t>La préparation fait partie du modèle</a:t>
-            </a:r>
-            <a:endParaRPr lang="en-US" sz="3400" dirty="0"/>
-          </a:p>
-        </p:txBody>
-      </p:sp>
-      <p:sp>
-        <p:nvSpPr>
-          <p:cNvPr id="3" name="Text 1"/>
-          <p:cNvSpPr/>
+                <a:latin typeface="Cambria"/>
+              </a:rPr>
+              <a:t>Classer, ou prédire puis seuiller</a:t>
+            </a:r>
+          </a:p>
+        </p:txBody>
+      </p:sp>
+      <p:sp>
+        <p:nvSpPr>
+          <p:cNvPr id="3" name="TextBox 2"/>
+          <p:cNvSpPr txBox="1"/>
           <p:nvPr/>
         </p:nvSpPr>
         <p:spPr>
@@ -10551,44 +11108,42 @@
             <a:avLst/>
           </a:prstGeom>
           <a:noFill/>
-          <a:ln/>
-        </p:spPr>
-        <p:txBody>
-          <a:bodyPr wrap="square" lIns="0" tIns="0" rIns="0" bIns="0" rtlCol="0" anchor="ctr"/>
-          <a:lstStyle/>
-          <a:p>
-            <a:pPr marL="0" indent="0">
-              <a:buNone/>
-            </a:pPr>
-            <a:r>
-              <a:rPr lang="en-US" sz="1400" i="1" dirty="0">
+        </p:spPr>
+        <p:txBody>
+          <a:bodyPr wrap="square" lIns="0" rIns="0" tIns="0" bIns="0" anchor="ctr">
+            <a:spAutoFit/>
+          </a:bodyPr>
+          <a:lstStyle/>
+          <a:p>
+            <a:pPr marL="0" indent="0">
+              <a:buNone/>
+            </a:pPr>
+            <a:r>
+              <a:rPr sz="1400" b="0" i="1">
                 <a:solidFill>
                   <a:srgbClr val="5E6E5E"/>
                 </a:solidFill>
-                <a:latin typeface="Calibri" pitchFamily="34" charset="0"/>
-                <a:ea typeface="Calibri" pitchFamily="34" charset="-122"/>
-                <a:cs typeface="Calibri" pitchFamily="34" charset="-120"/>
-              </a:rPr>
-              <a:t>Une fuite peut venir du code, pas seulement des données</a:t>
-            </a:r>
-            <a:endParaRPr lang="en-US" sz="1400" dirty="0"/>
-          </a:p>
-        </p:txBody>
-      </p:sp>
-      <p:sp>
-        <p:nvSpPr>
-          <p:cNvPr id="4" name="Shape 2"/>
-          <p:cNvSpPr/>
-          <p:nvPr/>
-        </p:nvSpPr>
-        <p:spPr>
-          <a:xfrm>
-            <a:off x="640080" y="1737360"/>
-            <a:ext cx="3538728" cy="2377440"/>
+                <a:latin typeface="Calibri"/>
+              </a:rPr>
+              <a:t>Deux chemins vers la même décision binaire — et ils se valent</a:t>
+            </a:r>
+          </a:p>
+        </p:txBody>
+      </p:sp>
+      <p:sp>
+        <p:nvSpPr>
+          <p:cNvPr id="4" name="Rounded Rectangle 3"/>
+          <p:cNvSpPr/>
+          <p:nvPr/>
+        </p:nvSpPr>
+        <p:spPr>
+          <a:xfrm>
+            <a:off x="640080" y="1691640"/>
+            <a:ext cx="5166360" cy="1828800"/>
           </a:xfrm>
           <a:prstGeom prst="roundRect">
             <a:avLst>
-              <a:gd name="adj" fmla="val 3077"/>
+              <a:gd name="adj" fmla="val 4000"/>
             </a:avLst>
           </a:prstGeom>
           <a:solidFill>
@@ -10598,75 +11153,88 @@
             <a:solidFill>
               <a:srgbClr val="EDF2E6"/>
             </a:solidFill>
-            <a:prstDash val="solid"/>
           </a:ln>
-        </p:spPr>
-        <p:txBody>
-          <a:bodyPr/>
-          <a:lstStyle/>
-          <a:p>
-            <a:endParaRPr lang="en-US"/>
-          </a:p>
-        </p:txBody>
-      </p:sp>
-      <p:sp>
-        <p:nvSpPr>
-          <p:cNvPr id="5" name="Text 3"/>
-          <p:cNvSpPr/>
-          <p:nvPr/>
-        </p:nvSpPr>
-        <p:spPr>
-          <a:xfrm>
-            <a:off x="914400" y="1920240"/>
-            <a:ext cx="3017520" cy="502920"/>
-          </a:xfrm>
-          <a:prstGeom prst="rect">
-            <a:avLst/>
-          </a:prstGeom>
-          <a:noFill/>
-          <a:ln/>
-        </p:spPr>
-        <p:txBody>
-          <a:bodyPr wrap="square" lIns="0" tIns="0" rIns="0" bIns="0" rtlCol="0" anchor="ctr"/>
-          <a:lstStyle/>
-          <a:p>
-            <a:pPr marL="0" indent="0">
-              <a:buNone/>
-            </a:pPr>
-            <a:r>
-              <a:rPr lang="en-US" sz="2400" b="1" dirty="0">
+          <a:effectLst/>
+        </p:spPr>
+        <p:style>
+          <a:lnRef idx="1">
+            <a:schemeClr val="accent1"/>
+          </a:lnRef>
+          <a:fillRef idx="3">
+            <a:schemeClr val="accent1"/>
+          </a:fillRef>
+          <a:effectRef idx="2">
+            <a:schemeClr val="accent1"/>
+          </a:effectRef>
+          <a:fontRef idx="minor">
+            <a:schemeClr val="lt1"/>
+          </a:fontRef>
+        </p:style>
+        <p:txBody>
+          <a:bodyPr rtlCol="0" anchor="ctr" wrap="square"/>
+          <a:lstStyle/>
+          <a:p>
+            <a:pPr algn="ctr"/>
+          </a:p>
+        </p:txBody>
+      </p:sp>
+      <p:sp>
+        <p:nvSpPr>
+          <p:cNvPr id="5" name="TextBox 4"/>
+          <p:cNvSpPr txBox="1"/>
+          <p:nvPr/>
+        </p:nvSpPr>
+        <p:spPr>
+          <a:xfrm>
+            <a:off x="960120" y="1874519"/>
+            <a:ext cx="4389120" cy="310896"/>
+          </a:xfrm>
+          <a:prstGeom prst="rect">
+            <a:avLst/>
+          </a:prstGeom>
+          <a:noFill/>
+        </p:spPr>
+        <p:txBody>
+          <a:bodyPr wrap="square" lIns="0" rIns="0" tIns="0" bIns="0" anchor="ctr">
+            <a:spAutoFit/>
+          </a:bodyPr>
+          <a:lstStyle/>
+          <a:p>
+            <a:pPr marL="0" indent="0">
+              <a:buNone/>
+            </a:pPr>
+            <a:r>
+              <a:rPr sz="1700" b="1" i="0">
                 <a:solidFill>
                   <a:srgbClr val="2C5F2D"/>
                 </a:solidFill>
-                <a:latin typeface="Cambria" pitchFamily="34" charset="0"/>
-                <a:ea typeface="Cambria" pitchFamily="34" charset="-122"/>
-                <a:cs typeface="Cambria" pitchFamily="34" charset="-120"/>
-              </a:rPr>
-              <a:t>Le symptôme</a:t>
-            </a:r>
-            <a:endParaRPr lang="en-US" sz="2400" dirty="0"/>
-          </a:p>
-        </p:txBody>
-      </p:sp>
-      <p:sp>
-        <p:nvSpPr>
-          <p:cNvPr id="6" name="Text 4"/>
-          <p:cNvSpPr/>
-          <p:nvPr/>
-        </p:nvSpPr>
-        <p:spPr>
-          <a:xfrm>
-            <a:off x="914400" y="2542032"/>
-            <a:ext cx="3017520" cy="1371600"/>
-          </a:xfrm>
-          <a:prstGeom prst="rect">
-            <a:avLst/>
-          </a:prstGeom>
-          <a:noFill/>
-          <a:ln/>
-        </p:spPr>
-        <p:txBody>
-          <a:bodyPr wrap="square" lIns="0" tIns="0" rIns="0" bIns="0" rtlCol="0" anchor="t"/>
+                <a:latin typeface="Cambria"/>
+              </a:rPr>
+              <a:t>Classer directement</a:t>
+            </a:r>
+          </a:p>
+        </p:txBody>
+      </p:sp>
+      <p:sp>
+        <p:nvSpPr>
+          <p:cNvPr id="6" name="TextBox 5"/>
+          <p:cNvSpPr txBox="1"/>
+          <p:nvPr/>
+        </p:nvSpPr>
+        <p:spPr>
+          <a:xfrm>
+            <a:off x="960120" y="2304288"/>
+            <a:ext cx="4572000" cy="777240"/>
+          </a:xfrm>
+          <a:prstGeom prst="rect">
+            <a:avLst/>
+          </a:prstGeom>
+          <a:noFill/>
+        </p:spPr>
+        <p:txBody>
+          <a:bodyPr wrap="square" lIns="0" rIns="0" tIns="0" bIns="0" anchor="t">
+            <a:spAutoFit/>
+          </a:bodyPr>
           <a:lstStyle/>
           <a:p>
             <a:pPr marL="0" indent="0">
@@ -10676,34 +11244,230 @@
               <a:buNone/>
             </a:pPr>
             <a:r>
-              <a:rPr lang="en-US" sz="1200" dirty="0">
+              <a:rPr sz="1200" b="0" i="0">
                 <a:solidFill>
                   <a:srgbClr val="1F2A1F"/>
                 </a:solidFill>
-                <a:latin typeface="Calibri" pitchFamily="34" charset="0"/>
-                <a:ea typeface="Calibri" pitchFamily="34" charset="-122"/>
-                <a:cs typeface="Calibri" pitchFamily="34" charset="-120"/>
-              </a:rPr>
-              <a:t>Un score de test trop beau, jamais retrouvé ensuite. Rien ne plante, rien n'avertit : le chiffre est simplement faux.</a:t>
-            </a:r>
-            <a:endParaRPr lang="en-US" sz="1200" dirty="0"/>
-          </a:p>
-        </p:txBody>
-      </p:sp>
-      <p:sp>
-        <p:nvSpPr>
-          <p:cNvPr id="7" name="Shape 5"/>
-          <p:cNvSpPr/>
-          <p:nvPr/>
-        </p:nvSpPr>
-        <p:spPr>
-          <a:xfrm>
-            <a:off x="4361688" y="1737360"/>
-            <a:ext cx="3538728" cy="2377440"/>
+                <a:latin typeface="Calibri"/>
+              </a:rPr>
+              <a:t>Le modèle ajuste la frontière elle-même et reste conservateur. Il est plus précis : quand il annonce un malus, il se trompe moins souvent.</a:t>
+            </a:r>
+          </a:p>
+        </p:txBody>
+      </p:sp>
+      <p:sp>
+        <p:nvSpPr>
+          <p:cNvPr id="7" name="TextBox 6"/>
+          <p:cNvSpPr txBox="1"/>
+          <p:nvPr/>
+        </p:nvSpPr>
+        <p:spPr>
+          <a:xfrm>
+            <a:off x="960120" y="3108960"/>
+            <a:ext cx="4572000" cy="274320"/>
+          </a:xfrm>
+          <a:prstGeom prst="rect">
+            <a:avLst/>
+          </a:prstGeom>
+          <a:noFill/>
+        </p:spPr>
+        <p:txBody>
+          <a:bodyPr wrap="square" lIns="0" rIns="0" tIns="0" bIns="0" anchor="ctr">
+            <a:spAutoFit/>
+          </a:bodyPr>
+          <a:lstStyle/>
+          <a:p>
+            <a:pPr marL="0" indent="0">
+              <a:buNone/>
+            </a:pPr>
+            <a:r>
+              <a:rPr sz="1150" b="1" i="0">
+                <a:solidFill>
+                  <a:srgbClr val="2C5F2D"/>
+                </a:solidFill>
+                <a:latin typeface="Calibri"/>
+              </a:rPr>
+              <a:t>Precision 88,6 %   ·   Recall 85,4 %</a:t>
+            </a:r>
+          </a:p>
+        </p:txBody>
+      </p:sp>
+      <p:sp>
+        <p:nvSpPr>
+          <p:cNvPr id="8" name="Rounded Rectangle 7"/>
+          <p:cNvSpPr/>
+          <p:nvPr/>
+        </p:nvSpPr>
+        <p:spPr>
+          <a:xfrm>
+            <a:off x="6355080" y="1691640"/>
+            <a:ext cx="5166360" cy="1828800"/>
           </a:xfrm>
           <a:prstGeom prst="roundRect">
             <a:avLst>
-              <a:gd name="adj" fmla="val 3077"/>
+              <a:gd name="adj" fmla="val 4000"/>
+            </a:avLst>
+          </a:prstGeom>
+          <a:solidFill>
+            <a:srgbClr val="1A3A1C"/>
+          </a:solidFill>
+          <a:ln w="12700">
+            <a:solidFill>
+              <a:srgbClr val="1A3A1C"/>
+            </a:solidFill>
+          </a:ln>
+          <a:effectLst/>
+        </p:spPr>
+        <p:style>
+          <a:lnRef idx="1">
+            <a:schemeClr val="accent1"/>
+          </a:lnRef>
+          <a:fillRef idx="3">
+            <a:schemeClr val="accent1"/>
+          </a:fillRef>
+          <a:effectRef idx="2">
+            <a:schemeClr val="accent1"/>
+          </a:effectRef>
+          <a:fontRef idx="minor">
+            <a:schemeClr val="lt1"/>
+          </a:fontRef>
+        </p:style>
+        <p:txBody>
+          <a:bodyPr rtlCol="0" anchor="ctr" wrap="square"/>
+          <a:lstStyle/>
+          <a:p>
+            <a:pPr algn="ctr"/>
+          </a:p>
+        </p:txBody>
+      </p:sp>
+      <p:sp>
+        <p:nvSpPr>
+          <p:cNvPr id="9" name="TextBox 8"/>
+          <p:cNvSpPr txBox="1"/>
+          <p:nvPr/>
+        </p:nvSpPr>
+        <p:spPr>
+          <a:xfrm>
+            <a:off x="6675120" y="1874519"/>
+            <a:ext cx="4389120" cy="310896"/>
+          </a:xfrm>
+          <a:prstGeom prst="rect">
+            <a:avLst/>
+          </a:prstGeom>
+          <a:noFill/>
+        </p:spPr>
+        <p:txBody>
+          <a:bodyPr wrap="square" lIns="0" rIns="0" tIns="0" bIns="0" anchor="ctr">
+            <a:spAutoFit/>
+          </a:bodyPr>
+          <a:lstStyle/>
+          <a:p>
+            <a:pPr marL="0" indent="0">
+              <a:buNone/>
+            </a:pPr>
+            <a:r>
+              <a:rPr sz="1700" b="1" i="0">
+                <a:solidFill>
+                  <a:srgbClr val="97BC62"/>
+                </a:solidFill>
+                <a:latin typeface="Cambria"/>
+              </a:rPr>
+              <a:t>Prédire, puis seuiller</a:t>
+            </a:r>
+          </a:p>
+        </p:txBody>
+      </p:sp>
+      <p:sp>
+        <p:nvSpPr>
+          <p:cNvPr id="10" name="TextBox 9"/>
+          <p:cNvSpPr txBox="1"/>
+          <p:nvPr/>
+        </p:nvSpPr>
+        <p:spPr>
+          <a:xfrm>
+            <a:off x="6675120" y="2304288"/>
+            <a:ext cx="4572000" cy="777240"/>
+          </a:xfrm>
+          <a:prstGeom prst="rect">
+            <a:avLst/>
+          </a:prstGeom>
+          <a:noFill/>
+        </p:spPr>
+        <p:txBody>
+          <a:bodyPr wrap="square" lIns="0" rIns="0" tIns="0" bIns="0" anchor="t">
+            <a:spAutoFit/>
+          </a:bodyPr>
+          <a:lstStyle/>
+          <a:p>
+            <a:pPr marL="0" indent="0">
+              <a:lnSpc>
+                <a:spcPct val="115000"/>
+              </a:lnSpc>
+              <a:buNone/>
+            </a:pPr>
+            <a:r>
+              <a:rPr sz="1200" b="0" i="0">
+                <a:solidFill>
+                  <a:srgbClr val="FFFFFF"/>
+                </a:solidFill>
+                <a:latin typeface="Calibri"/>
+              </a:rPr>
+              <a:t>Le modèle prédit des grammes. Son erreur moyenne (≈ 13 g/km) lui fait franchir le seuil plus facilement : il manque moins de malus réels.</a:t>
+            </a:r>
+          </a:p>
+        </p:txBody>
+      </p:sp>
+      <p:sp>
+        <p:nvSpPr>
+          <p:cNvPr id="11" name="TextBox 10"/>
+          <p:cNvSpPr txBox="1"/>
+          <p:nvPr/>
+        </p:nvSpPr>
+        <p:spPr>
+          <a:xfrm>
+            <a:off x="6675120" y="3108960"/>
+            <a:ext cx="4572000" cy="274320"/>
+          </a:xfrm>
+          <a:prstGeom prst="rect">
+            <a:avLst/>
+          </a:prstGeom>
+          <a:noFill/>
+        </p:spPr>
+        <p:txBody>
+          <a:bodyPr wrap="square" lIns="0" rIns="0" tIns="0" bIns="0" anchor="ctr">
+            <a:spAutoFit/>
+          </a:bodyPr>
+          <a:lstStyle/>
+          <a:p>
+            <a:pPr marL="0" indent="0">
+              <a:buNone/>
+            </a:pPr>
+            <a:r>
+              <a:rPr sz="1150" b="1" i="0">
+                <a:solidFill>
+                  <a:srgbClr val="97BC62"/>
+                </a:solidFill>
+                <a:latin typeface="Calibri"/>
+              </a:rPr>
+              <a:t>Precision 85,3 %   ·   Recall 88,8 %</a:t>
+            </a:r>
+          </a:p>
+        </p:txBody>
+      </p:sp>
+      <p:sp>
+        <p:nvSpPr>
+          <p:cNvPr id="12" name="Rounded Rectangle 11"/>
+          <p:cNvSpPr/>
+          <p:nvPr/>
+        </p:nvSpPr>
+        <p:spPr>
+          <a:xfrm>
+            <a:off x="640080" y="3749039"/>
+            <a:ext cx="10881360" cy="1005840"/>
+          </a:xfrm>
+          <a:prstGeom prst="roundRect">
+            <a:avLst>
+              <a:gd name="adj" fmla="val 7273"/>
             </a:avLst>
           </a:prstGeom>
           <a:solidFill>
@@ -10713,112 +11477,230 @@
             <a:solidFill>
               <a:srgbClr val="EDF2E6"/>
             </a:solidFill>
-            <a:prstDash val="solid"/>
           </a:ln>
-        </p:spPr>
-        <p:txBody>
-          <a:bodyPr/>
-          <a:lstStyle/>
-          <a:p>
-            <a:endParaRPr lang="en-US"/>
-          </a:p>
-        </p:txBody>
-      </p:sp>
-      <p:sp>
-        <p:nvSpPr>
-          <p:cNvPr id="8" name="Text 6"/>
-          <p:cNvSpPr/>
-          <p:nvPr/>
-        </p:nvSpPr>
-        <p:spPr>
-          <a:xfrm>
-            <a:off x="4636008" y="1920240"/>
-            <a:ext cx="3017520" cy="502920"/>
-          </a:xfrm>
-          <a:prstGeom prst="rect">
-            <a:avLst/>
-          </a:prstGeom>
-          <a:noFill/>
-          <a:ln/>
-        </p:spPr>
-        <p:txBody>
-          <a:bodyPr wrap="square" lIns="0" tIns="0" rIns="0" bIns="0" rtlCol="0" anchor="ctr"/>
-          <a:lstStyle/>
-          <a:p>
-            <a:pPr marL="0" indent="0">
-              <a:buNone/>
-            </a:pPr>
-            <a:r>
-              <a:rPr lang="en-US" sz="2400" b="1" dirty="0">
+          <a:effectLst/>
+        </p:spPr>
+        <p:style>
+          <a:lnRef idx="1">
+            <a:schemeClr val="accent1"/>
+          </a:lnRef>
+          <a:fillRef idx="3">
+            <a:schemeClr val="accent1"/>
+          </a:fillRef>
+          <a:effectRef idx="2">
+            <a:schemeClr val="accent1"/>
+          </a:effectRef>
+          <a:fontRef idx="minor">
+            <a:schemeClr val="lt1"/>
+          </a:fontRef>
+        </p:style>
+        <p:txBody>
+          <a:bodyPr rtlCol="0" anchor="ctr" wrap="square"/>
+          <a:lstStyle/>
+          <a:p>
+            <a:pPr algn="ctr"/>
+          </a:p>
+        </p:txBody>
+      </p:sp>
+      <p:sp>
+        <p:nvSpPr>
+          <p:cNvPr id="13" name="TextBox 12"/>
+          <p:cNvSpPr txBox="1"/>
+          <p:nvPr/>
+        </p:nvSpPr>
+        <p:spPr>
+          <a:xfrm>
+            <a:off x="1005840" y="3886200"/>
+            <a:ext cx="2743200" cy="685800"/>
+          </a:xfrm>
+          <a:prstGeom prst="rect">
+            <a:avLst/>
+          </a:prstGeom>
+          <a:noFill/>
+        </p:spPr>
+        <p:txBody>
+          <a:bodyPr wrap="square" lIns="0" rIns="0" tIns="0" bIns="0" anchor="ctr">
+            <a:spAutoFit/>
+          </a:bodyPr>
+          <a:lstStyle/>
+          <a:p>
+            <a:pPr marL="0" indent="0">
+              <a:buNone/>
+            </a:pPr>
+            <a:r>
+              <a:rPr sz="3200" b="1" i="0">
+                <a:solidFill>
+                  <a:srgbClr val="5E6E5E"/>
+                </a:solidFill>
+                <a:latin typeface="Cambria"/>
+              </a:rPr>
+              <a:t>87,0 %</a:t>
+            </a:r>
+          </a:p>
+        </p:txBody>
+      </p:sp>
+      <p:sp>
+        <p:nvSpPr>
+          <p:cNvPr id="14" name="TextBox 13"/>
+          <p:cNvSpPr txBox="1"/>
+          <p:nvPr/>
+        </p:nvSpPr>
+        <p:spPr>
+          <a:xfrm>
+            <a:off x="1005840" y="4462272"/>
+            <a:ext cx="3291840" cy="274320"/>
+          </a:xfrm>
+          <a:prstGeom prst="rect">
+            <a:avLst/>
+          </a:prstGeom>
+          <a:noFill/>
+        </p:spPr>
+        <p:txBody>
+          <a:bodyPr wrap="square" lIns="0" rIns="0" tIns="0" bIns="0" anchor="ctr">
+            <a:spAutoFit/>
+          </a:bodyPr>
+          <a:lstStyle/>
+          <a:p>
+            <a:pPr marL="0" indent="0">
+              <a:buNone/>
+            </a:pPr>
+            <a:r>
+              <a:rPr sz="1150" b="0" i="0">
+                <a:solidFill>
+                  <a:srgbClr val="5E6E5E"/>
+                </a:solidFill>
+                <a:latin typeface="Calibri"/>
+              </a:rPr>
+              <a:t>F1 de la classification directe</a:t>
+            </a:r>
+          </a:p>
+        </p:txBody>
+      </p:sp>
+      <p:sp>
+        <p:nvSpPr>
+          <p:cNvPr id="15" name="TextBox 14"/>
+          <p:cNvSpPr txBox="1"/>
+          <p:nvPr/>
+        </p:nvSpPr>
+        <p:spPr>
+          <a:xfrm>
+            <a:off x="4480560" y="3977639"/>
+            <a:ext cx="731520" cy="457200"/>
+          </a:xfrm>
+          <a:prstGeom prst="rect">
+            <a:avLst/>
+          </a:prstGeom>
+          <a:noFill/>
+        </p:spPr>
+        <p:txBody>
+          <a:bodyPr wrap="square" lIns="0" rIns="0" tIns="0" bIns="0" anchor="ctr">
+            <a:spAutoFit/>
+          </a:bodyPr>
+          <a:lstStyle/>
+          <a:p>
+            <a:pPr marL="0" indent="0" algn="ctr">
+              <a:buNone/>
+            </a:pPr>
+            <a:r>
+              <a:rPr sz="2600" b="1" i="0">
+                <a:solidFill>
+                  <a:srgbClr val="97BC62"/>
+                </a:solidFill>
+                <a:latin typeface="Calibri"/>
+              </a:rPr>
+              <a:t>=</a:t>
+            </a:r>
+          </a:p>
+        </p:txBody>
+      </p:sp>
+      <p:sp>
+        <p:nvSpPr>
+          <p:cNvPr id="16" name="TextBox 15"/>
+          <p:cNvSpPr txBox="1"/>
+          <p:nvPr/>
+        </p:nvSpPr>
+        <p:spPr>
+          <a:xfrm>
+            <a:off x="5669280" y="3886200"/>
+            <a:ext cx="2743200" cy="685800"/>
+          </a:xfrm>
+          <a:prstGeom prst="rect">
+            <a:avLst/>
+          </a:prstGeom>
+          <a:noFill/>
+        </p:spPr>
+        <p:txBody>
+          <a:bodyPr wrap="square" lIns="0" rIns="0" tIns="0" bIns="0" anchor="ctr">
+            <a:spAutoFit/>
+          </a:bodyPr>
+          <a:lstStyle/>
+          <a:p>
+            <a:pPr marL="0" indent="0">
+              <a:buNone/>
+            </a:pPr>
+            <a:r>
+              <a:rPr sz="3200" b="1" i="0">
                 <a:solidFill>
                   <a:srgbClr val="2C5F2D"/>
                 </a:solidFill>
-                <a:latin typeface="Cambria" pitchFamily="34" charset="0"/>
-                <a:ea typeface="Cambria" pitchFamily="34" charset="-122"/>
-                <a:cs typeface="Cambria" pitchFamily="34" charset="-120"/>
-              </a:rPr>
-              <a:t>La cause</a:t>
-            </a:r>
-            <a:endParaRPr lang="en-US" sz="2400" dirty="0"/>
-          </a:p>
-        </p:txBody>
-      </p:sp>
-      <p:sp>
-        <p:nvSpPr>
-          <p:cNvPr id="9" name="Text 7"/>
-          <p:cNvSpPr/>
-          <p:nvPr/>
-        </p:nvSpPr>
-        <p:spPr>
-          <a:xfrm>
-            <a:off x="4636008" y="2542032"/>
-            <a:ext cx="3017520" cy="1371600"/>
-          </a:xfrm>
-          <a:prstGeom prst="rect">
-            <a:avLst/>
-          </a:prstGeom>
-          <a:noFill/>
-          <a:ln/>
-        </p:spPr>
-        <p:txBody>
-          <a:bodyPr wrap="square" lIns="0" tIns="0" rIns="0" bIns="0" rtlCol="0" anchor="t"/>
-          <a:lstStyle/>
-          <a:p>
-            <a:pPr marL="0" indent="0">
-              <a:lnSpc>
-                <a:spcPct val="115000"/>
-              </a:lnSpc>
-              <a:buNone/>
-            </a:pPr>
-            <a:r>
-              <a:rPr lang="en-US" sz="1200" dirty="0">
+                <a:latin typeface="Cambria"/>
+              </a:rPr>
+              <a:t>87,0 %</a:t>
+            </a:r>
+          </a:p>
+        </p:txBody>
+      </p:sp>
+      <p:sp>
+        <p:nvSpPr>
+          <p:cNvPr id="17" name="TextBox 16"/>
+          <p:cNvSpPr txBox="1"/>
+          <p:nvPr/>
+        </p:nvSpPr>
+        <p:spPr>
+          <a:xfrm>
+            <a:off x="5669280" y="4462272"/>
+            <a:ext cx="5029200" cy="274320"/>
+          </a:xfrm>
+          <a:prstGeom prst="rect">
+            <a:avLst/>
+          </a:prstGeom>
+          <a:noFill/>
+        </p:spPr>
+        <p:txBody>
+          <a:bodyPr wrap="square" lIns="0" rIns="0" tIns="0" bIns="0" anchor="ctr">
+            <a:spAutoFit/>
+          </a:bodyPr>
+          <a:lstStyle/>
+          <a:p>
+            <a:pPr marL="0" indent="0">
+              <a:buNone/>
+            </a:pPr>
+            <a:r>
+              <a:rPr sz="1150" b="0" i="0">
                 <a:solidFill>
                   <a:srgbClr val="1F2A1F"/>
                 </a:solidFill>
-                <a:latin typeface="Calibri" pitchFamily="34" charset="0"/>
-                <a:ea typeface="Calibri" pitchFamily="34" charset="-122"/>
-                <a:cs typeface="Calibri" pitchFamily="34" charset="-120"/>
-              </a:rPr>
-              <a:t>μ et σ calculés sur tout X avant le découpage. L'information du jeu de test entre dans la préparation, donc dans le modèle.</a:t>
-            </a:r>
-            <a:endParaRPr lang="en-US" sz="1200" dirty="0"/>
-          </a:p>
-        </p:txBody>
-      </p:sp>
-      <p:sp>
-        <p:nvSpPr>
-          <p:cNvPr id="10" name="Shape 8"/>
-          <p:cNvSpPr/>
-          <p:nvPr/>
-        </p:nvSpPr>
-        <p:spPr>
-          <a:xfrm>
-            <a:off x="8083296" y="1737360"/>
-            <a:ext cx="3538728" cy="2377440"/>
+                <a:latin typeface="Calibri"/>
+              </a:rPr>
+              <a:t>F1 de la régression + seuil</a:t>
+            </a:r>
+          </a:p>
+        </p:txBody>
+      </p:sp>
+      <p:sp>
+        <p:nvSpPr>
+          <p:cNvPr id="18" name="Rounded Rectangle 17"/>
+          <p:cNvSpPr/>
+          <p:nvPr/>
+        </p:nvSpPr>
+        <p:spPr>
+          <a:xfrm>
+            <a:off x="640080" y="4983480"/>
+            <a:ext cx="10881360" cy="777240"/>
           </a:xfrm>
           <a:prstGeom prst="roundRect">
             <a:avLst>
-              <a:gd name="adj" fmla="val 3077"/>
+              <a:gd name="adj" fmla="val 9412"/>
             </a:avLst>
           </a:prstGeom>
           <a:solidFill>
@@ -10828,75 +11710,51 @@
             <a:solidFill>
               <a:srgbClr val="EDF2E6"/>
             </a:solidFill>
-            <a:prstDash val="solid"/>
           </a:ln>
-        </p:spPr>
-        <p:txBody>
-          <a:bodyPr/>
-          <a:lstStyle/>
-          <a:p>
-            <a:endParaRPr lang="en-US"/>
-          </a:p>
-        </p:txBody>
-      </p:sp>
-      <p:sp>
-        <p:nvSpPr>
-          <p:cNvPr id="11" name="Text 9"/>
-          <p:cNvSpPr/>
-          <p:nvPr/>
-        </p:nvSpPr>
-        <p:spPr>
-          <a:xfrm>
-            <a:off x="8357616" y="1920240"/>
-            <a:ext cx="3017520" cy="502920"/>
-          </a:xfrm>
-          <a:prstGeom prst="rect">
-            <a:avLst/>
-          </a:prstGeom>
-          <a:noFill/>
-          <a:ln/>
-        </p:spPr>
-        <p:txBody>
-          <a:bodyPr wrap="square" lIns="0" tIns="0" rIns="0" bIns="0" rtlCol="0" anchor="ctr"/>
-          <a:lstStyle/>
-          <a:p>
-            <a:pPr marL="0" indent="0">
-              <a:buNone/>
-            </a:pPr>
-            <a:r>
-              <a:rPr lang="en-US" sz="2400" b="1" dirty="0">
-                <a:solidFill>
-                  <a:srgbClr val="C0562F"/>
-                </a:solidFill>
-                <a:latin typeface="Cambria" pitchFamily="34" charset="0"/>
-                <a:ea typeface="Cambria" pitchFamily="34" charset="-122"/>
-                <a:cs typeface="Cambria" pitchFamily="34" charset="-120"/>
-              </a:rPr>
-              <a:t>Le remède</a:t>
-            </a:r>
-            <a:endParaRPr lang="en-US" sz="2400" dirty="0"/>
-          </a:p>
-        </p:txBody>
-      </p:sp>
-      <p:sp>
-        <p:nvSpPr>
-          <p:cNvPr id="12" name="Text 10"/>
-          <p:cNvSpPr/>
-          <p:nvPr/>
-        </p:nvSpPr>
-        <p:spPr>
-          <a:xfrm>
-            <a:off x="8357616" y="2542032"/>
-            <a:ext cx="3017520" cy="1371600"/>
-          </a:xfrm>
-          <a:prstGeom prst="rect">
-            <a:avLst/>
-          </a:prstGeom>
-          <a:noFill/>
-          <a:ln/>
-        </p:spPr>
-        <p:txBody>
-          <a:bodyPr wrap="square" lIns="0" tIns="0" rIns="0" bIns="0" rtlCol="0" anchor="t"/>
+          <a:effectLst/>
+        </p:spPr>
+        <p:style>
+          <a:lnRef idx="1">
+            <a:schemeClr val="accent1"/>
+          </a:lnRef>
+          <a:fillRef idx="3">
+            <a:schemeClr val="accent1"/>
+          </a:fillRef>
+          <a:effectRef idx="2">
+            <a:schemeClr val="accent1"/>
+          </a:effectRef>
+          <a:fontRef idx="minor">
+            <a:schemeClr val="lt1"/>
+          </a:fontRef>
+        </p:style>
+        <p:txBody>
+          <a:bodyPr rtlCol="0" anchor="ctr" wrap="square"/>
+          <a:lstStyle/>
+          <a:p>
+            <a:pPr algn="ctr"/>
+          </a:p>
+        </p:txBody>
+      </p:sp>
+      <p:sp>
+        <p:nvSpPr>
+          <p:cNvPr id="19" name="TextBox 18"/>
+          <p:cNvSpPr txBox="1"/>
+          <p:nvPr/>
+        </p:nvSpPr>
+        <p:spPr>
+          <a:xfrm>
+            <a:off x="960120" y="5102352"/>
+            <a:ext cx="10241280" cy="539496"/>
+          </a:xfrm>
+          <a:prstGeom prst="rect">
+            <a:avLst/>
+          </a:prstGeom>
+          <a:noFill/>
+        </p:spPr>
+        <p:txBody>
+          <a:bodyPr wrap="square" lIns="0" rIns="0" tIns="0" bIns="0" anchor="ctr">
+            <a:spAutoFit/>
+          </a:bodyPr>
           <a:lstStyle/>
           <a:p>
             <a:pPr marL="0" indent="0">
@@ -10906,112 +11764,1290 @@
               <a:buNone/>
             </a:pPr>
             <a:r>
-              <a:rPr lang="en-US" sz="1200" dirty="0">
+              <a:rPr sz="1300" b="0" i="0">
                 <a:solidFill>
                   <a:srgbClr val="1F2A1F"/>
                 </a:solidFill>
-                <a:latin typeface="Calibri" pitchFamily="34" charset="0"/>
-                <a:ea typeface="Calibri" pitchFamily="34" charset="-122"/>
-                <a:cs typeface="Calibri" pitchFamily="34" charset="-120"/>
-              </a:rPr>
-              <a:t>Le pipeline : la préparation et l'estimateur deviennent un seul objet, qui s'ajuste d'un bloc sur le seul jeu d'entraînement.</a:t>
-            </a:r>
-            <a:endParaRPr lang="en-US" sz="1200" dirty="0"/>
-          </a:p>
-        </p:txBody>
-      </p:sp>
-      <p:sp>
-        <p:nvSpPr>
-          <p:cNvPr id="13" name="Shape 11"/>
-          <p:cNvSpPr/>
-          <p:nvPr/>
-        </p:nvSpPr>
-        <p:spPr>
-          <a:xfrm>
-            <a:off x="640080" y="4389120"/>
-            <a:ext cx="10881360" cy="1371600"/>
+                <a:latin typeface="Calibri"/>
+              </a:rPr>
+              <a:t>Vérifié sur trois découpages : l'écart entre les deux approches est plus petit que la variation d'un tirage à l'autre. Ce qui les sépare n'est pas la quantité d'erreurs, mais leur nature — donc le choix relève du coût métier.</a:t>
+            </a:r>
+          </a:p>
+        </p:txBody>
+      </p:sp>
+    </p:spTree>
+  </p:cSld>
+  <p:clrMapOvr>
+    <a:masterClrMapping/>
+  </p:clrMapOvr>
+</p:sld>
+</file>
+
+<file path=ppt/slides/slide24.xml><?xml version="1.0" encoding="utf-8"?>
+<p:sld xmlns:a="http://schemas.openxmlformats.org/drawingml/2006/main" xmlns:p="http://schemas.openxmlformats.org/presentationml/2006/main" xmlns:r="http://schemas.openxmlformats.org/officeDocument/2006/relationships">
+  <p:cSld>
+    <p:spTree>
+      <p:nvGrpSpPr>
+        <p:cNvPr id="1" name=""/>
+        <p:cNvGrpSpPr/>
+        <p:nvPr/>
+      </p:nvGrpSpPr>
+      <p:grpSpPr/>
+      <p:sp>
+        <p:nvSpPr>
+          <p:cNvPr id="2" name="TextBox 1"/>
+          <p:cNvSpPr txBox="1"/>
+          <p:nvPr/>
+        </p:nvSpPr>
+        <p:spPr>
+          <a:xfrm>
+            <a:off x="640080" y="384048"/>
+            <a:ext cx="10881360" cy="685800"/>
+          </a:xfrm>
+          <a:prstGeom prst="rect">
+            <a:avLst/>
+          </a:prstGeom>
+          <a:noFill/>
+        </p:spPr>
+        <p:txBody>
+          <a:bodyPr wrap="square" lIns="0" rIns="0" tIns="0" bIns="0" anchor="ctr">
+            <a:spAutoFit/>
+          </a:bodyPr>
+          <a:lstStyle/>
+          <a:p>
+            <a:pPr marL="0" indent="0">
+              <a:buNone/>
+            </a:pPr>
+            <a:r>
+              <a:rPr sz="3400" b="1" i="0">
+                <a:solidFill>
+                  <a:srgbClr val="1F2A1F"/>
+                </a:solidFill>
+                <a:latin typeface="Cambria"/>
+              </a:rPr>
+              <a:t>Precision, recall, F1</a:t>
+            </a:r>
+          </a:p>
+        </p:txBody>
+      </p:sp>
+      <p:sp>
+        <p:nvSpPr>
+          <p:cNvPr id="3" name="TextBox 2"/>
+          <p:cNvSpPr txBox="1"/>
+          <p:nvPr/>
+        </p:nvSpPr>
+        <p:spPr>
+          <a:xfrm>
+            <a:off x="640080" y="1078992"/>
+            <a:ext cx="10881360" cy="384048"/>
+          </a:xfrm>
+          <a:prstGeom prst="rect">
+            <a:avLst/>
+          </a:prstGeom>
+          <a:noFill/>
+        </p:spPr>
+        <p:txBody>
+          <a:bodyPr wrap="square" lIns="0" rIns="0" tIns="0" bIns="0" anchor="ctr">
+            <a:spAutoFit/>
+          </a:bodyPr>
+          <a:lstStyle/>
+          <a:p>
+            <a:pPr marL="0" indent="0">
+              <a:buNone/>
+            </a:pPr>
+            <a:r>
+              <a:rPr sz="1400" b="0" i="1">
+                <a:solidFill>
+                  <a:srgbClr val="5E6E5E"/>
+                </a:solidFill>
+                <a:latin typeface="Calibri"/>
+              </a:rPr>
+              <a:t>Trois questions différentes — tout se joue sur l'ensemble d'où l'on part</a:t>
+            </a:r>
+          </a:p>
+        </p:txBody>
+      </p:sp>
+      <p:sp>
+        <p:nvSpPr>
+          <p:cNvPr id="4" name="Rounded Rectangle 3"/>
+          <p:cNvSpPr/>
+          <p:nvPr/>
+        </p:nvSpPr>
+        <p:spPr>
+          <a:xfrm>
+            <a:off x="640080" y="1645920"/>
+            <a:ext cx="5166360" cy="2240280"/>
           </a:xfrm>
           <a:prstGeom prst="roundRect">
             <a:avLst>
-              <a:gd name="adj" fmla="val 5333"/>
+              <a:gd name="adj" fmla="val 3265"/>
             </a:avLst>
           </a:prstGeom>
           <a:solidFill>
-            <a:srgbClr val="1A3A1C"/>
+            <a:srgbClr val="EDF2E6"/>
           </a:solidFill>
           <a:ln w="12700">
             <a:solidFill>
-              <a:srgbClr val="1A3A1C"/>
+              <a:srgbClr val="EDF2E6"/>
             </a:solidFill>
-            <a:prstDash val="solid"/>
           </a:ln>
-        </p:spPr>
-        <p:txBody>
-          <a:bodyPr/>
-          <a:lstStyle/>
-          <a:p>
-            <a:endParaRPr lang="en-US"/>
-          </a:p>
-        </p:txBody>
-      </p:sp>
-      <p:sp>
-        <p:nvSpPr>
-          <p:cNvPr id="14" name="Text 12"/>
-          <p:cNvSpPr/>
-          <p:nvPr/>
-        </p:nvSpPr>
-        <p:spPr>
-          <a:xfrm>
-            <a:off x="960120" y="4553712"/>
-            <a:ext cx="10241280" cy="320040"/>
-          </a:xfrm>
-          <a:prstGeom prst="rect">
-            <a:avLst/>
-          </a:prstGeom>
-          <a:noFill/>
-          <a:ln/>
-        </p:spPr>
-        <p:txBody>
-          <a:bodyPr wrap="square" lIns="0" tIns="0" rIns="0" bIns="0" rtlCol="0" anchor="ctr"/>
-          <a:lstStyle/>
-          <a:p>
-            <a:pPr marL="0" indent="0">
-              <a:buNone/>
-            </a:pPr>
-            <a:r>
-              <a:rPr lang="en-US" sz="1500" b="1" dirty="0">
+          <a:effectLst/>
+        </p:spPr>
+        <p:style>
+          <a:lnRef idx="1">
+            <a:schemeClr val="accent1"/>
+          </a:lnRef>
+          <a:fillRef idx="3">
+            <a:schemeClr val="accent1"/>
+          </a:fillRef>
+          <a:effectRef idx="2">
+            <a:schemeClr val="accent1"/>
+          </a:effectRef>
+          <a:fontRef idx="minor">
+            <a:schemeClr val="lt1"/>
+          </a:fontRef>
+        </p:style>
+        <p:txBody>
+          <a:bodyPr rtlCol="0" anchor="ctr" wrap="square"/>
+          <a:lstStyle/>
+          <a:p>
+            <a:pPr algn="ctr"/>
+          </a:p>
+        </p:txBody>
+      </p:sp>
+      <p:sp>
+        <p:nvSpPr>
+          <p:cNvPr id="5" name="TextBox 4"/>
+          <p:cNvSpPr txBox="1"/>
+          <p:nvPr/>
+        </p:nvSpPr>
+        <p:spPr>
+          <a:xfrm>
+            <a:off x="960120" y="1828800"/>
+            <a:ext cx="4389120" cy="310896"/>
+          </a:xfrm>
+          <a:prstGeom prst="rect">
+            <a:avLst/>
+          </a:prstGeom>
+          <a:noFill/>
+        </p:spPr>
+        <p:txBody>
+          <a:bodyPr wrap="square" lIns="0" rIns="0" tIns="0" bIns="0" anchor="ctr">
+            <a:spAutoFit/>
+          </a:bodyPr>
+          <a:lstStyle/>
+          <a:p>
+            <a:pPr marL="0" indent="0">
+              <a:buNone/>
+            </a:pPr>
+            <a:r>
+              <a:rPr sz="1700" b="1" i="0">
+                <a:solidFill>
+                  <a:srgbClr val="2C5F2D"/>
+                </a:solidFill>
+                <a:latin typeface="Cambria"/>
+              </a:rPr>
+              <a:t>Les quatre cas</a:t>
+            </a:r>
+          </a:p>
+        </p:txBody>
+      </p:sp>
+      <p:sp>
+        <p:nvSpPr>
+          <p:cNvPr id="6" name="TextBox 5"/>
+          <p:cNvSpPr txBox="1"/>
+          <p:nvPr/>
+        </p:nvSpPr>
+        <p:spPr>
+          <a:xfrm>
+            <a:off x="2240280" y="2249424"/>
+            <a:ext cx="1554480" cy="256032"/>
+          </a:xfrm>
+          <a:prstGeom prst="rect">
+            <a:avLst/>
+          </a:prstGeom>
+          <a:noFill/>
+        </p:spPr>
+        <p:txBody>
+          <a:bodyPr wrap="square" lIns="0" rIns="0" tIns="0" bIns="0" anchor="ctr">
+            <a:spAutoFit/>
+          </a:bodyPr>
+          <a:lstStyle/>
+          <a:p>
+            <a:pPr marL="0" indent="0" algn="ctr">
+              <a:buNone/>
+            </a:pPr>
+            <a:r>
+              <a:rPr sz="1050" b="0" i="0">
+                <a:solidFill>
+                  <a:srgbClr val="5E6E5E"/>
+                </a:solidFill>
+                <a:latin typeface="Calibri"/>
+              </a:rPr>
+              <a:t>prédit positif</a:t>
+            </a:r>
+          </a:p>
+        </p:txBody>
+      </p:sp>
+      <p:sp>
+        <p:nvSpPr>
+          <p:cNvPr id="7" name="TextBox 6"/>
+          <p:cNvSpPr txBox="1"/>
+          <p:nvPr/>
+        </p:nvSpPr>
+        <p:spPr>
+          <a:xfrm>
+            <a:off x="3886200" y="2249424"/>
+            <a:ext cx="1554480" cy="256032"/>
+          </a:xfrm>
+          <a:prstGeom prst="rect">
+            <a:avLst/>
+          </a:prstGeom>
+          <a:noFill/>
+        </p:spPr>
+        <p:txBody>
+          <a:bodyPr wrap="square" lIns="0" rIns="0" tIns="0" bIns="0" anchor="ctr">
+            <a:spAutoFit/>
+          </a:bodyPr>
+          <a:lstStyle/>
+          <a:p>
+            <a:pPr marL="0" indent="0" algn="ctr">
+              <a:buNone/>
+            </a:pPr>
+            <a:r>
+              <a:rPr sz="1050" b="0" i="0">
+                <a:solidFill>
+                  <a:srgbClr val="5E6E5E"/>
+                </a:solidFill>
+                <a:latin typeface="Calibri"/>
+              </a:rPr>
+              <a:t>prédit négatif</a:t>
+            </a:r>
+          </a:p>
+        </p:txBody>
+      </p:sp>
+      <p:sp>
+        <p:nvSpPr>
+          <p:cNvPr id="8" name="TextBox 7"/>
+          <p:cNvSpPr txBox="1"/>
+          <p:nvPr/>
+        </p:nvSpPr>
+        <p:spPr>
+          <a:xfrm>
+            <a:off x="960120" y="2560320"/>
+            <a:ext cx="1188720" cy="457200"/>
+          </a:xfrm>
+          <a:prstGeom prst="rect">
+            <a:avLst/>
+          </a:prstGeom>
+          <a:noFill/>
+        </p:spPr>
+        <p:txBody>
+          <a:bodyPr wrap="square" lIns="0" rIns="0" tIns="0" bIns="0" anchor="ctr">
+            <a:spAutoFit/>
+          </a:bodyPr>
+          <a:lstStyle/>
+          <a:p>
+            <a:pPr marL="0" indent="0">
+              <a:buNone/>
+            </a:pPr>
+            <a:r>
+              <a:rPr sz="1050" b="0" i="0">
+                <a:solidFill>
+                  <a:srgbClr val="5E6E5E"/>
+                </a:solidFill>
+                <a:latin typeface="Calibri"/>
+              </a:rPr>
+              <a:t>réel positif</a:t>
+            </a:r>
+          </a:p>
+        </p:txBody>
+      </p:sp>
+      <p:sp>
+        <p:nvSpPr>
+          <p:cNvPr id="9" name="Rounded Rectangle 8"/>
+          <p:cNvSpPr/>
+          <p:nvPr/>
+        </p:nvSpPr>
+        <p:spPr>
+          <a:xfrm>
+            <a:off x="2240280" y="2560320"/>
+            <a:ext cx="1554480" cy="457200"/>
+          </a:xfrm>
+          <a:prstGeom prst="roundRect">
+            <a:avLst>
+              <a:gd name="adj" fmla="val 16000"/>
+            </a:avLst>
+          </a:prstGeom>
+          <a:solidFill>
+            <a:srgbClr val="2C5F2D"/>
+          </a:solidFill>
+          <a:ln w="12700">
+            <a:solidFill>
+              <a:srgbClr val="2C5F2D"/>
+            </a:solidFill>
+          </a:ln>
+          <a:effectLst/>
+        </p:spPr>
+        <p:style>
+          <a:lnRef idx="1">
+            <a:schemeClr val="accent1"/>
+          </a:lnRef>
+          <a:fillRef idx="3">
+            <a:schemeClr val="accent1"/>
+          </a:fillRef>
+          <a:effectRef idx="2">
+            <a:schemeClr val="accent1"/>
+          </a:effectRef>
+          <a:fontRef idx="minor">
+            <a:schemeClr val="lt1"/>
+          </a:fontRef>
+        </p:style>
+        <p:txBody>
+          <a:bodyPr rtlCol="0" anchor="ctr" wrap="square"/>
+          <a:lstStyle/>
+          <a:p>
+            <a:pPr algn="ctr"/>
+          </a:p>
+        </p:txBody>
+      </p:sp>
+      <p:sp>
+        <p:nvSpPr>
+          <p:cNvPr id="10" name="TextBox 9"/>
+          <p:cNvSpPr txBox="1"/>
+          <p:nvPr/>
+        </p:nvSpPr>
+        <p:spPr>
+          <a:xfrm>
+            <a:off x="2240280" y="2560320"/>
+            <a:ext cx="1554480" cy="457200"/>
+          </a:xfrm>
+          <a:prstGeom prst="rect">
+            <a:avLst/>
+          </a:prstGeom>
+          <a:noFill/>
+        </p:spPr>
+        <p:txBody>
+          <a:bodyPr wrap="square" lIns="0" rIns="0" tIns="0" bIns="0" anchor="ctr">
+            <a:spAutoFit/>
+          </a:bodyPr>
+          <a:lstStyle/>
+          <a:p>
+            <a:pPr marL="0" indent="0" algn="ctr">
+              <a:buNone/>
+            </a:pPr>
+            <a:r>
+              <a:rPr sz="1200" b="1" i="0">
+                <a:solidFill>
+                  <a:srgbClr val="FFFFFF"/>
+                </a:solidFill>
+                <a:latin typeface="Calibri"/>
+              </a:rPr>
+              <a:t>VP</a:t>
+            </a:r>
+          </a:p>
+        </p:txBody>
+      </p:sp>
+      <p:sp>
+        <p:nvSpPr>
+          <p:cNvPr id="11" name="Rounded Rectangle 10"/>
+          <p:cNvSpPr/>
+          <p:nvPr/>
+        </p:nvSpPr>
+        <p:spPr>
+          <a:xfrm>
+            <a:off x="3886200" y="2560320"/>
+            <a:ext cx="1554480" cy="457200"/>
+          </a:xfrm>
+          <a:prstGeom prst="roundRect">
+            <a:avLst>
+              <a:gd name="adj" fmla="val 16000"/>
+            </a:avLst>
+          </a:prstGeom>
+          <a:solidFill>
+            <a:srgbClr val="C0562F"/>
+          </a:solidFill>
+          <a:ln w="12700">
+            <a:solidFill>
+              <a:srgbClr val="C0562F"/>
+            </a:solidFill>
+          </a:ln>
+          <a:effectLst/>
+        </p:spPr>
+        <p:style>
+          <a:lnRef idx="1">
+            <a:schemeClr val="accent1"/>
+          </a:lnRef>
+          <a:fillRef idx="3">
+            <a:schemeClr val="accent1"/>
+          </a:fillRef>
+          <a:effectRef idx="2">
+            <a:schemeClr val="accent1"/>
+          </a:effectRef>
+          <a:fontRef idx="minor">
+            <a:schemeClr val="lt1"/>
+          </a:fontRef>
+        </p:style>
+        <p:txBody>
+          <a:bodyPr rtlCol="0" anchor="ctr" wrap="square"/>
+          <a:lstStyle/>
+          <a:p>
+            <a:pPr algn="ctr"/>
+          </a:p>
+        </p:txBody>
+      </p:sp>
+      <p:sp>
+        <p:nvSpPr>
+          <p:cNvPr id="12" name="TextBox 11"/>
+          <p:cNvSpPr txBox="1"/>
+          <p:nvPr/>
+        </p:nvSpPr>
+        <p:spPr>
+          <a:xfrm>
+            <a:off x="3886200" y="2560320"/>
+            <a:ext cx="1554480" cy="457200"/>
+          </a:xfrm>
+          <a:prstGeom prst="rect">
+            <a:avLst/>
+          </a:prstGeom>
+          <a:noFill/>
+        </p:spPr>
+        <p:txBody>
+          <a:bodyPr wrap="square" lIns="0" rIns="0" tIns="0" bIns="0" anchor="ctr">
+            <a:spAutoFit/>
+          </a:bodyPr>
+          <a:lstStyle/>
+          <a:p>
+            <a:pPr marL="0" indent="0" algn="ctr">
+              <a:buNone/>
+            </a:pPr>
+            <a:r>
+              <a:rPr sz="1200" b="1" i="0">
+                <a:solidFill>
+                  <a:srgbClr val="FFFFFF"/>
+                </a:solidFill>
+                <a:latin typeface="Calibri"/>
+              </a:rPr>
+              <a:t>FN</a:t>
+            </a:r>
+          </a:p>
+        </p:txBody>
+      </p:sp>
+      <p:sp>
+        <p:nvSpPr>
+          <p:cNvPr id="13" name="TextBox 12"/>
+          <p:cNvSpPr txBox="1"/>
+          <p:nvPr/>
+        </p:nvSpPr>
+        <p:spPr>
+          <a:xfrm>
+            <a:off x="960120" y="3090672"/>
+            <a:ext cx="1188720" cy="457200"/>
+          </a:xfrm>
+          <a:prstGeom prst="rect">
+            <a:avLst/>
+          </a:prstGeom>
+          <a:noFill/>
+        </p:spPr>
+        <p:txBody>
+          <a:bodyPr wrap="square" lIns="0" rIns="0" tIns="0" bIns="0" anchor="ctr">
+            <a:spAutoFit/>
+          </a:bodyPr>
+          <a:lstStyle/>
+          <a:p>
+            <a:pPr marL="0" indent="0">
+              <a:buNone/>
+            </a:pPr>
+            <a:r>
+              <a:rPr sz="1050" b="0" i="0">
+                <a:solidFill>
+                  <a:srgbClr val="5E6E5E"/>
+                </a:solidFill>
+                <a:latin typeface="Calibri"/>
+              </a:rPr>
+              <a:t>réel négatif</a:t>
+            </a:r>
+          </a:p>
+        </p:txBody>
+      </p:sp>
+      <p:sp>
+        <p:nvSpPr>
+          <p:cNvPr id="14" name="Rounded Rectangle 13"/>
+          <p:cNvSpPr/>
+          <p:nvPr/>
+        </p:nvSpPr>
+        <p:spPr>
+          <a:xfrm>
+            <a:off x="2240280" y="3090672"/>
+            <a:ext cx="1554480" cy="457200"/>
+          </a:xfrm>
+          <a:prstGeom prst="roundRect">
+            <a:avLst>
+              <a:gd name="adj" fmla="val 16000"/>
+            </a:avLst>
+          </a:prstGeom>
+          <a:solidFill>
+            <a:srgbClr val="C0562F"/>
+          </a:solidFill>
+          <a:ln w="12700">
+            <a:solidFill>
+              <a:srgbClr val="C0562F"/>
+            </a:solidFill>
+          </a:ln>
+          <a:effectLst/>
+        </p:spPr>
+        <p:style>
+          <a:lnRef idx="1">
+            <a:schemeClr val="accent1"/>
+          </a:lnRef>
+          <a:fillRef idx="3">
+            <a:schemeClr val="accent1"/>
+          </a:fillRef>
+          <a:effectRef idx="2">
+            <a:schemeClr val="accent1"/>
+          </a:effectRef>
+          <a:fontRef idx="minor">
+            <a:schemeClr val="lt1"/>
+          </a:fontRef>
+        </p:style>
+        <p:txBody>
+          <a:bodyPr rtlCol="0" anchor="ctr" wrap="square"/>
+          <a:lstStyle/>
+          <a:p>
+            <a:pPr algn="ctr"/>
+          </a:p>
+        </p:txBody>
+      </p:sp>
+      <p:sp>
+        <p:nvSpPr>
+          <p:cNvPr id="15" name="TextBox 14"/>
+          <p:cNvSpPr txBox="1"/>
+          <p:nvPr/>
+        </p:nvSpPr>
+        <p:spPr>
+          <a:xfrm>
+            <a:off x="2240280" y="3090672"/>
+            <a:ext cx="1554480" cy="457200"/>
+          </a:xfrm>
+          <a:prstGeom prst="rect">
+            <a:avLst/>
+          </a:prstGeom>
+          <a:noFill/>
+        </p:spPr>
+        <p:txBody>
+          <a:bodyPr wrap="square" lIns="0" rIns="0" tIns="0" bIns="0" anchor="ctr">
+            <a:spAutoFit/>
+          </a:bodyPr>
+          <a:lstStyle/>
+          <a:p>
+            <a:pPr marL="0" indent="0" algn="ctr">
+              <a:buNone/>
+            </a:pPr>
+            <a:r>
+              <a:rPr sz="1200" b="1" i="0">
+                <a:solidFill>
+                  <a:srgbClr val="FFFFFF"/>
+                </a:solidFill>
+                <a:latin typeface="Calibri"/>
+              </a:rPr>
+              <a:t>FP</a:t>
+            </a:r>
+          </a:p>
+        </p:txBody>
+      </p:sp>
+      <p:sp>
+        <p:nvSpPr>
+          <p:cNvPr id="16" name="Rounded Rectangle 15"/>
+          <p:cNvSpPr/>
+          <p:nvPr/>
+        </p:nvSpPr>
+        <p:spPr>
+          <a:xfrm>
+            <a:off x="3886200" y="3090672"/>
+            <a:ext cx="1554480" cy="457200"/>
+          </a:xfrm>
+          <a:prstGeom prst="roundRect">
+            <a:avLst>
+              <a:gd name="adj" fmla="val 16000"/>
+            </a:avLst>
+          </a:prstGeom>
+          <a:solidFill>
+            <a:srgbClr val="2C5F2D"/>
+          </a:solidFill>
+          <a:ln w="12700">
+            <a:solidFill>
+              <a:srgbClr val="2C5F2D"/>
+            </a:solidFill>
+          </a:ln>
+          <a:effectLst/>
+        </p:spPr>
+        <p:style>
+          <a:lnRef idx="1">
+            <a:schemeClr val="accent1"/>
+          </a:lnRef>
+          <a:fillRef idx="3">
+            <a:schemeClr val="accent1"/>
+          </a:fillRef>
+          <a:effectRef idx="2">
+            <a:schemeClr val="accent1"/>
+          </a:effectRef>
+          <a:fontRef idx="minor">
+            <a:schemeClr val="lt1"/>
+          </a:fontRef>
+        </p:style>
+        <p:txBody>
+          <a:bodyPr rtlCol="0" anchor="ctr" wrap="square"/>
+          <a:lstStyle/>
+          <a:p>
+            <a:pPr algn="ctr"/>
+          </a:p>
+        </p:txBody>
+      </p:sp>
+      <p:sp>
+        <p:nvSpPr>
+          <p:cNvPr id="17" name="TextBox 16"/>
+          <p:cNvSpPr txBox="1"/>
+          <p:nvPr/>
+        </p:nvSpPr>
+        <p:spPr>
+          <a:xfrm>
+            <a:off x="3886200" y="3090672"/>
+            <a:ext cx="1554480" cy="457200"/>
+          </a:xfrm>
+          <a:prstGeom prst="rect">
+            <a:avLst/>
+          </a:prstGeom>
+          <a:noFill/>
+        </p:spPr>
+        <p:txBody>
+          <a:bodyPr wrap="square" lIns="0" rIns="0" tIns="0" bIns="0" anchor="ctr">
+            <a:spAutoFit/>
+          </a:bodyPr>
+          <a:lstStyle/>
+          <a:p>
+            <a:pPr marL="0" indent="0" algn="ctr">
+              <a:buNone/>
+            </a:pPr>
+            <a:r>
+              <a:rPr sz="1200" b="1" i="0">
+                <a:solidFill>
+                  <a:srgbClr val="FFFFFF"/>
+                </a:solidFill>
+                <a:latin typeface="Calibri"/>
+              </a:rPr>
+              <a:t>VN</a:t>
+            </a:r>
+          </a:p>
+        </p:txBody>
+      </p:sp>
+      <p:sp>
+        <p:nvSpPr>
+          <p:cNvPr id="18" name="TextBox 17"/>
+          <p:cNvSpPr txBox="1"/>
+          <p:nvPr/>
+        </p:nvSpPr>
+        <p:spPr>
+          <a:xfrm>
+            <a:off x="960120" y="3611880"/>
+            <a:ext cx="4572000" cy="237744"/>
+          </a:xfrm>
+          <a:prstGeom prst="rect">
+            <a:avLst/>
+          </a:prstGeom>
+          <a:noFill/>
+        </p:spPr>
+        <p:txBody>
+          <a:bodyPr wrap="square" lIns="0" rIns="0" tIns="0" bIns="0" anchor="ctr">
+            <a:spAutoFit/>
+          </a:bodyPr>
+          <a:lstStyle/>
+          <a:p>
+            <a:pPr marL="0" indent="0">
+              <a:buNone/>
+            </a:pPr>
+            <a:r>
+              <a:rPr sz="1050" b="0" i="0">
+                <a:solidFill>
+                  <a:srgbClr val="5E6E5E"/>
+                </a:solidFill>
+                <a:latin typeface="Calibri"/>
+              </a:rPr>
+              <a:t>FP = fausse alerte   ·   FN = cas manqué</a:t>
+            </a:r>
+          </a:p>
+        </p:txBody>
+      </p:sp>
+      <p:sp>
+        <p:nvSpPr>
+          <p:cNvPr id="19" name="Rounded Rectangle 18"/>
+          <p:cNvSpPr/>
+          <p:nvPr/>
+        </p:nvSpPr>
+        <p:spPr>
+          <a:xfrm>
+            <a:off x="6355080" y="1645920"/>
+            <a:ext cx="5166360" cy="2240280"/>
+          </a:xfrm>
+          <a:prstGeom prst="roundRect">
+            <a:avLst>
+              <a:gd name="adj" fmla="val 3265"/>
+            </a:avLst>
+          </a:prstGeom>
+          <a:solidFill>
+            <a:srgbClr val="EDF2E6"/>
+          </a:solidFill>
+          <a:ln w="12700">
+            <a:solidFill>
+              <a:srgbClr val="EDF2E6"/>
+            </a:solidFill>
+          </a:ln>
+          <a:effectLst/>
+        </p:spPr>
+        <p:style>
+          <a:lnRef idx="1">
+            <a:schemeClr val="accent1"/>
+          </a:lnRef>
+          <a:fillRef idx="3">
+            <a:schemeClr val="accent1"/>
+          </a:fillRef>
+          <a:effectRef idx="2">
+            <a:schemeClr val="accent1"/>
+          </a:effectRef>
+          <a:fontRef idx="minor">
+            <a:schemeClr val="lt1"/>
+          </a:fontRef>
+        </p:style>
+        <p:txBody>
+          <a:bodyPr rtlCol="0" anchor="ctr" wrap="square"/>
+          <a:lstStyle/>
+          <a:p>
+            <a:pPr algn="ctr"/>
+          </a:p>
+        </p:txBody>
+      </p:sp>
+      <p:sp>
+        <p:nvSpPr>
+          <p:cNvPr id="20" name="TextBox 19"/>
+          <p:cNvSpPr txBox="1"/>
+          <p:nvPr/>
+        </p:nvSpPr>
+        <p:spPr>
+          <a:xfrm>
+            <a:off x="6675120" y="1828800"/>
+            <a:ext cx="4572000" cy="274320"/>
+          </a:xfrm>
+          <a:prstGeom prst="rect">
+            <a:avLst/>
+          </a:prstGeom>
+          <a:noFill/>
+        </p:spPr>
+        <p:txBody>
+          <a:bodyPr wrap="square" lIns="0" rIns="0" tIns="0" bIns="0" anchor="ctr">
+            <a:spAutoFit/>
+          </a:bodyPr>
+          <a:lstStyle/>
+          <a:p>
+            <a:pPr marL="0" indent="0">
+              <a:buNone/>
+            </a:pPr>
+            <a:r>
+              <a:rPr sz="1150" b="0" i="0">
+                <a:solidFill>
+                  <a:srgbClr val="2C5F2D"/>
+                </a:solidFill>
+                <a:latin typeface="Courier New"/>
+              </a:rPr>
+              <a:t>Precision = VP / (VP + FP)</a:t>
+            </a:r>
+          </a:p>
+        </p:txBody>
+      </p:sp>
+      <p:sp>
+        <p:nvSpPr>
+          <p:cNvPr id="21" name="TextBox 20"/>
+          <p:cNvSpPr txBox="1"/>
+          <p:nvPr/>
+        </p:nvSpPr>
+        <p:spPr>
+          <a:xfrm>
+            <a:off x="6675120" y="2103120"/>
+            <a:ext cx="4572000" cy="292608"/>
+          </a:xfrm>
+          <a:prstGeom prst="rect">
+            <a:avLst/>
+          </a:prstGeom>
+          <a:noFill/>
+        </p:spPr>
+        <p:txBody>
+          <a:bodyPr wrap="square" lIns="0" rIns="0" tIns="0" bIns="0" anchor="ctr">
+            <a:spAutoFit/>
+          </a:bodyPr>
+          <a:lstStyle/>
+          <a:p>
+            <a:pPr marL="0" indent="0">
+              <a:buNone/>
+            </a:pPr>
+            <a:r>
+              <a:rPr sz="1150" b="0" i="0">
+                <a:solidFill>
+                  <a:srgbClr val="1F2A1F"/>
+                </a:solidFill>
+                <a:latin typeface="Calibri"/>
+              </a:rPr>
+              <a:t>part du PRÉDIT positif — quand j'annonce, ai-je raison ?</a:t>
+            </a:r>
+          </a:p>
+        </p:txBody>
+      </p:sp>
+      <p:sp>
+        <p:nvSpPr>
+          <p:cNvPr id="22" name="TextBox 21"/>
+          <p:cNvSpPr txBox="1"/>
+          <p:nvPr/>
+        </p:nvSpPr>
+        <p:spPr>
+          <a:xfrm>
+            <a:off x="6675120" y="2514600"/>
+            <a:ext cx="4572000" cy="274320"/>
+          </a:xfrm>
+          <a:prstGeom prst="rect">
+            <a:avLst/>
+          </a:prstGeom>
+          <a:noFill/>
+        </p:spPr>
+        <p:txBody>
+          <a:bodyPr wrap="square" lIns="0" rIns="0" tIns="0" bIns="0" anchor="ctr">
+            <a:spAutoFit/>
+          </a:bodyPr>
+          <a:lstStyle/>
+          <a:p>
+            <a:pPr marL="0" indent="0">
+              <a:buNone/>
+            </a:pPr>
+            <a:r>
+              <a:rPr sz="1150" b="0" i="0">
+                <a:solidFill>
+                  <a:srgbClr val="2C5F2D"/>
+                </a:solidFill>
+                <a:latin typeface="Courier New"/>
+              </a:rPr>
+              <a:t>Recall    = VP / (VP + FN)</a:t>
+            </a:r>
+          </a:p>
+        </p:txBody>
+      </p:sp>
+      <p:sp>
+        <p:nvSpPr>
+          <p:cNvPr id="23" name="TextBox 22"/>
+          <p:cNvSpPr txBox="1"/>
+          <p:nvPr/>
+        </p:nvSpPr>
+        <p:spPr>
+          <a:xfrm>
+            <a:off x="6675120" y="2788920"/>
+            <a:ext cx="4572000" cy="292608"/>
+          </a:xfrm>
+          <a:prstGeom prst="rect">
+            <a:avLst/>
+          </a:prstGeom>
+          <a:noFill/>
+        </p:spPr>
+        <p:txBody>
+          <a:bodyPr wrap="square" lIns="0" rIns="0" tIns="0" bIns="0" anchor="ctr">
+            <a:spAutoFit/>
+          </a:bodyPr>
+          <a:lstStyle/>
+          <a:p>
+            <a:pPr marL="0" indent="0">
+              <a:buNone/>
+            </a:pPr>
+            <a:r>
+              <a:rPr sz="1150" b="0" i="0">
+                <a:solidFill>
+                  <a:srgbClr val="1F2A1F"/>
+                </a:solidFill>
+                <a:latin typeface="Calibri"/>
+              </a:rPr>
+              <a:t>part du RÉEL positif — combien en ai-je trouvés ?</a:t>
+            </a:r>
+          </a:p>
+        </p:txBody>
+      </p:sp>
+      <p:sp>
+        <p:nvSpPr>
+          <p:cNvPr id="24" name="TextBox 23"/>
+          <p:cNvSpPr txBox="1"/>
+          <p:nvPr/>
+        </p:nvSpPr>
+        <p:spPr>
+          <a:xfrm>
+            <a:off x="6675120" y="3200400"/>
+            <a:ext cx="4572000" cy="274320"/>
+          </a:xfrm>
+          <a:prstGeom prst="rect">
+            <a:avLst/>
+          </a:prstGeom>
+          <a:noFill/>
+        </p:spPr>
+        <p:txBody>
+          <a:bodyPr wrap="square" lIns="0" rIns="0" tIns="0" bIns="0" anchor="ctr">
+            <a:spAutoFit/>
+          </a:bodyPr>
+          <a:lstStyle/>
+          <a:p>
+            <a:pPr marL="0" indent="0">
+              <a:buNone/>
+            </a:pPr>
+            <a:r>
+              <a:rPr sz="1150" b="0" i="0">
+                <a:solidFill>
+                  <a:srgbClr val="2C5F2D"/>
+                </a:solidFill>
+                <a:latin typeface="Courier New"/>
+              </a:rPr>
+              <a:t>F1        = 2PR / (P + R)</a:t>
+            </a:r>
+          </a:p>
+        </p:txBody>
+      </p:sp>
+      <p:sp>
+        <p:nvSpPr>
+          <p:cNvPr id="25" name="TextBox 24"/>
+          <p:cNvSpPr txBox="1"/>
+          <p:nvPr/>
+        </p:nvSpPr>
+        <p:spPr>
+          <a:xfrm>
+            <a:off x="6675120" y="3474720"/>
+            <a:ext cx="4572000" cy="292608"/>
+          </a:xfrm>
+          <a:prstGeom prst="rect">
+            <a:avLst/>
+          </a:prstGeom>
+          <a:noFill/>
+        </p:spPr>
+        <p:txBody>
+          <a:bodyPr wrap="square" lIns="0" rIns="0" tIns="0" bIns="0" anchor="ctr">
+            <a:spAutoFit/>
+          </a:bodyPr>
+          <a:lstStyle/>
+          <a:p>
+            <a:pPr marL="0" indent="0">
+              <a:buNone/>
+            </a:pPr>
+            <a:r>
+              <a:rPr sz="1150" b="0" i="0">
+                <a:solidFill>
+                  <a:srgbClr val="1F2A1F"/>
+                </a:solidFill>
+                <a:latin typeface="Calibri"/>
+              </a:rPr>
+              <a:t>moyenne harmonique — élevée seulement si les deux le sont</a:t>
+            </a:r>
+          </a:p>
+        </p:txBody>
+      </p:sp>
+      <p:sp>
+        <p:nvSpPr>
+          <p:cNvPr id="26" name="Rounded Rectangle 25"/>
+          <p:cNvSpPr/>
+          <p:nvPr/>
+        </p:nvSpPr>
+        <p:spPr>
+          <a:xfrm>
+            <a:off x="640080" y="4023360"/>
+            <a:ext cx="10881360" cy="1005840"/>
+          </a:xfrm>
+          <a:prstGeom prst="roundRect">
+            <a:avLst>
+              <a:gd name="adj" fmla="val 7273"/>
+            </a:avLst>
+          </a:prstGeom>
+          <a:solidFill>
+            <a:srgbClr val="EDF2E6"/>
+          </a:solidFill>
+          <a:ln w="12700">
+            <a:solidFill>
+              <a:srgbClr val="EDF2E6"/>
+            </a:solidFill>
+          </a:ln>
+          <a:effectLst/>
+        </p:spPr>
+        <p:style>
+          <a:lnRef idx="1">
+            <a:schemeClr val="accent1"/>
+          </a:lnRef>
+          <a:fillRef idx="3">
+            <a:schemeClr val="accent1"/>
+          </a:fillRef>
+          <a:effectRef idx="2">
+            <a:schemeClr val="accent1"/>
+          </a:effectRef>
+          <a:fontRef idx="minor">
+            <a:schemeClr val="lt1"/>
+          </a:fontRef>
+        </p:style>
+        <p:txBody>
+          <a:bodyPr rtlCol="0" anchor="ctr" wrap="square"/>
+          <a:lstStyle/>
+          <a:p>
+            <a:pPr algn="ctr"/>
+          </a:p>
+        </p:txBody>
+      </p:sp>
+      <p:sp>
+        <p:nvSpPr>
+          <p:cNvPr id="27" name="TextBox 26"/>
+          <p:cNvSpPr txBox="1"/>
+          <p:nvPr/>
+        </p:nvSpPr>
+        <p:spPr>
+          <a:xfrm>
+            <a:off x="1005840" y="4160520"/>
+            <a:ext cx="2743200" cy="685800"/>
+          </a:xfrm>
+          <a:prstGeom prst="rect">
+            <a:avLst/>
+          </a:prstGeom>
+          <a:noFill/>
+        </p:spPr>
+        <p:txBody>
+          <a:bodyPr wrap="square" lIns="0" rIns="0" tIns="0" bIns="0" anchor="ctr">
+            <a:spAutoFit/>
+          </a:bodyPr>
+          <a:lstStyle/>
+          <a:p>
+            <a:pPr marL="0" indent="0">
+              <a:buNone/>
+            </a:pPr>
+            <a:r>
+              <a:rPr sz="3200" b="1" i="0">
+                <a:solidFill>
+                  <a:srgbClr val="5E6E5E"/>
+                </a:solidFill>
+                <a:latin typeface="Cambria"/>
+              </a:rPr>
+              <a:t>72,6 %</a:t>
+            </a:r>
+          </a:p>
+        </p:txBody>
+      </p:sp>
+      <p:sp>
+        <p:nvSpPr>
+          <p:cNvPr id="28" name="TextBox 27"/>
+          <p:cNvSpPr txBox="1"/>
+          <p:nvPr/>
+        </p:nvSpPr>
+        <p:spPr>
+          <a:xfrm>
+            <a:off x="1005840" y="4736592"/>
+            <a:ext cx="3291840" cy="274320"/>
+          </a:xfrm>
+          <a:prstGeom prst="rect">
+            <a:avLst/>
+          </a:prstGeom>
+          <a:noFill/>
+        </p:spPr>
+        <p:txBody>
+          <a:bodyPr wrap="square" lIns="0" rIns="0" tIns="0" bIns="0" anchor="ctr">
+            <a:spAutoFit/>
+          </a:bodyPr>
+          <a:lstStyle/>
+          <a:p>
+            <a:pPr marL="0" indent="0">
+              <a:buNone/>
+            </a:pPr>
+            <a:r>
+              <a:rPr sz="1150" b="0" i="0">
+                <a:solidFill>
+                  <a:srgbClr val="5E6E5E"/>
+                </a:solidFill>
+                <a:latin typeface="Calibri"/>
+              </a:rPr>
+              <a:t>F1 du naïf, qui prédit « malus » partout</a:t>
+            </a:r>
+          </a:p>
+        </p:txBody>
+      </p:sp>
+      <p:sp>
+        <p:nvSpPr>
+          <p:cNvPr id="29" name="TextBox 28"/>
+          <p:cNvSpPr txBox="1"/>
+          <p:nvPr/>
+        </p:nvSpPr>
+        <p:spPr>
+          <a:xfrm>
+            <a:off x="4480560" y="4251960"/>
+            <a:ext cx="731520" cy="457200"/>
+          </a:xfrm>
+          <a:prstGeom prst="rect">
+            <a:avLst/>
+          </a:prstGeom>
+          <a:noFill/>
+        </p:spPr>
+        <p:txBody>
+          <a:bodyPr wrap="square" lIns="0" rIns="0" tIns="0" bIns="0" anchor="ctr">
+            <a:spAutoFit/>
+          </a:bodyPr>
+          <a:lstStyle/>
+          <a:p>
+            <a:pPr marL="0" indent="0" algn="ctr">
+              <a:buNone/>
+            </a:pPr>
+            <a:r>
+              <a:rPr sz="2600" b="1" i="0">
                 <a:solidFill>
                   <a:srgbClr val="97BC62"/>
                 </a:solidFill>
-                <a:latin typeface="Cambria" pitchFamily="34" charset="0"/>
-                <a:ea typeface="Cambria" pitchFamily="34" charset="-122"/>
-                <a:cs typeface="Cambria" pitchFamily="34" charset="-120"/>
-              </a:rPr>
-              <a:t>Séquentiel ou parallèle</a:t>
-            </a:r>
-            <a:endParaRPr lang="en-US" sz="1500" dirty="0"/>
-          </a:p>
-        </p:txBody>
-      </p:sp>
-      <p:sp>
-        <p:nvSpPr>
-          <p:cNvPr id="15" name="Text 13"/>
-          <p:cNvSpPr/>
-          <p:nvPr/>
-        </p:nvSpPr>
-        <p:spPr>
-          <a:xfrm>
-            <a:off x="960120" y="4937760"/>
-            <a:ext cx="10241280" cy="685800"/>
-          </a:xfrm>
-          <a:prstGeom prst="rect">
-            <a:avLst/>
-          </a:prstGeom>
-          <a:noFill/>
-          <a:ln/>
-        </p:spPr>
-        <p:txBody>
-          <a:bodyPr wrap="square" lIns="0" tIns="0" rIns="0" bIns="0" rtlCol="0" anchor="ctr"/>
+                <a:latin typeface="Calibri"/>
+              </a:rPr>
+              <a:t>→</a:t>
+            </a:r>
+          </a:p>
+        </p:txBody>
+      </p:sp>
+      <p:sp>
+        <p:nvSpPr>
+          <p:cNvPr id="30" name="TextBox 29"/>
+          <p:cNvSpPr txBox="1"/>
+          <p:nvPr/>
+        </p:nvSpPr>
+        <p:spPr>
+          <a:xfrm>
+            <a:off x="5669280" y="4160520"/>
+            <a:ext cx="2743200" cy="685800"/>
+          </a:xfrm>
+          <a:prstGeom prst="rect">
+            <a:avLst/>
+          </a:prstGeom>
+          <a:noFill/>
+        </p:spPr>
+        <p:txBody>
+          <a:bodyPr wrap="square" lIns="0" rIns="0" tIns="0" bIns="0" anchor="ctr">
+            <a:spAutoFit/>
+          </a:bodyPr>
+          <a:lstStyle/>
+          <a:p>
+            <a:pPr marL="0" indent="0">
+              <a:buNone/>
+            </a:pPr>
+            <a:r>
+              <a:rPr sz="3200" b="1" i="0">
+                <a:solidFill>
+                  <a:srgbClr val="2C5F2D"/>
+                </a:solidFill>
+                <a:latin typeface="Cambria"/>
+              </a:rPr>
+              <a:t>87,0 %</a:t>
+            </a:r>
+          </a:p>
+        </p:txBody>
+      </p:sp>
+      <p:sp>
+        <p:nvSpPr>
+          <p:cNvPr id="31" name="TextBox 30"/>
+          <p:cNvSpPr txBox="1"/>
+          <p:nvPr/>
+        </p:nvSpPr>
+        <p:spPr>
+          <a:xfrm>
+            <a:off x="5669280" y="4736592"/>
+            <a:ext cx="5029200" cy="274320"/>
+          </a:xfrm>
+          <a:prstGeom prst="rect">
+            <a:avLst/>
+          </a:prstGeom>
+          <a:noFill/>
+        </p:spPr>
+        <p:txBody>
+          <a:bodyPr wrap="square" lIns="0" rIns="0" tIns="0" bIns="0" anchor="ctr">
+            <a:spAutoFit/>
+          </a:bodyPr>
+          <a:lstStyle/>
+          <a:p>
+            <a:pPr marL="0" indent="0">
+              <a:buNone/>
+            </a:pPr>
+            <a:r>
+              <a:rPr sz="1150" b="0" i="0">
+                <a:solidFill>
+                  <a:srgbClr val="1F2A1F"/>
+                </a:solidFill>
+                <a:latin typeface="Calibri"/>
+              </a:rPr>
+              <a:t>F1 du modèle : +14 points, et non +30</a:t>
+            </a:r>
+          </a:p>
+        </p:txBody>
+      </p:sp>
+      <p:sp>
+        <p:nvSpPr>
+          <p:cNvPr id="32" name="Rounded Rectangle 31"/>
+          <p:cNvSpPr/>
+          <p:nvPr/>
+        </p:nvSpPr>
+        <p:spPr>
+          <a:xfrm>
+            <a:off x="640080" y="5166360"/>
+            <a:ext cx="10881360" cy="731520"/>
+          </a:xfrm>
+          <a:prstGeom prst="roundRect">
+            <a:avLst>
+              <a:gd name="adj" fmla="val 10000"/>
+            </a:avLst>
+          </a:prstGeom>
+          <a:solidFill>
+            <a:srgbClr val="EDF2E6"/>
+          </a:solidFill>
+          <a:ln w="12700">
+            <a:solidFill>
+              <a:srgbClr val="EDF2E6"/>
+            </a:solidFill>
+          </a:ln>
+          <a:effectLst/>
+        </p:spPr>
+        <p:style>
+          <a:lnRef idx="1">
+            <a:schemeClr val="accent1"/>
+          </a:lnRef>
+          <a:fillRef idx="3">
+            <a:schemeClr val="accent1"/>
+          </a:fillRef>
+          <a:effectRef idx="2">
+            <a:schemeClr val="accent1"/>
+          </a:effectRef>
+          <a:fontRef idx="minor">
+            <a:schemeClr val="lt1"/>
+          </a:fontRef>
+        </p:style>
+        <p:txBody>
+          <a:bodyPr rtlCol="0" anchor="ctr" wrap="square"/>
+          <a:lstStyle/>
+          <a:p>
+            <a:pPr algn="ctr"/>
+          </a:p>
+        </p:txBody>
+      </p:sp>
+      <p:sp>
+        <p:nvSpPr>
+          <p:cNvPr id="33" name="TextBox 32"/>
+          <p:cNvSpPr txBox="1"/>
+          <p:nvPr/>
+        </p:nvSpPr>
+        <p:spPr>
+          <a:xfrm>
+            <a:off x="960120" y="5285232"/>
+            <a:ext cx="10241280" cy="493776"/>
+          </a:xfrm>
+          <a:prstGeom prst="rect">
+            <a:avLst/>
+          </a:prstGeom>
+          <a:noFill/>
+        </p:spPr>
+        <p:txBody>
+          <a:bodyPr wrap="square" lIns="0" rIns="0" tIns="0" bIns="0" anchor="ctr">
+            <a:spAutoFit/>
+          </a:bodyPr>
           <a:lstStyle/>
           <a:p>
             <a:pPr marL="0" indent="0">
@@ -11021,17 +13057,1001 @@
               <a:buNone/>
             </a:pPr>
             <a:r>
-              <a:rPr lang="en-US" sz="1250" dirty="0">
-                <a:solidFill>
-                  <a:srgbClr val="FFFFFF"/>
-                </a:solidFill>
-                <a:latin typeface="Calibri" pitchFamily="34" charset="0"/>
-                <a:ea typeface="Calibri" pitchFamily="34" charset="-122"/>
-                <a:cs typeface="Calibri" pitchFamily="34" charset="-120"/>
-              </a:rPr>
-              <a:t>Pipeline enchaîne : la sortie d'une étape est l'entrée de la suivante. ColumnTransformer découpe : chaque branche ses colonnes, sorties concaténées. Une liste de paires (nom, objet) des deux côtés — ces noms préfixent les hyperparamètres.</a:t>
-            </a:r>
-            <a:endParaRPr lang="en-US" sz="1250" dirty="0"/>
+              <a:rPr sz="1300" b="0" i="0">
+                <a:solidFill>
+                  <a:srgbClr val="1F2A1F"/>
+                </a:solidFill>
+                <a:latin typeface="Calibri"/>
+              </a:rPr>
+              <a:t>F1 ignore complètement les vrais négatifs : elle ne regarde qu'autour de la classe positive. L'accuracy les compte — les deux sont complémentaires, pas redondantes.</a:t>
+            </a:r>
+          </a:p>
+        </p:txBody>
+      </p:sp>
+    </p:spTree>
+  </p:cSld>
+  <p:clrMapOvr>
+    <a:masterClrMapping/>
+  </p:clrMapOvr>
+</p:sld>
+</file>
+
+<file path=ppt/slides/slide25.xml><?xml version="1.0" encoding="utf-8"?>
+<p:sld xmlns:a="http://schemas.openxmlformats.org/drawingml/2006/main" xmlns:p="http://schemas.openxmlformats.org/presentationml/2006/main" xmlns:r="http://schemas.openxmlformats.org/officeDocument/2006/relationships">
+  <p:cSld>
+    <p:spTree>
+      <p:nvGrpSpPr>
+        <p:cNvPr id="1" name=""/>
+        <p:cNvGrpSpPr/>
+        <p:nvPr/>
+      </p:nvGrpSpPr>
+      <p:grpSpPr/>
+      <p:sp>
+        <p:nvSpPr>
+          <p:cNvPr id="2" name="TextBox 1"/>
+          <p:cNvSpPr txBox="1"/>
+          <p:nvPr/>
+        </p:nvSpPr>
+        <p:spPr>
+          <a:xfrm>
+            <a:off x="640080" y="384048"/>
+            <a:ext cx="10881360" cy="685800"/>
+          </a:xfrm>
+          <a:prstGeom prst="rect">
+            <a:avLst/>
+          </a:prstGeom>
+          <a:noFill/>
+        </p:spPr>
+        <p:txBody>
+          <a:bodyPr wrap="square" lIns="0" rIns="0" tIns="0" bIns="0" anchor="ctr">
+            <a:spAutoFit/>
+          </a:bodyPr>
+          <a:lstStyle/>
+          <a:p>
+            <a:pPr marL="0" indent="0">
+              <a:buNone/>
+            </a:pPr>
+            <a:r>
+              <a:rPr sz="3400" b="1" i="0">
+                <a:solidFill>
+                  <a:srgbClr val="1F2A1F"/>
+                </a:solidFill>
+                <a:latin typeface="Cambria"/>
+              </a:rPr>
+              <a:t>L'erreur n'est pas uniforme</a:t>
+            </a:r>
+          </a:p>
+        </p:txBody>
+      </p:sp>
+      <p:sp>
+        <p:nvSpPr>
+          <p:cNvPr id="3" name="TextBox 2"/>
+          <p:cNvSpPr txBox="1"/>
+          <p:nvPr/>
+        </p:nvSpPr>
+        <p:spPr>
+          <a:xfrm>
+            <a:off x="640080" y="1078992"/>
+            <a:ext cx="10881360" cy="384048"/>
+          </a:xfrm>
+          <a:prstGeom prst="rect">
+            <a:avLst/>
+          </a:prstGeom>
+          <a:noFill/>
+        </p:spPr>
+        <p:txBody>
+          <a:bodyPr wrap="square" lIns="0" rIns="0" tIns="0" bIns="0" anchor="ctr">
+            <a:spAutoFit/>
+          </a:bodyPr>
+          <a:lstStyle/>
+          <a:p>
+            <a:pPr marL="0" indent="0">
+              <a:buNone/>
+            </a:pPr>
+            <a:r>
+              <a:rPr sz="1400" b="0" i="1">
+                <a:solidFill>
+                  <a:srgbClr val="5E6E5E"/>
+                </a:solidFill>
+                <a:latin typeface="Calibri"/>
+              </a:rPr>
+              <a:t>Taux d'erreur des deux approches, par distance au seuil du malus</a:t>
+            </a:r>
+          </a:p>
+        </p:txBody>
+      </p:sp>
+      <p:sp>
+        <p:nvSpPr>
+          <p:cNvPr id="4" name="Rounded Rectangle 3"/>
+          <p:cNvSpPr/>
+          <p:nvPr/>
+        </p:nvSpPr>
+        <p:spPr>
+          <a:xfrm>
+            <a:off x="640080" y="1691640"/>
+            <a:ext cx="2514600" cy="1645920"/>
+          </a:xfrm>
+          <a:prstGeom prst="roundRect">
+            <a:avLst>
+              <a:gd name="adj" fmla="val 4444"/>
+            </a:avLst>
+          </a:prstGeom>
+          <a:solidFill>
+            <a:srgbClr val="EDF2E6"/>
+          </a:solidFill>
+          <a:ln w="12700">
+            <a:solidFill>
+              <a:srgbClr val="EDF2E6"/>
+            </a:solidFill>
+          </a:ln>
+          <a:effectLst/>
+        </p:spPr>
+        <p:style>
+          <a:lnRef idx="1">
+            <a:schemeClr val="accent1"/>
+          </a:lnRef>
+          <a:fillRef idx="3">
+            <a:schemeClr val="accent1"/>
+          </a:fillRef>
+          <a:effectRef idx="2">
+            <a:schemeClr val="accent1"/>
+          </a:effectRef>
+          <a:fontRef idx="minor">
+            <a:schemeClr val="lt1"/>
+          </a:fontRef>
+        </p:style>
+        <p:txBody>
+          <a:bodyPr rtlCol="0" anchor="ctr" wrap="square"/>
+          <a:lstStyle/>
+          <a:p>
+            <a:pPr algn="ctr"/>
+          </a:p>
+        </p:txBody>
+      </p:sp>
+      <p:sp>
+        <p:nvSpPr>
+          <p:cNvPr id="5" name="TextBox 4"/>
+          <p:cNvSpPr txBox="1"/>
+          <p:nvPr/>
+        </p:nvSpPr>
+        <p:spPr>
+          <a:xfrm>
+            <a:off x="640080" y="1874519"/>
+            <a:ext cx="2514600" cy="640080"/>
+          </a:xfrm>
+          <a:prstGeom prst="rect">
+            <a:avLst/>
+          </a:prstGeom>
+          <a:noFill/>
+        </p:spPr>
+        <p:txBody>
+          <a:bodyPr wrap="square" lIns="0" rIns="0" tIns="0" bIns="0" anchor="ctr">
+            <a:spAutoFit/>
+          </a:bodyPr>
+          <a:lstStyle/>
+          <a:p>
+            <a:pPr marL="0" indent="0" algn="ctr">
+              <a:buNone/>
+            </a:pPr>
+            <a:r>
+              <a:rPr sz="3000" b="1" i="0">
+                <a:solidFill>
+                  <a:srgbClr val="C0562F"/>
+                </a:solidFill>
+                <a:latin typeface="Cambria"/>
+              </a:rPr>
+              <a:t>≈ 41 %</a:t>
+            </a:r>
+          </a:p>
+        </p:txBody>
+      </p:sp>
+      <p:sp>
+        <p:nvSpPr>
+          <p:cNvPr id="6" name="TextBox 5"/>
+          <p:cNvSpPr txBox="1"/>
+          <p:nvPr/>
+        </p:nvSpPr>
+        <p:spPr>
+          <a:xfrm>
+            <a:off x="640080" y="2560320"/>
+            <a:ext cx="2514600" cy="274320"/>
+          </a:xfrm>
+          <a:prstGeom prst="rect">
+            <a:avLst/>
+          </a:prstGeom>
+          <a:noFill/>
+        </p:spPr>
+        <p:txBody>
+          <a:bodyPr wrap="square" lIns="0" rIns="0" tIns="0" bIns="0" anchor="ctr">
+            <a:spAutoFit/>
+          </a:bodyPr>
+          <a:lstStyle/>
+          <a:p>
+            <a:pPr marL="0" indent="0" algn="ctr">
+              <a:buNone/>
+            </a:pPr>
+            <a:r>
+              <a:rPr sz="1300" b="1" i="0">
+                <a:solidFill>
+                  <a:srgbClr val="1F2A1F"/>
+                </a:solidFill>
+                <a:latin typeface="Cambria"/>
+              </a:rPr>
+              <a:t>moins de 5 g</a:t>
+            </a:r>
+          </a:p>
+        </p:txBody>
+      </p:sp>
+      <p:sp>
+        <p:nvSpPr>
+          <p:cNvPr id="7" name="TextBox 6"/>
+          <p:cNvSpPr txBox="1"/>
+          <p:nvPr/>
+        </p:nvSpPr>
+        <p:spPr>
+          <a:xfrm>
+            <a:off x="640080" y="2871216"/>
+            <a:ext cx="2514600" cy="256032"/>
+          </a:xfrm>
+          <a:prstGeom prst="rect">
+            <a:avLst/>
+          </a:prstGeom>
+          <a:noFill/>
+        </p:spPr>
+        <p:txBody>
+          <a:bodyPr wrap="square" lIns="0" rIns="0" tIns="0" bIns="0" anchor="ctr">
+            <a:spAutoFit/>
+          </a:bodyPr>
+          <a:lstStyle/>
+          <a:p>
+            <a:pPr marL="0" indent="0" algn="ctr">
+              <a:buNone/>
+            </a:pPr>
+            <a:r>
+              <a:rPr sz="1100" b="0" i="0">
+                <a:solidFill>
+                  <a:srgbClr val="5E6E5E"/>
+                </a:solidFill>
+                <a:latin typeface="Calibri"/>
+              </a:rPr>
+              <a:t>163 véhicules</a:t>
+            </a:r>
+          </a:p>
+        </p:txBody>
+      </p:sp>
+      <p:sp>
+        <p:nvSpPr>
+          <p:cNvPr id="8" name="Rounded Rectangle 7"/>
+          <p:cNvSpPr/>
+          <p:nvPr/>
+        </p:nvSpPr>
+        <p:spPr>
+          <a:xfrm>
+            <a:off x="3429000" y="1691640"/>
+            <a:ext cx="2514600" cy="1645920"/>
+          </a:xfrm>
+          <a:prstGeom prst="roundRect">
+            <a:avLst>
+              <a:gd name="adj" fmla="val 4444"/>
+            </a:avLst>
+          </a:prstGeom>
+          <a:solidFill>
+            <a:srgbClr val="EDF2E6"/>
+          </a:solidFill>
+          <a:ln w="12700">
+            <a:solidFill>
+              <a:srgbClr val="EDF2E6"/>
+            </a:solidFill>
+          </a:ln>
+          <a:effectLst/>
+        </p:spPr>
+        <p:style>
+          <a:lnRef idx="1">
+            <a:schemeClr val="accent1"/>
+          </a:lnRef>
+          <a:fillRef idx="3">
+            <a:schemeClr val="accent1"/>
+          </a:fillRef>
+          <a:effectRef idx="2">
+            <a:schemeClr val="accent1"/>
+          </a:effectRef>
+          <a:fontRef idx="minor">
+            <a:schemeClr val="lt1"/>
+          </a:fontRef>
+        </p:style>
+        <p:txBody>
+          <a:bodyPr rtlCol="0" anchor="ctr" wrap="square"/>
+          <a:lstStyle/>
+          <a:p>
+            <a:pPr algn="ctr"/>
+          </a:p>
+        </p:txBody>
+      </p:sp>
+      <p:sp>
+        <p:nvSpPr>
+          <p:cNvPr id="9" name="TextBox 8"/>
+          <p:cNvSpPr txBox="1"/>
+          <p:nvPr/>
+        </p:nvSpPr>
+        <p:spPr>
+          <a:xfrm>
+            <a:off x="3429000" y="1874519"/>
+            <a:ext cx="2514600" cy="640080"/>
+          </a:xfrm>
+          <a:prstGeom prst="rect">
+            <a:avLst/>
+          </a:prstGeom>
+          <a:noFill/>
+        </p:spPr>
+        <p:txBody>
+          <a:bodyPr wrap="square" lIns="0" rIns="0" tIns="0" bIns="0" anchor="ctr">
+            <a:spAutoFit/>
+          </a:bodyPr>
+          <a:lstStyle/>
+          <a:p>
+            <a:pPr marL="0" indent="0" algn="ctr">
+              <a:buNone/>
+            </a:pPr>
+            <a:r>
+              <a:rPr sz="3000" b="1" i="0">
+                <a:solidFill>
+                  <a:srgbClr val="C0562F"/>
+                </a:solidFill>
+                <a:latin typeface="Cambria"/>
+              </a:rPr>
+              <a:t>≈ 36 %</a:t>
+            </a:r>
+          </a:p>
+        </p:txBody>
+      </p:sp>
+      <p:sp>
+        <p:nvSpPr>
+          <p:cNvPr id="10" name="TextBox 9"/>
+          <p:cNvSpPr txBox="1"/>
+          <p:nvPr/>
+        </p:nvSpPr>
+        <p:spPr>
+          <a:xfrm>
+            <a:off x="3429000" y="2560320"/>
+            <a:ext cx="2514600" cy="274320"/>
+          </a:xfrm>
+          <a:prstGeom prst="rect">
+            <a:avLst/>
+          </a:prstGeom>
+          <a:noFill/>
+        </p:spPr>
+        <p:txBody>
+          <a:bodyPr wrap="square" lIns="0" rIns="0" tIns="0" bIns="0" anchor="ctr">
+            <a:spAutoFit/>
+          </a:bodyPr>
+          <a:lstStyle/>
+          <a:p>
+            <a:pPr marL="0" indent="0" algn="ctr">
+              <a:buNone/>
+            </a:pPr>
+            <a:r>
+              <a:rPr sz="1300" b="1" i="0">
+                <a:solidFill>
+                  <a:srgbClr val="1F2A1F"/>
+                </a:solidFill>
+                <a:latin typeface="Cambria"/>
+              </a:rPr>
+              <a:t>5 à 10 g</a:t>
+            </a:r>
+          </a:p>
+        </p:txBody>
+      </p:sp>
+      <p:sp>
+        <p:nvSpPr>
+          <p:cNvPr id="11" name="TextBox 10"/>
+          <p:cNvSpPr txBox="1"/>
+          <p:nvPr/>
+        </p:nvSpPr>
+        <p:spPr>
+          <a:xfrm>
+            <a:off x="3429000" y="2871216"/>
+            <a:ext cx="2514600" cy="256032"/>
+          </a:xfrm>
+          <a:prstGeom prst="rect">
+            <a:avLst/>
+          </a:prstGeom>
+          <a:noFill/>
+        </p:spPr>
+        <p:txBody>
+          <a:bodyPr wrap="square" lIns="0" rIns="0" tIns="0" bIns="0" anchor="ctr">
+            <a:spAutoFit/>
+          </a:bodyPr>
+          <a:lstStyle/>
+          <a:p>
+            <a:pPr marL="0" indent="0" algn="ctr">
+              <a:buNone/>
+            </a:pPr>
+            <a:r>
+              <a:rPr sz="1100" b="0" i="0">
+                <a:solidFill>
+                  <a:srgbClr val="5E6E5E"/>
+                </a:solidFill>
+                <a:latin typeface="Calibri"/>
+              </a:rPr>
+              <a:t>129 véhicules</a:t>
+            </a:r>
+          </a:p>
+        </p:txBody>
+      </p:sp>
+      <p:sp>
+        <p:nvSpPr>
+          <p:cNvPr id="12" name="Rounded Rectangle 11"/>
+          <p:cNvSpPr/>
+          <p:nvPr/>
+        </p:nvSpPr>
+        <p:spPr>
+          <a:xfrm>
+            <a:off x="6217920" y="1691640"/>
+            <a:ext cx="2514600" cy="1645920"/>
+          </a:xfrm>
+          <a:prstGeom prst="roundRect">
+            <a:avLst>
+              <a:gd name="adj" fmla="val 4444"/>
+            </a:avLst>
+          </a:prstGeom>
+          <a:solidFill>
+            <a:srgbClr val="EDF2E6"/>
+          </a:solidFill>
+          <a:ln w="12700">
+            <a:solidFill>
+              <a:srgbClr val="EDF2E6"/>
+            </a:solidFill>
+          </a:ln>
+          <a:effectLst/>
+        </p:spPr>
+        <p:style>
+          <a:lnRef idx="1">
+            <a:schemeClr val="accent1"/>
+          </a:lnRef>
+          <a:fillRef idx="3">
+            <a:schemeClr val="accent1"/>
+          </a:fillRef>
+          <a:effectRef idx="2">
+            <a:schemeClr val="accent1"/>
+          </a:effectRef>
+          <a:fontRef idx="minor">
+            <a:schemeClr val="lt1"/>
+          </a:fontRef>
+        </p:style>
+        <p:txBody>
+          <a:bodyPr rtlCol="0" anchor="ctr" wrap="square"/>
+          <a:lstStyle/>
+          <a:p>
+            <a:pPr algn="ctr"/>
+          </a:p>
+        </p:txBody>
+      </p:sp>
+      <p:sp>
+        <p:nvSpPr>
+          <p:cNvPr id="13" name="TextBox 12"/>
+          <p:cNvSpPr txBox="1"/>
+          <p:nvPr/>
+        </p:nvSpPr>
+        <p:spPr>
+          <a:xfrm>
+            <a:off x="6217920" y="1874519"/>
+            <a:ext cx="2514600" cy="640080"/>
+          </a:xfrm>
+          <a:prstGeom prst="rect">
+            <a:avLst/>
+          </a:prstGeom>
+          <a:noFill/>
+        </p:spPr>
+        <p:txBody>
+          <a:bodyPr wrap="square" lIns="0" rIns="0" tIns="0" bIns="0" anchor="ctr">
+            <a:spAutoFit/>
+          </a:bodyPr>
+          <a:lstStyle/>
+          <a:p>
+            <a:pPr marL="0" indent="0" algn="ctr">
+              <a:buNone/>
+            </a:pPr>
+            <a:r>
+              <a:rPr sz="3000" b="1" i="0">
+                <a:solidFill>
+                  <a:srgbClr val="5E6E5E"/>
+                </a:solidFill>
+                <a:latin typeface="Cambria"/>
+              </a:rPr>
+              <a:t>≈ 13 %</a:t>
+            </a:r>
+          </a:p>
+        </p:txBody>
+      </p:sp>
+      <p:sp>
+        <p:nvSpPr>
+          <p:cNvPr id="14" name="TextBox 13"/>
+          <p:cNvSpPr txBox="1"/>
+          <p:nvPr/>
+        </p:nvSpPr>
+        <p:spPr>
+          <a:xfrm>
+            <a:off x="6217920" y="2560320"/>
+            <a:ext cx="2514600" cy="274320"/>
+          </a:xfrm>
+          <a:prstGeom prst="rect">
+            <a:avLst/>
+          </a:prstGeom>
+          <a:noFill/>
+        </p:spPr>
+        <p:txBody>
+          <a:bodyPr wrap="square" lIns="0" rIns="0" tIns="0" bIns="0" anchor="ctr">
+            <a:spAutoFit/>
+          </a:bodyPr>
+          <a:lstStyle/>
+          <a:p>
+            <a:pPr marL="0" indent="0" algn="ctr">
+              <a:buNone/>
+            </a:pPr>
+            <a:r>
+              <a:rPr sz="1300" b="1" i="0">
+                <a:solidFill>
+                  <a:srgbClr val="1F2A1F"/>
+                </a:solidFill>
+                <a:latin typeface="Cambria"/>
+              </a:rPr>
+              <a:t>10 à 20 g</a:t>
+            </a:r>
+          </a:p>
+        </p:txBody>
+      </p:sp>
+      <p:sp>
+        <p:nvSpPr>
+          <p:cNvPr id="15" name="TextBox 14"/>
+          <p:cNvSpPr txBox="1"/>
+          <p:nvPr/>
+        </p:nvSpPr>
+        <p:spPr>
+          <a:xfrm>
+            <a:off x="6217920" y="2871216"/>
+            <a:ext cx="2514600" cy="256032"/>
+          </a:xfrm>
+          <a:prstGeom prst="rect">
+            <a:avLst/>
+          </a:prstGeom>
+          <a:noFill/>
+        </p:spPr>
+        <p:txBody>
+          <a:bodyPr wrap="square" lIns="0" rIns="0" tIns="0" bIns="0" anchor="ctr">
+            <a:spAutoFit/>
+          </a:bodyPr>
+          <a:lstStyle/>
+          <a:p>
+            <a:pPr marL="0" indent="0" algn="ctr">
+              <a:buNone/>
+            </a:pPr>
+            <a:r>
+              <a:rPr sz="1100" b="0" i="0">
+                <a:solidFill>
+                  <a:srgbClr val="5E6E5E"/>
+                </a:solidFill>
+                <a:latin typeface="Calibri"/>
+              </a:rPr>
+              <a:t>249 véhicules</a:t>
+            </a:r>
+          </a:p>
+        </p:txBody>
+      </p:sp>
+      <p:sp>
+        <p:nvSpPr>
+          <p:cNvPr id="16" name="Rounded Rectangle 15"/>
+          <p:cNvSpPr/>
+          <p:nvPr/>
+        </p:nvSpPr>
+        <p:spPr>
+          <a:xfrm>
+            <a:off x="9006840" y="1691640"/>
+            <a:ext cx="2514600" cy="1645920"/>
+          </a:xfrm>
+          <a:prstGeom prst="roundRect">
+            <a:avLst>
+              <a:gd name="adj" fmla="val 4444"/>
+            </a:avLst>
+          </a:prstGeom>
+          <a:solidFill>
+            <a:srgbClr val="EDF2E6"/>
+          </a:solidFill>
+          <a:ln w="12700">
+            <a:solidFill>
+              <a:srgbClr val="EDF2E6"/>
+            </a:solidFill>
+          </a:ln>
+          <a:effectLst/>
+        </p:spPr>
+        <p:style>
+          <a:lnRef idx="1">
+            <a:schemeClr val="accent1"/>
+          </a:lnRef>
+          <a:fillRef idx="3">
+            <a:schemeClr val="accent1"/>
+          </a:fillRef>
+          <a:effectRef idx="2">
+            <a:schemeClr val="accent1"/>
+          </a:effectRef>
+          <a:fontRef idx="minor">
+            <a:schemeClr val="lt1"/>
+          </a:fontRef>
+        </p:style>
+        <p:txBody>
+          <a:bodyPr rtlCol="0" anchor="ctr" wrap="square"/>
+          <a:lstStyle/>
+          <a:p>
+            <a:pPr algn="ctr"/>
+          </a:p>
+        </p:txBody>
+      </p:sp>
+      <p:sp>
+        <p:nvSpPr>
+          <p:cNvPr id="17" name="TextBox 16"/>
+          <p:cNvSpPr txBox="1"/>
+          <p:nvPr/>
+        </p:nvSpPr>
+        <p:spPr>
+          <a:xfrm>
+            <a:off x="9006840" y="1874519"/>
+            <a:ext cx="2514600" cy="640080"/>
+          </a:xfrm>
+          <a:prstGeom prst="rect">
+            <a:avLst/>
+          </a:prstGeom>
+          <a:noFill/>
+        </p:spPr>
+        <p:txBody>
+          <a:bodyPr wrap="square" lIns="0" rIns="0" tIns="0" bIns="0" anchor="ctr">
+            <a:spAutoFit/>
+          </a:bodyPr>
+          <a:lstStyle/>
+          <a:p>
+            <a:pPr marL="0" indent="0" algn="ctr">
+              <a:buNone/>
+            </a:pPr>
+            <a:r>
+              <a:rPr sz="3000" b="1" i="0">
+                <a:solidFill>
+                  <a:srgbClr val="2C5F2D"/>
+                </a:solidFill>
+                <a:latin typeface="Cambria"/>
+              </a:rPr>
+              <a:t>≈ 3 %</a:t>
+            </a:r>
+          </a:p>
+        </p:txBody>
+      </p:sp>
+      <p:sp>
+        <p:nvSpPr>
+          <p:cNvPr id="18" name="TextBox 17"/>
+          <p:cNvSpPr txBox="1"/>
+          <p:nvPr/>
+        </p:nvSpPr>
+        <p:spPr>
+          <a:xfrm>
+            <a:off x="9006840" y="2560320"/>
+            <a:ext cx="2514600" cy="274320"/>
+          </a:xfrm>
+          <a:prstGeom prst="rect">
+            <a:avLst/>
+          </a:prstGeom>
+          <a:noFill/>
+        </p:spPr>
+        <p:txBody>
+          <a:bodyPr wrap="square" lIns="0" rIns="0" tIns="0" bIns="0" anchor="ctr">
+            <a:spAutoFit/>
+          </a:bodyPr>
+          <a:lstStyle/>
+          <a:p>
+            <a:pPr marL="0" indent="0" algn="ctr">
+              <a:buNone/>
+            </a:pPr>
+            <a:r>
+              <a:rPr sz="1300" b="1" i="0">
+                <a:solidFill>
+                  <a:srgbClr val="1F2A1F"/>
+                </a:solidFill>
+                <a:latin typeface="Cambria"/>
+              </a:rPr>
+              <a:t>plus de 20 g</a:t>
+            </a:r>
+          </a:p>
+        </p:txBody>
+      </p:sp>
+      <p:sp>
+        <p:nvSpPr>
+          <p:cNvPr id="19" name="TextBox 18"/>
+          <p:cNvSpPr txBox="1"/>
+          <p:nvPr/>
+        </p:nvSpPr>
+        <p:spPr>
+          <a:xfrm>
+            <a:off x="9006840" y="2871216"/>
+            <a:ext cx="2514600" cy="256032"/>
+          </a:xfrm>
+          <a:prstGeom prst="rect">
+            <a:avLst/>
+          </a:prstGeom>
+          <a:noFill/>
+        </p:spPr>
+        <p:txBody>
+          <a:bodyPr wrap="square" lIns="0" rIns="0" tIns="0" bIns="0" anchor="ctr">
+            <a:spAutoFit/>
+          </a:bodyPr>
+          <a:lstStyle/>
+          <a:p>
+            <a:pPr marL="0" indent="0" algn="ctr">
+              <a:buNone/>
+            </a:pPr>
+            <a:r>
+              <a:rPr sz="1100" b="0" i="0">
+                <a:solidFill>
+                  <a:srgbClr val="5E6E5E"/>
+                </a:solidFill>
+                <a:latin typeface="Calibri"/>
+              </a:rPr>
+              <a:t>556 véhicules</a:t>
+            </a:r>
+          </a:p>
+        </p:txBody>
+      </p:sp>
+      <p:sp>
+        <p:nvSpPr>
+          <p:cNvPr id="20" name="Rounded Rectangle 19"/>
+          <p:cNvSpPr/>
+          <p:nvPr/>
+        </p:nvSpPr>
+        <p:spPr>
+          <a:xfrm>
+            <a:off x="640080" y="3566160"/>
+            <a:ext cx="10881360" cy="1188720"/>
+          </a:xfrm>
+          <a:prstGeom prst="roundRect">
+            <a:avLst>
+              <a:gd name="adj" fmla="val 6154"/>
+            </a:avLst>
+          </a:prstGeom>
+          <a:solidFill>
+            <a:srgbClr val="EDF2E6"/>
+          </a:solidFill>
+          <a:ln w="12700">
+            <a:solidFill>
+              <a:srgbClr val="EDF2E6"/>
+            </a:solidFill>
+          </a:ln>
+          <a:effectLst/>
+        </p:spPr>
+        <p:style>
+          <a:lnRef idx="1">
+            <a:schemeClr val="accent1"/>
+          </a:lnRef>
+          <a:fillRef idx="3">
+            <a:schemeClr val="accent1"/>
+          </a:fillRef>
+          <a:effectRef idx="2">
+            <a:schemeClr val="accent1"/>
+          </a:effectRef>
+          <a:fontRef idx="minor">
+            <a:schemeClr val="lt1"/>
+          </a:fontRef>
+        </p:style>
+        <p:txBody>
+          <a:bodyPr rtlCol="0" anchor="ctr" wrap="square"/>
+          <a:lstStyle/>
+          <a:p>
+            <a:pPr algn="ctr"/>
+          </a:p>
+        </p:txBody>
+      </p:sp>
+      <p:sp>
+        <p:nvSpPr>
+          <p:cNvPr id="21" name="TextBox 20"/>
+          <p:cNvSpPr txBox="1"/>
+          <p:nvPr/>
+        </p:nvSpPr>
+        <p:spPr>
+          <a:xfrm>
+            <a:off x="960120" y="3703320"/>
+            <a:ext cx="10241280" cy="320040"/>
+          </a:xfrm>
+          <a:prstGeom prst="rect">
+            <a:avLst/>
+          </a:prstGeom>
+          <a:noFill/>
+        </p:spPr>
+        <p:txBody>
+          <a:bodyPr wrap="square" lIns="0" rIns="0" tIns="0" bIns="0" anchor="ctr">
+            <a:spAutoFit/>
+          </a:bodyPr>
+          <a:lstStyle/>
+          <a:p>
+            <a:pPr marL="0" indent="0">
+              <a:buNone/>
+            </a:pPr>
+            <a:r>
+              <a:rPr sz="1500" b="1" i="0">
+                <a:solidFill>
+                  <a:srgbClr val="2C5F2D"/>
+                </a:solidFill>
+                <a:latin typeface="Cambria"/>
+              </a:rPr>
+              <a:t>Chercher le régime, pas la moyenne</a:t>
+            </a:r>
+          </a:p>
+        </p:txBody>
+      </p:sp>
+      <p:sp>
+        <p:nvSpPr>
+          <p:cNvPr id="22" name="TextBox 21"/>
+          <p:cNvSpPr txBox="1"/>
+          <p:nvPr/>
+        </p:nvSpPr>
+        <p:spPr>
+          <a:xfrm>
+            <a:off x="960120" y="4087368"/>
+            <a:ext cx="10241280" cy="548640"/>
+          </a:xfrm>
+          <a:prstGeom prst="rect">
+            <a:avLst/>
+          </a:prstGeom>
+          <a:noFill/>
+        </p:spPr>
+        <p:txBody>
+          <a:bodyPr wrap="square" lIns="0" rIns="0" tIns="0" bIns="0" anchor="ctr">
+            <a:spAutoFit/>
+          </a:bodyPr>
+          <a:lstStyle/>
+          <a:p>
+            <a:pPr marL="0" indent="0">
+              <a:lnSpc>
+                <a:spcPct val="115000"/>
+              </a:lnSpc>
+              <a:buNone/>
+            </a:pPr>
+            <a:r>
+              <a:rPr sz="1250" b="0" i="0">
+                <a:solidFill>
+                  <a:srgbClr val="1F2A1F"/>
+                </a:solidFill>
+                <a:latin typeface="Calibri"/>
+              </a:rPr>
+              <a:t>Quand une décision binaire dérive d'une grandeur continue, les erreurs se concentrent près du seuil : un facteur 12 à 15 entre les deux extrêmes. Un score global de 85 % moyennait deux régimes — fiable loin de la frontière, quasi aléatoire à moins de 5 g.</a:t>
+            </a:r>
+          </a:p>
+        </p:txBody>
+      </p:sp>
+      <p:sp>
+        <p:nvSpPr>
+          <p:cNvPr id="23" name="Rounded Rectangle 22"/>
+          <p:cNvSpPr/>
+          <p:nvPr/>
+        </p:nvSpPr>
+        <p:spPr>
+          <a:xfrm>
+            <a:off x="640080" y="4937760"/>
+            <a:ext cx="10881360" cy="777240"/>
+          </a:xfrm>
+          <a:prstGeom prst="roundRect">
+            <a:avLst>
+              <a:gd name="adj" fmla="val 9412"/>
+            </a:avLst>
+          </a:prstGeom>
+          <a:solidFill>
+            <a:srgbClr val="EDF2E6"/>
+          </a:solidFill>
+          <a:ln w="12700">
+            <a:solidFill>
+              <a:srgbClr val="EDF2E6"/>
+            </a:solidFill>
+          </a:ln>
+          <a:effectLst/>
+        </p:spPr>
+        <p:style>
+          <a:lnRef idx="1">
+            <a:schemeClr val="accent1"/>
+          </a:lnRef>
+          <a:fillRef idx="3">
+            <a:schemeClr val="accent1"/>
+          </a:fillRef>
+          <a:effectRef idx="2">
+            <a:schemeClr val="accent1"/>
+          </a:effectRef>
+          <a:fontRef idx="minor">
+            <a:schemeClr val="lt1"/>
+          </a:fontRef>
+        </p:style>
+        <p:txBody>
+          <a:bodyPr rtlCol="0" anchor="ctr" wrap="square"/>
+          <a:lstStyle/>
+          <a:p>
+            <a:pPr algn="ctr"/>
+          </a:p>
+        </p:txBody>
+      </p:sp>
+      <p:sp>
+        <p:nvSpPr>
+          <p:cNvPr id="24" name="Oval 23"/>
+          <p:cNvSpPr/>
+          <p:nvPr/>
+        </p:nvSpPr>
+        <p:spPr>
+          <a:xfrm>
+            <a:off x="960120" y="5262372"/>
+            <a:ext cx="128016" cy="128016"/>
+          </a:xfrm>
+          <a:prstGeom prst="ellipse">
+            <a:avLst/>
+          </a:prstGeom>
+          <a:solidFill>
+            <a:srgbClr val="C0562F"/>
+          </a:solidFill>
+          <a:ln w="12700">
+            <a:solidFill>
+              <a:srgbClr val="C0562F"/>
+            </a:solidFill>
+          </a:ln>
+          <a:effectLst/>
+        </p:spPr>
+        <p:style>
+          <a:lnRef idx="1">
+            <a:schemeClr val="accent1"/>
+          </a:lnRef>
+          <a:fillRef idx="3">
+            <a:schemeClr val="accent1"/>
+          </a:fillRef>
+          <a:effectRef idx="2">
+            <a:schemeClr val="accent1"/>
+          </a:effectRef>
+          <a:fontRef idx="minor">
+            <a:schemeClr val="lt1"/>
+          </a:fontRef>
+        </p:style>
+        <p:txBody>
+          <a:bodyPr rtlCol="0" anchor="ctr"/>
+          <a:lstStyle/>
+          <a:p>
+            <a:pPr algn="ctr"/>
+          </a:p>
+        </p:txBody>
+      </p:sp>
+      <p:sp>
+        <p:nvSpPr>
+          <p:cNvPr id="25" name="TextBox 24"/>
+          <p:cNvSpPr txBox="1"/>
+          <p:nvPr/>
+        </p:nvSpPr>
+        <p:spPr>
+          <a:xfrm>
+            <a:off x="1216152" y="5056632"/>
+            <a:ext cx="9966960" cy="539496"/>
+          </a:xfrm>
+          <a:prstGeom prst="rect">
+            <a:avLst/>
+          </a:prstGeom>
+          <a:noFill/>
+        </p:spPr>
+        <p:txBody>
+          <a:bodyPr wrap="square" lIns="0" rIns="0" tIns="0" bIns="0" anchor="ctr">
+            <a:spAutoFit/>
+          </a:bodyPr>
+          <a:lstStyle/>
+          <a:p>
+            <a:pPr marL="0" indent="0">
+              <a:lnSpc>
+                <a:spcPct val="115000"/>
+              </a:lnSpc>
+              <a:buNone/>
+            </a:pPr>
+            <a:r>
+              <a:rPr sz="1300" b="0" i="0">
+                <a:solidFill>
+                  <a:srgbClr val="1F2A1F"/>
+                </a:solidFill>
+                <a:latin typeface="Calibri"/>
+              </a:rPr>
+              <a:t>Une PRÉDICTION près du seuil n'est pas une valeur réelle près du seuil : un véhicule à 216 g estimé à 132 g tombe du bon côté par chance.</a:t>
+            </a:r>
           </a:p>
         </p:txBody>
       </p:sp>
